--- a/docs/report/CT3201_Slides.pptx
+++ b/docs/report/CT3201_Slides.pptx
@@ -13,6 +13,7 @@
     <p:sldId id="261" r:id="rId12"/>
     <p:sldId id="262" r:id="rId13"/>
     <p:sldId id="263" r:id="rId14"/>
+    <p:sldId id="266" r:id="rId17"/>
     <p:sldId id="264" r:id="rId15"/>
     <p:sldId id="265" r:id="rId16"/>
   </p:sldIdLst>
@@ -3173,7 +3174,7 @@
                   <a:srgbClr val="222222"/>
                 </a:solidFill>
               </a:rPr>
-              <a:t>• Team: [names]</a:t>
+              <a:t>Team: [TEAM — add full names and matriculation numbers]</a:t>
             </a:r>
           </a:p>
           <a:p>
@@ -3188,7 +3189,7 @@
                   <a:srgbClr val="222222"/>
                 </a:solidFill>
               </a:rPr>
-              <a:t>• Problem area: search / intelligent agent / decision-making under uncertainty</a:t>
+              <a:t>Problem area: search / intelligent agent / decision-making under uncertainty</a:t>
             </a:r>
           </a:p>
           <a:p>
@@ -3203,7 +3204,7 @@
                   <a:srgbClr val="222222"/>
                 </a:solidFill>
               </a:rPr>
-              <a:t>• Can AI help us design AI - and can we recognise when AI is wrong?</a:t>
+              <a:t>Can AI help us design AI — and can we recognise when AI is wrong?</a:t>
             </a:r>
           </a:p>
         </p:txBody>
@@ -3287,12 +3288,12 @@
               </a:spcAft>
             </a:pPr>
             <a:r>
-              <a:rPr sz="1700">
+              <a:rPr sz="1600">
                 <a:solidFill>
                   <a:srgbClr val="222222"/>
                 </a:solidFill>
               </a:rPr>
-              <a:t>• Designed the agent human-first, then used AI to challenge and broaden it</a:t>
+              <a:t>Designed the agent human-first, then used AI to challenge and broaden it</a:t>
             </a:r>
           </a:p>
           <a:p>
@@ -3302,12 +3303,12 @@
               </a:spcAft>
             </a:pPr>
             <a:r>
-              <a:rPr sz="1700">
+              <a:rPr sz="1600">
                 <a:solidFill>
                   <a:srgbClr val="222222"/>
                 </a:solidFill>
               </a:rPr>
-              <a:t>• AI moved us from unweighted BFS to a hazard-weighted A* agent that plans under partial information and re-plans as the building changes</a:t>
+              <a:t>AI moved us from unweighted BFS to a hazard-weighted A* agent that plans under partial information and re-plans as the building changes</a:t>
             </a:r>
           </a:p>
           <a:p>
@@ -3317,12 +3318,12 @@
               </a:spcAft>
             </a:pPr>
             <a:r>
-              <a:rPr sz="1700">
+              <a:rPr sz="1600">
                 <a:solidFill>
                   <a:srgbClr val="222222"/>
                 </a:solidFill>
               </a:rPr>
-              <a:t>• Tested an AI recommendation (Greedy) against a purpose-built comparison - found it inappropriate, rejected it with evidence</a:t>
+              <a:t>Tested an AI recommendation (Greedy) against a purpose-built comparison — found it inappropriate, rejected it with evidence</a:t>
             </a:r>
           </a:p>
           <a:p>
@@ -3332,12 +3333,12 @@
               </a:spcAft>
             </a:pPr>
             <a:r>
-              <a:rPr sz="1700">
+              <a:rPr sz="1600">
                 <a:solidFill>
                   <a:srgbClr val="222222"/>
                 </a:solidFill>
               </a:rPr>
-              <a:t>• The AI's clearest failure (directional NPC animation) was identified, verified against requirements, and routed around</a:t>
+              <a:t>The AI's clearest failures — directional NPC animation, and a wrong authorship claim — were identified, verified, and corrected</a:t>
             </a:r>
           </a:p>
           <a:p>
@@ -3347,12 +3348,216 @@
               </a:spcAft>
             </a:pPr>
             <a:r>
-              <a:rPr sz="1700">
+              <a:rPr sz="1600">
                 <a:solidFill>
                   <a:srgbClr val="222222"/>
                 </a:solidFill>
               </a:rPr>
-              <a:t>• AI widened the option space and sped the work; the objective, the verification and every final decision were ours</a:t>
+              <a:t>An optional learned-AI brain (imitating A*) was added and evaluated: it roughly matches A* on familiar stages and trails it on new ones — A* stays the default</a:t>
+            </a:r>
+          </a:p>
+          <a:p>
+            <a:pPr>
+              <a:spcAft>
+                <a:spcPts val="600"/>
+              </a:spcAft>
+            </a:pPr>
+            <a:r>
+              <a:rPr sz="1600">
+                <a:solidFill>
+                  <a:srgbClr val="222222"/>
+                </a:solidFill>
+              </a:rPr>
+              <a:t>AI widened the option space and sped the work; the objective, the verification and every final decision were ours</a:t>
+            </a:r>
+          </a:p>
+        </p:txBody>
+      </p:sp>
+    </p:spTree>
+  </p:cSld>
+  <p:clrMapOvr>
+    <a:masterClrMapping/>
+  </p:clrMapOvr>
+</p:sld>
+</file>
+
+<file path=ppt/slides/slide11.xml><?xml version="1.0" encoding="utf-8"?>
+<p:sld xmlns:a="http://schemas.openxmlformats.org/drawingml/2006/main" xmlns:p="http://schemas.openxmlformats.org/presentationml/2006/main" xmlns:r="http://schemas.openxmlformats.org/officeDocument/2006/relationships">
+  <p:cSld>
+    <p:spTree>
+      <p:nvGrpSpPr>
+        <p:cNvPr id="1" name=""/>
+        <p:cNvGrpSpPr/>
+        <p:nvPr/>
+      </p:nvGrpSpPr>
+      <p:grpSpPr/>
+      <p:sp>
+        <p:nvSpPr>
+          <p:cNvPr id="2" name="TextBox 1"/>
+          <p:cNvSpPr txBox="1"/>
+          <p:nvPr/>
+        </p:nvSpPr>
+        <p:spPr>
+          <a:xfrm>
+            <a:off x="548640" y="320040"/>
+            <a:ext cx="11064240" cy="822960"/>
+          </a:xfrm>
+          <a:prstGeom prst="rect">
+            <a:avLst/>
+          </a:prstGeom>
+          <a:noFill/>
+        </p:spPr>
+        <p:txBody>
+          <a:bodyPr wrap="none">
+            <a:spAutoFit/>
+          </a:bodyPr>
+          <a:lstStyle/>
+          <a:p>
+            <a:r>
+              <a:rPr sz="3000" b="1">
+                <a:solidFill>
+                  <a:srgbClr val="1F4E79"/>
+                </a:solidFill>
+              </a:rPr>
+              <a:t>Critical Evaluation — What AI Got Wrong</a:t>
+            </a:r>
+          </a:p>
+          <a:p>
+            <a:r>
+              <a:rPr sz="1300">
+                <a:solidFill>
+                  <a:srgbClr val="666666"/>
+                </a:solidFill>
+              </a:rPr>
+              <a:t>Compulsory slide — what worked, what didn't, how it was verified</a:t>
+            </a:r>
+          </a:p>
+        </p:txBody>
+      </p:sp>
+      <p:sp>
+        <p:nvSpPr>
+          <p:cNvPr id="3" name="TextBox 2"/>
+          <p:cNvSpPr txBox="1"/>
+          <p:nvPr/>
+        </p:nvSpPr>
+        <p:spPr>
+          <a:xfrm>
+            <a:off x="640080" y="1371600"/>
+            <a:ext cx="10972800" cy="5029200"/>
+          </a:xfrm>
+          <a:prstGeom prst="rect">
+            <a:avLst/>
+          </a:prstGeom>
+          <a:noFill/>
+        </p:spPr>
+        <p:txBody>
+          <a:bodyPr wrap="square">
+            <a:spAutoFit/>
+          </a:bodyPr>
+          <a:lstStyle/>
+          <a:p>
+            <a:pPr>
+              <a:spcAft>
+                <a:spcPts val="600"/>
+              </a:spcAft>
+            </a:pPr>
+            <a:r>
+              <a:rPr sz="1500">
+                <a:solidFill>
+                  <a:srgbClr val="222222"/>
+                </a:solidFill>
+              </a:rPr>
+              <a:t>What worked: side-view (left/right) walk clips, concept art, the whole implementation</a:t>
+            </a:r>
+          </a:p>
+          <a:p>
+            <a:pPr>
+              <a:spcAft>
+                <a:spcPts val="600"/>
+              </a:spcAft>
+            </a:pPr>
+            <a:r>
+              <a:rPr sz="1500">
+                <a:solidFill>
+                  <a:srgbClr val="222222"/>
+                </a:solidFill>
+              </a:rPr>
+              <a:t>What didn't: no working “toward camera” or “away from camera” walk, across multiple re-prompts — that axis never worked</a:t>
+            </a:r>
+          </a:p>
+          <a:p>
+            <a:pPr>
+              <a:spcAft>
+                <a:spcPts val="600"/>
+              </a:spcAft>
+            </a:pPr>
+            <a:r>
+              <a:rPr sz="1500">
+                <a:solidFill>
+                  <a:srgbClr val="222222"/>
+                </a:solidFill>
+              </a:rPr>
+              <a:t>What AI got wrong: it treated “looks like a walk” as done; it never delivered a complete, 4-direction, production-ready set</a:t>
+            </a:r>
+          </a:p>
+          <a:p>
+            <a:pPr>
+              <a:spcAft>
+                <a:spcPts val="600"/>
+              </a:spcAft>
+            </a:pPr>
+            <a:r>
+              <a:rPr sz="1500">
+                <a:solidFill>
+                  <a:srgbClr val="222222"/>
+                </a:solidFill>
+              </a:rPr>
+              <a:t>How verified: checked against the engine's own requirements — 4 directions, fixed sprite size, feet-anchored — it met exactly one of four</a:t>
+            </a:r>
+          </a:p>
+          <a:p>
+            <a:pPr>
+              <a:spcAft>
+                <a:spcPts val="600"/>
+              </a:spcAft>
+            </a:pPr>
+            <a:r>
+              <a:rPr sz="1500">
+                <a:solidFill>
+                  <a:srgbClr val="222222"/>
+                </a:solidFill>
+              </a:rPr>
+              <a:t>Corrected: assembled the 4-direction set from mixed sources (front/back from the character sheet, one side frame mirrored) + a procedural walk bob</a:t>
+            </a:r>
+          </a:p>
+          <a:p>
+            <a:pPr>
+              <a:spcAft>
+                <a:spcPts val="600"/>
+              </a:spcAft>
+            </a:pPr>
+            <a:r>
+              <a:rPr sz="1500">
+                <a:solidFill>
+                  <a:srgbClr val="222222"/>
+                </a:solidFill>
+              </a:rPr>
+              <a:t>Second example: AI also claimed a teammate personally wrote a feature based only on a git commit's account — challenged, and corrected (a commit proves whose account, not who typed the code)</a:t>
+            </a:r>
+          </a:p>
+          <a:p>
+            <a:pPr>
+              <a:spcAft>
+                <a:spcPts val="600"/>
+              </a:spcAft>
+            </a:pPr>
+            <a:r>
+              <a:rPr sz="1500">
+                <a:solidFill>
+                  <a:srgbClr val="222222"/>
+                </a:solidFill>
+              </a:rPr>
+              <a:t>This is the mandatory identified → verified → corrected example.</a:t>
             </a:r>
           </a:p>
         </p:txBody>
@@ -3451,7 +3656,7 @@
                   <a:srgbClr val="222222"/>
                 </a:solidFill>
               </a:rPr>
-              <a:t>• Problem: occupants who don't know a burning building's layout must be found and led to an exit before fire, smoke and collapse cut the route off</a:t>
+              <a:t>Problem: occupants who don't know a burning building's layout must be found and led to an exit before fire, smoke and collapse cut the route off</a:t>
             </a:r>
           </a:p>
           <a:p>
@@ -3466,7 +3671,7 @@
                   <a:srgbClr val="222222"/>
                 </a:solidFill>
               </a:rPr>
-              <a:t>• User: [fire-service route planners / a rescuer-training simulator / a decision-support tool for a rescuer in the field]</a:t>
+              <a:t>User: a rescuer inside the building (human or AI) — the system is a decision-support tool that proposes a route, not an autonomous replacement</a:t>
             </a:r>
           </a:p>
           <a:p>
@@ -3481,7 +3686,7 @@
                   <a:srgbClr val="222222"/>
                 </a:solidFill>
               </a:rPr>
-              <a:t>• Environment: multi-room floor plan as a grid graph; hazards evolve over time; only a small radius is visible</a:t>
+              <a:t>Environment: multi-room floor plan as a grid graph; hazards evolve over time; only a small radius is visible</a:t>
             </a:r>
           </a:p>
           <a:p>
@@ -3496,7 +3701,7 @@
                   <a:srgbClr val="222222"/>
                 </a:solidFill>
               </a:rPr>
-              <a:t>• Desired outcome: all reachable occupants out, then the rescuer out - fast, with minimal hazard exposure</a:t>
+              <a:t>Desired outcome: all reachable occupants out, then the rescuer out — fast, with minimal hazard exposure</a:t>
             </a:r>
           </a:p>
           <a:p>
@@ -3511,7 +3716,7 @@
                   <a:srgbClr val="222222"/>
                 </a:solidFill>
               </a:rPr>
-              <a:t>• Main decision: push deeper for another occupant, or take the ones I have and get out now?</a:t>
+              <a:t>Main decision: push deeper for another occupant, or take the ones I have and get out now?</a:t>
             </a:r>
           </a:p>
           <a:p>
@@ -3526,7 +3731,7 @@
                   <a:srgbClr val="222222"/>
                 </a:solidFill>
               </a:rPr>
-              <a:t>• [TEAM] confirm this matches your Stage-1 notes made before any AI use</a:t>
+              <a:t>Think first: the team brainstormed and picked this problem before opening any AI tool</a:t>
             </a:r>
           </a:p>
         </p:txBody>
@@ -3679,7 +3884,7 @@
                     <a:p>
                       <a:r>
                         <a:rPr sz="1100"/>
-                        <a:t>one autonomous rescue unit (drone in-game; human plays the same role)</a:t>
+                        <a:t>one autonomous rescue unit (robot or drone skin, player's choice; human plays the same role)</a:t>
                       </a:r>
                     </a:p>
                   </a:txBody>
@@ -3886,12 +4091,12 @@
               </a:spcAft>
             </a:pPr>
             <a:r>
-              <a:rPr sz="1300">
+              <a:rPr sz="1600">
                 <a:solidFill>
                   <a:srgbClr val="222222"/>
                 </a:solidFill>
               </a:rPr>
-              <a:t>• Initial plan (pre-AI): BFS to the nearest occupant, escort out, repeat; treat fire as a wall</a:t>
+              <a:t>Initial plan: BFS to the nearest occupant, escort out, repeat; treat fire as a wall — worked out once AI-assisted implementation started</a:t>
             </a:r>
           </a:p>
         </p:txBody>
@@ -4668,7 +4873,7 @@
                   <a:srgbClr val="666666"/>
                 </a:solidFill>
               </a:rPr>
-              <a:t>playable game + autonomous rescue drone</a:t>
+              <a:t>playable game + autonomous rescue agent (robot or drone skin)</a:t>
             </a:r>
           </a:p>
         </p:txBody>
@@ -4682,7 +4887,7 @@
         <p:spPr>
           <a:xfrm>
             <a:off x="640080" y="1371600"/>
-            <a:ext cx="10972800" cy="5029200"/>
+            <a:ext cx="10972800" cy="2788920"/>
           </a:xfrm>
           <a:prstGeom prst="rect">
             <a:avLst/>
@@ -4706,7 +4911,7 @@
                   <a:srgbClr val="222222"/>
                 </a:solidFill>
               </a:rPr>
-              <a:t>• Decision loop:  sense (vision radius)  -&gt;  choose goal  -&gt;  hazard-weighted A* plan  -&gt;  step  -&gt;  re-plan every 0.25 s</a:t>
+              <a:t>Decision loop: sense (vision radius) -&gt; choose goal -&gt; hazard-weighted A* plan -&gt; step -&gt; re-plan every 0.25 s</a:t>
             </a:r>
           </a:p>
           <a:p>
@@ -4721,7 +4926,7 @@
                   <a:srgbClr val="222222"/>
                 </a:solidFill>
               </a:rPr>
-              <a:t>• Goal selection: nearest KNOWN occupant by weighted distance; else nearest unexplored area; else the exit; key first if a door blocks the goal</a:t>
+              <a:t>Goal selection: nearest KNOWN occupant by weighted distance; else nearest unexplored area; else the exit; key first if a door blocks the goal</a:t>
             </a:r>
           </a:p>
           <a:p>
@@ -4736,7 +4941,7 @@
                   <a:srgbClr val="222222"/>
                 </a:solidFill>
               </a:rPr>
-              <a:t>• Techniques (from the brief's list): Search (BFS/Dijkstra/A*/Greedy) · Intelligent agent · Decision-making under uncertainty</a:t>
+              <a:t>Techniques (from the brief's list): Search (BFS/Dijkstra/A*/Greedy) • Intelligent agent • Decision-making under uncertainty • Machine learning (optional second brain, imitates A*)</a:t>
             </a:r>
           </a:p>
           <a:p>
@@ -4751,7 +4956,7 @@
                   <a:srgbClr val="222222"/>
                 </a:solidFill>
               </a:rPr>
-              <a:t>• Systems: spreading fire + functional smoke · sparking panels · timed ceiling collapse · locked door + key · fog of war with memory</a:t>
+              <a:t>Systems: spreading fire + functional smoke • sparking panels • timed ceiling collapse • locked door + key • fog of war with memory</a:t>
             </a:r>
           </a:p>
           <a:p>
@@ -4766,26 +4971,59 @@
                   <a:srgbClr val="222222"/>
                 </a:solidFill>
               </a:rPr>
-              <a:t>• Score: +100 per occupant led out · +50 for exiting · speed bonus · damage penalty</a:t>
-            </a:r>
-          </a:p>
-          <a:p>
-            <a:pPr>
-              <a:spcAft>
-                <a:spcPts val="600"/>
-              </a:spcAft>
-            </a:pPr>
-            <a:r>
-              <a:rPr sz="1600">
-                <a:solidFill>
-                  <a:srgbClr val="222222"/>
-                </a:solidFill>
-              </a:rPr>
-              <a:t>• [SLIDE: paste the decision-loop flowchart + 2-3 gameplay screenshots here]</a:t>
-            </a:r>
-          </a:p>
-        </p:txBody>
-      </p:sp>
+              <a:t>Score: +100 per occupant led out • +50 for exiting • speed bonus • damage penalty</a:t>
+            </a:r>
+          </a:p>
+        </p:txBody>
+      </p:sp>
+      <p:pic>
+        <p:nvPicPr>
+          <p:cNvPr id="4" name="Picture 3" descr="fig_decision_loop.png"/>
+          <p:cNvPicPr>
+            <a:picLocks noChangeAspect="1"/>
+          </p:cNvPicPr>
+          <p:nvPr/>
+        </p:nvPicPr>
+        <p:blipFill>
+          <a:blip r:embed="rId2"/>
+          <a:stretch>
+            <a:fillRect/>
+          </a:stretch>
+        </p:blipFill>
+        <p:spPr>
+          <a:xfrm>
+            <a:off x="3055593" y="4160520"/>
+            <a:ext cx="1851409" cy="2514600"/>
+          </a:xfrm>
+          <a:prstGeom prst="rect">
+            <a:avLst/>
+          </a:prstGeom>
+        </p:spPr>
+      </p:pic>
+      <p:pic>
+        <p:nvPicPr>
+          <p:cNvPr id="5" name="Picture 4" descr="ui_sheet_final.png"/>
+          <p:cNvPicPr>
+            <a:picLocks noChangeAspect="1"/>
+          </p:cNvPicPr>
+          <p:nvPr/>
+        </p:nvPicPr>
+        <p:blipFill>
+          <a:blip r:embed="rId3"/>
+          <a:stretch>
+            <a:fillRect/>
+          </a:stretch>
+        </p:blipFill>
+        <p:spPr>
+          <a:xfrm>
+            <a:off x="5364201" y="4160520"/>
+            <a:ext cx="3771900" cy="2514600"/>
+          </a:xfrm>
+          <a:prstGeom prst="rect">
+            <a:avLst/>
+          </a:prstGeom>
+        </p:spPr>
+      </p:pic>
     </p:spTree>
   </p:cSld>
   <p:clrMapOvr>
@@ -5431,7 +5669,7 @@
                     <a:p>
                       <a:r>
                         <a:rPr sz="1000"/>
-                        <a:t>in-game the drone takes hazard damage &amp; has the same vision as the human - fair by construction</a:t>
+                        <a:t>in-game the AI agent takes hazard damage &amp; has the same vision as the human - fair by construction</a:t>
                       </a:r>
                     </a:p>
                   </a:txBody>
@@ -5638,12 +5876,12 @@
               </a:spcAft>
             </a:pPr>
             <a:r>
-              <a:rPr sz="1100">
+              <a:rPr sz="1600">
                 <a:solidFill>
                   <a:srgbClr val="222222"/>
                 </a:solidFill>
               </a:rPr>
-              <a:t>• Should it deploy? [TEAM] - defensible: not as an autonomous router; yes as a transparent aid a trained rescuer can override, if the sensor feed's integrity is assured and triage replaces greedy nearest-first</a:t>
+              <a:t>Should it deploy? Not as an autonomous router (no triage, trusts its hazard map blindly) — yes as a transparent aid a trained rescuer can override, if the sensor feed's integrity is assured and triage replaces greedy nearest-first</a:t>
             </a:r>
           </a:p>
         </p:txBody>
@@ -5704,7 +5942,7 @@
                   <a:srgbClr val="666666"/>
                 </a:solidFill>
               </a:rPr>
-              <a:t>Phase 8, Stage 9 - MANDATORY - rewrite in your own words</a:t>
+              <a:t>Phase 8, Stage 9 - MANDATORY</a:t>
             </a:r>
           </a:p>
         </p:txBody>
@@ -5742,7 +5980,7 @@
                   <a:srgbClr val="222222"/>
                 </a:solidFill>
               </a:rPr>
-              <a:t>• AI helped: explained tiles-vs-cost, listed search options, caught bad assumptions, sped up implementation</a:t>
+              <a:t>AI helped: explained tiles-vs-cost, listed search options, caught bad assumptions; later, built the whole UI rebuild fast (results, menus, pause, HUD, intro)</a:t>
             </a:r>
           </a:p>
           <a:p>
@@ -5757,7 +5995,7 @@
                   <a:srgbClr val="222222"/>
                 </a:solidFill>
               </a:rPr>
-              <a:t>• AI got wrong: video model couldn't do walk-to-camera NPC animation; recommended Greedy without weighting 'safe' vs 'fast'</a:t>
+              <a:t>AI got wrong: the video model couldn't animate toward/away from camera; recommended Greedy without weighing safe vs fast; later, wrongly credited a teammate for a feature based only on a git commit's account</a:t>
             </a:r>
           </a:p>
           <a:p>
@@ -5772,7 +6010,7 @@
                   <a:srgbClr val="222222"/>
                 </a:solidFill>
               </a:rPr>
-              <a:t>• Accepted: weighted costs, A*, partial observability, key sub-goal, connectivity-checked collapse, braided maze</a:t>
+              <a:t>Accepted: weighted costs, A*, partial observability, key sub-goal, connectivity-checked collapse, braided maze; later, the UI rebuild — reviewed screen by screen</a:t>
             </a:r>
           </a:p>
           <a:p>
@@ -5787,7 +6025,7 @@
                   <a:srgbClr val="222222"/>
                 </a:solidFill>
               </a:rPr>
-              <a:t>• Rejected: Greedy &amp; BFS for routing, full occupant map, AI-video for toward/away directions</a:t>
+              <a:t>Rejected: Greedy &amp; BFS for routing, full occupant map, AI-video for toward/away; later, AI opening PRs or merging into master unprompted</a:t>
             </a:r>
           </a:p>
           <a:p>
@@ -5802,7 +6040,7 @@
                   <a:srgbClr val="222222"/>
                 </a:solidFill>
               </a:rPr>
-              <a:t>• Verified via: search theory, a purpose-built comparison harness, 12 unit tests, checking assets vs engine requirements</a:t>
+              <a:t>Verified via: search theory, a purpose-built harness, unit tests, assets vs engine requirements; later, real screenshots, the real test suite, the real game run end-to-end</a:t>
             </a:r>
           </a:p>
           <a:p>
@@ -5817,7 +6055,7 @@
                   <a:srgbClr val="222222"/>
                 </a:solidFill>
               </a:rPr>
-              <a:t>• Human judgement was necessary for: scope decisions, tuning, recognising the AI failure was narrow, the Responsible-AI position</a:t>
+              <a:t>Human judgement was necessary for: scope, tuning, seeing the AI failure was narrow, the Responsible-AI stance, catching the wrong-authorship claim, judging the UI by eye</a:t>
             </a:r>
           </a:p>
           <a:p>
@@ -5832,7 +6070,7 @@
                   <a:srgbClr val="222222"/>
                 </a:solidFill>
               </a:rPr>
-              <a:t>• If we'd blindly followed AI: the agent would lead people through the fire and we'd have debugged 'bad game balance' instead of a wrong algorithm</a:t>
+              <a:t>If we'd blindly followed AI: agent walks through fire (looks like bad balance, not a wrong algorithm); a teammate wrongly credited; AI colliding with a teammate's work on master</a:t>
             </a:r>
           </a:p>
           <a:p>
@@ -5847,7 +6085,7 @@
                   <a:srgbClr val="222222"/>
                 </a:solidFill>
               </a:rPr>
-              <a:t>• [TEAM] full 11-question answers in the report - REWRITE these in your own words</a:t>
+              <a:t>Learned: a technically-true claim (“fewer expansions”) can still be wrong for the problem; a git commit proves whose account, not who typed the code — verify evidence, not summaries</a:t>
             </a:r>
           </a:p>
         </p:txBody>

--- a/docs/report/CT3201_Slides.pptx
+++ b/docs/report/CT3201_Slides.pptx
@@ -3174,7 +3174,7 @@
                   <a:srgbClr val="222222"/>
                 </a:solidFill>
               </a:rPr>
-              <a:t>Team: [TEAM — add full names and matriculation numbers]</a:t>
+              <a:t>Team: Lee Tze Hian, Ong Chuan Hau (C240087), See Jun Wen</a:t>
             </a:r>
           </a:p>
           <a:p>
@@ -3255,7 +3255,17 @@
                   <a:srgbClr val="1F4E79"/>
                 </a:solidFill>
               </a:rPr>
-              <a:t>9 - Conclusion</a:t>
+              <a:t>8 - Human-AI Reflection</a:t>
+            </a:r>
+          </a:p>
+          <a:p>
+            <a:r>
+              <a:rPr sz="1300">
+                <a:solidFill>
+                  <a:srgbClr val="666666"/>
+                </a:solidFill>
+              </a:rPr>
+              <a:t>Phase 8, Stage 9 - MANDATORY</a:t>
             </a:r>
           </a:p>
         </p:txBody>
@@ -3268,7 +3278,7 @@
         </p:nvSpPr>
         <p:spPr>
           <a:xfrm>
-            <a:off x="640080" y="1645920"/>
+            <a:off x="640080" y="1371600"/>
             <a:ext cx="10972800" cy="5029200"/>
           </a:xfrm>
           <a:prstGeom prst="rect">
@@ -3288,12 +3298,12 @@
               </a:spcAft>
             </a:pPr>
             <a:r>
-              <a:rPr sz="1600">
+              <a:rPr sz="1300">
                 <a:solidFill>
                   <a:srgbClr val="222222"/>
                 </a:solidFill>
               </a:rPr>
-              <a:t>Designed the agent human-first, then used AI to challenge and broaden it</a:t>
+              <a:t>AI helped: explained tiles-vs-cost, listed search options, caught bad assumptions; later, built the whole UI rebuild fast (results, menus, pause, HUD, intro)</a:t>
             </a:r>
           </a:p>
           <a:p>
@@ -3303,12 +3313,12 @@
               </a:spcAft>
             </a:pPr>
             <a:r>
-              <a:rPr sz="1600">
+              <a:rPr sz="1300">
                 <a:solidFill>
                   <a:srgbClr val="222222"/>
                 </a:solidFill>
               </a:rPr>
-              <a:t>AI moved us from unweighted BFS to a hazard-weighted A* agent that plans under partial information and re-plans as the building changes</a:t>
+              <a:t>AI got wrong: the video model couldn't animate toward/away from camera; recommended Greedy without weighing safe vs fast; later, wrongly credited a teammate for a feature based only on a git commit's account</a:t>
             </a:r>
           </a:p>
           <a:p>
@@ -3318,12 +3328,12 @@
               </a:spcAft>
             </a:pPr>
             <a:r>
-              <a:rPr sz="1600">
+              <a:rPr sz="1300">
                 <a:solidFill>
                   <a:srgbClr val="222222"/>
                 </a:solidFill>
               </a:rPr>
-              <a:t>Tested an AI recommendation (Greedy) against a purpose-built comparison — found it inappropriate, rejected it with evidence</a:t>
+              <a:t>Accepted: weighted costs, A*, partial observability, key sub-goal, connectivity-checked collapse, braided maze; later, the UI rebuild — reviewed screen by screen</a:t>
             </a:r>
           </a:p>
           <a:p>
@@ -3333,12 +3343,12 @@
               </a:spcAft>
             </a:pPr>
             <a:r>
-              <a:rPr sz="1600">
+              <a:rPr sz="1300">
                 <a:solidFill>
                   <a:srgbClr val="222222"/>
                 </a:solidFill>
               </a:rPr>
-              <a:t>The AI's clearest failures — directional NPC animation, and a wrong authorship claim — were identified, verified, and corrected</a:t>
+              <a:t>Rejected: Greedy &amp; BFS for routing, full occupant map, AI-video for toward/away; later, AI opening PRs or merging into master unprompted</a:t>
             </a:r>
           </a:p>
           <a:p>
@@ -3348,12 +3358,12 @@
               </a:spcAft>
             </a:pPr>
             <a:r>
-              <a:rPr sz="1600">
+              <a:rPr sz="1300">
                 <a:solidFill>
                   <a:srgbClr val="222222"/>
                 </a:solidFill>
               </a:rPr>
-              <a:t>An optional learned-AI brain (imitating A*) was added and evaluated: it roughly matches A* on familiar stages and trails it on new ones — A* stays the default</a:t>
+              <a:t>Verified via: search theory, a purpose-built harness, unit tests, assets vs engine requirements; later, real screenshots, the real test suite, the real game run end-to-end</a:t>
             </a:r>
           </a:p>
           <a:p>
@@ -3363,12 +3373,42 @@
               </a:spcAft>
             </a:pPr>
             <a:r>
-              <a:rPr sz="1600">
+              <a:rPr sz="1300">
                 <a:solidFill>
                   <a:srgbClr val="222222"/>
                 </a:solidFill>
               </a:rPr>
-              <a:t>AI widened the option space and sped the work; the objective, the verification and every final decision were ours</a:t>
+              <a:t>Human judgement was necessary for: scope, tuning, seeing the AI failure was narrow, the Responsible-AI stance, catching the wrong-authorship claim, judging the UI by eye</a:t>
+            </a:r>
+          </a:p>
+          <a:p>
+            <a:pPr>
+              <a:spcAft>
+                <a:spcPts val="600"/>
+              </a:spcAft>
+            </a:pPr>
+            <a:r>
+              <a:rPr sz="1300">
+                <a:solidFill>
+                  <a:srgbClr val="222222"/>
+                </a:solidFill>
+              </a:rPr>
+              <a:t>If we'd blindly followed AI: agent walks through fire (looks like bad balance, not a wrong algorithm); a teammate wrongly credited; AI colliding with a teammate's work on master</a:t>
+            </a:r>
+          </a:p>
+          <a:p>
+            <a:pPr>
+              <a:spcAft>
+                <a:spcPts val="600"/>
+              </a:spcAft>
+            </a:pPr>
+            <a:r>
+              <a:rPr sz="1300">
+                <a:solidFill>
+                  <a:srgbClr val="222222"/>
+                </a:solidFill>
+              </a:rPr>
+              <a:t>Learned: a technically-true claim (“fewer expansions”) can still be wrong for the problem; a git commit proves whose account, not who typed the code — verify evidence, not summaries</a:t>
             </a:r>
           </a:p>
         </p:txBody>
@@ -3419,17 +3459,7 @@
                   <a:srgbClr val="1F4E79"/>
                 </a:solidFill>
               </a:rPr>
-              <a:t>Critical Evaluation — What AI Got Wrong</a:t>
-            </a:r>
-          </a:p>
-          <a:p>
-            <a:r>
-              <a:rPr sz="1300">
-                <a:solidFill>
-                  <a:srgbClr val="666666"/>
-                </a:solidFill>
-              </a:rPr>
-              <a:t>Compulsory slide — what worked, what didn't, how it was verified</a:t>
+              <a:t>9 - Conclusion</a:t>
             </a:r>
           </a:p>
         </p:txBody>
@@ -3442,7 +3472,7 @@
         </p:nvSpPr>
         <p:spPr>
           <a:xfrm>
-            <a:off x="640080" y="1371600"/>
+            <a:off x="640080" y="1645920"/>
             <a:ext cx="10972800" cy="5029200"/>
           </a:xfrm>
           <a:prstGeom prst="rect">
@@ -3462,12 +3492,12 @@
               </a:spcAft>
             </a:pPr>
             <a:r>
-              <a:rPr sz="1500">
+              <a:rPr sz="1600">
                 <a:solidFill>
                   <a:srgbClr val="222222"/>
                 </a:solidFill>
               </a:rPr>
-              <a:t>What worked: side-view (left/right) walk clips, concept art, the whole implementation</a:t>
+              <a:t>Designed the agent human-first, then used AI to challenge and broaden it</a:t>
             </a:r>
           </a:p>
           <a:p>
@@ -3477,12 +3507,12 @@
               </a:spcAft>
             </a:pPr>
             <a:r>
-              <a:rPr sz="1500">
+              <a:rPr sz="1600">
                 <a:solidFill>
                   <a:srgbClr val="222222"/>
                 </a:solidFill>
               </a:rPr>
-              <a:t>What didn't: no working “toward camera” or “away from camera” walk, across multiple re-prompts — that axis never worked</a:t>
+              <a:t>AI moved us from unweighted BFS to a hazard-weighted A* agent that plans under partial information and re-plans as the building changes</a:t>
             </a:r>
           </a:p>
           <a:p>
@@ -3492,12 +3522,12 @@
               </a:spcAft>
             </a:pPr>
             <a:r>
-              <a:rPr sz="1500">
+              <a:rPr sz="1600">
                 <a:solidFill>
                   <a:srgbClr val="222222"/>
                 </a:solidFill>
               </a:rPr>
-              <a:t>What AI got wrong: it treated “looks like a walk” as done; it never delivered a complete, 4-direction, production-ready set</a:t>
+              <a:t>Tested an AI recommendation (Greedy) against a purpose-built comparison — found it inappropriate, rejected it with evidence</a:t>
             </a:r>
           </a:p>
           <a:p>
@@ -3507,12 +3537,12 @@
               </a:spcAft>
             </a:pPr>
             <a:r>
-              <a:rPr sz="1500">
+              <a:rPr sz="1600">
                 <a:solidFill>
                   <a:srgbClr val="222222"/>
                 </a:solidFill>
               </a:rPr>
-              <a:t>How verified: checked against the engine's own requirements — 4 directions, fixed sprite size, feet-anchored — it met exactly one of four</a:t>
+              <a:t>The AI's clearest failures — directional NPC animation, and a wrong authorship claim — were identified, verified, and corrected</a:t>
             </a:r>
           </a:p>
           <a:p>
@@ -3522,12 +3552,12 @@
               </a:spcAft>
             </a:pPr>
             <a:r>
-              <a:rPr sz="1500">
+              <a:rPr sz="1600">
                 <a:solidFill>
                   <a:srgbClr val="222222"/>
                 </a:solidFill>
               </a:rPr>
-              <a:t>Corrected: assembled the 4-direction set from mixed sources (front/back from the character sheet, one side frame mirrored) + a procedural walk bob</a:t>
+              <a:t>An optional learned-AI brain (imitating A*) was added and evaluated: it roughly matches A* on familiar stages and trails it on new ones — A* stays the default</a:t>
             </a:r>
           </a:p>
           <a:p>
@@ -3537,27 +3567,12 @@
               </a:spcAft>
             </a:pPr>
             <a:r>
-              <a:rPr sz="1500">
+              <a:rPr sz="1600">
                 <a:solidFill>
                   <a:srgbClr val="222222"/>
                 </a:solidFill>
               </a:rPr>
-              <a:t>Second example: AI also claimed a teammate personally wrote a feature based only on a git commit's account — challenged, and corrected (a commit proves whose account, not who typed the code)</a:t>
-            </a:r>
-          </a:p>
-          <a:p>
-            <a:pPr>
-              <a:spcAft>
-                <a:spcPts val="600"/>
-              </a:spcAft>
-            </a:pPr>
-            <a:r>
-              <a:rPr sz="1500">
-                <a:solidFill>
-                  <a:srgbClr val="222222"/>
-                </a:solidFill>
-              </a:rPr>
-              <a:t>This is the mandatory identified → verified → corrected example.</a:t>
+              <a:t>AI widened the option space and sped the work; the objective, the verification and every final decision were ours</a:t>
             </a:r>
           </a:p>
         </p:txBody>
@@ -5932,7 +5947,7 @@
                   <a:srgbClr val="1F4E79"/>
                 </a:solidFill>
               </a:rPr>
-              <a:t>8 - Human-AI Reflection</a:t>
+              <a:t>Critical Evaluation — What AI Got Wrong</a:t>
             </a:r>
           </a:p>
           <a:p>
@@ -5942,7 +5957,7 @@
                   <a:srgbClr val="666666"/>
                 </a:solidFill>
               </a:rPr>
-              <a:t>Phase 8, Stage 9 - MANDATORY</a:t>
+              <a:t>Compulsory slide — what worked, what didn't, how it was verified</a:t>
             </a:r>
           </a:p>
         </p:txBody>
@@ -5975,12 +5990,12 @@
               </a:spcAft>
             </a:pPr>
             <a:r>
-              <a:rPr sz="1300">
+              <a:rPr sz="1500">
                 <a:solidFill>
                   <a:srgbClr val="222222"/>
                 </a:solidFill>
               </a:rPr>
-              <a:t>AI helped: explained tiles-vs-cost, listed search options, caught bad assumptions; later, built the whole UI rebuild fast (results, menus, pause, HUD, intro)</a:t>
+              <a:t>What worked: side-view (left/right) walk clips, concept art, the whole implementation</a:t>
             </a:r>
           </a:p>
           <a:p>
@@ -5990,12 +6005,12 @@
               </a:spcAft>
             </a:pPr>
             <a:r>
-              <a:rPr sz="1300">
+              <a:rPr sz="1500">
                 <a:solidFill>
                   <a:srgbClr val="222222"/>
                 </a:solidFill>
               </a:rPr>
-              <a:t>AI got wrong: the video model couldn't animate toward/away from camera; recommended Greedy without weighing safe vs fast; later, wrongly credited a teammate for a feature based only on a git commit's account</a:t>
+              <a:t>What didn't: no working “toward camera” or “away from camera” walk, across multiple re-prompts — that axis never worked</a:t>
             </a:r>
           </a:p>
           <a:p>
@@ -6005,12 +6020,12 @@
               </a:spcAft>
             </a:pPr>
             <a:r>
-              <a:rPr sz="1300">
+              <a:rPr sz="1500">
                 <a:solidFill>
                   <a:srgbClr val="222222"/>
                 </a:solidFill>
               </a:rPr>
-              <a:t>Accepted: weighted costs, A*, partial observability, key sub-goal, connectivity-checked collapse, braided maze; later, the UI rebuild — reviewed screen by screen</a:t>
+              <a:t>What AI got wrong: it treated “looks like a walk” as done; it never delivered a complete, 4-direction, production-ready set</a:t>
             </a:r>
           </a:p>
           <a:p>
@@ -6020,12 +6035,12 @@
               </a:spcAft>
             </a:pPr>
             <a:r>
-              <a:rPr sz="1300">
+              <a:rPr sz="1500">
                 <a:solidFill>
                   <a:srgbClr val="222222"/>
                 </a:solidFill>
               </a:rPr>
-              <a:t>Rejected: Greedy &amp; BFS for routing, full occupant map, AI-video for toward/away; later, AI opening PRs or merging into master unprompted</a:t>
+              <a:t>How verified: checked against the engine's own requirements — 4 directions, fixed sprite size, feet-anchored — it met exactly one of four</a:t>
             </a:r>
           </a:p>
           <a:p>
@@ -6035,12 +6050,12 @@
               </a:spcAft>
             </a:pPr>
             <a:r>
-              <a:rPr sz="1300">
+              <a:rPr sz="1500">
                 <a:solidFill>
                   <a:srgbClr val="222222"/>
                 </a:solidFill>
               </a:rPr>
-              <a:t>Verified via: search theory, a purpose-built harness, unit tests, assets vs engine requirements; later, real screenshots, the real test suite, the real game run end-to-end</a:t>
+              <a:t>Corrected: assembled the 4-direction set from mixed sources (front/back from the character sheet, one side frame mirrored) + a procedural walk bob</a:t>
             </a:r>
           </a:p>
           <a:p>
@@ -6050,12 +6065,12 @@
               </a:spcAft>
             </a:pPr>
             <a:r>
-              <a:rPr sz="1300">
+              <a:rPr sz="1500">
                 <a:solidFill>
                   <a:srgbClr val="222222"/>
                 </a:solidFill>
               </a:rPr>
-              <a:t>Human judgement was necessary for: scope, tuning, seeing the AI failure was narrow, the Responsible-AI stance, catching the wrong-authorship claim, judging the UI by eye</a:t>
+              <a:t>Second example: AI also claimed a teammate personally wrote a feature based only on a git commit's account — challenged, and corrected (a commit proves whose account, not who typed the code)</a:t>
             </a:r>
           </a:p>
           <a:p>
@@ -6065,27 +6080,12 @@
               </a:spcAft>
             </a:pPr>
             <a:r>
-              <a:rPr sz="1300">
+              <a:rPr sz="1500">
                 <a:solidFill>
                   <a:srgbClr val="222222"/>
                 </a:solidFill>
               </a:rPr>
-              <a:t>If we'd blindly followed AI: agent walks through fire (looks like bad balance, not a wrong algorithm); a teammate wrongly credited; AI colliding with a teammate's work on master</a:t>
-            </a:r>
-          </a:p>
-          <a:p>
-            <a:pPr>
-              <a:spcAft>
-                <a:spcPts val="600"/>
-              </a:spcAft>
-            </a:pPr>
-            <a:r>
-              <a:rPr sz="1300">
-                <a:solidFill>
-                  <a:srgbClr val="222222"/>
-                </a:solidFill>
-              </a:rPr>
-              <a:t>Learned: a technically-true claim (“fewer expansions”) can still be wrong for the problem; a git commit proves whose account, not who typed the code — verify evidence, not summaries</a:t>
+              <a:t>This is the mandatory identified → verified → corrected example.</a:t>
             </a:r>
           </a:p>
         </p:txBody>

--- a/docs/report/CT3201_Slides.pptx
+++ b/docs/report/CT3201_Slides.pptx
@@ -3174,7 +3174,7 @@
                   <a:srgbClr val="222222"/>
                 </a:solidFill>
               </a:rPr>
-              <a:t>Team: Lee Tze Hian, Ong Chuan Hau (C240087), See Jun Wen</a:t>
+              <a:t>Team: Lee Tze Hian, Ong Chuan Hau (C240087), See Jun Wen (U2420456K)</a:t>
             </a:r>
           </a:p>
           <a:p>

--- a/docs/report/CT3201_Slides.pptx
+++ b/docs/report/CT3201_Slides.pptx
@@ -3174,7 +3174,7 @@
                   <a:srgbClr val="222222"/>
                 </a:solidFill>
               </a:rPr>
-              <a:t>Team: Lee Tze Hian, Ong Chuan Hau (C240087), See Jun Wen (U2420456K)</a:t>
+              <a:t>Team: Lee Tze Hian, Ong Chuan Hau (U2420725E), See Jun Wen (U2420456K)</a:t>
             </a:r>
           </a:p>
           <a:p>

--- a/docs/report/CT3201_Slides.pptx
+++ b/docs/report/CT3201_Slides.pptx
@@ -3318,7 +3318,7 @@
                   <a:srgbClr val="222222"/>
                 </a:solidFill>
               </a:rPr>
-              <a:t>AI got wrong: the video model couldn't animate toward/away from camera; recommended Greedy without weighing safe vs fast; later, wrongly credited a teammate for a feature based only on a git commit's account</a:t>
+              <a:t>AI got wrong: the video model couldn't animate toward/away from camera; recommended Greedy without weighing safe vs fast</a:t>
             </a:r>
           </a:p>
           <a:p>
@@ -3378,7 +3378,7 @@
                   <a:srgbClr val="222222"/>
                 </a:solidFill>
               </a:rPr>
-              <a:t>Human judgement was necessary for: scope, tuning, seeing the AI failure was narrow, the Responsible-AI stance, catching the wrong-authorship claim, judging the UI by eye</a:t>
+              <a:t>Human judgement was necessary for: scope, tuning, seeing the AI failure was narrow, the Responsible-AI stance, judging the UI by eye</a:t>
             </a:r>
           </a:p>
           <a:p>
@@ -3393,7 +3393,7 @@
                   <a:srgbClr val="222222"/>
                 </a:solidFill>
               </a:rPr>
-              <a:t>If we'd blindly followed AI: agent walks through fire (looks like bad balance, not a wrong algorithm); a teammate wrongly credited; AI colliding with a teammate's work on master</a:t>
+              <a:t>If we'd blindly followed AI: agent walks through fire (looks like bad balance, not a wrong algorithm); AI colliding with a teammate's work on master</a:t>
             </a:r>
           </a:p>
           <a:p>
@@ -6056,21 +6056,6 @@
                 </a:solidFill>
               </a:rPr>
               <a:t>Corrected: assembled the 4-direction set from mixed sources (front/back from the character sheet, one side frame mirrored) + a procedural walk bob</a:t>
-            </a:r>
-          </a:p>
-          <a:p>
-            <a:pPr>
-              <a:spcAft>
-                <a:spcPts val="600"/>
-              </a:spcAft>
-            </a:pPr>
-            <a:r>
-              <a:rPr sz="1500">
-                <a:solidFill>
-                  <a:srgbClr val="222222"/>
-                </a:solidFill>
-              </a:rPr>
-              <a:t>Second example: AI also claimed a teammate personally wrote a feature based only on a git commit's account — challenged, and corrected (a commit proves whose account, not who typed the code)</a:t>
             </a:r>
           </a:p>
           <a:p>

--- a/docs/report/CT3201_Slides.pptx
+++ b/docs/report/CT3201_Slides.pptx
@@ -3174,7 +3174,7 @@
                   <a:srgbClr val="222222"/>
                 </a:solidFill>
               </a:rPr>
-              <a:t>Team: Lee Tze Hian, Ong Chuan Hau (U2420725E), See Jun Wen (U2420456K)</a:t>
+              <a:t>Team: Lee Tze Hian (U2423241F), Ong Chuan Hau (U2420725E), See Jun Wen (U2420456K)</a:t>
             </a:r>
           </a:p>
           <a:p>

--- a/docs/report/CT3201_Slides.pptx
+++ b/docs/report/CT3201_Slides.pptx
@@ -3542,7 +3542,7 @@
                   <a:srgbClr val="222222"/>
                 </a:solidFill>
               </a:rPr>
-              <a:t>The AI's clearest failures — directional NPC animation, and a wrong authorship claim — were identified, verified, and corrected</a:t>
+              <a:t>The AI's clearest failure — directional NPC animation — was identified, verified, and corrected</a:t>
             </a:r>
           </a:p>
           <a:p>

--- a/docs/report/CT3201_Slides.pptx
+++ b/docs/report/CT3201_Slides.pptx
@@ -3174,7 +3174,7 @@
                   <a:srgbClr val="222222"/>
                 </a:solidFill>
               </a:rPr>
-              <a:t>Team: Lee Tze Hian, Ong Chuan Hau (U2420725E), See Jun Wen (U2420456K)</a:t>
+              <a:t>Team: Lee Tze Hian (U2423241F), Ong Chuan Hau (U2420725E), See Jun Wen (U2420456K)</a:t>
             </a:r>
           </a:p>
           <a:p>
@@ -3542,7 +3542,7 @@
                   <a:srgbClr val="222222"/>
                 </a:solidFill>
               </a:rPr>
-              <a:t>The AI's clearest failures — directional NPC animation, and a wrong authorship claim — were identified, verified, and corrected</a:t>
+              <a:t>The AI's clearest failure — directional NPC animation — was identified, verified, and corrected</a:t>
             </a:r>
           </a:p>
           <a:p>

--- a/docs/report/CT3201_Slides.pptx
+++ b/docs/report/CT3201_Slides.pptx
@@ -3100,14 +3100,58 @@
       <p:grpSpPr/>
       <p:sp>
         <p:nvSpPr>
+          <p:cNvPr id="4" name="Rectangle 3"/>
+          <p:cNvSpPr/>
+          <p:nvPr/>
+        </p:nvSpPr>
+        <p:spPr>
+          <a:xfrm>
+            <a:off x="0" y="0"/>
+            <a:ext cx="12191695" cy="1051560"/>
+          </a:xfrm>
+          <a:prstGeom prst="rect">
+            <a:avLst/>
+          </a:prstGeom>
+          <a:solidFill>
+            <a:srgbClr val="1F4E79"/>
+          </a:solidFill>
+          <a:ln>
+            <a:noFill/>
+          </a:ln>
+          <a:effectLst/>
+        </p:spPr>
+        <p:style>
+          <a:lnRef idx="1">
+            <a:schemeClr val="accent1"/>
+          </a:lnRef>
+          <a:fillRef idx="3">
+            <a:schemeClr val="accent1"/>
+          </a:fillRef>
+          <a:effectRef idx="2">
+            <a:schemeClr val="accent1"/>
+          </a:effectRef>
+          <a:fontRef idx="minor">
+            <a:schemeClr val="lt1"/>
+          </a:fontRef>
+        </p:style>
+        <p:txBody>
+          <a:bodyPr rtlCol="0" anchor="ctr"/>
+          <a:lstStyle/>
+          <a:p>
+            <a:pPr algn="ctr"/>
+          </a:p>
+        </p:txBody>
+      </p:sp>
+      <p:sp>
+        <p:nvSpPr>
           <p:cNvPr id="2" name="TextBox 1"/>
           <p:cNvSpPr txBox="1"/>
           <p:nvPr/>
         </p:nvSpPr>
         <p:spPr>
           <a:xfrm>
-            <a:off x="548640" y="320040"/>
-            <a:ext cx="11064240" cy="822960"/>
+            <a:off x="502920" y="91440"/>
+            <a:ext cx="11185855" cy="960120"/>
           </a:xfrm>
           <a:prstGeom prst="rect">
             <a:avLst/>
@@ -3115,15 +3159,15 @@
           <a:noFill/>
         </p:spPr>
         <p:txBody>
-          <a:bodyPr wrap="none">
+          <a:bodyPr wrap="none" anchor="ctr">
             <a:spAutoFit/>
           </a:bodyPr>
           <a:lstStyle/>
           <a:p>
             <a:r>
-              <a:rPr sz="3000" b="1">
-                <a:solidFill>
-                  <a:srgbClr val="1F4E79"/>
+              <a:rPr sz="2600" b="1">
+                <a:solidFill>
+                  <a:srgbClr val="FFFFFF"/>
                 </a:solidFill>
               </a:rPr>
               <a:t>Pyro Pete: Emergency Evacuation</a:t>
@@ -3131,9 +3175,9 @@
           </a:p>
           <a:p>
             <a:r>
-              <a:rPr sz="1300">
-                <a:solidFill>
-                  <a:srgbClr val="666666"/>
+              <a:rPr sz="1200">
+                <a:solidFill>
+                  <a:srgbClr val="C9D7E4"/>
                 </a:solidFill>
               </a:rPr>
               <a:t>CT3201 Mini Project  ·  an evacuation-routing AI agent  ·  Learn with AI</a:t>
@@ -3164,47 +3208,251 @@
           <a:lstStyle/>
           <a:p>
             <a:pPr>
+              <a:lnSpc>
+                <a:spcPct val="108000"/>
+              </a:lnSpc>
               <a:spcAft>
-                <a:spcPts val="600"/>
+                <a:spcPts val="1200"/>
               </a:spcAft>
             </a:pPr>
             <a:r>
-              <a:rPr sz="1800">
-                <a:solidFill>
-                  <a:srgbClr val="222222"/>
-                </a:solidFill>
-              </a:rPr>
-              <a:t>Team: Lee Tze Hian (U2423241F), Ong Chuan Hau (U2420725E), See Jun Wen (U2420456K)</a:t>
+              <a:rPr b="1" sz="1600">
+                <a:solidFill>
+                  <a:srgbClr val="C8820E"/>
+                </a:solidFill>
+              </a:rPr>
+              <a:t>▸  </a:t>
+            </a:r>
+            <a:r>
+              <a:rPr b="1" sz="1600">
+                <a:solidFill>
+                  <a:srgbClr val="1F4E79"/>
+                </a:solidFill>
+              </a:rPr>
+              <a:t>Team: </a:t>
+            </a:r>
+            <a:r>
+              <a:rPr sz="1600">
+                <a:solidFill>
+                  <a:srgbClr val="2B2B2B"/>
+                </a:solidFill>
+              </a:rPr>
+              <a:t>Lee Tze Hian (U2423241F), Ong Chuan Hau (U2420725E), See Jun Wen (U2420456K)</a:t>
             </a:r>
           </a:p>
           <a:p>
             <a:pPr>
+              <a:lnSpc>
+                <a:spcPct val="108000"/>
+              </a:lnSpc>
               <a:spcAft>
-                <a:spcPts val="600"/>
+                <a:spcPts val="1200"/>
               </a:spcAft>
             </a:pPr>
             <a:r>
-              <a:rPr sz="1800">
-                <a:solidFill>
-                  <a:srgbClr val="222222"/>
-                </a:solidFill>
-              </a:rPr>
-              <a:t>Problem area: search / intelligent agent / decision-making under uncertainty</a:t>
+              <a:rPr b="1" sz="1600">
+                <a:solidFill>
+                  <a:srgbClr val="C8820E"/>
+                </a:solidFill>
+              </a:rPr>
+              <a:t>▸  </a:t>
+            </a:r>
+            <a:r>
+              <a:rPr b="1" sz="1600">
+                <a:solidFill>
+                  <a:srgbClr val="1F4E79"/>
+                </a:solidFill>
+              </a:rPr>
+              <a:t>Problem area: </a:t>
+            </a:r>
+            <a:r>
+              <a:rPr sz="1600">
+                <a:solidFill>
+                  <a:srgbClr val="2B2B2B"/>
+                </a:solidFill>
+              </a:rPr>
+              <a:t>search / intelligent agent / decision-making under uncertainty</a:t>
             </a:r>
           </a:p>
           <a:p>
             <a:pPr>
+              <a:lnSpc>
+                <a:spcPct val="108000"/>
+              </a:lnSpc>
               <a:spcAft>
-                <a:spcPts val="600"/>
+                <a:spcPts val="1200"/>
               </a:spcAft>
             </a:pPr>
             <a:r>
-              <a:rPr sz="1800">
-                <a:solidFill>
-                  <a:srgbClr val="222222"/>
+              <a:rPr b="1" sz="1600">
+                <a:solidFill>
+                  <a:srgbClr val="C8820E"/>
+                </a:solidFill>
+              </a:rPr>
+              <a:t>▸  </a:t>
+            </a:r>
+            <a:r>
+              <a:rPr sz="1600">
+                <a:solidFill>
+                  <a:srgbClr val="2B2B2B"/>
                 </a:solidFill>
               </a:rPr>
               <a:t>Can AI help us design AI — and can we recognise when AI is wrong?</a:t>
+            </a:r>
+          </a:p>
+        </p:txBody>
+      </p:sp>
+      <p:sp>
+        <p:nvSpPr>
+          <p:cNvPr id="5" name="Rectangle 4"/>
+          <p:cNvSpPr/>
+          <p:nvPr/>
+        </p:nvSpPr>
+        <p:spPr>
+          <a:xfrm>
+            <a:off x="0" y="1051560"/>
+            <a:ext cx="12191695" cy="38100"/>
+          </a:xfrm>
+          <a:prstGeom prst="rect">
+            <a:avLst/>
+          </a:prstGeom>
+          <a:solidFill>
+            <a:srgbClr val="E0A23D"/>
+          </a:solidFill>
+          <a:ln>
+            <a:noFill/>
+          </a:ln>
+          <a:effectLst/>
+        </p:spPr>
+        <p:style>
+          <a:lnRef idx="1">
+            <a:schemeClr val="accent1"/>
+          </a:lnRef>
+          <a:fillRef idx="3">
+            <a:schemeClr val="accent1"/>
+          </a:fillRef>
+          <a:effectRef idx="2">
+            <a:schemeClr val="accent1"/>
+          </a:effectRef>
+          <a:fontRef idx="minor">
+            <a:schemeClr val="lt1"/>
+          </a:fontRef>
+        </p:style>
+        <p:txBody>
+          <a:bodyPr rtlCol="0" anchor="ctr"/>
+          <a:lstStyle/>
+          <a:p>
+            <a:pPr algn="ctr"/>
+          </a:p>
+        </p:txBody>
+      </p:sp>
+      <p:sp>
+        <p:nvSpPr>
+          <p:cNvPr id="6" name="Rectangle 5"/>
+          <p:cNvSpPr/>
+          <p:nvPr/>
+        </p:nvSpPr>
+        <p:spPr>
+          <a:xfrm>
+            <a:off x="457200" y="6510528"/>
+            <a:ext cx="11277295" cy="9525"/>
+          </a:xfrm>
+          <a:prstGeom prst="rect">
+            <a:avLst/>
+          </a:prstGeom>
+          <a:solidFill>
+            <a:srgbClr val="DDDDDD"/>
+          </a:solidFill>
+          <a:ln>
+            <a:noFill/>
+          </a:ln>
+          <a:effectLst/>
+        </p:spPr>
+        <p:style>
+          <a:lnRef idx="1">
+            <a:schemeClr val="accent1"/>
+          </a:lnRef>
+          <a:fillRef idx="3">
+            <a:schemeClr val="accent1"/>
+          </a:fillRef>
+          <a:effectRef idx="2">
+            <a:schemeClr val="accent1"/>
+          </a:effectRef>
+          <a:fontRef idx="minor">
+            <a:schemeClr val="lt1"/>
+          </a:fontRef>
+        </p:style>
+        <p:txBody>
+          <a:bodyPr rtlCol="0" anchor="ctr"/>
+          <a:lstStyle/>
+          <a:p>
+            <a:pPr algn="ctr"/>
+          </a:p>
+        </p:txBody>
+      </p:sp>
+      <p:sp>
+        <p:nvSpPr>
+          <p:cNvPr id="7" name="TextBox 6"/>
+          <p:cNvSpPr txBox="1"/>
+          <p:nvPr/>
+        </p:nvSpPr>
+        <p:spPr>
+          <a:xfrm>
+            <a:off x="457200" y="6565392"/>
+            <a:ext cx="5486400" cy="274320"/>
+          </a:xfrm>
+          <a:prstGeom prst="rect">
+            <a:avLst/>
+          </a:prstGeom>
+          <a:noFill/>
+        </p:spPr>
+        <p:txBody>
+          <a:bodyPr wrap="none" lIns="0" tIns="0" bIns="0">
+            <a:spAutoFit/>
+          </a:bodyPr>
+          <a:lstStyle/>
+          <a:p>
+            <a:r>
+              <a:rPr sz="900">
+                <a:solidFill>
+                  <a:srgbClr val="9A9A9A"/>
+                </a:solidFill>
+              </a:rPr>
+              <a:t>Pyro Pete: Emergency Evacuation  ·  CT3201 Mini Project</a:t>
+            </a:r>
+          </a:p>
+        </p:txBody>
+      </p:sp>
+      <p:sp>
+        <p:nvSpPr>
+          <p:cNvPr id="8" name="TextBox 7"/>
+          <p:cNvSpPr txBox="1"/>
+          <p:nvPr/>
+        </p:nvSpPr>
+        <p:spPr>
+          <a:xfrm>
+            <a:off x="10820095" y="6565392"/>
+            <a:ext cx="914400" cy="274320"/>
+          </a:xfrm>
+          <a:prstGeom prst="rect">
+            <a:avLst/>
+          </a:prstGeom>
+          <a:noFill/>
+        </p:spPr>
+        <p:txBody>
+          <a:bodyPr wrap="none" lIns="0" tIns="0" bIns="0">
+            <a:spAutoFit/>
+          </a:bodyPr>
+          <a:lstStyle/>
+          <a:p>
+            <a:pPr algn="r"/>
+            <a:r>
+              <a:rPr sz="900">
+                <a:solidFill>
+                  <a:srgbClr val="9A9A9A"/>
+                </a:solidFill>
+              </a:rPr>
+              <a:t>1</a:t>
             </a:r>
           </a:p>
         </p:txBody>
@@ -3229,14 +3477,58 @@
       <p:grpSpPr/>
       <p:sp>
         <p:nvSpPr>
+          <p:cNvPr id="4" name="Rectangle 3"/>
+          <p:cNvSpPr/>
+          <p:nvPr/>
+        </p:nvSpPr>
+        <p:spPr>
+          <a:xfrm>
+            <a:off x="0" y="0"/>
+            <a:ext cx="12191695" cy="1051560"/>
+          </a:xfrm>
+          <a:prstGeom prst="rect">
+            <a:avLst/>
+          </a:prstGeom>
+          <a:solidFill>
+            <a:srgbClr val="1F4E79"/>
+          </a:solidFill>
+          <a:ln>
+            <a:noFill/>
+          </a:ln>
+          <a:effectLst/>
+        </p:spPr>
+        <p:style>
+          <a:lnRef idx="1">
+            <a:schemeClr val="accent1"/>
+          </a:lnRef>
+          <a:fillRef idx="3">
+            <a:schemeClr val="accent1"/>
+          </a:fillRef>
+          <a:effectRef idx="2">
+            <a:schemeClr val="accent1"/>
+          </a:effectRef>
+          <a:fontRef idx="minor">
+            <a:schemeClr val="lt1"/>
+          </a:fontRef>
+        </p:style>
+        <p:txBody>
+          <a:bodyPr rtlCol="0" anchor="ctr"/>
+          <a:lstStyle/>
+          <a:p>
+            <a:pPr algn="ctr"/>
+          </a:p>
+        </p:txBody>
+      </p:sp>
+      <p:sp>
+        <p:nvSpPr>
           <p:cNvPr id="2" name="TextBox 1"/>
           <p:cNvSpPr txBox="1"/>
           <p:nvPr/>
         </p:nvSpPr>
         <p:spPr>
           <a:xfrm>
-            <a:off x="548640" y="320040"/>
-            <a:ext cx="11064240" cy="822960"/>
+            <a:off x="1234440" y="91440"/>
+            <a:ext cx="10728655" cy="960120"/>
           </a:xfrm>
           <a:prstGeom prst="rect">
             <a:avLst/>
@@ -3244,15 +3536,15 @@
           <a:noFill/>
         </p:spPr>
         <p:txBody>
-          <a:bodyPr wrap="none">
+          <a:bodyPr wrap="none" anchor="ctr">
             <a:spAutoFit/>
           </a:bodyPr>
           <a:lstStyle/>
           <a:p>
             <a:r>
-              <a:rPr sz="3000" b="1">
-                <a:solidFill>
-                  <a:srgbClr val="1F4E79"/>
+              <a:rPr sz="2600" b="1">
+                <a:solidFill>
+                  <a:srgbClr val="FFFFFF"/>
                 </a:solidFill>
               </a:rPr>
               <a:t>8 - Human-AI Reflection</a:t>
@@ -3260,9 +3552,9 @@
           </a:p>
           <a:p>
             <a:r>
-              <a:rPr sz="1300">
-                <a:solidFill>
-                  <a:srgbClr val="666666"/>
+              <a:rPr sz="1200">
+                <a:solidFill>
+                  <a:srgbClr val="C9D7E4"/>
                 </a:solidFill>
               </a:rPr>
               <a:t>Phase 8, Stage 9 - MANDATORY</a:t>
@@ -3293,122 +3585,484 @@
           <a:lstStyle/>
           <a:p>
             <a:pPr>
+              <a:lnSpc>
+                <a:spcPct val="100000"/>
+              </a:lnSpc>
               <a:spcAft>
                 <a:spcPts val="600"/>
               </a:spcAft>
             </a:pPr>
             <a:r>
+              <a:rPr b="1" sz="1300">
+                <a:solidFill>
+                  <a:srgbClr val="C8820E"/>
+                </a:solidFill>
+              </a:rPr>
+              <a:t>▸  </a:t>
+            </a:r>
+            <a:r>
+              <a:rPr b="1" sz="1300">
+                <a:solidFill>
+                  <a:srgbClr val="1F4E79"/>
+                </a:solidFill>
+              </a:rPr>
+              <a:t>AI helped: </a:t>
+            </a:r>
+            <a:r>
               <a:rPr sz="1300">
                 <a:solidFill>
-                  <a:srgbClr val="222222"/>
-                </a:solidFill>
-              </a:rPr>
-              <a:t>AI helped: explained tiles-vs-cost, listed search options, caught bad assumptions; later, built the whole UI rebuild fast (results, menus, pause, HUD, intro)</a:t>
+                  <a:srgbClr val="2B2B2B"/>
+                </a:solidFill>
+              </a:rPr>
+              <a:t>explained tiles-vs-cost, listed search options, caught bad assumptions; later, built the whole UI rebuild fast (results, menus, pause, HUD, intro)</a:t>
             </a:r>
           </a:p>
           <a:p>
             <a:pPr>
+              <a:lnSpc>
+                <a:spcPct val="100000"/>
+              </a:lnSpc>
               <a:spcAft>
                 <a:spcPts val="600"/>
               </a:spcAft>
             </a:pPr>
             <a:r>
+              <a:rPr b="1" sz="1300">
+                <a:solidFill>
+                  <a:srgbClr val="C8820E"/>
+                </a:solidFill>
+              </a:rPr>
+              <a:t>▸  </a:t>
+            </a:r>
+            <a:r>
+              <a:rPr b="1" sz="1300">
+                <a:solidFill>
+                  <a:srgbClr val="1F4E79"/>
+                </a:solidFill>
+              </a:rPr>
+              <a:t>AI got wrong: </a:t>
+            </a:r>
+            <a:r>
               <a:rPr sz="1300">
                 <a:solidFill>
-                  <a:srgbClr val="222222"/>
-                </a:solidFill>
-              </a:rPr>
-              <a:t>AI got wrong: the video model couldn't animate toward/away from camera; recommended Greedy without weighing safe vs fast</a:t>
+                  <a:srgbClr val="2B2B2B"/>
+                </a:solidFill>
+              </a:rPr>
+              <a:t>the video model couldn't animate toward/away from camera; recommended Greedy without weighing safe vs fast</a:t>
             </a:r>
           </a:p>
           <a:p>
             <a:pPr>
+              <a:lnSpc>
+                <a:spcPct val="100000"/>
+              </a:lnSpc>
               <a:spcAft>
                 <a:spcPts val="600"/>
               </a:spcAft>
             </a:pPr>
             <a:r>
+              <a:rPr b="1" sz="1300">
+                <a:solidFill>
+                  <a:srgbClr val="C8820E"/>
+                </a:solidFill>
+              </a:rPr>
+              <a:t>▸  </a:t>
+            </a:r>
+            <a:r>
+              <a:rPr b="1" sz="1300">
+                <a:solidFill>
+                  <a:srgbClr val="1F4E79"/>
+                </a:solidFill>
+              </a:rPr>
+              <a:t>Accepted: </a:t>
+            </a:r>
+            <a:r>
               <a:rPr sz="1300">
                 <a:solidFill>
-                  <a:srgbClr val="222222"/>
-                </a:solidFill>
-              </a:rPr>
-              <a:t>Accepted: weighted costs, A*, partial observability, key sub-goal, connectivity-checked collapse, braided maze; later, the UI rebuild — reviewed screen by screen</a:t>
+                  <a:srgbClr val="2B2B2B"/>
+                </a:solidFill>
+              </a:rPr>
+              <a:t>weighted costs, A*, partial observability, key sub-goal, connectivity-checked collapse, braided maze; later, the UI rebuild — reviewed screen by screen</a:t>
             </a:r>
           </a:p>
           <a:p>
             <a:pPr>
+              <a:lnSpc>
+                <a:spcPct val="100000"/>
+              </a:lnSpc>
               <a:spcAft>
                 <a:spcPts val="600"/>
               </a:spcAft>
             </a:pPr>
             <a:r>
+              <a:rPr b="1" sz="1300">
+                <a:solidFill>
+                  <a:srgbClr val="C8820E"/>
+                </a:solidFill>
+              </a:rPr>
+              <a:t>▸  </a:t>
+            </a:r>
+            <a:r>
+              <a:rPr b="1" sz="1300">
+                <a:solidFill>
+                  <a:srgbClr val="1F4E79"/>
+                </a:solidFill>
+              </a:rPr>
+              <a:t>Rejected: </a:t>
+            </a:r>
+            <a:r>
               <a:rPr sz="1300">
                 <a:solidFill>
-                  <a:srgbClr val="222222"/>
-                </a:solidFill>
-              </a:rPr>
-              <a:t>Rejected: Greedy &amp; BFS for routing, full occupant map, AI-video for toward/away; later, AI opening PRs or merging into master unprompted</a:t>
+                  <a:srgbClr val="2B2B2B"/>
+                </a:solidFill>
+              </a:rPr>
+              <a:t>Greedy &amp; BFS for routing, full occupant map, AI-video for toward/away; later, AI opening PRs or merging into master unprompted</a:t>
             </a:r>
           </a:p>
           <a:p>
             <a:pPr>
+              <a:lnSpc>
+                <a:spcPct val="100000"/>
+              </a:lnSpc>
               <a:spcAft>
                 <a:spcPts val="600"/>
               </a:spcAft>
             </a:pPr>
             <a:r>
+              <a:rPr b="1" sz="1300">
+                <a:solidFill>
+                  <a:srgbClr val="C8820E"/>
+                </a:solidFill>
+              </a:rPr>
+              <a:t>▸  </a:t>
+            </a:r>
+            <a:r>
+              <a:rPr b="1" sz="1300">
+                <a:solidFill>
+                  <a:srgbClr val="1F4E79"/>
+                </a:solidFill>
+              </a:rPr>
+              <a:t>Verified via: </a:t>
+            </a:r>
+            <a:r>
               <a:rPr sz="1300">
                 <a:solidFill>
-                  <a:srgbClr val="222222"/>
-                </a:solidFill>
-              </a:rPr>
-              <a:t>Verified via: search theory, a purpose-built harness, unit tests, assets vs engine requirements; later, real screenshots, the real test suite, the real game run end-to-end</a:t>
+                  <a:srgbClr val="2B2B2B"/>
+                </a:solidFill>
+              </a:rPr>
+              <a:t>search theory, a purpose-built harness, unit tests, assets vs engine requirements; later, real screenshots, the real test suite, the real game run end-to-end</a:t>
             </a:r>
           </a:p>
           <a:p>
             <a:pPr>
+              <a:lnSpc>
+                <a:spcPct val="100000"/>
+              </a:lnSpc>
               <a:spcAft>
                 <a:spcPts val="600"/>
               </a:spcAft>
             </a:pPr>
             <a:r>
+              <a:rPr b="1" sz="1300">
+                <a:solidFill>
+                  <a:srgbClr val="C8820E"/>
+                </a:solidFill>
+              </a:rPr>
+              <a:t>▸  </a:t>
+            </a:r>
+            <a:r>
+              <a:rPr b="1" sz="1300">
+                <a:solidFill>
+                  <a:srgbClr val="1F4E79"/>
+                </a:solidFill>
+              </a:rPr>
+              <a:t>Human judgement was necessary for: </a:t>
+            </a:r>
+            <a:r>
               <a:rPr sz="1300">
                 <a:solidFill>
-                  <a:srgbClr val="222222"/>
-                </a:solidFill>
-              </a:rPr>
-              <a:t>Human judgement was necessary for: scope, tuning, seeing the AI failure was narrow, the Responsible-AI stance, judging the UI by eye</a:t>
+                  <a:srgbClr val="2B2B2B"/>
+                </a:solidFill>
+              </a:rPr>
+              <a:t>scope, tuning, seeing the AI failure was narrow, the Responsible-AI stance, judging the UI by eye</a:t>
             </a:r>
           </a:p>
           <a:p>
             <a:pPr>
+              <a:lnSpc>
+                <a:spcPct val="100000"/>
+              </a:lnSpc>
               <a:spcAft>
                 <a:spcPts val="600"/>
               </a:spcAft>
             </a:pPr>
             <a:r>
+              <a:rPr b="1" sz="1300">
+                <a:solidFill>
+                  <a:srgbClr val="C8820E"/>
+                </a:solidFill>
+              </a:rPr>
+              <a:t>▸  </a:t>
+            </a:r>
+            <a:r>
+              <a:rPr b="1" sz="1300">
+                <a:solidFill>
+                  <a:srgbClr val="1F4E79"/>
+                </a:solidFill>
+              </a:rPr>
+              <a:t>If we'd blindly followed AI: </a:t>
+            </a:r>
+            <a:r>
               <a:rPr sz="1300">
                 <a:solidFill>
-                  <a:srgbClr val="222222"/>
-                </a:solidFill>
-              </a:rPr>
-              <a:t>If we'd blindly followed AI: agent walks through fire (looks like bad balance, not a wrong algorithm); AI colliding with a teammate's work on master</a:t>
+                  <a:srgbClr val="2B2B2B"/>
+                </a:solidFill>
+              </a:rPr>
+              <a:t>agent walks through fire (looks like bad balance, not a wrong algorithm); AI colliding with a teammate's work on master</a:t>
             </a:r>
           </a:p>
           <a:p>
             <a:pPr>
+              <a:lnSpc>
+                <a:spcPct val="100000"/>
+              </a:lnSpc>
               <a:spcAft>
                 <a:spcPts val="600"/>
               </a:spcAft>
             </a:pPr>
             <a:r>
+              <a:rPr b="1" sz="1300">
+                <a:solidFill>
+                  <a:srgbClr val="C8820E"/>
+                </a:solidFill>
+              </a:rPr>
+              <a:t>▸  </a:t>
+            </a:r>
+            <a:r>
+              <a:rPr b="1" sz="1300">
+                <a:solidFill>
+                  <a:srgbClr val="1F4E79"/>
+                </a:solidFill>
+              </a:rPr>
+              <a:t>Learned: </a:t>
+            </a:r>
+            <a:r>
               <a:rPr sz="1300">
                 <a:solidFill>
-                  <a:srgbClr val="222222"/>
-                </a:solidFill>
-              </a:rPr>
-              <a:t>Learned: a technically-true claim (“fewer expansions”) can still be wrong for the problem; a git commit proves whose account, not who typed the code — verify evidence, not summaries</a:t>
+                  <a:srgbClr val="2B2B2B"/>
+                </a:solidFill>
+              </a:rPr>
+              <a:t>a technically-true claim (“fewer expansions”) can still be wrong for the problem; a git commit proves whose account, not who typed the code — verify evidence, not summaries</a:t>
+            </a:r>
+          </a:p>
+        </p:txBody>
+      </p:sp>
+      <p:sp>
+        <p:nvSpPr>
+          <p:cNvPr id="5" name="Rectangle 4"/>
+          <p:cNvSpPr/>
+          <p:nvPr/>
+        </p:nvSpPr>
+        <p:spPr>
+          <a:xfrm>
+            <a:off x="0" y="1051560"/>
+            <a:ext cx="12191695" cy="38100"/>
+          </a:xfrm>
+          <a:prstGeom prst="rect">
+            <a:avLst/>
+          </a:prstGeom>
+          <a:solidFill>
+            <a:srgbClr val="E0A23D"/>
+          </a:solidFill>
+          <a:ln>
+            <a:noFill/>
+          </a:ln>
+          <a:effectLst/>
+        </p:spPr>
+        <p:style>
+          <a:lnRef idx="1">
+            <a:schemeClr val="accent1"/>
+          </a:lnRef>
+          <a:fillRef idx="3">
+            <a:schemeClr val="accent1"/>
+          </a:fillRef>
+          <a:effectRef idx="2">
+            <a:schemeClr val="accent1"/>
+          </a:effectRef>
+          <a:fontRef idx="minor">
+            <a:schemeClr val="lt1"/>
+          </a:fontRef>
+        </p:style>
+        <p:txBody>
+          <a:bodyPr rtlCol="0" anchor="ctr"/>
+          <a:lstStyle/>
+          <a:p>
+            <a:pPr algn="ctr"/>
+          </a:p>
+        </p:txBody>
+      </p:sp>
+      <p:sp>
+        <p:nvSpPr>
+          <p:cNvPr id="6" name="Rounded Rectangle 5"/>
+          <p:cNvSpPr/>
+          <p:nvPr/>
+        </p:nvSpPr>
+        <p:spPr>
+          <a:xfrm>
+            <a:off x="457200" y="242316"/>
+            <a:ext cx="566928" cy="566928"/>
+          </a:xfrm>
+          <a:prstGeom prst="roundRect">
+            <a:avLst>
+              <a:gd name="adj" fmla="val 28000"/>
+            </a:avLst>
+          </a:prstGeom>
+          <a:solidFill>
+            <a:srgbClr val="C8820E"/>
+          </a:solidFill>
+          <a:ln>
+            <a:noFill/>
+          </a:ln>
+          <a:effectLst/>
+        </p:spPr>
+        <p:style>
+          <a:lnRef idx="1">
+            <a:schemeClr val="accent1"/>
+          </a:lnRef>
+          <a:fillRef idx="3">
+            <a:schemeClr val="accent1"/>
+          </a:fillRef>
+          <a:effectRef idx="2">
+            <a:schemeClr val="accent1"/>
+          </a:effectRef>
+          <a:fontRef idx="minor">
+            <a:schemeClr val="lt1"/>
+          </a:fontRef>
+        </p:style>
+        <p:txBody>
+          <a:bodyPr rtlCol="0" anchor="ctr" wrap="none" lIns="0" rIns="0" tIns="0" bIns="0"/>
+          <a:lstStyle/>
+          <a:p>
+            <a:pPr algn="ctr"/>
+            <a:r>
+              <a:rPr sz="2600" b="1">
+                <a:solidFill>
+                  <a:srgbClr val="1F4E79"/>
+                </a:solidFill>
+                <a:latin typeface="Calibri"/>
+              </a:rPr>
+              <a:t>8</a:t>
+            </a:r>
+          </a:p>
+        </p:txBody>
+      </p:sp>
+      <p:sp>
+        <p:nvSpPr>
+          <p:cNvPr id="7" name="Rectangle 6"/>
+          <p:cNvSpPr/>
+          <p:nvPr/>
+        </p:nvSpPr>
+        <p:spPr>
+          <a:xfrm>
+            <a:off x="457200" y="6510528"/>
+            <a:ext cx="11277295" cy="9525"/>
+          </a:xfrm>
+          <a:prstGeom prst="rect">
+            <a:avLst/>
+          </a:prstGeom>
+          <a:solidFill>
+            <a:srgbClr val="DDDDDD"/>
+          </a:solidFill>
+          <a:ln>
+            <a:noFill/>
+          </a:ln>
+          <a:effectLst/>
+        </p:spPr>
+        <p:style>
+          <a:lnRef idx="1">
+            <a:schemeClr val="accent1"/>
+          </a:lnRef>
+          <a:fillRef idx="3">
+            <a:schemeClr val="accent1"/>
+          </a:fillRef>
+          <a:effectRef idx="2">
+            <a:schemeClr val="accent1"/>
+          </a:effectRef>
+          <a:fontRef idx="minor">
+            <a:schemeClr val="lt1"/>
+          </a:fontRef>
+        </p:style>
+        <p:txBody>
+          <a:bodyPr rtlCol="0" anchor="ctr"/>
+          <a:lstStyle/>
+          <a:p>
+            <a:pPr algn="ctr"/>
+          </a:p>
+        </p:txBody>
+      </p:sp>
+      <p:sp>
+        <p:nvSpPr>
+          <p:cNvPr id="8" name="TextBox 7"/>
+          <p:cNvSpPr txBox="1"/>
+          <p:nvPr/>
+        </p:nvSpPr>
+        <p:spPr>
+          <a:xfrm>
+            <a:off x="457200" y="6565392"/>
+            <a:ext cx="5486400" cy="274320"/>
+          </a:xfrm>
+          <a:prstGeom prst="rect">
+            <a:avLst/>
+          </a:prstGeom>
+          <a:noFill/>
+        </p:spPr>
+        <p:txBody>
+          <a:bodyPr wrap="none" lIns="0" tIns="0" bIns="0">
+            <a:spAutoFit/>
+          </a:bodyPr>
+          <a:lstStyle/>
+          <a:p>
+            <a:r>
+              <a:rPr sz="900">
+                <a:solidFill>
+                  <a:srgbClr val="9A9A9A"/>
+                </a:solidFill>
+              </a:rPr>
+              <a:t>Pyro Pete: Emergency Evacuation  ·  CT3201 Mini Project</a:t>
+            </a:r>
+          </a:p>
+        </p:txBody>
+      </p:sp>
+      <p:sp>
+        <p:nvSpPr>
+          <p:cNvPr id="9" name="TextBox 8"/>
+          <p:cNvSpPr txBox="1"/>
+          <p:nvPr/>
+        </p:nvSpPr>
+        <p:spPr>
+          <a:xfrm>
+            <a:off x="10820095" y="6565392"/>
+            <a:ext cx="914400" cy="274320"/>
+          </a:xfrm>
+          <a:prstGeom prst="rect">
+            <a:avLst/>
+          </a:prstGeom>
+          <a:noFill/>
+        </p:spPr>
+        <p:txBody>
+          <a:bodyPr wrap="none" lIns="0" tIns="0" bIns="0">
+            <a:spAutoFit/>
+          </a:bodyPr>
+          <a:lstStyle/>
+          <a:p>
+            <a:pPr algn="r"/>
+            <a:r>
+              <a:rPr sz="900">
+                <a:solidFill>
+                  <a:srgbClr val="9A9A9A"/>
+                </a:solidFill>
+              </a:rPr>
+              <a:t>10</a:t>
             </a:r>
           </a:p>
         </p:txBody>
@@ -3433,14 +4087,58 @@
       <p:grpSpPr/>
       <p:sp>
         <p:nvSpPr>
+          <p:cNvPr id="4" name="Rectangle 3"/>
+          <p:cNvSpPr/>
+          <p:nvPr/>
+        </p:nvSpPr>
+        <p:spPr>
+          <a:xfrm>
+            <a:off x="0" y="0"/>
+            <a:ext cx="12191695" cy="1051560"/>
+          </a:xfrm>
+          <a:prstGeom prst="rect">
+            <a:avLst/>
+          </a:prstGeom>
+          <a:solidFill>
+            <a:srgbClr val="1F4E79"/>
+          </a:solidFill>
+          <a:ln>
+            <a:noFill/>
+          </a:ln>
+          <a:effectLst/>
+        </p:spPr>
+        <p:style>
+          <a:lnRef idx="1">
+            <a:schemeClr val="accent1"/>
+          </a:lnRef>
+          <a:fillRef idx="3">
+            <a:schemeClr val="accent1"/>
+          </a:fillRef>
+          <a:effectRef idx="2">
+            <a:schemeClr val="accent1"/>
+          </a:effectRef>
+          <a:fontRef idx="minor">
+            <a:schemeClr val="lt1"/>
+          </a:fontRef>
+        </p:style>
+        <p:txBody>
+          <a:bodyPr rtlCol="0" anchor="ctr"/>
+          <a:lstStyle/>
+          <a:p>
+            <a:pPr algn="ctr"/>
+          </a:p>
+        </p:txBody>
+      </p:sp>
+      <p:sp>
+        <p:nvSpPr>
           <p:cNvPr id="2" name="TextBox 1"/>
           <p:cNvSpPr txBox="1"/>
           <p:nvPr/>
         </p:nvSpPr>
         <p:spPr>
           <a:xfrm>
-            <a:off x="548640" y="320040"/>
-            <a:ext cx="11064240" cy="822960"/>
+            <a:off x="1234440" y="91440"/>
+            <a:ext cx="10728655" cy="960120"/>
           </a:xfrm>
           <a:prstGeom prst="rect">
             <a:avLst/>
@@ -3448,15 +4146,15 @@
           <a:noFill/>
         </p:spPr>
         <p:txBody>
-          <a:bodyPr wrap="none">
+          <a:bodyPr wrap="none" anchor="ctr">
             <a:spAutoFit/>
           </a:bodyPr>
           <a:lstStyle/>
           <a:p>
             <a:r>
-              <a:rPr sz="3000" b="1">
-                <a:solidFill>
-                  <a:srgbClr val="1F4E79"/>
+              <a:rPr sz="2600" b="1">
+                <a:solidFill>
+                  <a:srgbClr val="FFFFFF"/>
                 </a:solidFill>
               </a:rPr>
               <a:t>9 - Conclusion</a:t>
@@ -3487,14 +4185,25 @@
           <a:lstStyle/>
           <a:p>
             <a:pPr>
+              <a:lnSpc>
+                <a:spcPct val="108000"/>
+              </a:lnSpc>
               <a:spcAft>
-                <a:spcPts val="600"/>
+                <a:spcPts val="1200"/>
               </a:spcAft>
             </a:pPr>
             <a:r>
+              <a:rPr b="1" sz="1600">
+                <a:solidFill>
+                  <a:srgbClr val="C8820E"/>
+                </a:solidFill>
+              </a:rPr>
+              <a:t>▸  </a:t>
+            </a:r>
+            <a:r>
               <a:rPr sz="1600">
                 <a:solidFill>
-                  <a:srgbClr val="222222"/>
+                  <a:srgbClr val="2B2B2B"/>
                 </a:solidFill>
               </a:rPr>
               <a:t>Designed the agent human-first, then used AI to challenge and broaden it</a:t>
@@ -3502,14 +4211,25 @@
           </a:p>
           <a:p>
             <a:pPr>
+              <a:lnSpc>
+                <a:spcPct val="108000"/>
+              </a:lnSpc>
               <a:spcAft>
-                <a:spcPts val="600"/>
+                <a:spcPts val="1200"/>
               </a:spcAft>
             </a:pPr>
             <a:r>
+              <a:rPr b="1" sz="1600">
+                <a:solidFill>
+                  <a:srgbClr val="C8820E"/>
+                </a:solidFill>
+              </a:rPr>
+              <a:t>▸  </a:t>
+            </a:r>
+            <a:r>
               <a:rPr sz="1600">
                 <a:solidFill>
-                  <a:srgbClr val="222222"/>
+                  <a:srgbClr val="2B2B2B"/>
                 </a:solidFill>
               </a:rPr>
               <a:t>AI moved us from unweighted BFS to a hazard-weighted A* agent that plans under partial information and re-plans as the building changes</a:t>
@@ -3517,14 +4237,25 @@
           </a:p>
           <a:p>
             <a:pPr>
+              <a:lnSpc>
+                <a:spcPct val="108000"/>
+              </a:lnSpc>
               <a:spcAft>
-                <a:spcPts val="600"/>
+                <a:spcPts val="1200"/>
               </a:spcAft>
             </a:pPr>
             <a:r>
+              <a:rPr b="1" sz="1600">
+                <a:solidFill>
+                  <a:srgbClr val="C8820E"/>
+                </a:solidFill>
+              </a:rPr>
+              <a:t>▸  </a:t>
+            </a:r>
+            <a:r>
               <a:rPr sz="1600">
                 <a:solidFill>
-                  <a:srgbClr val="222222"/>
+                  <a:srgbClr val="2B2B2B"/>
                 </a:solidFill>
               </a:rPr>
               <a:t>Tested an AI recommendation (Greedy) against a purpose-built comparison — found it inappropriate, rejected it with evidence</a:t>
@@ -3532,14 +4263,25 @@
           </a:p>
           <a:p>
             <a:pPr>
+              <a:lnSpc>
+                <a:spcPct val="108000"/>
+              </a:lnSpc>
               <a:spcAft>
-                <a:spcPts val="600"/>
+                <a:spcPts val="1200"/>
               </a:spcAft>
             </a:pPr>
             <a:r>
+              <a:rPr b="1" sz="1600">
+                <a:solidFill>
+                  <a:srgbClr val="C8820E"/>
+                </a:solidFill>
+              </a:rPr>
+              <a:t>▸  </a:t>
+            </a:r>
+            <a:r>
               <a:rPr sz="1600">
                 <a:solidFill>
-                  <a:srgbClr val="222222"/>
+                  <a:srgbClr val="2B2B2B"/>
                 </a:solidFill>
               </a:rPr>
               <a:t>The AI's clearest failure — directional NPC animation — was identified, verified, and corrected</a:t>
@@ -3547,14 +4289,25 @@
           </a:p>
           <a:p>
             <a:pPr>
+              <a:lnSpc>
+                <a:spcPct val="108000"/>
+              </a:lnSpc>
               <a:spcAft>
-                <a:spcPts val="600"/>
+                <a:spcPts val="1200"/>
               </a:spcAft>
             </a:pPr>
             <a:r>
+              <a:rPr b="1" sz="1600">
+                <a:solidFill>
+                  <a:srgbClr val="C8820E"/>
+                </a:solidFill>
+              </a:rPr>
+              <a:t>▸  </a:t>
+            </a:r>
+            <a:r>
               <a:rPr sz="1600">
                 <a:solidFill>
-                  <a:srgbClr val="222222"/>
+                  <a:srgbClr val="2B2B2B"/>
                 </a:solidFill>
               </a:rPr>
               <a:t>An optional learned-AI brain (imitating A*) was added and evaluated: it roughly matches A* on familiar stages and trails it on new ones — A* stays the default</a:t>
@@ -3562,17 +4315,238 @@
           </a:p>
           <a:p>
             <a:pPr>
+              <a:lnSpc>
+                <a:spcPct val="108000"/>
+              </a:lnSpc>
               <a:spcAft>
-                <a:spcPts val="600"/>
+                <a:spcPts val="1200"/>
               </a:spcAft>
             </a:pPr>
             <a:r>
+              <a:rPr b="1" sz="1600">
+                <a:solidFill>
+                  <a:srgbClr val="C8820E"/>
+                </a:solidFill>
+              </a:rPr>
+              <a:t>▸  </a:t>
+            </a:r>
+            <a:r>
               <a:rPr sz="1600">
                 <a:solidFill>
-                  <a:srgbClr val="222222"/>
+                  <a:srgbClr val="2B2B2B"/>
                 </a:solidFill>
               </a:rPr>
               <a:t>AI widened the option space and sped the work; the objective, the verification and every final decision were ours</a:t>
+            </a:r>
+          </a:p>
+        </p:txBody>
+      </p:sp>
+      <p:sp>
+        <p:nvSpPr>
+          <p:cNvPr id="5" name="Rectangle 4"/>
+          <p:cNvSpPr/>
+          <p:nvPr/>
+        </p:nvSpPr>
+        <p:spPr>
+          <a:xfrm>
+            <a:off x="0" y="1051560"/>
+            <a:ext cx="12191695" cy="38100"/>
+          </a:xfrm>
+          <a:prstGeom prst="rect">
+            <a:avLst/>
+          </a:prstGeom>
+          <a:solidFill>
+            <a:srgbClr val="E0A23D"/>
+          </a:solidFill>
+          <a:ln>
+            <a:noFill/>
+          </a:ln>
+          <a:effectLst/>
+        </p:spPr>
+        <p:style>
+          <a:lnRef idx="1">
+            <a:schemeClr val="accent1"/>
+          </a:lnRef>
+          <a:fillRef idx="3">
+            <a:schemeClr val="accent1"/>
+          </a:fillRef>
+          <a:effectRef idx="2">
+            <a:schemeClr val="accent1"/>
+          </a:effectRef>
+          <a:fontRef idx="minor">
+            <a:schemeClr val="lt1"/>
+          </a:fontRef>
+        </p:style>
+        <p:txBody>
+          <a:bodyPr rtlCol="0" anchor="ctr"/>
+          <a:lstStyle/>
+          <a:p>
+            <a:pPr algn="ctr"/>
+          </a:p>
+        </p:txBody>
+      </p:sp>
+      <p:sp>
+        <p:nvSpPr>
+          <p:cNvPr id="6" name="Rounded Rectangle 5"/>
+          <p:cNvSpPr/>
+          <p:nvPr/>
+        </p:nvSpPr>
+        <p:spPr>
+          <a:xfrm>
+            <a:off x="457200" y="242316"/>
+            <a:ext cx="566928" cy="566928"/>
+          </a:xfrm>
+          <a:prstGeom prst="roundRect">
+            <a:avLst>
+              <a:gd name="adj" fmla="val 28000"/>
+            </a:avLst>
+          </a:prstGeom>
+          <a:solidFill>
+            <a:srgbClr val="C8820E"/>
+          </a:solidFill>
+          <a:ln>
+            <a:noFill/>
+          </a:ln>
+          <a:effectLst/>
+        </p:spPr>
+        <p:style>
+          <a:lnRef idx="1">
+            <a:schemeClr val="accent1"/>
+          </a:lnRef>
+          <a:fillRef idx="3">
+            <a:schemeClr val="accent1"/>
+          </a:fillRef>
+          <a:effectRef idx="2">
+            <a:schemeClr val="accent1"/>
+          </a:effectRef>
+          <a:fontRef idx="minor">
+            <a:schemeClr val="lt1"/>
+          </a:fontRef>
+        </p:style>
+        <p:txBody>
+          <a:bodyPr rtlCol="0" anchor="ctr" wrap="none" lIns="0" rIns="0" tIns="0" bIns="0"/>
+          <a:lstStyle/>
+          <a:p>
+            <a:pPr algn="ctr"/>
+            <a:r>
+              <a:rPr sz="2600" b="1">
+                <a:solidFill>
+                  <a:srgbClr val="1F4E79"/>
+                </a:solidFill>
+                <a:latin typeface="Calibri"/>
+              </a:rPr>
+              <a:t>9</a:t>
+            </a:r>
+          </a:p>
+        </p:txBody>
+      </p:sp>
+      <p:sp>
+        <p:nvSpPr>
+          <p:cNvPr id="7" name="Rectangle 6"/>
+          <p:cNvSpPr/>
+          <p:nvPr/>
+        </p:nvSpPr>
+        <p:spPr>
+          <a:xfrm>
+            <a:off x="457200" y="6510528"/>
+            <a:ext cx="11277295" cy="9525"/>
+          </a:xfrm>
+          <a:prstGeom prst="rect">
+            <a:avLst/>
+          </a:prstGeom>
+          <a:solidFill>
+            <a:srgbClr val="DDDDDD"/>
+          </a:solidFill>
+          <a:ln>
+            <a:noFill/>
+          </a:ln>
+          <a:effectLst/>
+        </p:spPr>
+        <p:style>
+          <a:lnRef idx="1">
+            <a:schemeClr val="accent1"/>
+          </a:lnRef>
+          <a:fillRef idx="3">
+            <a:schemeClr val="accent1"/>
+          </a:fillRef>
+          <a:effectRef idx="2">
+            <a:schemeClr val="accent1"/>
+          </a:effectRef>
+          <a:fontRef idx="minor">
+            <a:schemeClr val="lt1"/>
+          </a:fontRef>
+        </p:style>
+        <p:txBody>
+          <a:bodyPr rtlCol="0" anchor="ctr"/>
+          <a:lstStyle/>
+          <a:p>
+            <a:pPr algn="ctr"/>
+          </a:p>
+        </p:txBody>
+      </p:sp>
+      <p:sp>
+        <p:nvSpPr>
+          <p:cNvPr id="8" name="TextBox 7"/>
+          <p:cNvSpPr txBox="1"/>
+          <p:nvPr/>
+        </p:nvSpPr>
+        <p:spPr>
+          <a:xfrm>
+            <a:off x="457200" y="6565392"/>
+            <a:ext cx="5486400" cy="274320"/>
+          </a:xfrm>
+          <a:prstGeom prst="rect">
+            <a:avLst/>
+          </a:prstGeom>
+          <a:noFill/>
+        </p:spPr>
+        <p:txBody>
+          <a:bodyPr wrap="none" lIns="0" tIns="0" bIns="0">
+            <a:spAutoFit/>
+          </a:bodyPr>
+          <a:lstStyle/>
+          <a:p>
+            <a:r>
+              <a:rPr sz="900">
+                <a:solidFill>
+                  <a:srgbClr val="9A9A9A"/>
+                </a:solidFill>
+              </a:rPr>
+              <a:t>Pyro Pete: Emergency Evacuation  ·  CT3201 Mini Project</a:t>
+            </a:r>
+          </a:p>
+        </p:txBody>
+      </p:sp>
+      <p:sp>
+        <p:nvSpPr>
+          <p:cNvPr id="9" name="TextBox 8"/>
+          <p:cNvSpPr txBox="1"/>
+          <p:nvPr/>
+        </p:nvSpPr>
+        <p:spPr>
+          <a:xfrm>
+            <a:off x="10820095" y="6565392"/>
+            <a:ext cx="914400" cy="274320"/>
+          </a:xfrm>
+          <a:prstGeom prst="rect">
+            <a:avLst/>
+          </a:prstGeom>
+          <a:noFill/>
+        </p:spPr>
+        <p:txBody>
+          <a:bodyPr wrap="none" lIns="0" tIns="0" bIns="0">
+            <a:spAutoFit/>
+          </a:bodyPr>
+          <a:lstStyle/>
+          <a:p>
+            <a:pPr algn="r"/>
+            <a:r>
+              <a:rPr sz="900">
+                <a:solidFill>
+                  <a:srgbClr val="9A9A9A"/>
+                </a:solidFill>
+              </a:rPr>
+              <a:t>11</a:t>
             </a:r>
           </a:p>
         </p:txBody>
@@ -3597,14 +4571,58 @@
       <p:grpSpPr/>
       <p:sp>
         <p:nvSpPr>
+          <p:cNvPr id="4" name="Rectangle 3"/>
+          <p:cNvSpPr/>
+          <p:nvPr/>
+        </p:nvSpPr>
+        <p:spPr>
+          <a:xfrm>
+            <a:off x="0" y="0"/>
+            <a:ext cx="12191695" cy="1051560"/>
+          </a:xfrm>
+          <a:prstGeom prst="rect">
+            <a:avLst/>
+          </a:prstGeom>
+          <a:solidFill>
+            <a:srgbClr val="1F4E79"/>
+          </a:solidFill>
+          <a:ln>
+            <a:noFill/>
+          </a:ln>
+          <a:effectLst/>
+        </p:spPr>
+        <p:style>
+          <a:lnRef idx="1">
+            <a:schemeClr val="accent1"/>
+          </a:lnRef>
+          <a:fillRef idx="3">
+            <a:schemeClr val="accent1"/>
+          </a:fillRef>
+          <a:effectRef idx="2">
+            <a:schemeClr val="accent1"/>
+          </a:effectRef>
+          <a:fontRef idx="minor">
+            <a:schemeClr val="lt1"/>
+          </a:fontRef>
+        </p:style>
+        <p:txBody>
+          <a:bodyPr rtlCol="0" anchor="ctr"/>
+          <a:lstStyle/>
+          <a:p>
+            <a:pPr algn="ctr"/>
+          </a:p>
+        </p:txBody>
+      </p:sp>
+      <p:sp>
+        <p:nvSpPr>
           <p:cNvPr id="2" name="TextBox 1"/>
           <p:cNvSpPr txBox="1"/>
           <p:nvPr/>
         </p:nvSpPr>
         <p:spPr>
           <a:xfrm>
-            <a:off x="548640" y="320040"/>
-            <a:ext cx="11064240" cy="822960"/>
+            <a:off x="1234440" y="91440"/>
+            <a:ext cx="10728655" cy="960120"/>
           </a:xfrm>
           <a:prstGeom prst="rect">
             <a:avLst/>
@@ -3612,15 +4630,15 @@
           <a:noFill/>
         </p:spPr>
         <p:txBody>
-          <a:bodyPr wrap="none">
+          <a:bodyPr wrap="none" anchor="ctr">
             <a:spAutoFit/>
           </a:bodyPr>
           <a:lstStyle/>
           <a:p>
             <a:r>
-              <a:rPr sz="3000" b="1">
-                <a:solidFill>
-                  <a:srgbClr val="1F4E79"/>
+              <a:rPr sz="2600" b="1">
+                <a:solidFill>
+                  <a:srgbClr val="FFFFFF"/>
                 </a:solidFill>
               </a:rPr>
               <a:t>1 - Problem Definition</a:t>
@@ -3628,9 +4646,9 @@
           </a:p>
           <a:p>
             <a:r>
-              <a:rPr sz="1300">
-                <a:solidFill>
-                  <a:srgbClr val="666666"/>
+              <a:rPr sz="1200">
+                <a:solidFill>
+                  <a:srgbClr val="C9D7E4"/>
                 </a:solidFill>
               </a:rPr>
               <a:t>Phase 1, Stage 1 - defined human-first, before using AI</a:t>
@@ -3661,92 +4679,416 @@
           <a:lstStyle/>
           <a:p>
             <a:pPr>
+              <a:lnSpc>
+                <a:spcPct val="108000"/>
+              </a:lnSpc>
               <a:spcAft>
-                <a:spcPts val="600"/>
+                <a:spcPts val="1200"/>
               </a:spcAft>
             </a:pPr>
             <a:r>
+              <a:rPr b="1" sz="1600">
+                <a:solidFill>
+                  <a:srgbClr val="C8820E"/>
+                </a:solidFill>
+              </a:rPr>
+              <a:t>▸  </a:t>
+            </a:r>
+            <a:r>
+              <a:rPr b="1" sz="1600">
+                <a:solidFill>
+                  <a:srgbClr val="1F4E79"/>
+                </a:solidFill>
+              </a:rPr>
+              <a:t>Problem: </a:t>
+            </a:r>
+            <a:r>
               <a:rPr sz="1600">
                 <a:solidFill>
-                  <a:srgbClr val="222222"/>
-                </a:solidFill>
-              </a:rPr>
-              <a:t>Problem: occupants who don't know a burning building's layout must be found and led to an exit before fire, smoke and collapse cut the route off</a:t>
+                  <a:srgbClr val="2B2B2B"/>
+                </a:solidFill>
+              </a:rPr>
+              <a:t>occupants who don't know a burning building's layout must be found and led to an exit before fire, smoke and collapse cut the route off</a:t>
             </a:r>
           </a:p>
           <a:p>
             <a:pPr>
+              <a:lnSpc>
+                <a:spcPct val="108000"/>
+              </a:lnSpc>
               <a:spcAft>
-                <a:spcPts val="600"/>
+                <a:spcPts val="1200"/>
               </a:spcAft>
             </a:pPr>
             <a:r>
+              <a:rPr b="1" sz="1600">
+                <a:solidFill>
+                  <a:srgbClr val="C8820E"/>
+                </a:solidFill>
+              </a:rPr>
+              <a:t>▸  </a:t>
+            </a:r>
+            <a:r>
+              <a:rPr b="1" sz="1600">
+                <a:solidFill>
+                  <a:srgbClr val="1F4E79"/>
+                </a:solidFill>
+              </a:rPr>
+              <a:t>User: </a:t>
+            </a:r>
+            <a:r>
               <a:rPr sz="1600">
                 <a:solidFill>
-                  <a:srgbClr val="222222"/>
-                </a:solidFill>
-              </a:rPr>
-              <a:t>User: a rescuer inside the building (human or AI) — the system is a decision-support tool that proposes a route, not an autonomous replacement</a:t>
+                  <a:srgbClr val="2B2B2B"/>
+                </a:solidFill>
+              </a:rPr>
+              <a:t>a rescuer inside the building (human or AI) — the system is a decision-support tool that proposes a route, not an autonomous replacement</a:t>
             </a:r>
           </a:p>
           <a:p>
             <a:pPr>
+              <a:lnSpc>
+                <a:spcPct val="108000"/>
+              </a:lnSpc>
               <a:spcAft>
-                <a:spcPts val="600"/>
+                <a:spcPts val="1200"/>
               </a:spcAft>
             </a:pPr>
             <a:r>
+              <a:rPr b="1" sz="1600">
+                <a:solidFill>
+                  <a:srgbClr val="C8820E"/>
+                </a:solidFill>
+              </a:rPr>
+              <a:t>▸  </a:t>
+            </a:r>
+            <a:r>
+              <a:rPr b="1" sz="1600">
+                <a:solidFill>
+                  <a:srgbClr val="1F4E79"/>
+                </a:solidFill>
+              </a:rPr>
+              <a:t>Environment: </a:t>
+            </a:r>
+            <a:r>
               <a:rPr sz="1600">
                 <a:solidFill>
-                  <a:srgbClr val="222222"/>
-                </a:solidFill>
-              </a:rPr>
-              <a:t>Environment: multi-room floor plan as a grid graph; hazards evolve over time; only a small radius is visible</a:t>
+                  <a:srgbClr val="2B2B2B"/>
+                </a:solidFill>
+              </a:rPr>
+              <a:t>multi-room floor plan as a grid graph; hazards evolve over time; only a small radius is visible</a:t>
             </a:r>
           </a:p>
           <a:p>
             <a:pPr>
+              <a:lnSpc>
+                <a:spcPct val="108000"/>
+              </a:lnSpc>
               <a:spcAft>
-                <a:spcPts val="600"/>
+                <a:spcPts val="1200"/>
               </a:spcAft>
             </a:pPr>
             <a:r>
+              <a:rPr b="1" sz="1600">
+                <a:solidFill>
+                  <a:srgbClr val="C8820E"/>
+                </a:solidFill>
+              </a:rPr>
+              <a:t>▸  </a:t>
+            </a:r>
+            <a:r>
+              <a:rPr b="1" sz="1600">
+                <a:solidFill>
+                  <a:srgbClr val="1F4E79"/>
+                </a:solidFill>
+              </a:rPr>
+              <a:t>Desired outcome: </a:t>
+            </a:r>
+            <a:r>
               <a:rPr sz="1600">
                 <a:solidFill>
-                  <a:srgbClr val="222222"/>
-                </a:solidFill>
-              </a:rPr>
-              <a:t>Desired outcome: all reachable occupants out, then the rescuer out — fast, with minimal hazard exposure</a:t>
+                  <a:srgbClr val="2B2B2B"/>
+                </a:solidFill>
+              </a:rPr>
+              <a:t>all reachable occupants out, then the rescuer out — fast, with minimal hazard exposure</a:t>
             </a:r>
           </a:p>
           <a:p>
             <a:pPr>
+              <a:lnSpc>
+                <a:spcPct val="108000"/>
+              </a:lnSpc>
               <a:spcAft>
-                <a:spcPts val="600"/>
+                <a:spcPts val="1200"/>
               </a:spcAft>
             </a:pPr>
             <a:r>
+              <a:rPr b="1" sz="1600">
+                <a:solidFill>
+                  <a:srgbClr val="C8820E"/>
+                </a:solidFill>
+              </a:rPr>
+              <a:t>▸  </a:t>
+            </a:r>
+            <a:r>
+              <a:rPr b="1" sz="1600">
+                <a:solidFill>
+                  <a:srgbClr val="1F4E79"/>
+                </a:solidFill>
+              </a:rPr>
+              <a:t>Main decision: </a:t>
+            </a:r>
+            <a:r>
               <a:rPr sz="1600">
                 <a:solidFill>
-                  <a:srgbClr val="222222"/>
-                </a:solidFill>
-              </a:rPr>
-              <a:t>Main decision: push deeper for another occupant, or take the ones I have and get out now?</a:t>
+                  <a:srgbClr val="2B2B2B"/>
+                </a:solidFill>
+              </a:rPr>
+              <a:t>push deeper for another occupant, or take the ones I have and get out now?</a:t>
             </a:r>
           </a:p>
           <a:p>
             <a:pPr>
+              <a:lnSpc>
+                <a:spcPct val="108000"/>
+              </a:lnSpc>
               <a:spcAft>
-                <a:spcPts val="600"/>
+                <a:spcPts val="1200"/>
               </a:spcAft>
             </a:pPr>
             <a:r>
+              <a:rPr b="1" sz="1600">
+                <a:solidFill>
+                  <a:srgbClr val="C8820E"/>
+                </a:solidFill>
+              </a:rPr>
+              <a:t>▸  </a:t>
+            </a:r>
+            <a:r>
+              <a:rPr b="1" sz="1600">
+                <a:solidFill>
+                  <a:srgbClr val="1F4E79"/>
+                </a:solidFill>
+              </a:rPr>
+              <a:t>Think first: </a:t>
+            </a:r>
+            <a:r>
               <a:rPr sz="1600">
                 <a:solidFill>
-                  <a:srgbClr val="222222"/>
-                </a:solidFill>
-              </a:rPr>
-              <a:t>Think first: the team brainstormed and picked this problem before opening any AI tool</a:t>
+                  <a:srgbClr val="2B2B2B"/>
+                </a:solidFill>
+              </a:rPr>
+              <a:t>the team brainstormed and picked this problem before opening any AI tool</a:t>
+            </a:r>
+          </a:p>
+        </p:txBody>
+      </p:sp>
+      <p:sp>
+        <p:nvSpPr>
+          <p:cNvPr id="5" name="Rectangle 4"/>
+          <p:cNvSpPr/>
+          <p:nvPr/>
+        </p:nvSpPr>
+        <p:spPr>
+          <a:xfrm>
+            <a:off x="0" y="1051560"/>
+            <a:ext cx="12191695" cy="38100"/>
+          </a:xfrm>
+          <a:prstGeom prst="rect">
+            <a:avLst/>
+          </a:prstGeom>
+          <a:solidFill>
+            <a:srgbClr val="E0A23D"/>
+          </a:solidFill>
+          <a:ln>
+            <a:noFill/>
+          </a:ln>
+          <a:effectLst/>
+        </p:spPr>
+        <p:style>
+          <a:lnRef idx="1">
+            <a:schemeClr val="accent1"/>
+          </a:lnRef>
+          <a:fillRef idx="3">
+            <a:schemeClr val="accent1"/>
+          </a:fillRef>
+          <a:effectRef idx="2">
+            <a:schemeClr val="accent1"/>
+          </a:effectRef>
+          <a:fontRef idx="minor">
+            <a:schemeClr val="lt1"/>
+          </a:fontRef>
+        </p:style>
+        <p:txBody>
+          <a:bodyPr rtlCol="0" anchor="ctr"/>
+          <a:lstStyle/>
+          <a:p>
+            <a:pPr algn="ctr"/>
+          </a:p>
+        </p:txBody>
+      </p:sp>
+      <p:sp>
+        <p:nvSpPr>
+          <p:cNvPr id="6" name="Rounded Rectangle 5"/>
+          <p:cNvSpPr/>
+          <p:nvPr/>
+        </p:nvSpPr>
+        <p:spPr>
+          <a:xfrm>
+            <a:off x="457200" y="242316"/>
+            <a:ext cx="566928" cy="566928"/>
+          </a:xfrm>
+          <a:prstGeom prst="roundRect">
+            <a:avLst>
+              <a:gd name="adj" fmla="val 28000"/>
+            </a:avLst>
+          </a:prstGeom>
+          <a:solidFill>
+            <a:srgbClr val="C8820E"/>
+          </a:solidFill>
+          <a:ln>
+            <a:noFill/>
+          </a:ln>
+          <a:effectLst/>
+        </p:spPr>
+        <p:style>
+          <a:lnRef idx="1">
+            <a:schemeClr val="accent1"/>
+          </a:lnRef>
+          <a:fillRef idx="3">
+            <a:schemeClr val="accent1"/>
+          </a:fillRef>
+          <a:effectRef idx="2">
+            <a:schemeClr val="accent1"/>
+          </a:effectRef>
+          <a:fontRef idx="minor">
+            <a:schemeClr val="lt1"/>
+          </a:fontRef>
+        </p:style>
+        <p:txBody>
+          <a:bodyPr rtlCol="0" anchor="ctr" wrap="none" lIns="0" rIns="0" tIns="0" bIns="0"/>
+          <a:lstStyle/>
+          <a:p>
+            <a:pPr algn="ctr"/>
+            <a:r>
+              <a:rPr sz="2600" b="1">
+                <a:solidFill>
+                  <a:srgbClr val="1F4E79"/>
+                </a:solidFill>
+                <a:latin typeface="Calibri"/>
+              </a:rPr>
+              <a:t>1</a:t>
+            </a:r>
+          </a:p>
+        </p:txBody>
+      </p:sp>
+      <p:sp>
+        <p:nvSpPr>
+          <p:cNvPr id="7" name="Rectangle 6"/>
+          <p:cNvSpPr/>
+          <p:nvPr/>
+        </p:nvSpPr>
+        <p:spPr>
+          <a:xfrm>
+            <a:off x="457200" y="6510528"/>
+            <a:ext cx="11277295" cy="9525"/>
+          </a:xfrm>
+          <a:prstGeom prst="rect">
+            <a:avLst/>
+          </a:prstGeom>
+          <a:solidFill>
+            <a:srgbClr val="DDDDDD"/>
+          </a:solidFill>
+          <a:ln>
+            <a:noFill/>
+          </a:ln>
+          <a:effectLst/>
+        </p:spPr>
+        <p:style>
+          <a:lnRef idx="1">
+            <a:schemeClr val="accent1"/>
+          </a:lnRef>
+          <a:fillRef idx="3">
+            <a:schemeClr val="accent1"/>
+          </a:fillRef>
+          <a:effectRef idx="2">
+            <a:schemeClr val="accent1"/>
+          </a:effectRef>
+          <a:fontRef idx="minor">
+            <a:schemeClr val="lt1"/>
+          </a:fontRef>
+        </p:style>
+        <p:txBody>
+          <a:bodyPr rtlCol="0" anchor="ctr"/>
+          <a:lstStyle/>
+          <a:p>
+            <a:pPr algn="ctr"/>
+          </a:p>
+        </p:txBody>
+      </p:sp>
+      <p:sp>
+        <p:nvSpPr>
+          <p:cNvPr id="8" name="TextBox 7"/>
+          <p:cNvSpPr txBox="1"/>
+          <p:nvPr/>
+        </p:nvSpPr>
+        <p:spPr>
+          <a:xfrm>
+            <a:off x="457200" y="6565392"/>
+            <a:ext cx="5486400" cy="274320"/>
+          </a:xfrm>
+          <a:prstGeom prst="rect">
+            <a:avLst/>
+          </a:prstGeom>
+          <a:noFill/>
+        </p:spPr>
+        <p:txBody>
+          <a:bodyPr wrap="none" lIns="0" tIns="0" bIns="0">
+            <a:spAutoFit/>
+          </a:bodyPr>
+          <a:lstStyle/>
+          <a:p>
+            <a:r>
+              <a:rPr sz="900">
+                <a:solidFill>
+                  <a:srgbClr val="9A9A9A"/>
+                </a:solidFill>
+              </a:rPr>
+              <a:t>Pyro Pete: Emergency Evacuation  ·  CT3201 Mini Project</a:t>
+            </a:r>
+          </a:p>
+        </p:txBody>
+      </p:sp>
+      <p:sp>
+        <p:nvSpPr>
+          <p:cNvPr id="9" name="TextBox 8"/>
+          <p:cNvSpPr txBox="1"/>
+          <p:nvPr/>
+        </p:nvSpPr>
+        <p:spPr>
+          <a:xfrm>
+            <a:off x="10820095" y="6565392"/>
+            <a:ext cx="914400" cy="274320"/>
+          </a:xfrm>
+          <a:prstGeom prst="rect">
+            <a:avLst/>
+          </a:prstGeom>
+          <a:noFill/>
+        </p:spPr>
+        <p:txBody>
+          <a:bodyPr wrap="none" lIns="0" tIns="0" bIns="0">
+            <a:spAutoFit/>
+          </a:bodyPr>
+          <a:lstStyle/>
+          <a:p>
+            <a:pPr algn="r"/>
+            <a:r>
+              <a:rPr sz="900">
+                <a:solidFill>
+                  <a:srgbClr val="9A9A9A"/>
+                </a:solidFill>
+              </a:rPr>
+              <a:t>2</a:t>
             </a:r>
           </a:p>
         </p:txBody>
@@ -3771,14 +5113,58 @@
       <p:grpSpPr/>
       <p:sp>
         <p:nvSpPr>
+          <p:cNvPr id="5" name="Rectangle 4"/>
+          <p:cNvSpPr/>
+          <p:nvPr/>
+        </p:nvSpPr>
+        <p:spPr>
+          <a:xfrm>
+            <a:off x="0" y="0"/>
+            <a:ext cx="12191695" cy="1051560"/>
+          </a:xfrm>
+          <a:prstGeom prst="rect">
+            <a:avLst/>
+          </a:prstGeom>
+          <a:solidFill>
+            <a:srgbClr val="1F4E79"/>
+          </a:solidFill>
+          <a:ln>
+            <a:noFill/>
+          </a:ln>
+          <a:effectLst/>
+        </p:spPr>
+        <p:style>
+          <a:lnRef idx="1">
+            <a:schemeClr val="accent1"/>
+          </a:lnRef>
+          <a:fillRef idx="3">
+            <a:schemeClr val="accent1"/>
+          </a:fillRef>
+          <a:effectRef idx="2">
+            <a:schemeClr val="accent1"/>
+          </a:effectRef>
+          <a:fontRef idx="minor">
+            <a:schemeClr val="lt1"/>
+          </a:fontRef>
+        </p:style>
+        <p:txBody>
+          <a:bodyPr rtlCol="0" anchor="ctr"/>
+          <a:lstStyle/>
+          <a:p>
+            <a:pPr algn="ctr"/>
+          </a:p>
+        </p:txBody>
+      </p:sp>
+      <p:sp>
+        <p:nvSpPr>
           <p:cNvPr id="2" name="TextBox 1"/>
           <p:cNvSpPr txBox="1"/>
           <p:nvPr/>
         </p:nvSpPr>
         <p:spPr>
           <a:xfrm>
-            <a:off x="548640" y="320040"/>
-            <a:ext cx="11064240" cy="822960"/>
+            <a:off x="1234440" y="91440"/>
+            <a:ext cx="10728655" cy="960120"/>
           </a:xfrm>
           <a:prstGeom prst="rect">
             <a:avLst/>
@@ -3786,15 +5172,15 @@
           <a:noFill/>
         </p:spPr>
         <p:txBody>
-          <a:bodyPr wrap="none">
+          <a:bodyPr wrap="none" anchor="ctr">
             <a:spAutoFit/>
           </a:bodyPr>
           <a:lstStyle/>
           <a:p>
             <a:r>
-              <a:rPr sz="3000" b="1">
-                <a:solidFill>
-                  <a:srgbClr val="1F4E79"/>
+              <a:rPr sz="2600" b="1">
+                <a:solidFill>
+                  <a:srgbClr val="FFFFFF"/>
                 </a:solidFill>
               </a:rPr>
               <a:t>2 - Initial Human Solution</a:t>
@@ -3802,9 +5188,9 @@
           </a:p>
           <a:p>
             <a:r>
-              <a:rPr sz="1300">
-                <a:solidFill>
-                  <a:srgbClr val="666666"/>
+              <a:rPr sz="1200">
+                <a:solidFill>
+                  <a:srgbClr val="C9D7E4"/>
                 </a:solidFill>
               </a:rPr>
               <a:t>Phase 1, Stage 2 - the AI formulation</a:t>
@@ -4101,17 +5487,246 @@
           <a:lstStyle/>
           <a:p>
             <a:pPr>
+              <a:lnSpc>
+                <a:spcPct val="108000"/>
+              </a:lnSpc>
               <a:spcAft>
-                <a:spcPts val="600"/>
+                <a:spcPts val="1200"/>
               </a:spcAft>
             </a:pPr>
             <a:r>
+              <a:rPr b="1" sz="1600">
+                <a:solidFill>
+                  <a:srgbClr val="C8820E"/>
+                </a:solidFill>
+              </a:rPr>
+              <a:t>▸  </a:t>
+            </a:r>
+            <a:r>
+              <a:rPr b="1" sz="1600">
+                <a:solidFill>
+                  <a:srgbClr val="1F4E79"/>
+                </a:solidFill>
+              </a:rPr>
+              <a:t>Initial plan: </a:t>
+            </a:r>
+            <a:r>
               <a:rPr sz="1600">
                 <a:solidFill>
-                  <a:srgbClr val="222222"/>
-                </a:solidFill>
-              </a:rPr>
-              <a:t>Initial plan: BFS to the nearest occupant, escort out, repeat; treat fire as a wall — worked out once AI-assisted implementation started</a:t>
+                  <a:srgbClr val="2B2B2B"/>
+                </a:solidFill>
+              </a:rPr>
+              <a:t>BFS to the nearest occupant, escort out, repeat; treat fire as a wall — worked out once AI-assisted implementation started</a:t>
+            </a:r>
+          </a:p>
+        </p:txBody>
+      </p:sp>
+      <p:sp>
+        <p:nvSpPr>
+          <p:cNvPr id="6" name="Rectangle 5"/>
+          <p:cNvSpPr/>
+          <p:nvPr/>
+        </p:nvSpPr>
+        <p:spPr>
+          <a:xfrm>
+            <a:off x="0" y="1051560"/>
+            <a:ext cx="12191695" cy="38100"/>
+          </a:xfrm>
+          <a:prstGeom prst="rect">
+            <a:avLst/>
+          </a:prstGeom>
+          <a:solidFill>
+            <a:srgbClr val="E0A23D"/>
+          </a:solidFill>
+          <a:ln>
+            <a:noFill/>
+          </a:ln>
+          <a:effectLst/>
+        </p:spPr>
+        <p:style>
+          <a:lnRef idx="1">
+            <a:schemeClr val="accent1"/>
+          </a:lnRef>
+          <a:fillRef idx="3">
+            <a:schemeClr val="accent1"/>
+          </a:fillRef>
+          <a:effectRef idx="2">
+            <a:schemeClr val="accent1"/>
+          </a:effectRef>
+          <a:fontRef idx="minor">
+            <a:schemeClr val="lt1"/>
+          </a:fontRef>
+        </p:style>
+        <p:txBody>
+          <a:bodyPr rtlCol="0" anchor="ctr"/>
+          <a:lstStyle/>
+          <a:p>
+            <a:pPr algn="ctr"/>
+          </a:p>
+        </p:txBody>
+      </p:sp>
+      <p:sp>
+        <p:nvSpPr>
+          <p:cNvPr id="7" name="Rounded Rectangle 6"/>
+          <p:cNvSpPr/>
+          <p:nvPr/>
+        </p:nvSpPr>
+        <p:spPr>
+          <a:xfrm>
+            <a:off x="457200" y="242316"/>
+            <a:ext cx="566928" cy="566928"/>
+          </a:xfrm>
+          <a:prstGeom prst="roundRect">
+            <a:avLst>
+              <a:gd name="adj" fmla="val 28000"/>
+            </a:avLst>
+          </a:prstGeom>
+          <a:solidFill>
+            <a:srgbClr val="C8820E"/>
+          </a:solidFill>
+          <a:ln>
+            <a:noFill/>
+          </a:ln>
+          <a:effectLst/>
+        </p:spPr>
+        <p:style>
+          <a:lnRef idx="1">
+            <a:schemeClr val="accent1"/>
+          </a:lnRef>
+          <a:fillRef idx="3">
+            <a:schemeClr val="accent1"/>
+          </a:fillRef>
+          <a:effectRef idx="2">
+            <a:schemeClr val="accent1"/>
+          </a:effectRef>
+          <a:fontRef idx="minor">
+            <a:schemeClr val="lt1"/>
+          </a:fontRef>
+        </p:style>
+        <p:txBody>
+          <a:bodyPr rtlCol="0" anchor="ctr" wrap="none" lIns="0" rIns="0" tIns="0" bIns="0"/>
+          <a:lstStyle/>
+          <a:p>
+            <a:pPr algn="ctr"/>
+            <a:r>
+              <a:rPr sz="2600" b="1">
+                <a:solidFill>
+                  <a:srgbClr val="1F4E79"/>
+                </a:solidFill>
+                <a:latin typeface="Calibri"/>
+              </a:rPr>
+              <a:t>2</a:t>
+            </a:r>
+          </a:p>
+        </p:txBody>
+      </p:sp>
+      <p:sp>
+        <p:nvSpPr>
+          <p:cNvPr id="8" name="Rectangle 7"/>
+          <p:cNvSpPr/>
+          <p:nvPr/>
+        </p:nvSpPr>
+        <p:spPr>
+          <a:xfrm>
+            <a:off x="457200" y="6510528"/>
+            <a:ext cx="11277295" cy="9525"/>
+          </a:xfrm>
+          <a:prstGeom prst="rect">
+            <a:avLst/>
+          </a:prstGeom>
+          <a:solidFill>
+            <a:srgbClr val="DDDDDD"/>
+          </a:solidFill>
+          <a:ln>
+            <a:noFill/>
+          </a:ln>
+          <a:effectLst/>
+        </p:spPr>
+        <p:style>
+          <a:lnRef idx="1">
+            <a:schemeClr val="accent1"/>
+          </a:lnRef>
+          <a:fillRef idx="3">
+            <a:schemeClr val="accent1"/>
+          </a:fillRef>
+          <a:effectRef idx="2">
+            <a:schemeClr val="accent1"/>
+          </a:effectRef>
+          <a:fontRef idx="minor">
+            <a:schemeClr val="lt1"/>
+          </a:fontRef>
+        </p:style>
+        <p:txBody>
+          <a:bodyPr rtlCol="0" anchor="ctr"/>
+          <a:lstStyle/>
+          <a:p>
+            <a:pPr algn="ctr"/>
+          </a:p>
+        </p:txBody>
+      </p:sp>
+      <p:sp>
+        <p:nvSpPr>
+          <p:cNvPr id="9" name="TextBox 8"/>
+          <p:cNvSpPr txBox="1"/>
+          <p:nvPr/>
+        </p:nvSpPr>
+        <p:spPr>
+          <a:xfrm>
+            <a:off x="457200" y="6565392"/>
+            <a:ext cx="5486400" cy="274320"/>
+          </a:xfrm>
+          <a:prstGeom prst="rect">
+            <a:avLst/>
+          </a:prstGeom>
+          <a:noFill/>
+        </p:spPr>
+        <p:txBody>
+          <a:bodyPr wrap="none" lIns="0" tIns="0" bIns="0">
+            <a:spAutoFit/>
+          </a:bodyPr>
+          <a:lstStyle/>
+          <a:p>
+            <a:r>
+              <a:rPr sz="900">
+                <a:solidFill>
+                  <a:srgbClr val="9A9A9A"/>
+                </a:solidFill>
+              </a:rPr>
+              <a:t>Pyro Pete: Emergency Evacuation  ·  CT3201 Mini Project</a:t>
+            </a:r>
+          </a:p>
+        </p:txBody>
+      </p:sp>
+      <p:sp>
+        <p:nvSpPr>
+          <p:cNvPr id="10" name="TextBox 9"/>
+          <p:cNvSpPr txBox="1"/>
+          <p:nvPr/>
+        </p:nvSpPr>
+        <p:spPr>
+          <a:xfrm>
+            <a:off x="10820095" y="6565392"/>
+            <a:ext cx="914400" cy="274320"/>
+          </a:xfrm>
+          <a:prstGeom prst="rect">
+            <a:avLst/>
+          </a:prstGeom>
+          <a:noFill/>
+        </p:spPr>
+        <p:txBody>
+          <a:bodyPr wrap="none" lIns="0" tIns="0" bIns="0">
+            <a:spAutoFit/>
+          </a:bodyPr>
+          <a:lstStyle/>
+          <a:p>
+            <a:pPr algn="r"/>
+            <a:r>
+              <a:rPr sz="900">
+                <a:solidFill>
+                  <a:srgbClr val="9A9A9A"/>
+                </a:solidFill>
+              </a:rPr>
+              <a:t>3</a:t>
             </a:r>
           </a:p>
         </p:txBody>
@@ -4136,14 +5751,58 @@
       <p:grpSpPr/>
       <p:sp>
         <p:nvSpPr>
+          <p:cNvPr id="4" name="Rectangle 3"/>
+          <p:cNvSpPr/>
+          <p:nvPr/>
+        </p:nvSpPr>
+        <p:spPr>
+          <a:xfrm>
+            <a:off x="0" y="0"/>
+            <a:ext cx="12191695" cy="1051560"/>
+          </a:xfrm>
+          <a:prstGeom prst="rect">
+            <a:avLst/>
+          </a:prstGeom>
+          <a:solidFill>
+            <a:srgbClr val="1F4E79"/>
+          </a:solidFill>
+          <a:ln>
+            <a:noFill/>
+          </a:ln>
+          <a:effectLst/>
+        </p:spPr>
+        <p:style>
+          <a:lnRef idx="1">
+            <a:schemeClr val="accent1"/>
+          </a:lnRef>
+          <a:fillRef idx="3">
+            <a:schemeClr val="accent1"/>
+          </a:fillRef>
+          <a:effectRef idx="2">
+            <a:schemeClr val="accent1"/>
+          </a:effectRef>
+          <a:fontRef idx="minor">
+            <a:schemeClr val="lt1"/>
+          </a:fontRef>
+        </p:style>
+        <p:txBody>
+          <a:bodyPr rtlCol="0" anchor="ctr"/>
+          <a:lstStyle/>
+          <a:p>
+            <a:pPr algn="ctr"/>
+          </a:p>
+        </p:txBody>
+      </p:sp>
+      <p:sp>
+        <p:nvSpPr>
           <p:cNvPr id="2" name="TextBox 1"/>
           <p:cNvSpPr txBox="1"/>
           <p:nvPr/>
         </p:nvSpPr>
         <p:spPr>
           <a:xfrm>
-            <a:off x="548640" y="320040"/>
-            <a:ext cx="11064240" cy="822960"/>
+            <a:off x="1234440" y="91440"/>
+            <a:ext cx="10728655" cy="960120"/>
           </a:xfrm>
           <a:prstGeom prst="rect">
             <a:avLst/>
@@ -4151,15 +5810,15 @@
           <a:noFill/>
         </p:spPr>
         <p:txBody>
-          <a:bodyPr wrap="none">
+          <a:bodyPr wrap="none" anchor="ctr">
             <a:spAutoFit/>
           </a:bodyPr>
           <a:lstStyle/>
           <a:p>
             <a:r>
-              <a:rPr sz="3000" b="1">
-                <a:solidFill>
-                  <a:srgbClr val="1F4E79"/>
+              <a:rPr sz="2600" b="1">
+                <a:solidFill>
+                  <a:srgbClr val="FFFFFF"/>
                 </a:solidFill>
               </a:rPr>
               <a:t>3 - AI-Assisted Exploration</a:t>
@@ -4167,9 +5826,9 @@
           </a:p>
           <a:p>
             <a:r>
-              <a:rPr sz="1300">
-                <a:solidFill>
-                  <a:srgbClr val="666666"/>
+              <a:rPr sz="1200">
+                <a:solidFill>
+                  <a:srgbClr val="C9D7E4"/>
                 </a:solidFill>
               </a:rPr>
               <a:t>Phase 2, Stage 3 - used AI to challenge, not to design</a:t>
@@ -4433,6 +6092,216 @@
           </a:graphicData>
         </a:graphic>
       </p:graphicFrame>
+      <p:sp>
+        <p:nvSpPr>
+          <p:cNvPr id="5" name="Rectangle 4"/>
+          <p:cNvSpPr/>
+          <p:nvPr/>
+        </p:nvSpPr>
+        <p:spPr>
+          <a:xfrm>
+            <a:off x="0" y="1051560"/>
+            <a:ext cx="12191695" cy="38100"/>
+          </a:xfrm>
+          <a:prstGeom prst="rect">
+            <a:avLst/>
+          </a:prstGeom>
+          <a:solidFill>
+            <a:srgbClr val="E0A23D"/>
+          </a:solidFill>
+          <a:ln>
+            <a:noFill/>
+          </a:ln>
+          <a:effectLst/>
+        </p:spPr>
+        <p:style>
+          <a:lnRef idx="1">
+            <a:schemeClr val="accent1"/>
+          </a:lnRef>
+          <a:fillRef idx="3">
+            <a:schemeClr val="accent1"/>
+          </a:fillRef>
+          <a:effectRef idx="2">
+            <a:schemeClr val="accent1"/>
+          </a:effectRef>
+          <a:fontRef idx="minor">
+            <a:schemeClr val="lt1"/>
+          </a:fontRef>
+        </p:style>
+        <p:txBody>
+          <a:bodyPr rtlCol="0" anchor="ctr"/>
+          <a:lstStyle/>
+          <a:p>
+            <a:pPr algn="ctr"/>
+          </a:p>
+        </p:txBody>
+      </p:sp>
+      <p:sp>
+        <p:nvSpPr>
+          <p:cNvPr id="6" name="Rounded Rectangle 5"/>
+          <p:cNvSpPr/>
+          <p:nvPr/>
+        </p:nvSpPr>
+        <p:spPr>
+          <a:xfrm>
+            <a:off x="457200" y="242316"/>
+            <a:ext cx="566928" cy="566928"/>
+          </a:xfrm>
+          <a:prstGeom prst="roundRect">
+            <a:avLst>
+              <a:gd name="adj" fmla="val 28000"/>
+            </a:avLst>
+          </a:prstGeom>
+          <a:solidFill>
+            <a:srgbClr val="C8820E"/>
+          </a:solidFill>
+          <a:ln>
+            <a:noFill/>
+          </a:ln>
+          <a:effectLst/>
+        </p:spPr>
+        <p:style>
+          <a:lnRef idx="1">
+            <a:schemeClr val="accent1"/>
+          </a:lnRef>
+          <a:fillRef idx="3">
+            <a:schemeClr val="accent1"/>
+          </a:fillRef>
+          <a:effectRef idx="2">
+            <a:schemeClr val="accent1"/>
+          </a:effectRef>
+          <a:fontRef idx="minor">
+            <a:schemeClr val="lt1"/>
+          </a:fontRef>
+        </p:style>
+        <p:txBody>
+          <a:bodyPr rtlCol="0" anchor="ctr" wrap="none" lIns="0" rIns="0" tIns="0" bIns="0"/>
+          <a:lstStyle/>
+          <a:p>
+            <a:pPr algn="ctr"/>
+            <a:r>
+              <a:rPr sz="2600" b="1">
+                <a:solidFill>
+                  <a:srgbClr val="1F4E79"/>
+                </a:solidFill>
+                <a:latin typeface="Calibri"/>
+              </a:rPr>
+              <a:t>3</a:t>
+            </a:r>
+          </a:p>
+        </p:txBody>
+      </p:sp>
+      <p:sp>
+        <p:nvSpPr>
+          <p:cNvPr id="7" name="Rectangle 6"/>
+          <p:cNvSpPr/>
+          <p:nvPr/>
+        </p:nvSpPr>
+        <p:spPr>
+          <a:xfrm>
+            <a:off x="457200" y="6510528"/>
+            <a:ext cx="11277295" cy="9525"/>
+          </a:xfrm>
+          <a:prstGeom prst="rect">
+            <a:avLst/>
+          </a:prstGeom>
+          <a:solidFill>
+            <a:srgbClr val="DDDDDD"/>
+          </a:solidFill>
+          <a:ln>
+            <a:noFill/>
+          </a:ln>
+          <a:effectLst/>
+        </p:spPr>
+        <p:style>
+          <a:lnRef idx="1">
+            <a:schemeClr val="accent1"/>
+          </a:lnRef>
+          <a:fillRef idx="3">
+            <a:schemeClr val="accent1"/>
+          </a:fillRef>
+          <a:effectRef idx="2">
+            <a:schemeClr val="accent1"/>
+          </a:effectRef>
+          <a:fontRef idx="minor">
+            <a:schemeClr val="lt1"/>
+          </a:fontRef>
+        </p:style>
+        <p:txBody>
+          <a:bodyPr rtlCol="0" anchor="ctr"/>
+          <a:lstStyle/>
+          <a:p>
+            <a:pPr algn="ctr"/>
+          </a:p>
+        </p:txBody>
+      </p:sp>
+      <p:sp>
+        <p:nvSpPr>
+          <p:cNvPr id="8" name="TextBox 7"/>
+          <p:cNvSpPr txBox="1"/>
+          <p:nvPr/>
+        </p:nvSpPr>
+        <p:spPr>
+          <a:xfrm>
+            <a:off x="457200" y="6565392"/>
+            <a:ext cx="5486400" cy="274320"/>
+          </a:xfrm>
+          <a:prstGeom prst="rect">
+            <a:avLst/>
+          </a:prstGeom>
+          <a:noFill/>
+        </p:spPr>
+        <p:txBody>
+          <a:bodyPr wrap="none" lIns="0" tIns="0" bIns="0">
+            <a:spAutoFit/>
+          </a:bodyPr>
+          <a:lstStyle/>
+          <a:p>
+            <a:r>
+              <a:rPr sz="900">
+                <a:solidFill>
+                  <a:srgbClr val="9A9A9A"/>
+                </a:solidFill>
+              </a:rPr>
+              <a:t>Pyro Pete: Emergency Evacuation  ·  CT3201 Mini Project</a:t>
+            </a:r>
+          </a:p>
+        </p:txBody>
+      </p:sp>
+      <p:sp>
+        <p:nvSpPr>
+          <p:cNvPr id="9" name="TextBox 8"/>
+          <p:cNvSpPr txBox="1"/>
+          <p:nvPr/>
+        </p:nvSpPr>
+        <p:spPr>
+          <a:xfrm>
+            <a:off x="10820095" y="6565392"/>
+            <a:ext cx="914400" cy="274320"/>
+          </a:xfrm>
+          <a:prstGeom prst="rect">
+            <a:avLst/>
+          </a:prstGeom>
+          <a:noFill/>
+        </p:spPr>
+        <p:txBody>
+          <a:bodyPr wrap="none" lIns="0" tIns="0" bIns="0">
+            <a:spAutoFit/>
+          </a:bodyPr>
+          <a:lstStyle/>
+          <a:p>
+            <a:pPr algn="r"/>
+            <a:r>
+              <a:rPr sz="900">
+                <a:solidFill>
+                  <a:srgbClr val="9A9A9A"/>
+                </a:solidFill>
+              </a:rPr>
+              <a:t>4</a:t>
+            </a:r>
+          </a:p>
+        </p:txBody>
+      </p:sp>
     </p:spTree>
   </p:cSld>
   <p:clrMapOvr>
@@ -4453,14 +6322,58 @@
       <p:grpSpPr/>
       <p:sp>
         <p:nvSpPr>
+          <p:cNvPr id="4" name="Rectangle 3"/>
+          <p:cNvSpPr/>
+          <p:nvPr/>
+        </p:nvSpPr>
+        <p:spPr>
+          <a:xfrm>
+            <a:off x="0" y="0"/>
+            <a:ext cx="12191695" cy="1051560"/>
+          </a:xfrm>
+          <a:prstGeom prst="rect">
+            <a:avLst/>
+          </a:prstGeom>
+          <a:solidFill>
+            <a:srgbClr val="1F4E79"/>
+          </a:solidFill>
+          <a:ln>
+            <a:noFill/>
+          </a:ln>
+          <a:effectLst/>
+        </p:spPr>
+        <p:style>
+          <a:lnRef idx="1">
+            <a:schemeClr val="accent1"/>
+          </a:lnRef>
+          <a:fillRef idx="3">
+            <a:schemeClr val="accent1"/>
+          </a:fillRef>
+          <a:effectRef idx="2">
+            <a:schemeClr val="accent1"/>
+          </a:effectRef>
+          <a:fontRef idx="minor">
+            <a:schemeClr val="lt1"/>
+          </a:fontRef>
+        </p:style>
+        <p:txBody>
+          <a:bodyPr rtlCol="0" anchor="ctr"/>
+          <a:lstStyle/>
+          <a:p>
+            <a:pPr algn="ctr"/>
+          </a:p>
+        </p:txBody>
+      </p:sp>
+      <p:sp>
+        <p:nvSpPr>
           <p:cNvPr id="2" name="TextBox 1"/>
           <p:cNvSpPr txBox="1"/>
           <p:nvPr/>
         </p:nvSpPr>
         <p:spPr>
           <a:xfrm>
-            <a:off x="548640" y="320040"/>
-            <a:ext cx="11064240" cy="822960"/>
+            <a:off x="1234440" y="91440"/>
+            <a:ext cx="10728655" cy="960120"/>
           </a:xfrm>
           <a:prstGeom prst="rect">
             <a:avLst/>
@@ -4468,15 +6381,15 @@
           <a:noFill/>
         </p:spPr>
         <p:txBody>
-          <a:bodyPr wrap="none">
+          <a:bodyPr wrap="none" anchor="ctr">
             <a:spAutoFit/>
           </a:bodyPr>
           <a:lstStyle/>
           <a:p>
             <a:r>
-              <a:rPr sz="3000" b="1">
-                <a:solidFill>
-                  <a:srgbClr val="1F4E79"/>
+              <a:rPr sz="2600" b="1">
+                <a:solidFill>
+                  <a:srgbClr val="FFFFFF"/>
                 </a:solidFill>
               </a:rPr>
               <a:t>4 - AI Critique and Student Decisions</a:t>
@@ -4484,9 +6397,9 @@
           </a:p>
           <a:p>
             <a:r>
-              <a:rPr sz="1300">
-                <a:solidFill>
-                  <a:srgbClr val="666666"/>
+              <a:rPr sz="1200">
+                <a:solidFill>
+                  <a:srgbClr val="C9D7E4"/>
                 </a:solidFill>
               </a:rPr>
               <a:t>Phase 3 &amp; 4 - Accept / Modify / Reject, each verified</a:t>
@@ -4589,12 +6502,20 @@
                     <a:lstStyle/>
                     <a:p>
                       <a:r>
-                        <a:rPr sz="1000"/>
+                        <a:rPr sz="1000" b="1">
+                          <a:solidFill>
+                            <a:srgbClr val="A32B1F"/>
+                          </a:solidFill>
+                        </a:rPr>
                         <a:t>Use Greedy Best-First (fewer expansions)</a:t>
                       </a:r>
                     </a:p>
                   </a:txBody>
-                  <a:tcPr/>
+                  <a:tcPr>
+                    <a:solidFill>
+                      <a:srgbClr val="FBE7E4"/>
+                    </a:solidFill>
+                  </a:tcPr>
                 </a:tc>
                 <a:tc>
                   <a:txBody>
@@ -4602,12 +6523,20 @@
                     <a:lstStyle/>
                     <a:p>
                       <a:r>
-                        <a:rPr sz="1000"/>
+                        <a:rPr sz="1000" b="1">
+                          <a:solidFill>
+                            <a:srgbClr val="A32B1F"/>
+                          </a:solidFill>
+                        </a:rPr>
                         <a:t>Reject</a:t>
                       </a:r>
                     </a:p>
                   </a:txBody>
-                  <a:tcPr/>
+                  <a:tcPr>
+                    <a:solidFill>
+                      <a:srgbClr val="FBE7E4"/>
+                    </a:solidFill>
+                  </a:tcPr>
                 </a:tc>
                 <a:tc>
                   <a:txBody>
@@ -4615,12 +6544,20 @@
                     <a:lstStyle/>
                     <a:p>
                       <a:r>
-                        <a:rPr sz="1000"/>
+                        <a:rPr sz="1000" b="1">
+                          <a:solidFill>
+                            <a:srgbClr val="A32B1F"/>
+                          </a:solidFill>
+                        </a:rPr>
                         <a:t>not cost-optimal on a weighted map; comparison harness shows BFS routes through 9 fire tiles</a:t>
                       </a:r>
                     </a:p>
                   </a:txBody>
-                  <a:tcPr/>
+                  <a:tcPr>
+                    <a:solidFill>
+                      <a:srgbClr val="FBE7E4"/>
+                    </a:solidFill>
+                  </a:tcPr>
                 </a:tc>
               </a:tr>
               <a:tr h="365760">
@@ -4630,12 +6567,20 @@
                     <a:lstStyle/>
                     <a:p>
                       <a:r>
-                        <a:rPr sz="1000"/>
+                        <a:rPr sz="1000" b="1">
+                          <a:solidFill>
+                            <a:srgbClr val="1E6B3D"/>
+                          </a:solidFill>
+                        </a:rPr>
                         <a:t>Use A* over the hazard cost</a:t>
                       </a:r>
                     </a:p>
                   </a:txBody>
-                  <a:tcPr/>
+                  <a:tcPr>
+                    <a:solidFill>
+                      <a:srgbClr val="E4F3E8"/>
+                    </a:solidFill>
+                  </a:tcPr>
                 </a:tc>
                 <a:tc>
                   <a:txBody>
@@ -4643,12 +6588,20 @@
                     <a:lstStyle/>
                     <a:p>
                       <a:r>
-                        <a:rPr sz="1000"/>
+                        <a:rPr sz="1000" b="1">
+                          <a:solidFill>
+                            <a:srgbClr val="1E6B3D"/>
+                          </a:solidFill>
+                        </a:rPr>
                         <a:t>Accept</a:t>
                       </a:r>
                     </a:p>
                   </a:txBody>
-                  <a:tcPr/>
+                  <a:tcPr>
+                    <a:solidFill>
+                      <a:srgbClr val="E4F3E8"/>
+                    </a:solidFill>
+                  </a:tcPr>
                 </a:tc>
                 <a:tc>
                   <a:txBody>
@@ -4656,12 +6609,20 @@
                     <a:lstStyle/>
                     <a:p>
                       <a:r>
-                        <a:rPr sz="1000"/>
+                        <a:rPr sz="1000" b="1">
+                          <a:solidFill>
+                            <a:srgbClr val="1E6B3D"/>
+                          </a:solidFill>
+                        </a:rPr>
                         <a:t>ties Dijkstra for optimality, far fewer expansions; search theory + harness</a:t>
                       </a:r>
                     </a:p>
                   </a:txBody>
-                  <a:tcPr/>
+                  <a:tcPr>
+                    <a:solidFill>
+                      <a:srgbClr val="E4F3E8"/>
+                    </a:solidFill>
+                  </a:tcPr>
                 </a:tc>
               </a:tr>
               <a:tr h="365760">
@@ -4671,12 +6632,20 @@
                     <a:lstStyle/>
                     <a:p>
                       <a:r>
-                        <a:rPr sz="1000"/>
+                        <a:rPr sz="1000" b="1">
+                          <a:solidFill>
+                            <a:srgbClr val="1E6B3D"/>
+                          </a:solidFill>
+                        </a:rPr>
                         <a:t>Keep BFS for unweighted jobs</a:t>
                       </a:r>
                     </a:p>
                   </a:txBody>
-                  <a:tcPr/>
+                  <a:tcPr>
+                    <a:solidFill>
+                      <a:srgbClr val="E4F3E8"/>
+                    </a:solidFill>
+                  </a:tcPr>
                 </a:tc>
                 <a:tc>
                   <a:txBody>
@@ -4684,12 +6653,20 @@
                     <a:lstStyle/>
                     <a:p>
                       <a:r>
-                        <a:rPr sz="1000"/>
+                        <a:rPr sz="1000" b="1">
+                          <a:solidFill>
+                            <a:srgbClr val="1E6B3D"/>
+                          </a:solidFill>
+                        </a:rPr>
                         <a:t>Accept</a:t>
                       </a:r>
                     </a:p>
                   </a:txBody>
-                  <a:tcPr/>
+                  <a:tcPr>
+                    <a:solidFill>
+                      <a:srgbClr val="E4F3E8"/>
+                    </a:solidFill>
+                  </a:tcPr>
                 </a:tc>
                 <a:tc>
                   <a:txBody>
@@ -4697,12 +6674,20 @@
                     <a:lstStyle/>
                     <a:p>
                       <a:r>
-                        <a:rPr sz="1000"/>
+                        <a:rPr sz="1000" b="1">
+                          <a:solidFill>
+                            <a:srgbClr val="1E6B3D"/>
+                          </a:solidFill>
+                        </a:rPr>
                         <a:t>fire-ring counting &amp; connectivity have no weights; unit tests</a:t>
                       </a:r>
                     </a:p>
                   </a:txBody>
-                  <a:tcPr/>
+                  <a:tcPr>
+                    <a:solidFill>
+                      <a:srgbClr val="E4F3E8"/>
+                    </a:solidFill>
+                  </a:tcPr>
                 </a:tc>
               </a:tr>
               <a:tr h="365760">
@@ -4712,12 +6697,20 @@
                     <a:lstStyle/>
                     <a:p>
                       <a:r>
-                        <a:rPr sz="1000"/>
+                        <a:rPr sz="1000" b="1">
+                          <a:solidFill>
+                            <a:srgbClr val="A32B1F"/>
+                          </a:solidFill>
+                        </a:rPr>
                         <a:t>Generate NPC walk as AI video</a:t>
                       </a:r>
                     </a:p>
                   </a:txBody>
-                  <a:tcPr/>
+                  <a:tcPr>
+                    <a:solidFill>
+                      <a:srgbClr val="FBE7E4"/>
+                    </a:solidFill>
+                  </a:tcPr>
                 </a:tc>
                 <a:tc>
                   <a:txBody>
@@ -4725,12 +6718,20 @@
                     <a:lstStyle/>
                     <a:p>
                       <a:r>
-                        <a:rPr sz="1000"/>
+                        <a:rPr sz="1000" b="1">
+                          <a:solidFill>
+                            <a:srgbClr val="A32B1F"/>
+                          </a:solidFill>
+                        </a:rPr>
                         <a:t>Reject</a:t>
                       </a:r>
                     </a:p>
                   </a:txBody>
-                  <a:tcPr/>
+                  <a:tcPr>
+                    <a:solidFill>
+                      <a:srgbClr val="FBE7E4"/>
+                    </a:solidFill>
+                  </a:tcPr>
                 </a:tc>
                 <a:tc>
                   <a:txBody>
@@ -4738,12 +6739,20 @@
                     <a:lstStyle/>
                     <a:p>
                       <a:r>
-                        <a:rPr sz="1000"/>
+                        <a:rPr sz="1000" b="1">
+                          <a:solidFill>
+                            <a:srgbClr val="A32B1F"/>
+                          </a:solidFill>
+                        </a:rPr>
                         <a:t>video model only did side-view, unstable; checked vs engine needs (see ai_critique.md)</a:t>
                       </a:r>
                     </a:p>
                   </a:txBody>
-                  <a:tcPr/>
+                  <a:tcPr>
+                    <a:solidFill>
+                      <a:srgbClr val="FBE7E4"/>
+                    </a:solidFill>
+                  </a:tcPr>
                 </a:tc>
               </a:tr>
               <a:tr h="365760">
@@ -4753,12 +6762,20 @@
                     <a:lstStyle/>
                     <a:p>
                       <a:r>
-                        <a:rPr sz="1000"/>
+                        <a:rPr sz="1000" b="1">
+                          <a:solidFill>
+                            <a:srgbClr val="8A5A12"/>
+                          </a:solidFill>
+                        </a:rPr>
                         <a:t>Perfect (single-path) maze</a:t>
                       </a:r>
                     </a:p>
                   </a:txBody>
-                  <a:tcPr/>
+                  <a:tcPr>
+                    <a:solidFill>
+                      <a:srgbClr val="FAF1DF"/>
+                    </a:solidFill>
+                  </a:tcPr>
                 </a:tc>
                 <a:tc>
                   <a:txBody>
@@ -4766,12 +6783,20 @@
                     <a:lstStyle/>
                     <a:p>
                       <a:r>
-                        <a:rPr sz="1000"/>
+                        <a:rPr sz="1000" b="1">
+                          <a:solidFill>
+                            <a:srgbClr val="8A5A12"/>
+                          </a:solidFill>
+                        </a:rPr>
                         <a:t>Modify</a:t>
                       </a:r>
                     </a:p>
                   </a:txBody>
-                  <a:tcPr/>
+                  <a:tcPr>
+                    <a:solidFill>
+                      <a:srgbClr val="FAF1DF"/>
+                    </a:solidFill>
+                  </a:tcPr>
                 </a:tc>
                 <a:tc>
                   <a:txBody>
@@ -4779,12 +6804,20 @@
                     <a:lstStyle/>
                     <a:p>
                       <a:r>
-                        <a:rPr sz="1000"/>
+                        <a:rPr sz="1000" b="1">
+                          <a:solidFill>
+                            <a:srgbClr val="8A5A12"/>
+                          </a:solidFill>
+                        </a:rPr>
                         <a:t>every search returns the same route -&gt; braided the maze so routing has choices</a:t>
                       </a:r>
                     </a:p>
                   </a:txBody>
-                  <a:tcPr/>
+                  <a:tcPr>
+                    <a:solidFill>
+                      <a:srgbClr val="FAF1DF"/>
+                    </a:solidFill>
+                  </a:tcPr>
                 </a:tc>
               </a:tr>
               <a:tr h="365760">
@@ -4794,12 +6827,20 @@
                     <a:lstStyle/>
                     <a:p>
                       <a:r>
-                        <a:rPr sz="1000"/>
+                        <a:rPr sz="1000" b="1">
+                          <a:solidFill>
+                            <a:srgbClr val="A32B1F"/>
+                          </a:solidFill>
+                        </a:rPr>
                         <a:t>Give the agent a full occupant map</a:t>
                       </a:r>
                     </a:p>
                   </a:txBody>
-                  <a:tcPr/>
+                  <a:tcPr>
+                    <a:solidFill>
+                      <a:srgbClr val="FBE7E4"/>
+                    </a:solidFill>
+                  </a:tcPr>
                 </a:tc>
                 <a:tc>
                   <a:txBody>
@@ -4807,12 +6848,20 @@
                     <a:lstStyle/>
                     <a:p>
                       <a:r>
-                        <a:rPr sz="1000"/>
+                        <a:rPr sz="1000" b="1">
+                          <a:solidFill>
+                            <a:srgbClr val="A32B1F"/>
+                          </a:solidFill>
+                        </a:rPr>
                         <a:t>Reject</a:t>
                       </a:r>
                     </a:p>
                   </a:txBody>
-                  <a:tcPr/>
+                  <a:tcPr>
+                    <a:solidFill>
+                      <a:srgbClr val="FBE7E4"/>
+                    </a:solidFill>
+                  </a:tcPr>
                 </a:tc>
                 <a:tc>
                   <a:txBody>
@@ -4820,18 +6869,236 @@
                     <a:lstStyle/>
                     <a:p>
                       <a:r>
-                        <a:rPr sz="1000"/>
+                        <a:rPr sz="1000" b="1">
+                          <a:solidFill>
+                            <a:srgbClr val="A32B1F"/>
+                          </a:solidFill>
+                        </a:rPr>
                         <a:t>contradicts 'you don't know the building'; unbalances the human-vs-AI race</a:t>
                       </a:r>
                     </a:p>
                   </a:txBody>
-                  <a:tcPr/>
+                  <a:tcPr>
+                    <a:solidFill>
+                      <a:srgbClr val="FBE7E4"/>
+                    </a:solidFill>
+                  </a:tcPr>
                 </a:tc>
               </a:tr>
             </a:tbl>
           </a:graphicData>
         </a:graphic>
       </p:graphicFrame>
+      <p:sp>
+        <p:nvSpPr>
+          <p:cNvPr id="5" name="Rectangle 4"/>
+          <p:cNvSpPr/>
+          <p:nvPr/>
+        </p:nvSpPr>
+        <p:spPr>
+          <a:xfrm>
+            <a:off x="0" y="1051560"/>
+            <a:ext cx="12191695" cy="38100"/>
+          </a:xfrm>
+          <a:prstGeom prst="rect">
+            <a:avLst/>
+          </a:prstGeom>
+          <a:solidFill>
+            <a:srgbClr val="E0A23D"/>
+          </a:solidFill>
+          <a:ln>
+            <a:noFill/>
+          </a:ln>
+          <a:effectLst/>
+        </p:spPr>
+        <p:style>
+          <a:lnRef idx="1">
+            <a:schemeClr val="accent1"/>
+          </a:lnRef>
+          <a:fillRef idx="3">
+            <a:schemeClr val="accent1"/>
+          </a:fillRef>
+          <a:effectRef idx="2">
+            <a:schemeClr val="accent1"/>
+          </a:effectRef>
+          <a:fontRef idx="minor">
+            <a:schemeClr val="lt1"/>
+          </a:fontRef>
+        </p:style>
+        <p:txBody>
+          <a:bodyPr rtlCol="0" anchor="ctr"/>
+          <a:lstStyle/>
+          <a:p>
+            <a:pPr algn="ctr"/>
+          </a:p>
+        </p:txBody>
+      </p:sp>
+      <p:sp>
+        <p:nvSpPr>
+          <p:cNvPr id="6" name="Rounded Rectangle 5"/>
+          <p:cNvSpPr/>
+          <p:nvPr/>
+        </p:nvSpPr>
+        <p:spPr>
+          <a:xfrm>
+            <a:off x="457200" y="242316"/>
+            <a:ext cx="566928" cy="566928"/>
+          </a:xfrm>
+          <a:prstGeom prst="roundRect">
+            <a:avLst>
+              <a:gd name="adj" fmla="val 28000"/>
+            </a:avLst>
+          </a:prstGeom>
+          <a:solidFill>
+            <a:srgbClr val="C8820E"/>
+          </a:solidFill>
+          <a:ln>
+            <a:noFill/>
+          </a:ln>
+          <a:effectLst/>
+        </p:spPr>
+        <p:style>
+          <a:lnRef idx="1">
+            <a:schemeClr val="accent1"/>
+          </a:lnRef>
+          <a:fillRef idx="3">
+            <a:schemeClr val="accent1"/>
+          </a:fillRef>
+          <a:effectRef idx="2">
+            <a:schemeClr val="accent1"/>
+          </a:effectRef>
+          <a:fontRef idx="minor">
+            <a:schemeClr val="lt1"/>
+          </a:fontRef>
+        </p:style>
+        <p:txBody>
+          <a:bodyPr rtlCol="0" anchor="ctr" wrap="none" lIns="0" rIns="0" tIns="0" bIns="0"/>
+          <a:lstStyle/>
+          <a:p>
+            <a:pPr algn="ctr"/>
+            <a:r>
+              <a:rPr sz="2600" b="1">
+                <a:solidFill>
+                  <a:srgbClr val="1F4E79"/>
+                </a:solidFill>
+                <a:latin typeface="Calibri"/>
+              </a:rPr>
+              <a:t>4</a:t>
+            </a:r>
+          </a:p>
+        </p:txBody>
+      </p:sp>
+      <p:sp>
+        <p:nvSpPr>
+          <p:cNvPr id="7" name="Rectangle 6"/>
+          <p:cNvSpPr/>
+          <p:nvPr/>
+        </p:nvSpPr>
+        <p:spPr>
+          <a:xfrm>
+            <a:off x="457200" y="6510528"/>
+            <a:ext cx="11277295" cy="9525"/>
+          </a:xfrm>
+          <a:prstGeom prst="rect">
+            <a:avLst/>
+          </a:prstGeom>
+          <a:solidFill>
+            <a:srgbClr val="DDDDDD"/>
+          </a:solidFill>
+          <a:ln>
+            <a:noFill/>
+          </a:ln>
+          <a:effectLst/>
+        </p:spPr>
+        <p:style>
+          <a:lnRef idx="1">
+            <a:schemeClr val="accent1"/>
+          </a:lnRef>
+          <a:fillRef idx="3">
+            <a:schemeClr val="accent1"/>
+          </a:fillRef>
+          <a:effectRef idx="2">
+            <a:schemeClr val="accent1"/>
+          </a:effectRef>
+          <a:fontRef idx="minor">
+            <a:schemeClr val="lt1"/>
+          </a:fontRef>
+        </p:style>
+        <p:txBody>
+          <a:bodyPr rtlCol="0" anchor="ctr"/>
+          <a:lstStyle/>
+          <a:p>
+            <a:pPr algn="ctr"/>
+          </a:p>
+        </p:txBody>
+      </p:sp>
+      <p:sp>
+        <p:nvSpPr>
+          <p:cNvPr id="8" name="TextBox 7"/>
+          <p:cNvSpPr txBox="1"/>
+          <p:nvPr/>
+        </p:nvSpPr>
+        <p:spPr>
+          <a:xfrm>
+            <a:off x="457200" y="6565392"/>
+            <a:ext cx="5486400" cy="274320"/>
+          </a:xfrm>
+          <a:prstGeom prst="rect">
+            <a:avLst/>
+          </a:prstGeom>
+          <a:noFill/>
+        </p:spPr>
+        <p:txBody>
+          <a:bodyPr wrap="none" lIns="0" tIns="0" bIns="0">
+            <a:spAutoFit/>
+          </a:bodyPr>
+          <a:lstStyle/>
+          <a:p>
+            <a:r>
+              <a:rPr sz="900">
+                <a:solidFill>
+                  <a:srgbClr val="9A9A9A"/>
+                </a:solidFill>
+              </a:rPr>
+              <a:t>Pyro Pete: Emergency Evacuation  ·  CT3201 Mini Project</a:t>
+            </a:r>
+          </a:p>
+        </p:txBody>
+      </p:sp>
+      <p:sp>
+        <p:nvSpPr>
+          <p:cNvPr id="9" name="TextBox 8"/>
+          <p:cNvSpPr txBox="1"/>
+          <p:nvPr/>
+        </p:nvSpPr>
+        <p:spPr>
+          <a:xfrm>
+            <a:off x="10820095" y="6565392"/>
+            <a:ext cx="914400" cy="274320"/>
+          </a:xfrm>
+          <a:prstGeom prst="rect">
+            <a:avLst/>
+          </a:prstGeom>
+          <a:noFill/>
+        </p:spPr>
+        <p:txBody>
+          <a:bodyPr wrap="none" lIns="0" tIns="0" bIns="0">
+            <a:spAutoFit/>
+          </a:bodyPr>
+          <a:lstStyle/>
+          <a:p>
+            <a:pPr algn="r"/>
+            <a:r>
+              <a:rPr sz="900">
+                <a:solidFill>
+                  <a:srgbClr val="9A9A9A"/>
+                </a:solidFill>
+              </a:rPr>
+              <a:t>5</a:t>
+            </a:r>
+          </a:p>
+        </p:txBody>
+      </p:sp>
     </p:spTree>
   </p:cSld>
   <p:clrMapOvr>
@@ -4852,14 +7119,58 @@
       <p:grpSpPr/>
       <p:sp>
         <p:nvSpPr>
+          <p:cNvPr id="6" name="Rectangle 5"/>
+          <p:cNvSpPr/>
+          <p:nvPr/>
+        </p:nvSpPr>
+        <p:spPr>
+          <a:xfrm>
+            <a:off x="0" y="0"/>
+            <a:ext cx="12191695" cy="1051560"/>
+          </a:xfrm>
+          <a:prstGeom prst="rect">
+            <a:avLst/>
+          </a:prstGeom>
+          <a:solidFill>
+            <a:srgbClr val="1F4E79"/>
+          </a:solidFill>
+          <a:ln>
+            <a:noFill/>
+          </a:ln>
+          <a:effectLst/>
+        </p:spPr>
+        <p:style>
+          <a:lnRef idx="1">
+            <a:schemeClr val="accent1"/>
+          </a:lnRef>
+          <a:fillRef idx="3">
+            <a:schemeClr val="accent1"/>
+          </a:fillRef>
+          <a:effectRef idx="2">
+            <a:schemeClr val="accent1"/>
+          </a:effectRef>
+          <a:fontRef idx="minor">
+            <a:schemeClr val="lt1"/>
+          </a:fontRef>
+        </p:style>
+        <p:txBody>
+          <a:bodyPr rtlCol="0" anchor="ctr"/>
+          <a:lstStyle/>
+          <a:p>
+            <a:pPr algn="ctr"/>
+          </a:p>
+        </p:txBody>
+      </p:sp>
+      <p:sp>
+        <p:nvSpPr>
           <p:cNvPr id="2" name="TextBox 1"/>
           <p:cNvSpPr txBox="1"/>
           <p:nvPr/>
         </p:nvSpPr>
         <p:spPr>
           <a:xfrm>
-            <a:off x="548640" y="320040"/>
-            <a:ext cx="11064240" cy="822960"/>
+            <a:off x="1234440" y="91440"/>
+            <a:ext cx="10728655" cy="960120"/>
           </a:xfrm>
           <a:prstGeom prst="rect">
             <a:avLst/>
@@ -4867,15 +7178,15 @@
           <a:noFill/>
         </p:spPr>
         <p:txBody>
-          <a:bodyPr wrap="none">
+          <a:bodyPr wrap="none" anchor="ctr">
             <a:spAutoFit/>
           </a:bodyPr>
           <a:lstStyle/>
           <a:p>
             <a:r>
-              <a:rPr sz="3000" b="1">
-                <a:solidFill>
-                  <a:srgbClr val="1F4E79"/>
+              <a:rPr sz="2600" b="1">
+                <a:solidFill>
+                  <a:srgbClr val="FFFFFF"/>
                 </a:solidFill>
               </a:rPr>
               <a:t>5 - Final AI Solution</a:t>
@@ -4883,9 +7194,9 @@
           </a:p>
           <a:p>
             <a:r>
-              <a:rPr sz="1300">
-                <a:solidFill>
-                  <a:srgbClr val="666666"/>
+              <a:rPr sz="1200">
+                <a:solidFill>
+                  <a:srgbClr val="C9D7E4"/>
                 </a:solidFill>
               </a:rPr>
               <a:t>playable game + autonomous rescue agent (robot or drone skin)</a:t>
@@ -4916,44 +7227,93 @@
           <a:lstStyle/>
           <a:p>
             <a:pPr>
+              <a:lnSpc>
+                <a:spcPct val="108000"/>
+              </a:lnSpc>
               <a:spcAft>
-                <a:spcPts val="600"/>
+                <a:spcPts val="1200"/>
               </a:spcAft>
             </a:pPr>
             <a:r>
+              <a:rPr b="1" sz="1600">
+                <a:solidFill>
+                  <a:srgbClr val="C8820E"/>
+                </a:solidFill>
+              </a:rPr>
+              <a:t>▸  </a:t>
+            </a:r>
+            <a:r>
+              <a:rPr b="1" sz="1600">
+                <a:solidFill>
+                  <a:srgbClr val="1F4E79"/>
+                </a:solidFill>
+              </a:rPr>
+              <a:t>Decision loop: </a:t>
+            </a:r>
+            <a:r>
               <a:rPr sz="1600">
                 <a:solidFill>
-                  <a:srgbClr val="222222"/>
-                </a:solidFill>
-              </a:rPr>
-              <a:t>Decision loop: sense (vision radius) -&gt; choose goal -&gt; hazard-weighted A* plan -&gt; step -&gt; re-plan every 0.25 s</a:t>
+                  <a:srgbClr val="2B2B2B"/>
+                </a:solidFill>
+              </a:rPr>
+              <a:t>sense (vision radius) -&gt; choose goal -&gt; hazard-weighted A* plan -&gt; step -&gt; re-plan every 0.25 s</a:t>
             </a:r>
           </a:p>
           <a:p>
             <a:pPr>
+              <a:lnSpc>
+                <a:spcPct val="108000"/>
+              </a:lnSpc>
               <a:spcAft>
-                <a:spcPts val="600"/>
+                <a:spcPts val="1200"/>
               </a:spcAft>
             </a:pPr>
             <a:r>
+              <a:rPr b="1" sz="1600">
+                <a:solidFill>
+                  <a:srgbClr val="C8820E"/>
+                </a:solidFill>
+              </a:rPr>
+              <a:t>▸  </a:t>
+            </a:r>
+            <a:r>
+              <a:rPr b="1" sz="1600">
+                <a:solidFill>
+                  <a:srgbClr val="1F4E79"/>
+                </a:solidFill>
+              </a:rPr>
+              <a:t>Goal selection: </a:t>
+            </a:r>
+            <a:r>
               <a:rPr sz="1600">
                 <a:solidFill>
-                  <a:srgbClr val="222222"/>
-                </a:solidFill>
-              </a:rPr>
-              <a:t>Goal selection: nearest KNOWN occupant by weighted distance; else nearest unexplored area; else the exit; key first if a door blocks the goal</a:t>
+                  <a:srgbClr val="2B2B2B"/>
+                </a:solidFill>
+              </a:rPr>
+              <a:t>nearest KNOWN occupant by weighted distance; else nearest unexplored area; else the exit; key first if a door blocks the goal</a:t>
             </a:r>
           </a:p>
           <a:p>
             <a:pPr>
+              <a:lnSpc>
+                <a:spcPct val="108000"/>
+              </a:lnSpc>
               <a:spcAft>
-                <a:spcPts val="600"/>
+                <a:spcPts val="1200"/>
               </a:spcAft>
             </a:pPr>
             <a:r>
+              <a:rPr b="1" sz="1600">
+                <a:solidFill>
+                  <a:srgbClr val="C8820E"/>
+                </a:solidFill>
+              </a:rPr>
+              <a:t>▸  </a:t>
+            </a:r>
+            <a:r>
               <a:rPr sz="1600">
                 <a:solidFill>
-                  <a:srgbClr val="222222"/>
+                  <a:srgbClr val="2B2B2B"/>
                 </a:solidFill>
               </a:rPr>
               <a:t>Techniques (from the brief's list): Search (BFS/Dijkstra/A*/Greedy) • Intelligent agent • Decision-making under uncertainty • Machine learning (optional second brain, imitates A*)</a:t>
@@ -4961,32 +7321,70 @@
           </a:p>
           <a:p>
             <a:pPr>
+              <a:lnSpc>
+                <a:spcPct val="108000"/>
+              </a:lnSpc>
               <a:spcAft>
-                <a:spcPts val="600"/>
+                <a:spcPts val="1200"/>
               </a:spcAft>
             </a:pPr>
             <a:r>
+              <a:rPr b="1" sz="1600">
+                <a:solidFill>
+                  <a:srgbClr val="C8820E"/>
+                </a:solidFill>
+              </a:rPr>
+              <a:t>▸  </a:t>
+            </a:r>
+            <a:r>
+              <a:rPr b="1" sz="1600">
+                <a:solidFill>
+                  <a:srgbClr val="1F4E79"/>
+                </a:solidFill>
+              </a:rPr>
+              <a:t>Systems: </a:t>
+            </a:r>
+            <a:r>
               <a:rPr sz="1600">
                 <a:solidFill>
-                  <a:srgbClr val="222222"/>
-                </a:solidFill>
-              </a:rPr>
-              <a:t>Systems: spreading fire + functional smoke • sparking panels • timed ceiling collapse • locked door + key • fog of war with memory</a:t>
+                  <a:srgbClr val="2B2B2B"/>
+                </a:solidFill>
+              </a:rPr>
+              <a:t>spreading fire + functional smoke • sparking panels • timed ceiling collapse • locked door + key • fog of war with memory</a:t>
             </a:r>
           </a:p>
           <a:p>
             <a:pPr>
+              <a:lnSpc>
+                <a:spcPct val="108000"/>
+              </a:lnSpc>
               <a:spcAft>
-                <a:spcPts val="600"/>
+                <a:spcPts val="1200"/>
               </a:spcAft>
             </a:pPr>
             <a:r>
+              <a:rPr b="1" sz="1600">
+                <a:solidFill>
+                  <a:srgbClr val="C8820E"/>
+                </a:solidFill>
+              </a:rPr>
+              <a:t>▸  </a:t>
+            </a:r>
+            <a:r>
+              <a:rPr b="1" sz="1600">
+                <a:solidFill>
+                  <a:srgbClr val="1F4E79"/>
+                </a:solidFill>
+              </a:rPr>
+              <a:t>Score: </a:t>
+            </a:r>
+            <a:r>
               <a:rPr sz="1600">
                 <a:solidFill>
-                  <a:srgbClr val="222222"/>
-                </a:solidFill>
-              </a:rPr>
-              <a:t>Score: +100 per occupant led out • +50 for exiting • speed bonus • damage penalty</a:t>
+                  <a:srgbClr val="2B2B2B"/>
+                </a:solidFill>
+              </a:rPr>
+              <a:t>+100 per occupant led out • +50 for exiting • speed bonus • damage penalty</a:t>
             </a:r>
           </a:p>
         </p:txBody>
@@ -5008,7 +7406,7 @@
         <p:spPr>
           <a:xfrm>
             <a:off x="3055593" y="4160520"/>
-            <a:ext cx="1851409" cy="2514600"/>
+            <a:ext cx="1649437" cy="2240280"/>
           </a:xfrm>
           <a:prstGeom prst="rect">
             <a:avLst/>
@@ -5032,13 +7430,223 @@
         <p:spPr>
           <a:xfrm>
             <a:off x="5364201" y="4160520"/>
-            <a:ext cx="3771900" cy="2514600"/>
+            <a:ext cx="3360420" cy="2240280"/>
           </a:xfrm>
           <a:prstGeom prst="rect">
             <a:avLst/>
           </a:prstGeom>
         </p:spPr>
       </p:pic>
+      <p:sp>
+        <p:nvSpPr>
+          <p:cNvPr id="7" name="Rectangle 6"/>
+          <p:cNvSpPr/>
+          <p:nvPr/>
+        </p:nvSpPr>
+        <p:spPr>
+          <a:xfrm>
+            <a:off x="0" y="1051560"/>
+            <a:ext cx="12191695" cy="38100"/>
+          </a:xfrm>
+          <a:prstGeom prst="rect">
+            <a:avLst/>
+          </a:prstGeom>
+          <a:solidFill>
+            <a:srgbClr val="E0A23D"/>
+          </a:solidFill>
+          <a:ln>
+            <a:noFill/>
+          </a:ln>
+          <a:effectLst/>
+        </p:spPr>
+        <p:style>
+          <a:lnRef idx="1">
+            <a:schemeClr val="accent1"/>
+          </a:lnRef>
+          <a:fillRef idx="3">
+            <a:schemeClr val="accent1"/>
+          </a:fillRef>
+          <a:effectRef idx="2">
+            <a:schemeClr val="accent1"/>
+          </a:effectRef>
+          <a:fontRef idx="minor">
+            <a:schemeClr val="lt1"/>
+          </a:fontRef>
+        </p:style>
+        <p:txBody>
+          <a:bodyPr rtlCol="0" anchor="ctr"/>
+          <a:lstStyle/>
+          <a:p>
+            <a:pPr algn="ctr"/>
+          </a:p>
+        </p:txBody>
+      </p:sp>
+      <p:sp>
+        <p:nvSpPr>
+          <p:cNvPr id="8" name="Rounded Rectangle 7"/>
+          <p:cNvSpPr/>
+          <p:nvPr/>
+        </p:nvSpPr>
+        <p:spPr>
+          <a:xfrm>
+            <a:off x="457200" y="242316"/>
+            <a:ext cx="566928" cy="566928"/>
+          </a:xfrm>
+          <a:prstGeom prst="roundRect">
+            <a:avLst>
+              <a:gd name="adj" fmla="val 28000"/>
+            </a:avLst>
+          </a:prstGeom>
+          <a:solidFill>
+            <a:srgbClr val="C8820E"/>
+          </a:solidFill>
+          <a:ln>
+            <a:noFill/>
+          </a:ln>
+          <a:effectLst/>
+        </p:spPr>
+        <p:style>
+          <a:lnRef idx="1">
+            <a:schemeClr val="accent1"/>
+          </a:lnRef>
+          <a:fillRef idx="3">
+            <a:schemeClr val="accent1"/>
+          </a:fillRef>
+          <a:effectRef idx="2">
+            <a:schemeClr val="accent1"/>
+          </a:effectRef>
+          <a:fontRef idx="minor">
+            <a:schemeClr val="lt1"/>
+          </a:fontRef>
+        </p:style>
+        <p:txBody>
+          <a:bodyPr rtlCol="0" anchor="ctr" wrap="none" lIns="0" rIns="0" tIns="0" bIns="0"/>
+          <a:lstStyle/>
+          <a:p>
+            <a:pPr algn="ctr"/>
+            <a:r>
+              <a:rPr sz="2600" b="1">
+                <a:solidFill>
+                  <a:srgbClr val="1F4E79"/>
+                </a:solidFill>
+                <a:latin typeface="Calibri"/>
+              </a:rPr>
+              <a:t>5</a:t>
+            </a:r>
+          </a:p>
+        </p:txBody>
+      </p:sp>
+      <p:sp>
+        <p:nvSpPr>
+          <p:cNvPr id="9" name="Rectangle 8"/>
+          <p:cNvSpPr/>
+          <p:nvPr/>
+        </p:nvSpPr>
+        <p:spPr>
+          <a:xfrm>
+            <a:off x="457200" y="6510528"/>
+            <a:ext cx="11277295" cy="9525"/>
+          </a:xfrm>
+          <a:prstGeom prst="rect">
+            <a:avLst/>
+          </a:prstGeom>
+          <a:solidFill>
+            <a:srgbClr val="DDDDDD"/>
+          </a:solidFill>
+          <a:ln>
+            <a:noFill/>
+          </a:ln>
+          <a:effectLst/>
+        </p:spPr>
+        <p:style>
+          <a:lnRef idx="1">
+            <a:schemeClr val="accent1"/>
+          </a:lnRef>
+          <a:fillRef idx="3">
+            <a:schemeClr val="accent1"/>
+          </a:fillRef>
+          <a:effectRef idx="2">
+            <a:schemeClr val="accent1"/>
+          </a:effectRef>
+          <a:fontRef idx="minor">
+            <a:schemeClr val="lt1"/>
+          </a:fontRef>
+        </p:style>
+        <p:txBody>
+          <a:bodyPr rtlCol="0" anchor="ctr"/>
+          <a:lstStyle/>
+          <a:p>
+            <a:pPr algn="ctr"/>
+          </a:p>
+        </p:txBody>
+      </p:sp>
+      <p:sp>
+        <p:nvSpPr>
+          <p:cNvPr id="10" name="TextBox 9"/>
+          <p:cNvSpPr txBox="1"/>
+          <p:nvPr/>
+        </p:nvSpPr>
+        <p:spPr>
+          <a:xfrm>
+            <a:off x="457200" y="6565392"/>
+            <a:ext cx="5486400" cy="274320"/>
+          </a:xfrm>
+          <a:prstGeom prst="rect">
+            <a:avLst/>
+          </a:prstGeom>
+          <a:noFill/>
+        </p:spPr>
+        <p:txBody>
+          <a:bodyPr wrap="none" lIns="0" tIns="0" bIns="0">
+            <a:spAutoFit/>
+          </a:bodyPr>
+          <a:lstStyle/>
+          <a:p>
+            <a:r>
+              <a:rPr sz="900">
+                <a:solidFill>
+                  <a:srgbClr val="9A9A9A"/>
+                </a:solidFill>
+              </a:rPr>
+              <a:t>Pyro Pete: Emergency Evacuation  ·  CT3201 Mini Project</a:t>
+            </a:r>
+          </a:p>
+        </p:txBody>
+      </p:sp>
+      <p:sp>
+        <p:nvSpPr>
+          <p:cNvPr id="11" name="TextBox 10"/>
+          <p:cNvSpPr txBox="1"/>
+          <p:nvPr/>
+        </p:nvSpPr>
+        <p:spPr>
+          <a:xfrm>
+            <a:off x="10820095" y="6565392"/>
+            <a:ext cx="914400" cy="274320"/>
+          </a:xfrm>
+          <a:prstGeom prst="rect">
+            <a:avLst/>
+          </a:prstGeom>
+          <a:noFill/>
+        </p:spPr>
+        <p:txBody>
+          <a:bodyPr wrap="none" lIns="0" tIns="0" bIns="0">
+            <a:spAutoFit/>
+          </a:bodyPr>
+          <a:lstStyle/>
+          <a:p>
+            <a:pPr algn="r"/>
+            <a:r>
+              <a:rPr sz="900">
+                <a:solidFill>
+                  <a:srgbClr val="9A9A9A"/>
+                </a:solidFill>
+              </a:rPr>
+              <a:t>6</a:t>
+            </a:r>
+          </a:p>
+        </p:txBody>
+      </p:sp>
     </p:spTree>
   </p:cSld>
   <p:clrMapOvr>
@@ -5059,14 +7667,58 @@
       <p:grpSpPr/>
       <p:sp>
         <p:nvSpPr>
+          <p:cNvPr id="6" name="Rectangle 5"/>
+          <p:cNvSpPr/>
+          <p:nvPr/>
+        </p:nvSpPr>
+        <p:spPr>
+          <a:xfrm>
+            <a:off x="0" y="0"/>
+            <a:ext cx="12191695" cy="1051560"/>
+          </a:xfrm>
+          <a:prstGeom prst="rect">
+            <a:avLst/>
+          </a:prstGeom>
+          <a:solidFill>
+            <a:srgbClr val="1F4E79"/>
+          </a:solidFill>
+          <a:ln>
+            <a:noFill/>
+          </a:ln>
+          <a:effectLst/>
+        </p:spPr>
+        <p:style>
+          <a:lnRef idx="1">
+            <a:schemeClr val="accent1"/>
+          </a:lnRef>
+          <a:fillRef idx="3">
+            <a:schemeClr val="accent1"/>
+          </a:fillRef>
+          <a:effectRef idx="2">
+            <a:schemeClr val="accent1"/>
+          </a:effectRef>
+          <a:fontRef idx="minor">
+            <a:schemeClr val="lt1"/>
+          </a:fontRef>
+        </p:style>
+        <p:txBody>
+          <a:bodyPr rtlCol="0" anchor="ctr"/>
+          <a:lstStyle/>
+          <a:p>
+            <a:pPr algn="ctr"/>
+          </a:p>
+        </p:txBody>
+      </p:sp>
+      <p:sp>
+        <p:nvSpPr>
           <p:cNvPr id="2" name="TextBox 1"/>
           <p:cNvSpPr txBox="1"/>
           <p:nvPr/>
         </p:nvSpPr>
         <p:spPr>
           <a:xfrm>
-            <a:off x="548640" y="320040"/>
-            <a:ext cx="11064240" cy="822960"/>
+            <a:off x="1234440" y="91440"/>
+            <a:ext cx="10728655" cy="960120"/>
           </a:xfrm>
           <a:prstGeom prst="rect">
             <a:avLst/>
@@ -5074,15 +7726,15 @@
           <a:noFill/>
         </p:spPr>
         <p:txBody>
-          <a:bodyPr wrap="none">
+          <a:bodyPr wrap="none" anchor="ctr">
             <a:spAutoFit/>
           </a:bodyPr>
           <a:lstStyle/>
           <a:p>
             <a:r>
-              <a:rPr sz="3000" b="1">
-                <a:solidFill>
-                  <a:srgbClr val="1F4E79"/>
+              <a:rPr sz="2600" b="1">
+                <a:solidFill>
+                  <a:srgbClr val="FFFFFF"/>
                 </a:solidFill>
               </a:rPr>
               <a:t>6 - Evaluation and Testing</a:t>
@@ -5090,9 +7742,9 @@
           </a:p>
           <a:p>
             <a:r>
-              <a:rPr sz="1300">
-                <a:solidFill>
-                  <a:srgbClr val="666666"/>
+              <a:rPr sz="1200">
+                <a:solidFill>
+                  <a:srgbClr val="C9D7E4"/>
                 </a:solidFill>
               </a:rPr>
               <a:t>Phase 6, Stage 7 - testing an AI recommendation with evidence</a:t>
@@ -5123,17 +7775,36 @@
           <a:lstStyle/>
           <a:p>
             <a:pPr>
+              <a:lnSpc>
+                <a:spcPct val="108000"/>
+              </a:lnSpc>
               <a:spcAft>
-                <a:spcPts val="600"/>
+                <a:spcPts val="1200"/>
               </a:spcAft>
             </a:pPr>
             <a:r>
-              <a:rPr sz="1500">
-                <a:solidFill>
-                  <a:srgbClr val="222222"/>
-                </a:solidFill>
-              </a:rPr>
-              <a:t>• AI recommendation tested: "Use Greedy Best-First - fewer node expansions, so it's faster."</a:t>
+              <a:rPr b="1" sz="1600">
+                <a:solidFill>
+                  <a:srgbClr val="C8820E"/>
+                </a:solidFill>
+              </a:rPr>
+              <a:t>▸  </a:t>
+            </a:r>
+            <a:r>
+              <a:rPr b="1" sz="1600">
+                <a:solidFill>
+                  <a:srgbClr val="1F4E79"/>
+                </a:solidFill>
+              </a:rPr>
+              <a:t>AI recommendation tested: </a:t>
+            </a:r>
+            <a:r>
+              <a:rPr sz="1600">
+                <a:solidFill>
+                  <a:srgbClr val="2B2B2B"/>
+                </a:solidFill>
+              </a:rPr>
+              <a:t>"Use Greedy Best-First - fewer node expansions, so it's faster."</a:t>
             </a:r>
           </a:p>
         </p:txBody>
@@ -5255,12 +7926,20 @@
                     <a:lstStyle/>
                     <a:p>
                       <a:r>
-                        <a:rPr sz="1200"/>
+                        <a:rPr sz="1200" b="1">
+                          <a:solidFill>
+                            <a:srgbClr val="A32B1F"/>
+                          </a:solidFill>
+                        </a:rPr>
                         <a:t>BFS (unweighted)</a:t>
                       </a:r>
                     </a:p>
                   </a:txBody>
-                  <a:tcPr/>
+                  <a:tcPr>
+                    <a:solidFill>
+                      <a:srgbClr val="FBE7E4"/>
+                    </a:solidFill>
+                  </a:tcPr>
                 </a:tc>
                 <a:tc>
                   <a:txBody>
@@ -5268,12 +7947,20 @@
                     <a:lstStyle/>
                     <a:p>
                       <a:r>
-                        <a:rPr sz="1200"/>
+                        <a:rPr sz="1200" b="1">
+                          <a:solidFill>
+                            <a:srgbClr val="A32B1F"/>
+                          </a:solidFill>
+                        </a:rPr>
                         <a:t>101.8</a:t>
                       </a:r>
                     </a:p>
                   </a:txBody>
-                  <a:tcPr/>
+                  <a:tcPr>
+                    <a:solidFill>
+                      <a:srgbClr val="FBE7E4"/>
+                    </a:solidFill>
+                  </a:tcPr>
                 </a:tc>
                 <a:tc>
                   <a:txBody>
@@ -5281,12 +7968,20 @@
                     <a:lstStyle/>
                     <a:p>
                       <a:r>
-                        <a:rPr sz="1200"/>
+                        <a:rPr sz="1200" b="1">
+                          <a:solidFill>
+                            <a:srgbClr val="A32B1F"/>
+                          </a:solidFill>
+                        </a:rPr>
                         <a:t>30</a:t>
                       </a:r>
                     </a:p>
                   </a:txBody>
-                  <a:tcPr/>
+                  <a:tcPr>
+                    <a:solidFill>
+                      <a:srgbClr val="FBE7E4"/>
+                    </a:solidFill>
+                  </a:tcPr>
                 </a:tc>
                 <a:tc>
                   <a:txBody>
@@ -5294,12 +7989,20 @@
                     <a:lstStyle/>
                     <a:p>
                       <a:r>
-                        <a:rPr sz="1200"/>
+                        <a:rPr sz="1200" b="1">
+                          <a:solidFill>
+                            <a:srgbClr val="A32B1F"/>
+                          </a:solidFill>
+                        </a:rPr>
                         <a:t>9</a:t>
                       </a:r>
                     </a:p>
                   </a:txBody>
-                  <a:tcPr/>
+                  <a:tcPr>
+                    <a:solidFill>
+                      <a:srgbClr val="FBE7E4"/>
+                    </a:solidFill>
+                  </a:tcPr>
                 </a:tc>
               </a:tr>
               <a:tr h="365760">
@@ -5363,12 +8066,20 @@
                     <a:lstStyle/>
                     <a:p>
                       <a:r>
-                        <a:rPr sz="1200"/>
+                        <a:rPr sz="1200" b="1">
+                          <a:solidFill>
+                            <a:srgbClr val="1E6B3D"/>
+                          </a:solidFill>
+                        </a:rPr>
                         <a:t>A*</a:t>
                       </a:r>
                     </a:p>
                   </a:txBody>
-                  <a:tcPr/>
+                  <a:tcPr>
+                    <a:solidFill>
+                      <a:srgbClr val="E4F3E8"/>
+                    </a:solidFill>
+                  </a:tcPr>
                 </a:tc>
                 <a:tc>
                   <a:txBody>
@@ -5376,12 +8087,20 @@
                     <a:lstStyle/>
                     <a:p>
                       <a:r>
-                        <a:rPr sz="1200"/>
+                        <a:rPr sz="1200" b="1">
+                          <a:solidFill>
+                            <a:srgbClr val="1E6B3D"/>
+                          </a:solidFill>
+                        </a:rPr>
                         <a:t>43.8</a:t>
                       </a:r>
                     </a:p>
                   </a:txBody>
-                  <a:tcPr/>
+                  <a:tcPr>
+                    <a:solidFill>
+                      <a:srgbClr val="E4F3E8"/>
+                    </a:solidFill>
+                  </a:tcPr>
                 </a:tc>
                 <a:tc>
                   <a:txBody>
@@ -5389,12 +8108,20 @@
                     <a:lstStyle/>
                     <a:p>
                       <a:r>
-                        <a:rPr sz="1200"/>
+                        <a:rPr sz="1200" b="1">
+                          <a:solidFill>
+                            <a:srgbClr val="1E6B3D"/>
+                          </a:solidFill>
+                        </a:rPr>
                         <a:t>42</a:t>
                       </a:r>
                     </a:p>
                   </a:txBody>
-                  <a:tcPr/>
+                  <a:tcPr>
+                    <a:solidFill>
+                      <a:srgbClr val="E4F3E8"/>
+                    </a:solidFill>
+                  </a:tcPr>
                 </a:tc>
                 <a:tc>
                   <a:txBody>
@@ -5402,12 +8129,20 @@
                     <a:lstStyle/>
                     <a:p>
                       <a:r>
-                        <a:rPr sz="1200"/>
+                        <a:rPr sz="1200" b="1">
+                          <a:solidFill>
+                            <a:srgbClr val="1E6B3D"/>
+                          </a:solidFill>
+                        </a:rPr>
                         <a:t>2</a:t>
                       </a:r>
                     </a:p>
                   </a:txBody>
-                  <a:tcPr/>
+                  <a:tcPr>
+                    <a:solidFill>
+                      <a:srgbClr val="E4F3E8"/>
+                    </a:solidFill>
+                  </a:tcPr>
                 </a:tc>
               </a:tr>
               <a:tr h="365760">
@@ -5417,12 +8152,20 @@
                     <a:lstStyle/>
                     <a:p>
                       <a:r>
-                        <a:rPr sz="1200"/>
+                        <a:rPr sz="1200" b="1">
+                          <a:solidFill>
+                            <a:srgbClr val="A32B1F"/>
+                          </a:solidFill>
+                        </a:rPr>
                         <a:t>Greedy best-first</a:t>
                       </a:r>
                     </a:p>
                   </a:txBody>
-                  <a:tcPr/>
+                  <a:tcPr>
+                    <a:solidFill>
+                      <a:srgbClr val="FBE7E4"/>
+                    </a:solidFill>
+                  </a:tcPr>
                 </a:tc>
                 <a:tc>
                   <a:txBody>
@@ -5430,12 +8173,20 @@
                     <a:lstStyle/>
                     <a:p>
                       <a:r>
-                        <a:rPr sz="1200"/>
+                        <a:rPr sz="1200" b="1">
+                          <a:solidFill>
+                            <a:srgbClr val="A32B1F"/>
+                          </a:solidFill>
+                        </a:rPr>
                         <a:t>43.8</a:t>
                       </a:r>
                     </a:p>
                   </a:txBody>
-                  <a:tcPr/>
+                  <a:tcPr>
+                    <a:solidFill>
+                      <a:srgbClr val="FBE7E4"/>
+                    </a:solidFill>
+                  </a:tcPr>
                 </a:tc>
                 <a:tc>
                   <a:txBody>
@@ -5443,12 +8194,20 @@
                     <a:lstStyle/>
                     <a:p>
                       <a:r>
-                        <a:rPr sz="1200"/>
+                        <a:rPr sz="1200" b="1">
+                          <a:solidFill>
+                            <a:srgbClr val="A32B1F"/>
+                          </a:solidFill>
+                        </a:rPr>
                         <a:t>42</a:t>
                       </a:r>
                     </a:p>
                   </a:txBody>
-                  <a:tcPr/>
+                  <a:tcPr>
+                    <a:solidFill>
+                      <a:srgbClr val="FBE7E4"/>
+                    </a:solidFill>
+                  </a:tcPr>
                 </a:tc>
                 <a:tc>
                   <a:txBody>
@@ -5456,12 +8215,20 @@
                     <a:lstStyle/>
                     <a:p>
                       <a:r>
-                        <a:rPr sz="1200"/>
+                        <a:rPr sz="1200" b="1">
+                          <a:solidFill>
+                            <a:srgbClr val="A32B1F"/>
+                          </a:solidFill>
+                        </a:rPr>
                         <a:t>2  (only when the straight line is safe)</a:t>
                       </a:r>
                     </a:p>
                   </a:txBody>
-                  <a:tcPr/>
+                  <a:tcPr>
+                    <a:solidFill>
+                      <a:srgbClr val="FBE7E4"/>
+                    </a:solidFill>
+                  </a:tcPr>
                 </a:tc>
               </a:tr>
             </a:tbl>
@@ -5491,47 +8258,314 @@
           <a:lstStyle/>
           <a:p>
             <a:pPr>
+              <a:lnSpc>
+                <a:spcPct val="108000"/>
+              </a:lnSpc>
               <a:spcAft>
-                <a:spcPts val="600"/>
+                <a:spcPts val="1200"/>
               </a:spcAft>
             </a:pPr>
             <a:r>
-              <a:rPr sz="1300">
-                <a:solidFill>
-                  <a:srgbClr val="222222"/>
-                </a:solidFill>
-              </a:rPr>
-              <a:t>• Appropriate? NO - 'fewer expansions' optimises the wrong thing. BFS/Greedy minimise tiles, not danger.</a:t>
+              <a:rPr b="1" sz="1600">
+                <a:solidFill>
+                  <a:srgbClr val="C8820E"/>
+                </a:solidFill>
+              </a:rPr>
+              <a:t>▸  </a:t>
+            </a:r>
+            <a:r>
+              <a:rPr b="1" sz="1600">
+                <a:solidFill>
+                  <a:srgbClr val="1F4E79"/>
+                </a:solidFill>
+              </a:rPr>
+              <a:t>Appropriate? </a:t>
+            </a:r>
+            <a:r>
+              <a:rPr sz="1600">
+                <a:solidFill>
+                  <a:srgbClr val="2B2B2B"/>
+                </a:solidFill>
+              </a:rPr>
+              <a:t>NO - 'fewer expansions' optimises the wrong thing. BFS/Greedy minimise tiles, not danger.</a:t>
             </a:r>
           </a:p>
           <a:p>
             <a:pPr>
+              <a:lnSpc>
+                <a:spcPct val="108000"/>
+              </a:lnSpc>
               <a:spcAft>
-                <a:spcPts val="600"/>
+                <a:spcPts val="1200"/>
               </a:spcAft>
             </a:pPr>
             <a:r>
-              <a:rPr sz="1300">
-                <a:solidFill>
-                  <a:srgbClr val="222222"/>
-                </a:solidFill>
-              </a:rPr>
-              <a:t>• Evidence: BFS route = 2.3x the cost through 9 burning tiles. A* = Dijkstra cost, fewer expansions -&gt; optimal AND fast.</a:t>
+              <a:rPr b="1" sz="1600">
+                <a:solidFill>
+                  <a:srgbClr val="C8820E"/>
+                </a:solidFill>
+              </a:rPr>
+              <a:t>▸  </a:t>
+            </a:r>
+            <a:r>
+              <a:rPr b="1" sz="1600">
+                <a:solidFill>
+                  <a:srgbClr val="1F4E79"/>
+                </a:solidFill>
+              </a:rPr>
+              <a:t>Evidence: </a:t>
+            </a:r>
+            <a:r>
+              <a:rPr sz="1600">
+                <a:solidFill>
+                  <a:srgbClr val="2B2B2B"/>
+                </a:solidFill>
+              </a:rPr>
+              <a:t>BFS route = 2.3x the cost through 9 burning tiles. A* = Dijkstra cost, fewer expansions -&gt; optimal AND fast.</a:t>
             </a:r>
           </a:p>
           <a:p>
             <a:pPr>
+              <a:lnSpc>
+                <a:spcPct val="108000"/>
+              </a:lnSpc>
               <a:spcAft>
-                <a:spcPts val="600"/>
+                <a:spcPts val="1200"/>
               </a:spcAft>
             </a:pPr>
             <a:r>
-              <a:rPr sz="1300">
-                <a:solidFill>
-                  <a:srgbClr val="222222"/>
-                </a:solidFill>
-              </a:rPr>
-              <a:t>• Decision: A* for routing; Greedy &amp; BFS rejected; BFS kept only for unweighted jobs.  Plus 12 unit tests.</a:t>
+              <a:rPr b="1" sz="1600">
+                <a:solidFill>
+                  <a:srgbClr val="C8820E"/>
+                </a:solidFill>
+              </a:rPr>
+              <a:t>▸  </a:t>
+            </a:r>
+            <a:r>
+              <a:rPr b="1" sz="1600">
+                <a:solidFill>
+                  <a:srgbClr val="1F4E79"/>
+                </a:solidFill>
+              </a:rPr>
+              <a:t>Decision: </a:t>
+            </a:r>
+            <a:r>
+              <a:rPr sz="1600">
+                <a:solidFill>
+                  <a:srgbClr val="2B2B2B"/>
+                </a:solidFill>
+              </a:rPr>
+              <a:t>A* for routing; Greedy &amp; BFS rejected; BFS kept only for unweighted jobs.  Plus 12 unit tests.</a:t>
+            </a:r>
+          </a:p>
+        </p:txBody>
+      </p:sp>
+      <p:sp>
+        <p:nvSpPr>
+          <p:cNvPr id="7" name="Rectangle 6"/>
+          <p:cNvSpPr/>
+          <p:nvPr/>
+        </p:nvSpPr>
+        <p:spPr>
+          <a:xfrm>
+            <a:off x="0" y="1051560"/>
+            <a:ext cx="12191695" cy="38100"/>
+          </a:xfrm>
+          <a:prstGeom prst="rect">
+            <a:avLst/>
+          </a:prstGeom>
+          <a:solidFill>
+            <a:srgbClr val="E0A23D"/>
+          </a:solidFill>
+          <a:ln>
+            <a:noFill/>
+          </a:ln>
+          <a:effectLst/>
+        </p:spPr>
+        <p:style>
+          <a:lnRef idx="1">
+            <a:schemeClr val="accent1"/>
+          </a:lnRef>
+          <a:fillRef idx="3">
+            <a:schemeClr val="accent1"/>
+          </a:fillRef>
+          <a:effectRef idx="2">
+            <a:schemeClr val="accent1"/>
+          </a:effectRef>
+          <a:fontRef idx="minor">
+            <a:schemeClr val="lt1"/>
+          </a:fontRef>
+        </p:style>
+        <p:txBody>
+          <a:bodyPr rtlCol="0" anchor="ctr"/>
+          <a:lstStyle/>
+          <a:p>
+            <a:pPr algn="ctr"/>
+          </a:p>
+        </p:txBody>
+      </p:sp>
+      <p:sp>
+        <p:nvSpPr>
+          <p:cNvPr id="8" name="Rounded Rectangle 7"/>
+          <p:cNvSpPr/>
+          <p:nvPr/>
+        </p:nvSpPr>
+        <p:spPr>
+          <a:xfrm>
+            <a:off x="457200" y="242316"/>
+            <a:ext cx="566928" cy="566928"/>
+          </a:xfrm>
+          <a:prstGeom prst="roundRect">
+            <a:avLst>
+              <a:gd name="adj" fmla="val 28000"/>
+            </a:avLst>
+          </a:prstGeom>
+          <a:solidFill>
+            <a:srgbClr val="C8820E"/>
+          </a:solidFill>
+          <a:ln>
+            <a:noFill/>
+          </a:ln>
+          <a:effectLst/>
+        </p:spPr>
+        <p:style>
+          <a:lnRef idx="1">
+            <a:schemeClr val="accent1"/>
+          </a:lnRef>
+          <a:fillRef idx="3">
+            <a:schemeClr val="accent1"/>
+          </a:fillRef>
+          <a:effectRef idx="2">
+            <a:schemeClr val="accent1"/>
+          </a:effectRef>
+          <a:fontRef idx="minor">
+            <a:schemeClr val="lt1"/>
+          </a:fontRef>
+        </p:style>
+        <p:txBody>
+          <a:bodyPr rtlCol="0" anchor="ctr" wrap="none" lIns="0" rIns="0" tIns="0" bIns="0"/>
+          <a:lstStyle/>
+          <a:p>
+            <a:pPr algn="ctr"/>
+            <a:r>
+              <a:rPr sz="2600" b="1">
+                <a:solidFill>
+                  <a:srgbClr val="1F4E79"/>
+                </a:solidFill>
+                <a:latin typeface="Calibri"/>
+              </a:rPr>
+              <a:t>6</a:t>
+            </a:r>
+          </a:p>
+        </p:txBody>
+      </p:sp>
+      <p:sp>
+        <p:nvSpPr>
+          <p:cNvPr id="9" name="Rectangle 8"/>
+          <p:cNvSpPr/>
+          <p:nvPr/>
+        </p:nvSpPr>
+        <p:spPr>
+          <a:xfrm>
+            <a:off x="457200" y="6510528"/>
+            <a:ext cx="11277295" cy="9525"/>
+          </a:xfrm>
+          <a:prstGeom prst="rect">
+            <a:avLst/>
+          </a:prstGeom>
+          <a:solidFill>
+            <a:srgbClr val="DDDDDD"/>
+          </a:solidFill>
+          <a:ln>
+            <a:noFill/>
+          </a:ln>
+          <a:effectLst/>
+        </p:spPr>
+        <p:style>
+          <a:lnRef idx="1">
+            <a:schemeClr val="accent1"/>
+          </a:lnRef>
+          <a:fillRef idx="3">
+            <a:schemeClr val="accent1"/>
+          </a:fillRef>
+          <a:effectRef idx="2">
+            <a:schemeClr val="accent1"/>
+          </a:effectRef>
+          <a:fontRef idx="minor">
+            <a:schemeClr val="lt1"/>
+          </a:fontRef>
+        </p:style>
+        <p:txBody>
+          <a:bodyPr rtlCol="0" anchor="ctr"/>
+          <a:lstStyle/>
+          <a:p>
+            <a:pPr algn="ctr"/>
+          </a:p>
+        </p:txBody>
+      </p:sp>
+      <p:sp>
+        <p:nvSpPr>
+          <p:cNvPr id="10" name="TextBox 9"/>
+          <p:cNvSpPr txBox="1"/>
+          <p:nvPr/>
+        </p:nvSpPr>
+        <p:spPr>
+          <a:xfrm>
+            <a:off x="457200" y="6565392"/>
+            <a:ext cx="5486400" cy="274320"/>
+          </a:xfrm>
+          <a:prstGeom prst="rect">
+            <a:avLst/>
+          </a:prstGeom>
+          <a:noFill/>
+        </p:spPr>
+        <p:txBody>
+          <a:bodyPr wrap="none" lIns="0" tIns="0" bIns="0">
+            <a:spAutoFit/>
+          </a:bodyPr>
+          <a:lstStyle/>
+          <a:p>
+            <a:r>
+              <a:rPr sz="900">
+                <a:solidFill>
+                  <a:srgbClr val="9A9A9A"/>
+                </a:solidFill>
+              </a:rPr>
+              <a:t>Pyro Pete: Emergency Evacuation  ·  CT3201 Mini Project</a:t>
+            </a:r>
+          </a:p>
+        </p:txBody>
+      </p:sp>
+      <p:sp>
+        <p:nvSpPr>
+          <p:cNvPr id="11" name="TextBox 10"/>
+          <p:cNvSpPr txBox="1"/>
+          <p:nvPr/>
+        </p:nvSpPr>
+        <p:spPr>
+          <a:xfrm>
+            <a:off x="10820095" y="6565392"/>
+            <a:ext cx="914400" cy="274320"/>
+          </a:xfrm>
+          <a:prstGeom prst="rect">
+            <a:avLst/>
+          </a:prstGeom>
+          <a:noFill/>
+        </p:spPr>
+        <p:txBody>
+          <a:bodyPr wrap="none" lIns="0" tIns="0" bIns="0">
+            <a:spAutoFit/>
+          </a:bodyPr>
+          <a:lstStyle/>
+          <a:p>
+            <a:pPr algn="r"/>
+            <a:r>
+              <a:rPr sz="900">
+                <a:solidFill>
+                  <a:srgbClr val="9A9A9A"/>
+                </a:solidFill>
+              </a:rPr>
+              <a:t>7</a:t>
             </a:r>
           </a:p>
         </p:txBody>
@@ -5556,14 +8590,58 @@
       <p:grpSpPr/>
       <p:sp>
         <p:nvSpPr>
+          <p:cNvPr id="5" name="Rectangle 4"/>
+          <p:cNvSpPr/>
+          <p:nvPr/>
+        </p:nvSpPr>
+        <p:spPr>
+          <a:xfrm>
+            <a:off x="0" y="0"/>
+            <a:ext cx="12191695" cy="1051560"/>
+          </a:xfrm>
+          <a:prstGeom prst="rect">
+            <a:avLst/>
+          </a:prstGeom>
+          <a:solidFill>
+            <a:srgbClr val="1F4E79"/>
+          </a:solidFill>
+          <a:ln>
+            <a:noFill/>
+          </a:ln>
+          <a:effectLst/>
+        </p:spPr>
+        <p:style>
+          <a:lnRef idx="1">
+            <a:schemeClr val="accent1"/>
+          </a:lnRef>
+          <a:fillRef idx="3">
+            <a:schemeClr val="accent1"/>
+          </a:fillRef>
+          <a:effectRef idx="2">
+            <a:schemeClr val="accent1"/>
+          </a:effectRef>
+          <a:fontRef idx="minor">
+            <a:schemeClr val="lt1"/>
+          </a:fontRef>
+        </p:style>
+        <p:txBody>
+          <a:bodyPr rtlCol="0" anchor="ctr"/>
+          <a:lstStyle/>
+          <a:p>
+            <a:pPr algn="ctr"/>
+          </a:p>
+        </p:txBody>
+      </p:sp>
+      <p:sp>
+        <p:nvSpPr>
           <p:cNvPr id="2" name="TextBox 1"/>
           <p:cNvSpPr txBox="1"/>
           <p:nvPr/>
         </p:nvSpPr>
         <p:spPr>
           <a:xfrm>
-            <a:off x="548640" y="320040"/>
-            <a:ext cx="11064240" cy="822960"/>
+            <a:off x="1234440" y="91440"/>
+            <a:ext cx="10728655" cy="960120"/>
           </a:xfrm>
           <a:prstGeom prst="rect">
             <a:avLst/>
@@ -5571,15 +8649,15 @@
           <a:noFill/>
         </p:spPr>
         <p:txBody>
-          <a:bodyPr wrap="none">
+          <a:bodyPr wrap="none" anchor="ctr">
             <a:spAutoFit/>
           </a:bodyPr>
           <a:lstStyle/>
           <a:p>
             <a:r>
-              <a:rPr sz="3000" b="1">
-                <a:solidFill>
-                  <a:srgbClr val="1F4E79"/>
+              <a:rPr sz="2600" b="1">
+                <a:solidFill>
+                  <a:srgbClr val="FFFFFF"/>
                 </a:solidFill>
               </a:rPr>
               <a:t>7 - Responsible AI</a:t>
@@ -5587,9 +8665,9 @@
           </a:p>
           <a:p>
             <a:r>
-              <a:rPr sz="1300">
-                <a:solidFill>
-                  <a:srgbClr val="666666"/>
+              <a:rPr sz="1200">
+                <a:solidFill>
+                  <a:srgbClr val="C9D7E4"/>
                 </a:solidFill>
               </a:rPr>
               <a:t>Phase 7, Stage 8 - should this system be deployed?</a:t>
@@ -5886,17 +8964,246 @@
           <a:lstStyle/>
           <a:p>
             <a:pPr>
+              <a:lnSpc>
+                <a:spcPct val="108000"/>
+              </a:lnSpc>
               <a:spcAft>
-                <a:spcPts val="600"/>
+                <a:spcPts val="1200"/>
               </a:spcAft>
             </a:pPr>
             <a:r>
+              <a:rPr b="1" sz="1600">
+                <a:solidFill>
+                  <a:srgbClr val="C8820E"/>
+                </a:solidFill>
+              </a:rPr>
+              <a:t>▸  </a:t>
+            </a:r>
+            <a:r>
+              <a:rPr b="1" sz="1600">
+                <a:solidFill>
+                  <a:srgbClr val="1F4E79"/>
+                </a:solidFill>
+              </a:rPr>
+              <a:t>Should it deploy? </a:t>
+            </a:r>
+            <a:r>
               <a:rPr sz="1600">
                 <a:solidFill>
-                  <a:srgbClr val="222222"/>
-                </a:solidFill>
-              </a:rPr>
-              <a:t>Should it deploy? Not as an autonomous router (no triage, trusts its hazard map blindly) — yes as a transparent aid a trained rescuer can override, if the sensor feed's integrity is assured and triage replaces greedy nearest-first</a:t>
+                  <a:srgbClr val="2B2B2B"/>
+                </a:solidFill>
+              </a:rPr>
+              <a:t>Not as an autonomous router (no triage, trusts its hazard map blindly) — yes as a transparent aid a trained rescuer can override, if the sensor feed's integrity is assured and triage replaces greedy nearest-first</a:t>
+            </a:r>
+          </a:p>
+        </p:txBody>
+      </p:sp>
+      <p:sp>
+        <p:nvSpPr>
+          <p:cNvPr id="6" name="Rectangle 5"/>
+          <p:cNvSpPr/>
+          <p:nvPr/>
+        </p:nvSpPr>
+        <p:spPr>
+          <a:xfrm>
+            <a:off x="0" y="1051560"/>
+            <a:ext cx="12191695" cy="38100"/>
+          </a:xfrm>
+          <a:prstGeom prst="rect">
+            <a:avLst/>
+          </a:prstGeom>
+          <a:solidFill>
+            <a:srgbClr val="E0A23D"/>
+          </a:solidFill>
+          <a:ln>
+            <a:noFill/>
+          </a:ln>
+          <a:effectLst/>
+        </p:spPr>
+        <p:style>
+          <a:lnRef idx="1">
+            <a:schemeClr val="accent1"/>
+          </a:lnRef>
+          <a:fillRef idx="3">
+            <a:schemeClr val="accent1"/>
+          </a:fillRef>
+          <a:effectRef idx="2">
+            <a:schemeClr val="accent1"/>
+          </a:effectRef>
+          <a:fontRef idx="minor">
+            <a:schemeClr val="lt1"/>
+          </a:fontRef>
+        </p:style>
+        <p:txBody>
+          <a:bodyPr rtlCol="0" anchor="ctr"/>
+          <a:lstStyle/>
+          <a:p>
+            <a:pPr algn="ctr"/>
+          </a:p>
+        </p:txBody>
+      </p:sp>
+      <p:sp>
+        <p:nvSpPr>
+          <p:cNvPr id="7" name="Rounded Rectangle 6"/>
+          <p:cNvSpPr/>
+          <p:nvPr/>
+        </p:nvSpPr>
+        <p:spPr>
+          <a:xfrm>
+            <a:off x="457200" y="242316"/>
+            <a:ext cx="566928" cy="566928"/>
+          </a:xfrm>
+          <a:prstGeom prst="roundRect">
+            <a:avLst>
+              <a:gd name="adj" fmla="val 28000"/>
+            </a:avLst>
+          </a:prstGeom>
+          <a:solidFill>
+            <a:srgbClr val="C8820E"/>
+          </a:solidFill>
+          <a:ln>
+            <a:noFill/>
+          </a:ln>
+          <a:effectLst/>
+        </p:spPr>
+        <p:style>
+          <a:lnRef idx="1">
+            <a:schemeClr val="accent1"/>
+          </a:lnRef>
+          <a:fillRef idx="3">
+            <a:schemeClr val="accent1"/>
+          </a:fillRef>
+          <a:effectRef idx="2">
+            <a:schemeClr val="accent1"/>
+          </a:effectRef>
+          <a:fontRef idx="minor">
+            <a:schemeClr val="lt1"/>
+          </a:fontRef>
+        </p:style>
+        <p:txBody>
+          <a:bodyPr rtlCol="0" anchor="ctr" wrap="none" lIns="0" rIns="0" tIns="0" bIns="0"/>
+          <a:lstStyle/>
+          <a:p>
+            <a:pPr algn="ctr"/>
+            <a:r>
+              <a:rPr sz="2600" b="1">
+                <a:solidFill>
+                  <a:srgbClr val="1F4E79"/>
+                </a:solidFill>
+                <a:latin typeface="Calibri"/>
+              </a:rPr>
+              <a:t>7</a:t>
+            </a:r>
+          </a:p>
+        </p:txBody>
+      </p:sp>
+      <p:sp>
+        <p:nvSpPr>
+          <p:cNvPr id="8" name="Rectangle 7"/>
+          <p:cNvSpPr/>
+          <p:nvPr/>
+        </p:nvSpPr>
+        <p:spPr>
+          <a:xfrm>
+            <a:off x="457200" y="6510528"/>
+            <a:ext cx="11277295" cy="9525"/>
+          </a:xfrm>
+          <a:prstGeom prst="rect">
+            <a:avLst/>
+          </a:prstGeom>
+          <a:solidFill>
+            <a:srgbClr val="DDDDDD"/>
+          </a:solidFill>
+          <a:ln>
+            <a:noFill/>
+          </a:ln>
+          <a:effectLst/>
+        </p:spPr>
+        <p:style>
+          <a:lnRef idx="1">
+            <a:schemeClr val="accent1"/>
+          </a:lnRef>
+          <a:fillRef idx="3">
+            <a:schemeClr val="accent1"/>
+          </a:fillRef>
+          <a:effectRef idx="2">
+            <a:schemeClr val="accent1"/>
+          </a:effectRef>
+          <a:fontRef idx="minor">
+            <a:schemeClr val="lt1"/>
+          </a:fontRef>
+        </p:style>
+        <p:txBody>
+          <a:bodyPr rtlCol="0" anchor="ctr"/>
+          <a:lstStyle/>
+          <a:p>
+            <a:pPr algn="ctr"/>
+          </a:p>
+        </p:txBody>
+      </p:sp>
+      <p:sp>
+        <p:nvSpPr>
+          <p:cNvPr id="9" name="TextBox 8"/>
+          <p:cNvSpPr txBox="1"/>
+          <p:nvPr/>
+        </p:nvSpPr>
+        <p:spPr>
+          <a:xfrm>
+            <a:off x="457200" y="6565392"/>
+            <a:ext cx="5486400" cy="274320"/>
+          </a:xfrm>
+          <a:prstGeom prst="rect">
+            <a:avLst/>
+          </a:prstGeom>
+          <a:noFill/>
+        </p:spPr>
+        <p:txBody>
+          <a:bodyPr wrap="none" lIns="0" tIns="0" bIns="0">
+            <a:spAutoFit/>
+          </a:bodyPr>
+          <a:lstStyle/>
+          <a:p>
+            <a:r>
+              <a:rPr sz="900">
+                <a:solidFill>
+                  <a:srgbClr val="9A9A9A"/>
+                </a:solidFill>
+              </a:rPr>
+              <a:t>Pyro Pete: Emergency Evacuation  ·  CT3201 Mini Project</a:t>
+            </a:r>
+          </a:p>
+        </p:txBody>
+      </p:sp>
+      <p:sp>
+        <p:nvSpPr>
+          <p:cNvPr id="10" name="TextBox 9"/>
+          <p:cNvSpPr txBox="1"/>
+          <p:nvPr/>
+        </p:nvSpPr>
+        <p:spPr>
+          <a:xfrm>
+            <a:off x="10820095" y="6565392"/>
+            <a:ext cx="914400" cy="274320"/>
+          </a:xfrm>
+          <a:prstGeom prst="rect">
+            <a:avLst/>
+          </a:prstGeom>
+          <a:noFill/>
+        </p:spPr>
+        <p:txBody>
+          <a:bodyPr wrap="none" lIns="0" tIns="0" bIns="0">
+            <a:spAutoFit/>
+          </a:bodyPr>
+          <a:lstStyle/>
+          <a:p>
+            <a:pPr algn="r"/>
+            <a:r>
+              <a:rPr sz="900">
+                <a:solidFill>
+                  <a:srgbClr val="9A9A9A"/>
+                </a:solidFill>
+              </a:rPr>
+              <a:t>8</a:t>
             </a:r>
           </a:p>
         </p:txBody>
@@ -5921,14 +9228,58 @@
       <p:grpSpPr/>
       <p:sp>
         <p:nvSpPr>
+          <p:cNvPr id="4" name="Rectangle 3"/>
+          <p:cNvSpPr/>
+          <p:nvPr/>
+        </p:nvSpPr>
+        <p:spPr>
+          <a:xfrm>
+            <a:off x="0" y="0"/>
+            <a:ext cx="12191695" cy="1051560"/>
+          </a:xfrm>
+          <a:prstGeom prst="rect">
+            <a:avLst/>
+          </a:prstGeom>
+          <a:solidFill>
+            <a:srgbClr val="1F4E79"/>
+          </a:solidFill>
+          <a:ln>
+            <a:noFill/>
+          </a:ln>
+          <a:effectLst/>
+        </p:spPr>
+        <p:style>
+          <a:lnRef idx="1">
+            <a:schemeClr val="accent1"/>
+          </a:lnRef>
+          <a:fillRef idx="3">
+            <a:schemeClr val="accent1"/>
+          </a:fillRef>
+          <a:effectRef idx="2">
+            <a:schemeClr val="accent1"/>
+          </a:effectRef>
+          <a:fontRef idx="minor">
+            <a:schemeClr val="lt1"/>
+          </a:fontRef>
+        </p:style>
+        <p:txBody>
+          <a:bodyPr rtlCol="0" anchor="ctr"/>
+          <a:lstStyle/>
+          <a:p>
+            <a:pPr algn="ctr"/>
+          </a:p>
+        </p:txBody>
+      </p:sp>
+      <p:sp>
+        <p:nvSpPr>
           <p:cNvPr id="2" name="TextBox 1"/>
           <p:cNvSpPr txBox="1"/>
           <p:nvPr/>
         </p:nvSpPr>
         <p:spPr>
           <a:xfrm>
-            <a:off x="548640" y="320040"/>
-            <a:ext cx="11064240" cy="822960"/>
+            <a:off x="1234440" y="91440"/>
+            <a:ext cx="10728655" cy="960120"/>
           </a:xfrm>
           <a:prstGeom prst="rect">
             <a:avLst/>
@@ -5936,15 +9287,15 @@
           <a:noFill/>
         </p:spPr>
         <p:txBody>
-          <a:bodyPr wrap="none">
+          <a:bodyPr wrap="none" anchor="ctr">
             <a:spAutoFit/>
           </a:bodyPr>
           <a:lstStyle/>
           <a:p>
             <a:r>
-              <a:rPr sz="3000" b="1">
-                <a:solidFill>
-                  <a:srgbClr val="1F4E79"/>
+              <a:rPr sz="2600" b="1">
+                <a:solidFill>
+                  <a:srgbClr val="FFFFFF"/>
                 </a:solidFill>
               </a:rPr>
               <a:t>Critical Evaluation — What AI Got Wrong</a:t>
@@ -5952,9 +9303,9 @@
           </a:p>
           <a:p>
             <a:r>
-              <a:rPr sz="1300">
-                <a:solidFill>
-                  <a:srgbClr val="666666"/>
+              <a:rPr sz="1200">
+                <a:solidFill>
+                  <a:srgbClr val="C9D7E4"/>
                 </a:solidFill>
               </a:rPr>
               <a:t>Compulsory slide — what worked, what didn't, how it was verified</a:t>
@@ -5985,89 +9336,195 @@
           <a:lstStyle/>
           <a:p>
             <a:pPr>
+              <a:lnSpc>
+                <a:spcPct val="108000"/>
+              </a:lnSpc>
               <a:spcAft>
-                <a:spcPts val="600"/>
+                <a:spcPts val="1200"/>
               </a:spcAft>
             </a:pPr>
             <a:r>
-              <a:rPr sz="1500">
-                <a:solidFill>
-                  <a:srgbClr val="222222"/>
-                </a:solidFill>
-              </a:rPr>
-              <a:t>What worked: side-view (left/right) walk clips, concept art, the whole implementation</a:t>
+              <a:rPr b="1" sz="1600">
+                <a:solidFill>
+                  <a:srgbClr val="C8820E"/>
+                </a:solidFill>
+              </a:rPr>
+              <a:t>▸  </a:t>
+            </a:r>
+            <a:r>
+              <a:rPr b="1" sz="1600">
+                <a:solidFill>
+                  <a:srgbClr val="1F4E79"/>
+                </a:solidFill>
+              </a:rPr>
+              <a:t>What worked: </a:t>
+            </a:r>
+            <a:r>
+              <a:rPr sz="1600">
+                <a:solidFill>
+                  <a:srgbClr val="2B2B2B"/>
+                </a:solidFill>
+              </a:rPr>
+              <a:t>side-view (left/right) walk clips, concept art, the whole implementation</a:t>
             </a:r>
           </a:p>
           <a:p>
             <a:pPr>
+              <a:lnSpc>
+                <a:spcPct val="108000"/>
+              </a:lnSpc>
               <a:spcAft>
-                <a:spcPts val="600"/>
+                <a:spcPts val="1200"/>
               </a:spcAft>
             </a:pPr>
             <a:r>
-              <a:rPr sz="1500">
-                <a:solidFill>
-                  <a:srgbClr val="222222"/>
-                </a:solidFill>
-              </a:rPr>
-              <a:t>What didn't: no working “toward camera” or “away from camera” walk, across multiple re-prompts — that axis never worked</a:t>
+              <a:rPr b="1" sz="1600">
+                <a:solidFill>
+                  <a:srgbClr val="C8820E"/>
+                </a:solidFill>
+              </a:rPr>
+              <a:t>▸  </a:t>
+            </a:r>
+            <a:r>
+              <a:rPr b="1" sz="1600">
+                <a:solidFill>
+                  <a:srgbClr val="1F4E79"/>
+                </a:solidFill>
+              </a:rPr>
+              <a:t>What didn't: </a:t>
+            </a:r>
+            <a:r>
+              <a:rPr sz="1600">
+                <a:solidFill>
+                  <a:srgbClr val="2B2B2B"/>
+                </a:solidFill>
+              </a:rPr>
+              <a:t>no working “toward camera” or “away from camera” walk, across multiple re-prompts — that axis never worked</a:t>
             </a:r>
           </a:p>
           <a:p>
             <a:pPr>
+              <a:lnSpc>
+                <a:spcPct val="108000"/>
+              </a:lnSpc>
               <a:spcAft>
-                <a:spcPts val="600"/>
+                <a:spcPts val="1200"/>
               </a:spcAft>
             </a:pPr>
             <a:r>
-              <a:rPr sz="1500">
-                <a:solidFill>
-                  <a:srgbClr val="222222"/>
-                </a:solidFill>
-              </a:rPr>
-              <a:t>What AI got wrong: it treated “looks like a walk” as done; it never delivered a complete, 4-direction, production-ready set</a:t>
+              <a:rPr b="1" sz="1600">
+                <a:solidFill>
+                  <a:srgbClr val="C8820E"/>
+                </a:solidFill>
+              </a:rPr>
+              <a:t>▸  </a:t>
+            </a:r>
+            <a:r>
+              <a:rPr b="1" sz="1600">
+                <a:solidFill>
+                  <a:srgbClr val="1F4E79"/>
+                </a:solidFill>
+              </a:rPr>
+              <a:t>What AI got wrong: </a:t>
+            </a:r>
+            <a:r>
+              <a:rPr sz="1600">
+                <a:solidFill>
+                  <a:srgbClr val="2B2B2B"/>
+                </a:solidFill>
+              </a:rPr>
+              <a:t>it treated “looks like a walk” as done; it never delivered a complete, 4-direction, production-ready set</a:t>
             </a:r>
           </a:p>
           <a:p>
             <a:pPr>
+              <a:lnSpc>
+                <a:spcPct val="108000"/>
+              </a:lnSpc>
               <a:spcAft>
-                <a:spcPts val="600"/>
+                <a:spcPts val="1200"/>
               </a:spcAft>
             </a:pPr>
             <a:r>
-              <a:rPr sz="1500">
-                <a:solidFill>
-                  <a:srgbClr val="222222"/>
-                </a:solidFill>
-              </a:rPr>
-              <a:t>How verified: checked against the engine's own requirements — 4 directions, fixed sprite size, feet-anchored — it met exactly one of four</a:t>
+              <a:rPr b="1" sz="1600">
+                <a:solidFill>
+                  <a:srgbClr val="C8820E"/>
+                </a:solidFill>
+              </a:rPr>
+              <a:t>▸  </a:t>
+            </a:r>
+            <a:r>
+              <a:rPr b="1" sz="1600">
+                <a:solidFill>
+                  <a:srgbClr val="1F4E79"/>
+                </a:solidFill>
+              </a:rPr>
+              <a:t>How verified: </a:t>
+            </a:r>
+            <a:r>
+              <a:rPr sz="1600">
+                <a:solidFill>
+                  <a:srgbClr val="2B2B2B"/>
+                </a:solidFill>
+              </a:rPr>
+              <a:t>checked against the engine's own requirements — 4 directions, fixed sprite size, feet-anchored — it met exactly one of four</a:t>
             </a:r>
           </a:p>
           <a:p>
             <a:pPr>
+              <a:lnSpc>
+                <a:spcPct val="108000"/>
+              </a:lnSpc>
               <a:spcAft>
-                <a:spcPts val="600"/>
+                <a:spcPts val="1200"/>
               </a:spcAft>
             </a:pPr>
             <a:r>
-              <a:rPr sz="1500">
-                <a:solidFill>
-                  <a:srgbClr val="222222"/>
-                </a:solidFill>
-              </a:rPr>
-              <a:t>Corrected: assembled the 4-direction set from mixed sources (front/back from the character sheet, one side frame mirrored) + a procedural walk bob</a:t>
+              <a:rPr b="1" sz="1600">
+                <a:solidFill>
+                  <a:srgbClr val="C8820E"/>
+                </a:solidFill>
+              </a:rPr>
+              <a:t>▸  </a:t>
+            </a:r>
+            <a:r>
+              <a:rPr b="1" sz="1600">
+                <a:solidFill>
+                  <a:srgbClr val="1F4E79"/>
+                </a:solidFill>
+              </a:rPr>
+              <a:t>Corrected: </a:t>
+            </a:r>
+            <a:r>
+              <a:rPr sz="1600">
+                <a:solidFill>
+                  <a:srgbClr val="2B2B2B"/>
+                </a:solidFill>
+              </a:rPr>
+              <a:t>assembled the 4-direction set from mixed sources (front/back from the character sheet, one side frame mirrored) + a procedural walk bob</a:t>
             </a:r>
           </a:p>
           <a:p>
             <a:pPr>
+              <a:lnSpc>
+                <a:spcPct val="108000"/>
+              </a:lnSpc>
               <a:spcAft>
-                <a:spcPts val="600"/>
+                <a:spcPts val="1200"/>
               </a:spcAft>
             </a:pPr>
             <a:r>
-              <a:rPr sz="1500">
-                <a:solidFill>
-                  <a:srgbClr val="222222"/>
+              <a:rPr b="1" sz="1600">
+                <a:solidFill>
+                  <a:srgbClr val="C8820E"/>
+                </a:solidFill>
+              </a:rPr>
+              <a:t>▸  </a:t>
+            </a:r>
+            <a:r>
+              <a:rPr sz="1600">
+                <a:solidFill>
+                  <a:srgbClr val="2B2B2B"/>
                 </a:solidFill>
               </a:rPr>
               <a:t>This is the mandatory identified → verified → corrected example.</a:t>
@@ -6075,6 +9532,240 @@
           </a:p>
         </p:txBody>
       </p:sp>
+      <p:sp>
+        <p:nvSpPr>
+          <p:cNvPr id="5" name="Rectangle 4"/>
+          <p:cNvSpPr/>
+          <p:nvPr/>
+        </p:nvSpPr>
+        <p:spPr>
+          <a:xfrm>
+            <a:off x="0" y="1051560"/>
+            <a:ext cx="12191695" cy="38100"/>
+          </a:xfrm>
+          <a:prstGeom prst="rect">
+            <a:avLst/>
+          </a:prstGeom>
+          <a:solidFill>
+            <a:srgbClr val="E0A23D"/>
+          </a:solidFill>
+          <a:ln>
+            <a:noFill/>
+          </a:ln>
+          <a:effectLst/>
+        </p:spPr>
+        <p:style>
+          <a:lnRef idx="1">
+            <a:schemeClr val="accent1"/>
+          </a:lnRef>
+          <a:fillRef idx="3">
+            <a:schemeClr val="accent1"/>
+          </a:fillRef>
+          <a:effectRef idx="2">
+            <a:schemeClr val="accent1"/>
+          </a:effectRef>
+          <a:fontRef idx="minor">
+            <a:schemeClr val="lt1"/>
+          </a:fontRef>
+        </p:style>
+        <p:txBody>
+          <a:bodyPr rtlCol="0" anchor="ctr"/>
+          <a:lstStyle/>
+          <a:p>
+            <a:pPr algn="ctr"/>
+          </a:p>
+        </p:txBody>
+      </p:sp>
+      <p:sp>
+        <p:nvSpPr>
+          <p:cNvPr id="6" name="Rounded Rectangle 5"/>
+          <p:cNvSpPr/>
+          <p:nvPr/>
+        </p:nvSpPr>
+        <p:spPr>
+          <a:xfrm>
+            <a:off x="457200" y="242316"/>
+            <a:ext cx="566928" cy="566928"/>
+          </a:xfrm>
+          <a:prstGeom prst="roundRect">
+            <a:avLst>
+              <a:gd name="adj" fmla="val 28000"/>
+            </a:avLst>
+          </a:prstGeom>
+          <a:solidFill>
+            <a:srgbClr val="C8820E"/>
+          </a:solidFill>
+          <a:ln>
+            <a:noFill/>
+          </a:ln>
+          <a:effectLst/>
+        </p:spPr>
+        <p:style>
+          <a:lnRef idx="1">
+            <a:schemeClr val="accent1"/>
+          </a:lnRef>
+          <a:fillRef idx="3">
+            <a:schemeClr val="accent1"/>
+          </a:fillRef>
+          <a:effectRef idx="2">
+            <a:schemeClr val="accent1"/>
+          </a:effectRef>
+          <a:fontRef idx="minor">
+            <a:schemeClr val="lt1"/>
+          </a:fontRef>
+        </p:style>
+        <p:txBody>
+          <a:bodyPr rtlCol="0" anchor="ctr" wrap="none" lIns="0" rIns="0" tIns="0" bIns="0"/>
+          <a:lstStyle/>
+          <a:p>
+            <a:pPr algn="ctr"/>
+            <a:r>
+              <a:rPr sz="2600" b="1">
+                <a:solidFill>
+                  <a:srgbClr val="1F4E79"/>
+                </a:solidFill>
+                <a:latin typeface="Calibri"/>
+              </a:rPr>
+              <a:t>!</a:t>
+            </a:r>
+          </a:p>
+        </p:txBody>
+      </p:sp>
+      <p:sp>
+        <p:nvSpPr>
+          <p:cNvPr id="7" name="Rectangle 6"/>
+          <p:cNvSpPr/>
+          <p:nvPr/>
+        </p:nvSpPr>
+        <p:spPr>
+          <a:xfrm>
+            <a:off x="457200" y="6510528"/>
+            <a:ext cx="11277295" cy="9525"/>
+          </a:xfrm>
+          <a:prstGeom prst="rect">
+            <a:avLst/>
+          </a:prstGeom>
+          <a:solidFill>
+            <a:srgbClr val="DDDDDD"/>
+          </a:solidFill>
+          <a:ln>
+            <a:noFill/>
+          </a:ln>
+          <a:effectLst/>
+        </p:spPr>
+        <p:style>
+          <a:lnRef idx="1">
+            <a:schemeClr val="accent1"/>
+          </a:lnRef>
+          <a:fillRef idx="3">
+            <a:schemeClr val="accent1"/>
+          </a:fillRef>
+          <a:effectRef idx="2">
+            <a:schemeClr val="accent1"/>
+          </a:effectRef>
+          <a:fontRef idx="minor">
+            <a:schemeClr val="lt1"/>
+          </a:fontRef>
+        </p:style>
+        <p:txBody>
+          <a:bodyPr rtlCol="0" anchor="ctr"/>
+          <a:lstStyle/>
+          <a:p>
+            <a:pPr algn="ctr"/>
+          </a:p>
+        </p:txBody>
+      </p:sp>
+      <p:sp>
+        <p:nvSpPr>
+          <p:cNvPr id="8" name="TextBox 7"/>
+          <p:cNvSpPr txBox="1"/>
+          <p:nvPr/>
+        </p:nvSpPr>
+        <p:spPr>
+          <a:xfrm>
+            <a:off x="457200" y="6565392"/>
+            <a:ext cx="5486400" cy="274320"/>
+          </a:xfrm>
+          <a:prstGeom prst="rect">
+            <a:avLst/>
+          </a:prstGeom>
+          <a:noFill/>
+        </p:spPr>
+        <p:txBody>
+          <a:bodyPr wrap="none" lIns="0" tIns="0" bIns="0">
+            <a:spAutoFit/>
+          </a:bodyPr>
+          <a:lstStyle/>
+          <a:p>
+            <a:r>
+              <a:rPr sz="900">
+                <a:solidFill>
+                  <a:srgbClr val="9A9A9A"/>
+                </a:solidFill>
+              </a:rPr>
+              <a:t>Pyro Pete: Emergency Evacuation  ·  CT3201 Mini Project</a:t>
+            </a:r>
+          </a:p>
+        </p:txBody>
+      </p:sp>
+      <p:sp>
+        <p:nvSpPr>
+          <p:cNvPr id="9" name="TextBox 8"/>
+          <p:cNvSpPr txBox="1"/>
+          <p:nvPr/>
+        </p:nvSpPr>
+        <p:spPr>
+          <a:xfrm>
+            <a:off x="10820095" y="6565392"/>
+            <a:ext cx="914400" cy="274320"/>
+          </a:xfrm>
+          <a:prstGeom prst="rect">
+            <a:avLst/>
+          </a:prstGeom>
+          <a:noFill/>
+        </p:spPr>
+        <p:txBody>
+          <a:bodyPr wrap="none" lIns="0" tIns="0" bIns="0">
+            <a:spAutoFit/>
+          </a:bodyPr>
+          <a:lstStyle/>
+          <a:p>
+            <a:pPr algn="r"/>
+            <a:r>
+              <a:rPr sz="900">
+                <a:solidFill>
+                  <a:srgbClr val="9A9A9A"/>
+                </a:solidFill>
+              </a:rPr>
+              <a:t>9</a:t>
+            </a:r>
+          </a:p>
+        </p:txBody>
+      </p:sp>
+      <p:pic>
+        <p:nvPicPr>
+          <p:cNvPr id="10" name="Picture 9" descr="npc_fourdir.png"/>
+          <p:cNvPicPr>
+            <a:picLocks noChangeAspect="1"/>
+          </p:cNvPicPr>
+          <p:nvPr/>
+        </p:nvPicPr>
+        <p:blipFill>
+          <a:blip r:embed="rId2"/>
+          <a:stretch>
+            <a:fillRect/>
+          </a:stretch>
+        </p:blipFill>
+        <p:spPr>
+          <a:xfrm>
+            <a:off x="1188720" y="4343400"/>
+            <a:ext cx="4074193" cy="1920240"/>
+          </a:xfrm>
+          <a:prstGeom prst="rect">
+            <a:avLst/>
+          </a:prstGeom>
+        </p:spPr>
+      </p:pic>
     </p:spTree>
   </p:cSld>
   <p:clrMapOvr>

--- a/docs/report/CT3201_Slides.pptx
+++ b/docs/report/CT3201_Slides.pptx
@@ -5227,7 +5227,7 @@
                     <a:lstStyle/>
                     <a:p>
                       <a:r>
-                        <a:rPr sz="1100" b="1">
+                        <a:rPr sz="1300" b="1">
                           <a:solidFill>
                             <a:srgbClr val="FFFFFF"/>
                           </a:solidFill>
@@ -5248,7 +5248,7 @@
                     <a:lstStyle/>
                     <a:p>
                       <a:r>
-                        <a:rPr sz="1100" b="1">
+                        <a:rPr sz="1300" b="1">
                           <a:solidFill>
                             <a:srgbClr val="FFFFFF"/>
                           </a:solidFill>
@@ -5271,7 +5271,7 @@
                     <a:lstStyle/>
                     <a:p>
                       <a:r>
-                        <a:rPr sz="1100"/>
+                        <a:rPr sz="1300"/>
                         <a:t>Agent</a:t>
                       </a:r>
                     </a:p>
@@ -5284,7 +5284,7 @@
                     <a:lstStyle/>
                     <a:p>
                       <a:r>
-                        <a:rPr sz="1100"/>
+                        <a:rPr sz="1300"/>
                         <a:t>one autonomous rescue unit (robot or drone skin, player's choice; human plays the same role)</a:t>
                       </a:r>
                     </a:p>
@@ -5299,7 +5299,7 @@
                     <a:lstStyle/>
                     <a:p>
                       <a:r>
-                        <a:rPr sz="1100"/>
+                        <a:rPr sz="1300"/>
                         <a:t>State</a:t>
                       </a:r>
                     </a:p>
@@ -5312,7 +5312,7 @@
                     <a:lstStyle/>
                     <a:p>
                       <a:r>
-                        <a:rPr sz="1100"/>
+                        <a:rPr sz="1300"/>
                         <a:t>current cell · occupant statuses · map seen so far · health</a:t>
                       </a:r>
                     </a:p>
@@ -5327,7 +5327,7 @@
                     <a:lstStyle/>
                     <a:p>
                       <a:r>
-                        <a:rPr sz="1100"/>
+                        <a:rPr sz="1300"/>
                         <a:t>Actions</a:t>
                       </a:r>
                     </a:p>
@@ -5340,7 +5340,7 @@
                     <a:lstStyle/>
                     <a:p>
                       <a:r>
-                        <a:rPr sz="1100"/>
+                        <a:rPr sz="1300"/>
                         <a:t>move to one of the 4 adjacent floor cells</a:t>
                       </a:r>
                     </a:p>
@@ -5355,7 +5355,7 @@
                     <a:lstStyle/>
                     <a:p>
                       <a:r>
-                        <a:rPr sz="1100"/>
+                        <a:rPr sz="1300"/>
                         <a:t>Goal</a:t>
                       </a:r>
                     </a:p>
@@ -5368,7 +5368,7 @@
                     <a:lstStyle/>
                     <a:p>
                       <a:r>
-                        <a:rPr sz="1100"/>
+                        <a:rPr sz="1300"/>
                         <a:t>lead every reachable occupant to the exit, then exit</a:t>
                       </a:r>
                     </a:p>
@@ -5383,7 +5383,7 @@
                     <a:lstStyle/>
                     <a:p>
                       <a:r>
-                        <a:rPr sz="1100"/>
+                        <a:rPr sz="1300"/>
                         <a:t>Cost</a:t>
                       </a:r>
                     </a:p>
@@ -5396,7 +5396,7 @@
                     <a:lstStyle/>
                     <a:p>
                       <a:r>
-                        <a:rPr sz="1100"/>
+                        <a:rPr sz="1300"/>
                         <a:t>1 / step + hazard surcharge (fire +8, smoke +2xdensity, panel +7.5, pending collapse +25)</a:t>
                       </a:r>
                     </a:p>
@@ -5411,7 +5411,7 @@
                     <a:lstStyle/>
                     <a:p>
                       <a:r>
-                        <a:rPr sz="1100"/>
+                        <a:rPr sz="1300"/>
                         <a:t>Constraints</a:t>
                       </a:r>
                     </a:p>
@@ -5424,7 +5424,7 @@
                     <a:lstStyle/>
                     <a:p>
                       <a:r>
-                        <a:rPr sz="1100"/>
+                        <a:rPr sz="1300"/>
                         <a:t>walls &amp; debris impassable; door impassable until key; health drains in hazards, 0 = run over</a:t>
                       </a:r>
                     </a:p>
@@ -5439,7 +5439,7 @@
                     <a:lstStyle/>
                     <a:p>
                       <a:r>
-                        <a:rPr sz="1100"/>
+                        <a:rPr sz="1300"/>
                         <a:t>Information</a:t>
                       </a:r>
                     </a:p>
@@ -5452,7 +5452,7 @@
                     <a:lstStyle/>
                     <a:p>
                       <a:r>
-                        <a:rPr sz="1100"/>
+                        <a:rPr sz="1300"/>
                         <a:t>PARTIAL - only cells/occupants within a vision radius; re-plan when reality differs</a:t>
                       </a:r>
                     </a:p>
@@ -5866,7 +5866,7 @@
                     <a:lstStyle/>
                     <a:p>
                       <a:r>
-                        <a:rPr sz="1100" b="1">
+                        <a:rPr sz="1300" b="1">
                           <a:solidFill>
                             <a:srgbClr val="FFFFFF"/>
                           </a:solidFill>
@@ -5887,7 +5887,7 @@
                     <a:lstStyle/>
                     <a:p>
                       <a:r>
-                        <a:rPr sz="1100" b="1">
+                        <a:rPr sz="1300" b="1">
                           <a:solidFill>
                             <a:srgbClr val="FFFFFF"/>
                           </a:solidFill>
@@ -5908,7 +5908,7 @@
                     <a:lstStyle/>
                     <a:p>
                       <a:r>
-                        <a:rPr sz="1100" b="1">
+                        <a:rPr sz="1300" b="1">
                           <a:solidFill>
                             <a:srgbClr val="FFFFFF"/>
                           </a:solidFill>
@@ -5931,7 +5931,7 @@
                     <a:lstStyle/>
                     <a:p>
                       <a:r>
-                        <a:rPr sz="1100"/>
+                        <a:rPr sz="1300"/>
                         <a:t>challenge BFS-with-fire-as-a-wall</a:t>
                       </a:r>
                     </a:p>
@@ -5944,7 +5944,7 @@
                     <a:lstStyle/>
                     <a:p>
                       <a:r>
-                        <a:rPr sz="1100"/>
+                        <a:rPr sz="1300"/>
                         <a:t>BFS minimises tiles, not danger - it walks through fire to save a step</a:t>
                       </a:r>
                     </a:p>
@@ -5957,7 +5957,7 @@
                     <a:lstStyle/>
                     <a:p>
                       <a:r>
-                        <a:rPr sz="1100"/>
+                        <a:rPr sz="1300"/>
                         <a:t>treat hazards as weighted costs; use cost-aware search</a:t>
                       </a:r>
                     </a:p>
@@ -5972,7 +5972,7 @@
                     <a:lstStyle/>
                     <a:p>
                       <a:r>
-                        <a:rPr sz="1100"/>
+                        <a:rPr sz="1300"/>
                         <a:t>suggest alternative search strategies</a:t>
                       </a:r>
                     </a:p>
@@ -5985,7 +5985,7 @@
                     <a:lstStyle/>
                     <a:p>
                       <a:r>
-                        <a:rPr sz="1100"/>
+                        <a:rPr sz="1300"/>
                         <a:t>Dijkstra / A* / Greedy and their trade-offs</a:t>
                       </a:r>
                     </a:p>
@@ -5998,7 +5998,7 @@
                     <a:lstStyle/>
                     <a:p>
                       <a:r>
-                        <a:rPr sz="1100"/>
+                        <a:rPr sz="1300"/>
                         <a:t>implement all four to compare on our own map</a:t>
                       </a:r>
                     </a:p>
@@ -6013,7 +6013,7 @@
                     <a:lstStyle/>
                     <a:p>
                       <a:r>
-                        <a:rPr sz="1100"/>
+                        <a:rPr sz="1300"/>
                         <a:t>point out assumptions</a:t>
                       </a:r>
                     </a:p>
@@ -6026,7 +6026,7 @@
                     <a:lstStyle/>
                     <a:p>
                       <a:r>
-                        <a:rPr sz="1100"/>
+                        <a:rPr sz="1300"/>
                         <a:t>we assumed a full map of occupant locations</a:t>
                       </a:r>
                     </a:p>
@@ -6039,7 +6039,7 @@
                     <a:lstStyle/>
                     <a:p>
                       <a:r>
-                        <a:rPr sz="1100"/>
+                        <a:rPr sz="1300"/>
                         <a:t>add partial observability + frontier exploration</a:t>
                       </a:r>
                     </a:p>
@@ -6054,7 +6054,7 @@
                     <a:lstStyle/>
                     <a:p>
                       <a:r>
-                        <a:rPr sz="1100"/>
+                        <a:rPr sz="1300"/>
                         <a:t>what could make it fail?</a:t>
                       </a:r>
                     </a:p>
@@ -6067,7 +6067,7 @@
                     <a:lstStyle/>
                     <a:p>
                       <a:r>
-                        <a:rPr sz="1100"/>
+                        <a:rPr sz="1300"/>
                         <a:t>locked door on the only corridor; a collapse could trap someone</a:t>
                       </a:r>
                     </a:p>
@@ -6080,7 +6080,7 @@
                     <a:lstStyle/>
                     <a:p>
                       <a:r>
-                        <a:rPr sz="1100"/>
+                        <a:rPr sz="1300"/>
                         <a:t>key sub-goal; connectivity-checked collapse</a:t>
                       </a:r>
                     </a:p>
@@ -6437,7 +6437,7 @@
                     <a:lstStyle/>
                     <a:p>
                       <a:r>
-                        <a:rPr sz="1000" b="1">
+                        <a:rPr sz="1300" b="1">
                           <a:solidFill>
                             <a:srgbClr val="FFFFFF"/>
                           </a:solidFill>
@@ -6458,7 +6458,7 @@
                     <a:lstStyle/>
                     <a:p>
                       <a:r>
-                        <a:rPr sz="1000" b="1">
+                        <a:rPr sz="1300" b="1">
                           <a:solidFill>
                             <a:srgbClr val="FFFFFF"/>
                           </a:solidFill>
@@ -6479,7 +6479,7 @@
                     <a:lstStyle/>
                     <a:p>
                       <a:r>
-                        <a:rPr sz="1000" b="1">
+                        <a:rPr sz="1300" b="1">
                           <a:solidFill>
                             <a:srgbClr val="FFFFFF"/>
                           </a:solidFill>
@@ -6502,7 +6502,7 @@
                     <a:lstStyle/>
                     <a:p>
                       <a:r>
-                        <a:rPr sz="1000" b="1">
+                        <a:rPr sz="1300" b="1">
                           <a:solidFill>
                             <a:srgbClr val="A32B1F"/>
                           </a:solidFill>
@@ -6523,7 +6523,7 @@
                     <a:lstStyle/>
                     <a:p>
                       <a:r>
-                        <a:rPr sz="1000" b="1">
+                        <a:rPr sz="1300" b="1">
                           <a:solidFill>
                             <a:srgbClr val="A32B1F"/>
                           </a:solidFill>
@@ -6544,7 +6544,7 @@
                     <a:lstStyle/>
                     <a:p>
                       <a:r>
-                        <a:rPr sz="1000" b="1">
+                        <a:rPr sz="1300" b="1">
                           <a:solidFill>
                             <a:srgbClr val="A32B1F"/>
                           </a:solidFill>
@@ -6567,7 +6567,7 @@
                     <a:lstStyle/>
                     <a:p>
                       <a:r>
-                        <a:rPr sz="1000" b="1">
+                        <a:rPr sz="1300" b="1">
                           <a:solidFill>
                             <a:srgbClr val="1E6B3D"/>
                           </a:solidFill>
@@ -6588,7 +6588,7 @@
                     <a:lstStyle/>
                     <a:p>
                       <a:r>
-                        <a:rPr sz="1000" b="1">
+                        <a:rPr sz="1300" b="1">
                           <a:solidFill>
                             <a:srgbClr val="1E6B3D"/>
                           </a:solidFill>
@@ -6609,7 +6609,7 @@
                     <a:lstStyle/>
                     <a:p>
                       <a:r>
-                        <a:rPr sz="1000" b="1">
+                        <a:rPr sz="1300" b="1">
                           <a:solidFill>
                             <a:srgbClr val="1E6B3D"/>
                           </a:solidFill>
@@ -6632,7 +6632,7 @@
                     <a:lstStyle/>
                     <a:p>
                       <a:r>
-                        <a:rPr sz="1000" b="1">
+                        <a:rPr sz="1300" b="1">
                           <a:solidFill>
                             <a:srgbClr val="1E6B3D"/>
                           </a:solidFill>
@@ -6653,7 +6653,7 @@
                     <a:lstStyle/>
                     <a:p>
                       <a:r>
-                        <a:rPr sz="1000" b="1">
+                        <a:rPr sz="1300" b="1">
                           <a:solidFill>
                             <a:srgbClr val="1E6B3D"/>
                           </a:solidFill>
@@ -6674,7 +6674,7 @@
                     <a:lstStyle/>
                     <a:p>
                       <a:r>
-                        <a:rPr sz="1000" b="1">
+                        <a:rPr sz="1300" b="1">
                           <a:solidFill>
                             <a:srgbClr val="1E6B3D"/>
                           </a:solidFill>
@@ -6697,7 +6697,7 @@
                     <a:lstStyle/>
                     <a:p>
                       <a:r>
-                        <a:rPr sz="1000" b="1">
+                        <a:rPr sz="1300" b="1">
                           <a:solidFill>
                             <a:srgbClr val="A32B1F"/>
                           </a:solidFill>
@@ -6718,7 +6718,7 @@
                     <a:lstStyle/>
                     <a:p>
                       <a:r>
-                        <a:rPr sz="1000" b="1">
+                        <a:rPr sz="1300" b="1">
                           <a:solidFill>
                             <a:srgbClr val="A32B1F"/>
                           </a:solidFill>
@@ -6739,7 +6739,7 @@
                     <a:lstStyle/>
                     <a:p>
                       <a:r>
-                        <a:rPr sz="1000" b="1">
+                        <a:rPr sz="1300" b="1">
                           <a:solidFill>
                             <a:srgbClr val="A32B1F"/>
                           </a:solidFill>
@@ -6762,7 +6762,7 @@
                     <a:lstStyle/>
                     <a:p>
                       <a:r>
-                        <a:rPr sz="1000" b="1">
+                        <a:rPr sz="1300" b="1">
                           <a:solidFill>
                             <a:srgbClr val="8A5A12"/>
                           </a:solidFill>
@@ -6783,7 +6783,7 @@
                     <a:lstStyle/>
                     <a:p>
                       <a:r>
-                        <a:rPr sz="1000" b="1">
+                        <a:rPr sz="1300" b="1">
                           <a:solidFill>
                             <a:srgbClr val="8A5A12"/>
                           </a:solidFill>
@@ -6804,7 +6804,7 @@
                     <a:lstStyle/>
                     <a:p>
                       <a:r>
-                        <a:rPr sz="1000" b="1">
+                        <a:rPr sz="1300" b="1">
                           <a:solidFill>
                             <a:srgbClr val="8A5A12"/>
                           </a:solidFill>
@@ -6827,7 +6827,7 @@
                     <a:lstStyle/>
                     <a:p>
                       <a:r>
-                        <a:rPr sz="1000" b="1">
+                        <a:rPr sz="1300" b="1">
                           <a:solidFill>
                             <a:srgbClr val="A32B1F"/>
                           </a:solidFill>
@@ -6848,7 +6848,7 @@
                     <a:lstStyle/>
                     <a:p>
                       <a:r>
-                        <a:rPr sz="1000" b="1">
+                        <a:rPr sz="1300" b="1">
                           <a:solidFill>
                             <a:srgbClr val="A32B1F"/>
                           </a:solidFill>
@@ -6869,7 +6869,7 @@
                     <a:lstStyle/>
                     <a:p>
                       <a:r>
-                        <a:rPr sz="1000" b="1">
+                        <a:rPr sz="1300" b="1">
                           <a:solidFill>
                             <a:srgbClr val="A32B1F"/>
                           </a:solidFill>
@@ -7840,7 +7840,7 @@
                     <a:lstStyle/>
                     <a:p>
                       <a:r>
-                        <a:rPr sz="1200" b="1">
+                        <a:rPr sz="1300" b="1">
                           <a:solidFill>
                             <a:srgbClr val="FFFFFF"/>
                           </a:solidFill>
@@ -7861,7 +7861,7 @@
                     <a:lstStyle/>
                     <a:p>
                       <a:r>
-                        <a:rPr sz="1200" b="1">
+                        <a:rPr sz="1300" b="1">
                           <a:solidFill>
                             <a:srgbClr val="FFFFFF"/>
                           </a:solidFill>
@@ -7882,7 +7882,7 @@
                     <a:lstStyle/>
                     <a:p>
                       <a:r>
-                        <a:rPr sz="1200" b="1">
+                        <a:rPr sz="1300" b="1">
                           <a:solidFill>
                             <a:srgbClr val="FFFFFF"/>
                           </a:solidFill>
@@ -7903,7 +7903,7 @@
                     <a:lstStyle/>
                     <a:p>
                       <a:r>
-                        <a:rPr sz="1200" b="1">
+                        <a:rPr sz="1300" b="1">
                           <a:solidFill>
                             <a:srgbClr val="FFFFFF"/>
                           </a:solidFill>
@@ -7926,7 +7926,7 @@
                     <a:lstStyle/>
                     <a:p>
                       <a:r>
-                        <a:rPr sz="1200" b="1">
+                        <a:rPr sz="1300" b="1">
                           <a:solidFill>
                             <a:srgbClr val="A32B1F"/>
                           </a:solidFill>
@@ -7947,7 +7947,7 @@
                     <a:lstStyle/>
                     <a:p>
                       <a:r>
-                        <a:rPr sz="1200" b="1">
+                        <a:rPr sz="1300" b="1">
                           <a:solidFill>
                             <a:srgbClr val="A32B1F"/>
                           </a:solidFill>
@@ -7968,7 +7968,7 @@
                     <a:lstStyle/>
                     <a:p>
                       <a:r>
-                        <a:rPr sz="1200" b="1">
+                        <a:rPr sz="1300" b="1">
                           <a:solidFill>
                             <a:srgbClr val="A32B1F"/>
                           </a:solidFill>
@@ -7989,7 +7989,7 @@
                     <a:lstStyle/>
                     <a:p>
                       <a:r>
-                        <a:rPr sz="1200" b="1">
+                        <a:rPr sz="1300" b="1">
                           <a:solidFill>
                             <a:srgbClr val="A32B1F"/>
                           </a:solidFill>
@@ -8012,7 +8012,7 @@
                     <a:lstStyle/>
                     <a:p>
                       <a:r>
-                        <a:rPr sz="1200"/>
+                        <a:rPr sz="1300"/>
                         <a:t>Dijkstra</a:t>
                       </a:r>
                     </a:p>
@@ -8025,7 +8025,7 @@
                     <a:lstStyle/>
                     <a:p>
                       <a:r>
-                        <a:rPr sz="1200"/>
+                        <a:rPr sz="1300"/>
                         <a:t>43.8</a:t>
                       </a:r>
                     </a:p>
@@ -8038,7 +8038,7 @@
                     <a:lstStyle/>
                     <a:p>
                       <a:r>
-                        <a:rPr sz="1200"/>
+                        <a:rPr sz="1300"/>
                         <a:t>42</a:t>
                       </a:r>
                     </a:p>
@@ -8051,7 +8051,7 @@
                     <a:lstStyle/>
                     <a:p>
                       <a:r>
-                        <a:rPr sz="1200"/>
+                        <a:rPr sz="1300"/>
                         <a:t>2</a:t>
                       </a:r>
                     </a:p>
@@ -8066,7 +8066,7 @@
                     <a:lstStyle/>
                     <a:p>
                       <a:r>
-                        <a:rPr sz="1200" b="1">
+                        <a:rPr sz="1300" b="1">
                           <a:solidFill>
                             <a:srgbClr val="1E6B3D"/>
                           </a:solidFill>
@@ -8087,7 +8087,7 @@
                     <a:lstStyle/>
                     <a:p>
                       <a:r>
-                        <a:rPr sz="1200" b="1">
+                        <a:rPr sz="1300" b="1">
                           <a:solidFill>
                             <a:srgbClr val="1E6B3D"/>
                           </a:solidFill>
@@ -8108,7 +8108,7 @@
                     <a:lstStyle/>
                     <a:p>
                       <a:r>
-                        <a:rPr sz="1200" b="1">
+                        <a:rPr sz="1300" b="1">
                           <a:solidFill>
                             <a:srgbClr val="1E6B3D"/>
                           </a:solidFill>
@@ -8129,7 +8129,7 @@
                     <a:lstStyle/>
                     <a:p>
                       <a:r>
-                        <a:rPr sz="1200" b="1">
+                        <a:rPr sz="1300" b="1">
                           <a:solidFill>
                             <a:srgbClr val="1E6B3D"/>
                           </a:solidFill>
@@ -8152,7 +8152,7 @@
                     <a:lstStyle/>
                     <a:p>
                       <a:r>
-                        <a:rPr sz="1200" b="1">
+                        <a:rPr sz="1300" b="1">
                           <a:solidFill>
                             <a:srgbClr val="A32B1F"/>
                           </a:solidFill>
@@ -8173,7 +8173,7 @@
                     <a:lstStyle/>
                     <a:p>
                       <a:r>
-                        <a:rPr sz="1200" b="1">
+                        <a:rPr sz="1300" b="1">
                           <a:solidFill>
                             <a:srgbClr val="A32B1F"/>
                           </a:solidFill>
@@ -8194,7 +8194,7 @@
                     <a:lstStyle/>
                     <a:p>
                       <a:r>
-                        <a:rPr sz="1200" b="1">
+                        <a:rPr sz="1300" b="1">
                           <a:solidFill>
                             <a:srgbClr val="A32B1F"/>
                           </a:solidFill>
@@ -8215,7 +8215,7 @@
                     <a:lstStyle/>
                     <a:p>
                       <a:r>
-                        <a:rPr sz="1200" b="1">
+                        <a:rPr sz="1300" b="1">
                           <a:solidFill>
                             <a:srgbClr val="A32B1F"/>
                           </a:solidFill>
@@ -8704,7 +8704,7 @@
                     <a:lstStyle/>
                     <a:p>
                       <a:r>
-                        <a:rPr sz="1000" b="1">
+                        <a:rPr sz="1300" b="1">
                           <a:solidFill>
                             <a:srgbClr val="FFFFFF"/>
                           </a:solidFill>
@@ -8725,7 +8725,7 @@
                     <a:lstStyle/>
                     <a:p>
                       <a:r>
-                        <a:rPr sz="1000" b="1">
+                        <a:rPr sz="1300" b="1">
                           <a:solidFill>
                             <a:srgbClr val="FFFFFF"/>
                           </a:solidFill>
@@ -8748,7 +8748,7 @@
                     <a:lstStyle/>
                     <a:p>
                       <a:r>
-                        <a:rPr sz="1000"/>
+                        <a:rPr sz="1300"/>
                         <a:t>Fairness</a:t>
                       </a:r>
                     </a:p>
@@ -8761,7 +8761,7 @@
                     <a:lstStyle/>
                     <a:p>
                       <a:r>
-                        <a:rPr sz="1000"/>
+                        <a:rPr sz="1300"/>
                         <a:t>in-game the AI agent takes hazard damage &amp; has the same vision as the human - fair by construction</a:t>
                       </a:r>
                     </a:p>
@@ -8776,7 +8776,7 @@
                     <a:lstStyle/>
                     <a:p>
                       <a:r>
-                        <a:rPr sz="1000"/>
+                        <a:rPr sz="1300"/>
                         <a:t>Bias</a:t>
                       </a:r>
                     </a:p>
@@ -8789,7 +8789,7 @@
                     <a:lstStyle/>
                     <a:p>
                       <a:r>
-                        <a:rPr sz="1000"/>
+                        <a:rPr sz="1300"/>
                         <a:t>goal selection is greedy nearest-first: no triage, no notion of who is most at risk</a:t>
                       </a:r>
                     </a:p>
@@ -8804,7 +8804,7 @@
                     <a:lstStyle/>
                     <a:p>
                       <a:r>
-                        <a:rPr sz="1000"/>
+                        <a:rPr sz="1300"/>
                         <a:t>Transparency</a:t>
                       </a:r>
                     </a:p>
@@ -8817,7 +8817,7 @@
                     <a:lstStyle/>
                     <a:p>
                       <a:r>
-                        <a:rPr sz="1000"/>
+                        <a:rPr sz="1300"/>
                         <a:t>the agent DRAWS its planned route + walked trail - you can see what it decided and why it changed</a:t>
                       </a:r>
                     </a:p>
@@ -8832,7 +8832,7 @@
                     <a:lstStyle/>
                     <a:p>
                       <a:r>
-                        <a:rPr sz="1000"/>
+                        <a:rPr sz="1300"/>
                         <a:t>Privacy</a:t>
                       </a:r>
                     </a:p>
@@ -8845,7 +8845,7 @@
                     <a:lstStyle/>
                     <a:p>
                       <a:r>
-                        <a:rPr sz="1000"/>
+                        <a:rPr sz="1300"/>
                         <a:t>a real occupant-locator needs live location data on people - sensitive, must be minimised</a:t>
                       </a:r>
                     </a:p>
@@ -8860,7 +8860,7 @@
                     <a:lstStyle/>
                     <a:p>
                       <a:r>
-                        <a:rPr sz="1000"/>
+                        <a:rPr sz="1300"/>
                         <a:t>Security</a:t>
                       </a:r>
                     </a:p>
@@ -8873,7 +8873,7 @@
                     <a:lstStyle/>
                     <a:p>
                       <a:r>
-                        <a:rPr sz="1000"/>
+                        <a:rPr sz="1300"/>
                         <a:t>the agent trusts its hazard map; a spoofed feed could steer it (and followers) into a hazard</a:t>
                       </a:r>
                     </a:p>
@@ -8888,7 +8888,7 @@
                     <a:lstStyle/>
                     <a:p>
                       <a:r>
-                        <a:rPr sz="1000"/>
+                        <a:rPr sz="1300"/>
                         <a:t>Accountability</a:t>
                       </a:r>
                     </a:p>
@@ -8901,7 +8901,7 @@
                     <a:lstStyle/>
                     <a:p>
                       <a:r>
-                        <a:rPr sz="1000"/>
+                        <a:rPr sz="1300"/>
                         <a:t>if it leads someone into a collapse - operator? developer? sensor vendor? needs an audit log</a:t>
                       </a:r>
                     </a:p>
@@ -8916,7 +8916,7 @@
                     <a:lstStyle/>
                     <a:p>
                       <a:r>
-                        <a:rPr sz="1000"/>
+                        <a:rPr sz="1300"/>
                         <a:t>Human oversight</a:t>
                       </a:r>
                     </a:p>
@@ -8929,7 +8929,7 @@
                     <a:lstStyle/>
                     <a:p>
                       <a:r>
-                        <a:rPr sz="1000"/>
+                        <a:rPr sz="1300"/>
                         <a:t>it's decision-support, not an autonomous replacement for firefighters - the right posture</a:t>
                       </a:r>
                     </a:p>

--- a/docs/report/CT3201_Slides.pptx
+++ b/docs/report/CT3201_Slides.pptx
@@ -3180,7 +3180,7 @@
                   <a:srgbClr val="C9D7E4"/>
                 </a:solidFill>
               </a:rPr>
-              <a:t>CT3201 Mini Project  ·  an evacuation-routing AI agent  ·  Learn with AI</a:t>
+              <a:t>CT3201 Mini Project  ·  An evacuation-routing AI agent  ·  Learn with AI</a:t>
             </a:r>
           </a:p>
         </p:txBody>

--- a/docs/report/CT3201_Slides.pptx
+++ b/docs/report/CT3201_Slides.pptx
@@ -3271,7 +3271,7 @@
                   <a:srgbClr val="2B2B2B"/>
                 </a:solidFill>
               </a:rPr>
-              <a:t>search / intelligent agent / decision-making under uncertainty</a:t>
+              <a:t>Search / Intelligent agent / Decision-making under uncertainty</a:t>
             </a:r>
           </a:p>
           <a:p>
@@ -3297,7 +3297,7 @@
                   <a:srgbClr val="2B2B2B"/>
                 </a:solidFill>
               </a:rPr>
-              <a:t>Can AI help us design AI — and can we recognise when AI is wrong?</a:t>
+              <a:t>Can AI help us design AI — And can we recognise when AI is wrong?</a:t>
             </a:r>
           </a:p>
         </p:txBody>

--- a/docs/report/CT3201_Slides.pptx
+++ b/docs/report/CT3201_Slides.pptx
@@ -4651,7 +4651,7 @@
                   <a:srgbClr val="C9D7E4"/>
                 </a:solidFill>
               </a:rPr>
-              <a:t>Phase 1, Stage 1 - defined human-first, before using AI</a:t>
+              <a:t>Phase 1, Stage 1 - Defined human-first, before using AI</a:t>
             </a:r>
           </a:p>
         </p:txBody>

--- a/docs/report/CT3201_Slides.pptx
+++ b/docs/report/CT3201_Slides.pptx
@@ -5193,7 +5193,7 @@
                   <a:srgbClr val="C9D7E4"/>
                 </a:solidFill>
               </a:rPr>
-              <a:t>Phase 1, Stage 2 - the AI formulation</a:t>
+              <a:t>Phase 1, Stage 2 - The AI formulation</a:t>
             </a:r>
           </a:p>
         </p:txBody>

--- a/docs/report/CT3201_Slides.pptx
+++ b/docs/report/CT3201_Slides.pptx
@@ -5226,6 +5226,7 @@
                     <a:bodyPr/>
                     <a:lstStyle/>
                     <a:p>
+                      <a:pPr algn="ctr"/>
                       <a:r>
                         <a:rPr sz="1300" b="1">
                           <a:solidFill>
@@ -5236,7 +5237,7 @@
                       </a:r>
                     </a:p>
                   </a:txBody>
-                  <a:tcPr>
+                  <a:tcPr anchor="ctr">
                     <a:solidFill>
                       <a:srgbClr val="1F4E79"/>
                     </a:solidFill>
@@ -5270,13 +5271,14 @@
                     <a:bodyPr/>
                     <a:lstStyle/>
                     <a:p>
+                      <a:pPr algn="ctr"/>
                       <a:r>
                         <a:rPr sz="1300"/>
                         <a:t>Agent</a:t>
                       </a:r>
                     </a:p>
                   </a:txBody>
-                  <a:tcPr/>
+                  <a:tcPr anchor="ctr"/>
                 </a:tc>
                 <a:tc>
                   <a:txBody>
@@ -5298,13 +5300,14 @@
                     <a:bodyPr/>
                     <a:lstStyle/>
                     <a:p>
+                      <a:pPr algn="ctr"/>
                       <a:r>
                         <a:rPr sz="1300"/>
                         <a:t>State</a:t>
                       </a:r>
                     </a:p>
                   </a:txBody>
-                  <a:tcPr/>
+                  <a:tcPr anchor="ctr"/>
                 </a:tc>
                 <a:tc>
                   <a:txBody>
@@ -5326,13 +5329,14 @@
                     <a:bodyPr/>
                     <a:lstStyle/>
                     <a:p>
+                      <a:pPr algn="ctr"/>
                       <a:r>
                         <a:rPr sz="1300"/>
                         <a:t>Actions</a:t>
                       </a:r>
                     </a:p>
                   </a:txBody>
-                  <a:tcPr/>
+                  <a:tcPr anchor="ctr"/>
                 </a:tc>
                 <a:tc>
                   <a:txBody>
@@ -5354,13 +5358,14 @@
                     <a:bodyPr/>
                     <a:lstStyle/>
                     <a:p>
+                      <a:pPr algn="ctr"/>
                       <a:r>
                         <a:rPr sz="1300"/>
                         <a:t>Goal</a:t>
                       </a:r>
                     </a:p>
                   </a:txBody>
-                  <a:tcPr/>
+                  <a:tcPr anchor="ctr"/>
                 </a:tc>
                 <a:tc>
                   <a:txBody>
@@ -5382,13 +5387,14 @@
                     <a:bodyPr/>
                     <a:lstStyle/>
                     <a:p>
+                      <a:pPr algn="ctr"/>
                       <a:r>
                         <a:rPr sz="1300"/>
                         <a:t>Cost</a:t>
                       </a:r>
                     </a:p>
                   </a:txBody>
-                  <a:tcPr/>
+                  <a:tcPr anchor="ctr"/>
                 </a:tc>
                 <a:tc>
                   <a:txBody>
@@ -5410,13 +5416,14 @@
                     <a:bodyPr/>
                     <a:lstStyle/>
                     <a:p>
+                      <a:pPr algn="ctr"/>
                       <a:r>
                         <a:rPr sz="1300"/>
                         <a:t>Constraints</a:t>
                       </a:r>
                     </a:p>
                   </a:txBody>
-                  <a:tcPr/>
+                  <a:tcPr anchor="ctr"/>
                 </a:tc>
                 <a:tc>
                   <a:txBody>
@@ -5438,13 +5445,14 @@
                     <a:bodyPr/>
                     <a:lstStyle/>
                     <a:p>
+                      <a:pPr algn="ctr"/>
                       <a:r>
                         <a:rPr sz="1300"/>
                         <a:t>Information</a:t>
                       </a:r>
                     </a:p>
                   </a:txBody>
-                  <a:tcPr/>
+                  <a:tcPr anchor="ctr"/>
                 </a:tc>
                 <a:tc>
                   <a:txBody>

--- a/docs/report/CT3201_Slides.pptx
+++ b/docs/report/CT3201_Slides.pptx
@@ -5258,7 +5258,7 @@
                       </a:r>
                     </a:p>
                   </a:txBody>
-                  <a:tcPr>
+                  <a:tcPr anchor="ctr">
                     <a:solidFill>
                       <a:srgbClr val="1F4E79"/>
                     </a:solidFill>
@@ -5287,11 +5287,11 @@
                     <a:p>
                       <a:r>
                         <a:rPr sz="1300"/>
-                        <a:t>one autonomous rescue unit (robot or drone skin, player's choice; human plays the same role)</a:t>
+                        <a:t>One autonomous rescue unit (robot or drone skin, player's choice; human plays the same role)</a:t>
                       </a:r>
                     </a:p>
                   </a:txBody>
-                  <a:tcPr/>
+                  <a:tcPr anchor="ctr"/>
                 </a:tc>
               </a:tr>
               <a:tr h="365760">
@@ -5316,11 +5316,11 @@
                     <a:p>
                       <a:r>
                         <a:rPr sz="1300"/>
-                        <a:t>current cell · occupant statuses · map seen so far · health</a:t>
+                        <a:t>Current cell · occupant statuses · map seen so far · health</a:t>
                       </a:r>
                     </a:p>
                   </a:txBody>
-                  <a:tcPr/>
+                  <a:tcPr anchor="ctr"/>
                 </a:tc>
               </a:tr>
               <a:tr h="365760">
@@ -5345,11 +5345,11 @@
                     <a:p>
                       <a:r>
                         <a:rPr sz="1300"/>
-                        <a:t>move to one of the 4 adjacent floor cells</a:t>
+                        <a:t>Move to one of the 4 adjacent floor cells</a:t>
                       </a:r>
                     </a:p>
                   </a:txBody>
-                  <a:tcPr/>
+                  <a:tcPr anchor="ctr"/>
                 </a:tc>
               </a:tr>
               <a:tr h="365760">
@@ -5374,11 +5374,11 @@
                     <a:p>
                       <a:r>
                         <a:rPr sz="1300"/>
-                        <a:t>lead every reachable occupant to the exit, then exit</a:t>
+                        <a:t>Lead every reachable occupant to the exit, then exit</a:t>
                       </a:r>
                     </a:p>
                   </a:txBody>
-                  <a:tcPr/>
+                  <a:tcPr anchor="ctr"/>
                 </a:tc>
               </a:tr>
               <a:tr h="365760">
@@ -5407,7 +5407,7 @@
                       </a:r>
                     </a:p>
                   </a:txBody>
-                  <a:tcPr/>
+                  <a:tcPr anchor="ctr"/>
                 </a:tc>
               </a:tr>
               <a:tr h="365760">
@@ -5432,11 +5432,11 @@
                     <a:p>
                       <a:r>
                         <a:rPr sz="1300"/>
-                        <a:t>walls &amp; debris impassable; door impassable until key; health drains in hazards, 0 = run over</a:t>
+                        <a:t>Walls &amp; debris impassable; door impassable until key; health drains in hazards, 0 = run over</a:t>
                       </a:r>
                     </a:p>
                   </a:txBody>
-                  <a:tcPr/>
+                  <a:tcPr anchor="ctr"/>
                 </a:tc>
               </a:tr>
               <a:tr h="365760">
@@ -5461,11 +5461,11 @@
                     <a:p>
                       <a:r>
                         <a:rPr sz="1300"/>
-                        <a:t>PARTIAL - only cells/occupants within a vision radius; re-plan when reality differs</a:t>
+                        <a:t>Partial - only cells/occupants within a vision radius; re-plan when reality differs</a:t>
                       </a:r>
                     </a:p>
                   </a:txBody>
-                  <a:tcPr/>
+                  <a:tcPr anchor="ctr"/>
                 </a:tc>
               </a:tr>
             </a:tbl>

--- a/docs/report/CT3201_Slides.pptx
+++ b/docs/report/CT3201_Slides.pptx
@@ -5248,6 +5248,7 @@
                     <a:bodyPr/>
                     <a:lstStyle/>
                     <a:p>
+                      <a:pPr algn="ctr"/>
                       <a:r>
                         <a:rPr sz="1300" b="1">
                           <a:solidFill>

--- a/docs/report/CT3201_Slides.pptx
+++ b/docs/report/CT3201_Slides.pptx
@@ -3614,7 +3614,7 @@
                   <a:srgbClr val="2B2B2B"/>
                 </a:solidFill>
               </a:rPr>
-              <a:t>explained tiles-vs-cost, listed search options, caught bad assumptions; later, built the whole UI rebuild fast (results, menus, pause, HUD, intro)</a:t>
+              <a:t>Explained tiles-vs-cost, listed search options, caught bad assumptions; later, built the whole UI rebuild fast (results, menus, pause, HUD, intro)</a:t>
             </a:r>
           </a:p>
           <a:p>
@@ -3648,7 +3648,7 @@
                   <a:srgbClr val="2B2B2B"/>
                 </a:solidFill>
               </a:rPr>
-              <a:t>the video model couldn't animate toward/away from camera; recommended Greedy without weighing safe vs fast</a:t>
+              <a:t>The video model couldn't animate toward/away from camera; recommended Greedy without weighing safe vs fast</a:t>
             </a:r>
           </a:p>
           <a:p>
@@ -3682,7 +3682,7 @@
                   <a:srgbClr val="2B2B2B"/>
                 </a:solidFill>
               </a:rPr>
-              <a:t>weighted costs, A*, partial observability, key sub-goal, connectivity-checked collapse, braided maze; later, the UI rebuild — reviewed screen by screen</a:t>
+              <a:t>Weighted costs, A*, partial observability, key sub-goal, connectivity-checked collapse, braided maze; later, the UI rebuild — reviewed screen by screen</a:t>
             </a:r>
           </a:p>
           <a:p>
@@ -3750,7 +3750,7 @@
                   <a:srgbClr val="2B2B2B"/>
                 </a:solidFill>
               </a:rPr>
-              <a:t>search theory, a purpose-built harness, unit tests, assets vs engine requirements; later, real screenshots, the real test suite, the real game run end-to-end</a:t>
+              <a:t>Search theory, a purpose-built harness, unit tests, assets vs engine requirements; later, real screenshots, the real test suite, the real game run end-to-end</a:t>
             </a:r>
           </a:p>
           <a:p>
@@ -3784,7 +3784,7 @@
                   <a:srgbClr val="2B2B2B"/>
                 </a:solidFill>
               </a:rPr>
-              <a:t>scope, tuning, seeing the AI failure was narrow, the Responsible-AI stance, judging the UI by eye</a:t>
+              <a:t>Scope, tuning, seeing the AI failure was narrow, the Responsible-AI stance, judging the UI by eye</a:t>
             </a:r>
           </a:p>
           <a:p>
@@ -3818,7 +3818,7 @@
                   <a:srgbClr val="2B2B2B"/>
                 </a:solidFill>
               </a:rPr>
-              <a:t>agent walks through fire (looks like bad balance, not a wrong algorithm); AI colliding with a teammate's work on master</a:t>
+              <a:t>Agent walks through fire (looks like bad balance, not a wrong algorithm); AI colliding with a teammate's work on master</a:t>
             </a:r>
           </a:p>
           <a:p>
@@ -3852,7 +3852,7 @@
                   <a:srgbClr val="2B2B2B"/>
                 </a:solidFill>
               </a:rPr>
-              <a:t>a technically-true claim (“fewer expansions”) can still be wrong for the problem; a git commit proves whose account, not who typed the code — verify evidence, not summaries</a:t>
+              <a:t>A technically-true claim (“fewer expansions”) can still be wrong for the problem; a git commit proves whose account, not who typed the code — verify evidence, not summaries</a:t>
             </a:r>
           </a:p>
         </p:txBody>
@@ -4708,7 +4708,7 @@
                   <a:srgbClr val="2B2B2B"/>
                 </a:solidFill>
               </a:rPr>
-              <a:t>occupants who don't know a burning building's layout must be found and led to an exit before fire, smoke and collapse cut the route off</a:t>
+              <a:t>Occupants who don't know a burning building's layout must be found and led to an exit before fire, smoke and collapse cut the route off</a:t>
             </a:r>
           </a:p>
           <a:p>
@@ -4742,7 +4742,7 @@
                   <a:srgbClr val="2B2B2B"/>
                 </a:solidFill>
               </a:rPr>
-              <a:t>a rescuer inside the building (human or AI) — the system is a decision-support tool that proposes a route, not an autonomous replacement</a:t>
+              <a:t>A rescuer inside the building (human or AI) — the system is a decision-support tool that proposes a route, not an autonomous replacement</a:t>
             </a:r>
           </a:p>
           <a:p>
@@ -4776,7 +4776,7 @@
                   <a:srgbClr val="2B2B2B"/>
                 </a:solidFill>
               </a:rPr>
-              <a:t>multi-room floor plan as a grid graph; hazards evolve over time; only a small radius is visible</a:t>
+              <a:t>Multi-room floor plan as a grid graph; hazards evolve over time; only a small radius is visible</a:t>
             </a:r>
           </a:p>
           <a:p>
@@ -4810,7 +4810,7 @@
                   <a:srgbClr val="2B2B2B"/>
                 </a:solidFill>
               </a:rPr>
-              <a:t>all reachable occupants out, then the rescuer out — fast, with minimal hazard exposure</a:t>
+              <a:t>All reachable occupants out, then the rescuer out — fast, with minimal hazard exposure</a:t>
             </a:r>
           </a:p>
           <a:p>
@@ -4844,7 +4844,7 @@
                   <a:srgbClr val="2B2B2B"/>
                 </a:solidFill>
               </a:rPr>
-              <a:t>push deeper for another occupant, or take the ones I have and get out now?</a:t>
+              <a:t>Push deeper for another occupant, or take the ones I have and get out now?</a:t>
             </a:r>
           </a:p>
           <a:p>
@@ -4878,7 +4878,7 @@
                   <a:srgbClr val="2B2B2B"/>
                 </a:solidFill>
               </a:rPr>
-              <a:t>the team brainstormed and picked this problem before opening any AI tool</a:t>
+              <a:t>The team brainstormed and picked this problem before opening any AI tool</a:t>
             </a:r>
           </a:p>
         </p:txBody>
@@ -5840,7 +5840,7 @@
                   <a:srgbClr val="C9D7E4"/>
                 </a:solidFill>
               </a:rPr>
-              <a:t>Phase 2, Stage 3 - used AI to challenge, not to design</a:t>
+              <a:t>Phase 2, Stage 3 - Used AI to challenge, not to design</a:t>
             </a:r>
           </a:p>
         </p:txBody>
@@ -5941,7 +5941,7 @@
                     <a:p>
                       <a:r>
                         <a:rPr sz="1300"/>
-                        <a:t>challenge BFS-with-fire-as-a-wall</a:t>
+                        <a:t>Challenge BFS-with-fire-as-a-wall</a:t>
                       </a:r>
                     </a:p>
                   </a:txBody>
@@ -5967,7 +5967,7 @@
                     <a:p>
                       <a:r>
                         <a:rPr sz="1300"/>
-                        <a:t>treat hazards as weighted costs; use cost-aware search</a:t>
+                        <a:t>Treat hazards as weighted costs; use cost-aware search</a:t>
                       </a:r>
                     </a:p>
                   </a:txBody>
@@ -5982,7 +5982,7 @@
                     <a:p>
                       <a:r>
                         <a:rPr sz="1300"/>
-                        <a:t>suggest alternative search strategies</a:t>
+                        <a:t>Suggest alternative search strategies</a:t>
                       </a:r>
                     </a:p>
                   </a:txBody>
@@ -6008,7 +6008,7 @@
                     <a:p>
                       <a:r>
                         <a:rPr sz="1300"/>
-                        <a:t>implement all four to compare on our own map</a:t>
+                        <a:t>Implement all four to compare on our own map</a:t>
                       </a:r>
                     </a:p>
                   </a:txBody>
@@ -6023,7 +6023,7 @@
                     <a:p>
                       <a:r>
                         <a:rPr sz="1300"/>
-                        <a:t>point out assumptions</a:t>
+                        <a:t>Point out assumptions</a:t>
                       </a:r>
                     </a:p>
                   </a:txBody>
@@ -6036,7 +6036,7 @@
                     <a:p>
                       <a:r>
                         <a:rPr sz="1300"/>
-                        <a:t>we assumed a full map of occupant locations</a:t>
+                        <a:t>We assumed a full map of occupant locations</a:t>
                       </a:r>
                     </a:p>
                   </a:txBody>
@@ -6049,7 +6049,7 @@
                     <a:p>
                       <a:r>
                         <a:rPr sz="1300"/>
-                        <a:t>add partial observability + frontier exploration</a:t>
+                        <a:t>Add partial observability + frontier exploration</a:t>
                       </a:r>
                     </a:p>
                   </a:txBody>
@@ -6064,7 +6064,7 @@
                     <a:p>
                       <a:r>
                         <a:rPr sz="1300"/>
-                        <a:t>what could make it fail?</a:t>
+                        <a:t>What could make it fail?</a:t>
                       </a:r>
                     </a:p>
                   </a:txBody>
@@ -6077,7 +6077,7 @@
                     <a:p>
                       <a:r>
                         <a:rPr sz="1300"/>
-                        <a:t>locked door on the only corridor; a collapse could trap someone</a:t>
+                        <a:t>Locked door on the only corridor; a collapse could trap someone</a:t>
                       </a:r>
                     </a:p>
                   </a:txBody>
@@ -6090,7 +6090,7 @@
                     <a:p>
                       <a:r>
                         <a:rPr sz="1300"/>
-                        <a:t>key sub-goal; connectivity-checked collapse</a:t>
+                        <a:t>Key sub-goal; connectivity-checked collapse</a:t>
                       </a:r>
                     </a:p>
                   </a:txBody>
@@ -6558,7 +6558,7 @@
                             <a:srgbClr val="A32B1F"/>
                           </a:solidFill>
                         </a:rPr>
-                        <a:t>not cost-optimal on a weighted map; comparison harness shows BFS routes through 9 fire tiles</a:t>
+                        <a:t>Not cost-optimal on a weighted map; comparison harness shows BFS routes through 9 fire tiles</a:t>
                       </a:r>
                     </a:p>
                   </a:txBody>
@@ -6623,7 +6623,7 @@
                             <a:srgbClr val="1E6B3D"/>
                           </a:solidFill>
                         </a:rPr>
-                        <a:t>ties Dijkstra for optimality, far fewer expansions; search theory + harness</a:t>
+                        <a:t>Ties Dijkstra for optimality, far fewer expansions; search theory + harness</a:t>
                       </a:r>
                     </a:p>
                   </a:txBody>
@@ -6688,7 +6688,7 @@
                             <a:srgbClr val="1E6B3D"/>
                           </a:solidFill>
                         </a:rPr>
-                        <a:t>fire-ring counting &amp; connectivity have no weights; unit tests</a:t>
+                        <a:t>Fire-ring counting &amp; connectivity have no weights; unit tests</a:t>
                       </a:r>
                     </a:p>
                   </a:txBody>
@@ -6753,7 +6753,7 @@
                             <a:srgbClr val="A32B1F"/>
                           </a:solidFill>
                         </a:rPr>
-                        <a:t>video model only did side-view, unstable; checked vs engine needs (see ai_critique.md)</a:t>
+                        <a:t>Video model only did side-view, unstable; checked vs engine needs (see ai_critique.md)</a:t>
                       </a:r>
                     </a:p>
                   </a:txBody>
@@ -6818,7 +6818,7 @@
                             <a:srgbClr val="8A5A12"/>
                           </a:solidFill>
                         </a:rPr>
-                        <a:t>every search returns the same route -&gt; braided the maze so routing has choices</a:t>
+                        <a:t>Every search returns the same route -&gt; braided the maze so routing has choices</a:t>
                       </a:r>
                     </a:p>
                   </a:txBody>
@@ -6883,7 +6883,7 @@
                             <a:srgbClr val="A32B1F"/>
                           </a:solidFill>
                         </a:rPr>
-                        <a:t>contradicts 'you don't know the building'; unbalances the human-vs-AI race</a:t>
+                        <a:t>Contradicts 'you don't know the building'; unbalances the human-vs-AI race</a:t>
                       </a:r>
                     </a:p>
                   </a:txBody>
@@ -7208,7 +7208,7 @@
                   <a:srgbClr val="C9D7E4"/>
                 </a:solidFill>
               </a:rPr>
-              <a:t>playable game + autonomous rescue agent (robot or drone skin)</a:t>
+              <a:t>Playable game + autonomous rescue agent (robot or drone skin)</a:t>
             </a:r>
           </a:p>
         </p:txBody>
@@ -7265,7 +7265,7 @@
                   <a:srgbClr val="2B2B2B"/>
                 </a:solidFill>
               </a:rPr>
-              <a:t>sense (vision radius) -&gt; choose goal -&gt; hazard-weighted A* plan -&gt; step -&gt; re-plan every 0.25 s</a:t>
+              <a:t>Sense (vision radius) -&gt; choose goal -&gt; hazard-weighted A* plan -&gt; step -&gt; re-plan every 0.25 s</a:t>
             </a:r>
           </a:p>
           <a:p>
@@ -7299,7 +7299,7 @@
                   <a:srgbClr val="2B2B2B"/>
                 </a:solidFill>
               </a:rPr>
-              <a:t>nearest KNOWN occupant by weighted distance; else nearest unexplored area; else the exit; key first if a door blocks the goal</a:t>
+              <a:t>Nearest KNOWN occupant by weighted distance; else nearest unexplored area; else the exit; key first if a door blocks the goal</a:t>
             </a:r>
           </a:p>
           <a:p>
@@ -7359,7 +7359,7 @@
                   <a:srgbClr val="2B2B2B"/>
                 </a:solidFill>
               </a:rPr>
-              <a:t>spreading fire + functional smoke • sparking panels • timed ceiling collapse • locked door + key • fog of war with memory</a:t>
+              <a:t>Spreading fire + functional smoke • sparking panels • timed ceiling collapse • locked door + key • fog of war with memory</a:t>
             </a:r>
           </a:p>
           <a:p>
@@ -7756,7 +7756,7 @@
                   <a:srgbClr val="C9D7E4"/>
                 </a:solidFill>
               </a:rPr>
-              <a:t>Phase 6, Stage 7 - testing an AI recommendation with evidence</a:t>
+              <a:t>Phase 6, Stage 7 - Testing an AI recommendation with evidence</a:t>
             </a:r>
           </a:p>
         </p:txBody>
@@ -7854,7 +7854,7 @@
                             <a:srgbClr val="FFFFFF"/>
                           </a:solidFill>
                         </a:rPr>
-                        <a:t>strategy</a:t>
+                        <a:t>Strategy</a:t>
                       </a:r>
                     </a:p>
                   </a:txBody>
@@ -7875,7 +7875,7 @@
                             <a:srgbClr val="FFFFFF"/>
                           </a:solidFill>
                         </a:rPr>
-                        <a:t>path cost</a:t>
+                        <a:t>Path cost</a:t>
                       </a:r>
                     </a:p>
                   </a:txBody>
@@ -7896,7 +7896,7 @@
                             <a:srgbClr val="FFFFFF"/>
                           </a:solidFill>
                         </a:rPr>
-                        <a:t>steps</a:t>
+                        <a:t>Steps</a:t>
                       </a:r>
                     </a:p>
                   </a:txBody>
@@ -7917,7 +7917,7 @@
                             <a:srgbClr val="FFFFFF"/>
                           </a:solidFill>
                         </a:rPr>
-                        <a:t>hazard tiles crossed</a:t>
+                        <a:t>Hazard tiles crossed</a:t>
                       </a:r>
                     </a:p>
                   </a:txBody>
@@ -8679,7 +8679,7 @@
                   <a:srgbClr val="C9D7E4"/>
                 </a:solidFill>
               </a:rPr>
-              <a:t>Phase 7, Stage 8 - should this system be deployed?</a:t>
+              <a:t>Phase 7, Stage 8 - Should this system be deployed?</a:t>
             </a:r>
           </a:p>
         </p:txBody>
@@ -8771,7 +8771,7 @@
                     <a:p>
                       <a:r>
                         <a:rPr sz="1300"/>
-                        <a:t>in-game the AI agent takes hazard damage &amp; has the same vision as the human - fair by construction</a:t>
+                        <a:t>In-game the AI agent takes hazard damage &amp; has the same vision as the human - fair by construction</a:t>
                       </a:r>
                     </a:p>
                   </a:txBody>
@@ -8799,7 +8799,7 @@
                     <a:p>
                       <a:r>
                         <a:rPr sz="1300"/>
-                        <a:t>goal selection is greedy nearest-first: no triage, no notion of who is most at risk</a:t>
+                        <a:t>Goal selection is greedy nearest-first: no triage, no notion of who is most at risk</a:t>
                       </a:r>
                     </a:p>
                   </a:txBody>
@@ -8827,7 +8827,7 @@
                     <a:p>
                       <a:r>
                         <a:rPr sz="1300"/>
-                        <a:t>the agent DRAWS its planned route + walked trail - you can see what it decided and why it changed</a:t>
+                        <a:t>The agent DRAWS its planned route + walked trail - you can see what it decided and why it changed</a:t>
                       </a:r>
                     </a:p>
                   </a:txBody>
@@ -8855,7 +8855,7 @@
                     <a:p>
                       <a:r>
                         <a:rPr sz="1300"/>
-                        <a:t>a real occupant-locator needs live location data on people - sensitive, must be minimised</a:t>
+                        <a:t>A real occupant-locator needs live location data on people - sensitive, must be minimised</a:t>
                       </a:r>
                     </a:p>
                   </a:txBody>
@@ -8883,7 +8883,7 @@
                     <a:p>
                       <a:r>
                         <a:rPr sz="1300"/>
-                        <a:t>the agent trusts its hazard map; a spoofed feed could steer it (and followers) into a hazard</a:t>
+                        <a:t>The agent trusts its hazard map; a spoofed feed could steer it (and followers) into a hazard</a:t>
                       </a:r>
                     </a:p>
                   </a:txBody>
@@ -8911,7 +8911,7 @@
                     <a:p>
                       <a:r>
                         <a:rPr sz="1300"/>
-                        <a:t>if it leads someone into a collapse - operator? developer? sensor vendor? needs an audit log</a:t>
+                        <a:t>If it leads someone into a collapse - operator? developer? sensor vendor? needs an audit log</a:t>
                       </a:r>
                     </a:p>
                   </a:txBody>
@@ -8939,7 +8939,7 @@
                     <a:p>
                       <a:r>
                         <a:rPr sz="1300"/>
-                        <a:t>it's decision-support, not an autonomous replacement for firefighters - the right posture</a:t>
+                        <a:t>It's decision-support, not an autonomous replacement for firefighters - the right posture</a:t>
                       </a:r>
                     </a:p>
                   </a:txBody>
@@ -9317,7 +9317,7 @@
                   <a:srgbClr val="C9D7E4"/>
                 </a:solidFill>
               </a:rPr>
-              <a:t>Compulsory slide — what worked, what didn't, how it was verified</a:t>
+              <a:t>Compulsory slide — What worked, what didn't, how it was verified</a:t>
             </a:r>
           </a:p>
         </p:txBody>
@@ -9374,7 +9374,7 @@
                   <a:srgbClr val="2B2B2B"/>
                 </a:solidFill>
               </a:rPr>
-              <a:t>side-view (left/right) walk clips, concept art, the whole implementation</a:t>
+              <a:t>Side-view (left/right) walk clips, concept art, the whole implementation</a:t>
             </a:r>
           </a:p>
           <a:p>
@@ -9408,7 +9408,7 @@
                   <a:srgbClr val="2B2B2B"/>
                 </a:solidFill>
               </a:rPr>
-              <a:t>no working “toward camera” or “away from camera” walk, across multiple re-prompts — that axis never worked</a:t>
+              <a:t>No working “toward camera” or “away from camera” walk, across multiple re-prompts — that axis never worked</a:t>
             </a:r>
           </a:p>
           <a:p>
@@ -9442,7 +9442,7 @@
                   <a:srgbClr val="2B2B2B"/>
                 </a:solidFill>
               </a:rPr>
-              <a:t>it treated “looks like a walk” as done; it never delivered a complete, 4-direction, production-ready set</a:t>
+              <a:t>It treated “looks like a walk” as done; it never delivered a complete, 4-direction, production-ready set</a:t>
             </a:r>
           </a:p>
           <a:p>
@@ -9476,7 +9476,7 @@
                   <a:srgbClr val="2B2B2B"/>
                 </a:solidFill>
               </a:rPr>
-              <a:t>checked against the engine's own requirements — 4 directions, fixed sprite size, feet-anchored — it met exactly one of four</a:t>
+              <a:t>Checked against the engine's own requirements — 4 directions, fixed sprite size, feet-anchored — it met exactly one of four</a:t>
             </a:r>
           </a:p>
           <a:p>
@@ -9510,7 +9510,7 @@
                   <a:srgbClr val="2B2B2B"/>
                 </a:solidFill>
               </a:rPr>
-              <a:t>assembled the 4-direction set from mixed sources (front/back from the character sheet, one side frame mirrored) + a procedural walk bob</a:t>
+              <a:t>Assembled the 4-direction set from mixed sources (front/back from the character sheet, one side frame mirrored) + a procedural walk bob</a:t>
             </a:r>
           </a:p>
           <a:p>

--- a/docs/report/CT3201_Slides.pptx
+++ b/docs/report/CT3201_Slides.pptx
@@ -5874,6 +5874,7 @@
                     <a:bodyPr/>
                     <a:lstStyle/>
                     <a:p>
+                      <a:pPr algn="ctr"/>
                       <a:r>
                         <a:rPr sz="1300" b="1">
                           <a:solidFill>
@@ -5884,7 +5885,7 @@
                       </a:r>
                     </a:p>
                   </a:txBody>
-                  <a:tcPr>
+                  <a:tcPr anchor="ctr">
                     <a:solidFill>
                       <a:srgbClr val="1F4E79"/>
                     </a:solidFill>
@@ -5895,6 +5896,7 @@
                     <a:bodyPr/>
                     <a:lstStyle/>
                     <a:p>
+                      <a:pPr algn="ctr"/>
                       <a:r>
                         <a:rPr sz="1300" b="1">
                           <a:solidFill>
@@ -5905,7 +5907,7 @@
                       </a:r>
                     </a:p>
                   </a:txBody>
-                  <a:tcPr>
+                  <a:tcPr anchor="ctr">
                     <a:solidFill>
                       <a:srgbClr val="1F4E79"/>
                     </a:solidFill>
@@ -5916,6 +5918,7 @@
                     <a:bodyPr/>
                     <a:lstStyle/>
                     <a:p>
+                      <a:pPr algn="ctr"/>
                       <a:r>
                         <a:rPr sz="1300" b="1">
                           <a:solidFill>
@@ -5926,7 +5929,7 @@
                       </a:r>
                     </a:p>
                   </a:txBody>
-                  <a:tcPr>
+                  <a:tcPr anchor="ctr">
                     <a:solidFill>
                       <a:srgbClr val="1F4E79"/>
                     </a:solidFill>
@@ -5939,39 +5942,42 @@
                     <a:bodyPr/>
                     <a:lstStyle/>
                     <a:p>
+                      <a:pPr algn="ctr"/>
                       <a:r>
                         <a:rPr sz="1300"/>
                         <a:t>Challenge BFS-with-fire-as-a-wall</a:t>
                       </a:r>
                     </a:p>
                   </a:txBody>
-                  <a:tcPr/>
+                  <a:tcPr anchor="ctr"/>
                 </a:tc>
                 <a:tc>
                   <a:txBody>
                     <a:bodyPr/>
                     <a:lstStyle/>
                     <a:p>
+                      <a:pPr algn="ctr"/>
                       <a:r>
                         <a:rPr sz="1300"/>
                         <a:t>BFS minimises tiles, not danger - it walks through fire to save a step</a:t>
                       </a:r>
                     </a:p>
                   </a:txBody>
-                  <a:tcPr/>
+                  <a:tcPr anchor="ctr"/>
                 </a:tc>
                 <a:tc>
                   <a:txBody>
                     <a:bodyPr/>
                     <a:lstStyle/>
                     <a:p>
+                      <a:pPr algn="ctr"/>
                       <a:r>
                         <a:rPr sz="1300"/>
                         <a:t>Treat hazards as weighted costs; use cost-aware search</a:t>
                       </a:r>
                     </a:p>
                   </a:txBody>
-                  <a:tcPr/>
+                  <a:tcPr anchor="ctr"/>
                 </a:tc>
               </a:tr>
               <a:tr h="365760">
@@ -5980,39 +5986,42 @@
                     <a:bodyPr/>
                     <a:lstStyle/>
                     <a:p>
+                      <a:pPr algn="ctr"/>
                       <a:r>
                         <a:rPr sz="1300"/>
                         <a:t>Suggest alternative search strategies</a:t>
                       </a:r>
                     </a:p>
                   </a:txBody>
-                  <a:tcPr/>
+                  <a:tcPr anchor="ctr"/>
                 </a:tc>
                 <a:tc>
                   <a:txBody>
                     <a:bodyPr/>
                     <a:lstStyle/>
                     <a:p>
+                      <a:pPr algn="ctr"/>
                       <a:r>
                         <a:rPr sz="1300"/>
                         <a:t>Dijkstra / A* / Greedy and their trade-offs</a:t>
                       </a:r>
                     </a:p>
                   </a:txBody>
-                  <a:tcPr/>
+                  <a:tcPr anchor="ctr"/>
                 </a:tc>
                 <a:tc>
                   <a:txBody>
                     <a:bodyPr/>
                     <a:lstStyle/>
                     <a:p>
+                      <a:pPr algn="ctr"/>
                       <a:r>
                         <a:rPr sz="1300"/>
                         <a:t>Implement all four to compare on our own map</a:t>
                       </a:r>
                     </a:p>
                   </a:txBody>
-                  <a:tcPr/>
+                  <a:tcPr anchor="ctr"/>
                 </a:tc>
               </a:tr>
               <a:tr h="365760">
@@ -6021,39 +6030,42 @@
                     <a:bodyPr/>
                     <a:lstStyle/>
                     <a:p>
+                      <a:pPr algn="ctr"/>
                       <a:r>
                         <a:rPr sz="1300"/>
                         <a:t>Point out assumptions</a:t>
                       </a:r>
                     </a:p>
                   </a:txBody>
-                  <a:tcPr/>
+                  <a:tcPr anchor="ctr"/>
                 </a:tc>
                 <a:tc>
                   <a:txBody>
                     <a:bodyPr/>
                     <a:lstStyle/>
                     <a:p>
+                      <a:pPr algn="ctr"/>
                       <a:r>
                         <a:rPr sz="1300"/>
                         <a:t>We assumed a full map of occupant locations</a:t>
                       </a:r>
                     </a:p>
                   </a:txBody>
-                  <a:tcPr/>
+                  <a:tcPr anchor="ctr"/>
                 </a:tc>
                 <a:tc>
                   <a:txBody>
                     <a:bodyPr/>
                     <a:lstStyle/>
                     <a:p>
+                      <a:pPr algn="ctr"/>
                       <a:r>
                         <a:rPr sz="1300"/>
                         <a:t>Add partial observability + frontier exploration</a:t>
                       </a:r>
                     </a:p>
                   </a:txBody>
-                  <a:tcPr/>
+                  <a:tcPr anchor="ctr"/>
                 </a:tc>
               </a:tr>
               <a:tr h="365760">
@@ -6062,39 +6074,42 @@
                     <a:bodyPr/>
                     <a:lstStyle/>
                     <a:p>
+                      <a:pPr algn="ctr"/>
                       <a:r>
                         <a:rPr sz="1300"/>
                         <a:t>What could make it fail?</a:t>
                       </a:r>
                     </a:p>
                   </a:txBody>
-                  <a:tcPr/>
+                  <a:tcPr anchor="ctr"/>
                 </a:tc>
                 <a:tc>
                   <a:txBody>
                     <a:bodyPr/>
                     <a:lstStyle/>
                     <a:p>
+                      <a:pPr algn="ctr"/>
                       <a:r>
                         <a:rPr sz="1300"/>
                         <a:t>Locked door on the only corridor; a collapse could trap someone</a:t>
                       </a:r>
                     </a:p>
                   </a:txBody>
-                  <a:tcPr/>
+                  <a:tcPr anchor="ctr"/>
                 </a:tc>
                 <a:tc>
                   <a:txBody>
                     <a:bodyPr/>
                     <a:lstStyle/>
                     <a:p>
+                      <a:pPr algn="ctr"/>
                       <a:r>
                         <a:rPr sz="1300"/>
                         <a:t>Key sub-goal; connectivity-checked collapse</a:t>
                       </a:r>
                     </a:p>
                   </a:txBody>
-                  <a:tcPr/>
+                  <a:tcPr anchor="ctr"/>
                 </a:tc>
               </a:tr>
             </a:tbl>

--- a/docs/report/CT3201_Slides.pptx
+++ b/docs/report/CT3201_Slides.pptx
@@ -6460,6 +6460,7 @@
                     <a:bodyPr/>
                     <a:lstStyle/>
                     <a:p>
+                      <a:pPr algn="ctr"/>
                       <a:r>
                         <a:rPr sz="1300" b="1">
                           <a:solidFill>
@@ -6470,7 +6471,7 @@
                       </a:r>
                     </a:p>
                   </a:txBody>
-                  <a:tcPr>
+                  <a:tcPr anchor="ctr">
                     <a:solidFill>
                       <a:srgbClr val="1F4E79"/>
                     </a:solidFill>
@@ -6481,6 +6482,7 @@
                     <a:bodyPr/>
                     <a:lstStyle/>
                     <a:p>
+                      <a:pPr algn="ctr"/>
                       <a:r>
                         <a:rPr sz="1300" b="1">
                           <a:solidFill>
@@ -6491,7 +6493,7 @@
                       </a:r>
                     </a:p>
                   </a:txBody>
-                  <a:tcPr>
+                  <a:tcPr anchor="ctr">
                     <a:solidFill>
                       <a:srgbClr val="1F4E79"/>
                     </a:solidFill>
@@ -6502,6 +6504,7 @@
                     <a:bodyPr/>
                     <a:lstStyle/>
                     <a:p>
+                      <a:pPr algn="ctr"/>
                       <a:r>
                         <a:rPr sz="1300" b="1">
                           <a:solidFill>
@@ -6512,7 +6515,7 @@
                       </a:r>
                     </a:p>
                   </a:txBody>
-                  <a:tcPr>
+                  <a:tcPr anchor="ctr">
                     <a:solidFill>
                       <a:srgbClr val="1F4E79"/>
                     </a:solidFill>
@@ -6525,6 +6528,7 @@
                     <a:bodyPr/>
                     <a:lstStyle/>
                     <a:p>
+                      <a:pPr algn="ctr"/>
                       <a:r>
                         <a:rPr sz="1300" b="1">
                           <a:solidFill>
@@ -6535,7 +6539,7 @@
                       </a:r>
                     </a:p>
                   </a:txBody>
-                  <a:tcPr>
+                  <a:tcPr anchor="ctr">
                     <a:solidFill>
                       <a:srgbClr val="FBE7E4"/>
                     </a:solidFill>
@@ -6546,6 +6550,7 @@
                     <a:bodyPr/>
                     <a:lstStyle/>
                     <a:p>
+                      <a:pPr algn="ctr"/>
                       <a:r>
                         <a:rPr sz="1300" b="1">
                           <a:solidFill>
@@ -6556,7 +6561,7 @@
                       </a:r>
                     </a:p>
                   </a:txBody>
-                  <a:tcPr>
+                  <a:tcPr anchor="ctr">
                     <a:solidFill>
                       <a:srgbClr val="FBE7E4"/>
                     </a:solidFill>
@@ -6567,6 +6572,7 @@
                     <a:bodyPr/>
                     <a:lstStyle/>
                     <a:p>
+                      <a:pPr algn="ctr"/>
                       <a:r>
                         <a:rPr sz="1300" b="1">
                           <a:solidFill>
@@ -6577,7 +6583,7 @@
                       </a:r>
                     </a:p>
                   </a:txBody>
-                  <a:tcPr>
+                  <a:tcPr anchor="ctr">
                     <a:solidFill>
                       <a:srgbClr val="FBE7E4"/>
                     </a:solidFill>
@@ -6590,6 +6596,7 @@
                     <a:bodyPr/>
                     <a:lstStyle/>
                     <a:p>
+                      <a:pPr algn="ctr"/>
                       <a:r>
                         <a:rPr sz="1300" b="1">
                           <a:solidFill>
@@ -6600,7 +6607,7 @@
                       </a:r>
                     </a:p>
                   </a:txBody>
-                  <a:tcPr>
+                  <a:tcPr anchor="ctr">
                     <a:solidFill>
                       <a:srgbClr val="E4F3E8"/>
                     </a:solidFill>
@@ -6611,6 +6618,7 @@
                     <a:bodyPr/>
                     <a:lstStyle/>
                     <a:p>
+                      <a:pPr algn="ctr"/>
                       <a:r>
                         <a:rPr sz="1300" b="1">
                           <a:solidFill>
@@ -6621,7 +6629,7 @@
                       </a:r>
                     </a:p>
                   </a:txBody>
-                  <a:tcPr>
+                  <a:tcPr anchor="ctr">
                     <a:solidFill>
                       <a:srgbClr val="E4F3E8"/>
                     </a:solidFill>
@@ -6632,6 +6640,7 @@
                     <a:bodyPr/>
                     <a:lstStyle/>
                     <a:p>
+                      <a:pPr algn="ctr"/>
                       <a:r>
                         <a:rPr sz="1300" b="1">
                           <a:solidFill>
@@ -6642,7 +6651,7 @@
                       </a:r>
                     </a:p>
                   </a:txBody>
-                  <a:tcPr>
+                  <a:tcPr anchor="ctr">
                     <a:solidFill>
                       <a:srgbClr val="E4F3E8"/>
                     </a:solidFill>
@@ -6655,6 +6664,7 @@
                     <a:bodyPr/>
                     <a:lstStyle/>
                     <a:p>
+                      <a:pPr algn="ctr"/>
                       <a:r>
                         <a:rPr sz="1300" b="1">
                           <a:solidFill>
@@ -6665,7 +6675,7 @@
                       </a:r>
                     </a:p>
                   </a:txBody>
-                  <a:tcPr>
+                  <a:tcPr anchor="ctr">
                     <a:solidFill>
                       <a:srgbClr val="E4F3E8"/>
                     </a:solidFill>
@@ -6676,6 +6686,7 @@
                     <a:bodyPr/>
                     <a:lstStyle/>
                     <a:p>
+                      <a:pPr algn="ctr"/>
                       <a:r>
                         <a:rPr sz="1300" b="1">
                           <a:solidFill>
@@ -6686,7 +6697,7 @@
                       </a:r>
                     </a:p>
                   </a:txBody>
-                  <a:tcPr>
+                  <a:tcPr anchor="ctr">
                     <a:solidFill>
                       <a:srgbClr val="E4F3E8"/>
                     </a:solidFill>
@@ -6697,6 +6708,7 @@
                     <a:bodyPr/>
                     <a:lstStyle/>
                     <a:p>
+                      <a:pPr algn="ctr"/>
                       <a:r>
                         <a:rPr sz="1300" b="1">
                           <a:solidFill>
@@ -6707,7 +6719,7 @@
                       </a:r>
                     </a:p>
                   </a:txBody>
-                  <a:tcPr>
+                  <a:tcPr anchor="ctr">
                     <a:solidFill>
                       <a:srgbClr val="E4F3E8"/>
                     </a:solidFill>
@@ -6720,6 +6732,7 @@
                     <a:bodyPr/>
                     <a:lstStyle/>
                     <a:p>
+                      <a:pPr algn="ctr"/>
                       <a:r>
                         <a:rPr sz="1300" b="1">
                           <a:solidFill>
@@ -6730,7 +6743,7 @@
                       </a:r>
                     </a:p>
                   </a:txBody>
-                  <a:tcPr>
+                  <a:tcPr anchor="ctr">
                     <a:solidFill>
                       <a:srgbClr val="FBE7E4"/>
                     </a:solidFill>
@@ -6741,6 +6754,7 @@
                     <a:bodyPr/>
                     <a:lstStyle/>
                     <a:p>
+                      <a:pPr algn="ctr"/>
                       <a:r>
                         <a:rPr sz="1300" b="1">
                           <a:solidFill>
@@ -6751,7 +6765,7 @@
                       </a:r>
                     </a:p>
                   </a:txBody>
-                  <a:tcPr>
+                  <a:tcPr anchor="ctr">
                     <a:solidFill>
                       <a:srgbClr val="FBE7E4"/>
                     </a:solidFill>
@@ -6762,6 +6776,7 @@
                     <a:bodyPr/>
                     <a:lstStyle/>
                     <a:p>
+                      <a:pPr algn="ctr"/>
                       <a:r>
                         <a:rPr sz="1300" b="1">
                           <a:solidFill>
@@ -6772,7 +6787,7 @@
                       </a:r>
                     </a:p>
                   </a:txBody>
-                  <a:tcPr>
+                  <a:tcPr anchor="ctr">
                     <a:solidFill>
                       <a:srgbClr val="FBE7E4"/>
                     </a:solidFill>
@@ -6785,6 +6800,7 @@
                     <a:bodyPr/>
                     <a:lstStyle/>
                     <a:p>
+                      <a:pPr algn="ctr"/>
                       <a:r>
                         <a:rPr sz="1300" b="1">
                           <a:solidFill>
@@ -6795,7 +6811,7 @@
                       </a:r>
                     </a:p>
                   </a:txBody>
-                  <a:tcPr>
+                  <a:tcPr anchor="ctr">
                     <a:solidFill>
                       <a:srgbClr val="FAF1DF"/>
                     </a:solidFill>
@@ -6806,6 +6822,7 @@
                     <a:bodyPr/>
                     <a:lstStyle/>
                     <a:p>
+                      <a:pPr algn="ctr"/>
                       <a:r>
                         <a:rPr sz="1300" b="1">
                           <a:solidFill>
@@ -6816,7 +6833,7 @@
                       </a:r>
                     </a:p>
                   </a:txBody>
-                  <a:tcPr>
+                  <a:tcPr anchor="ctr">
                     <a:solidFill>
                       <a:srgbClr val="FAF1DF"/>
                     </a:solidFill>
@@ -6827,6 +6844,7 @@
                     <a:bodyPr/>
                     <a:lstStyle/>
                     <a:p>
+                      <a:pPr algn="ctr"/>
                       <a:r>
                         <a:rPr sz="1300" b="1">
                           <a:solidFill>
@@ -6837,7 +6855,7 @@
                       </a:r>
                     </a:p>
                   </a:txBody>
-                  <a:tcPr>
+                  <a:tcPr anchor="ctr">
                     <a:solidFill>
                       <a:srgbClr val="FAF1DF"/>
                     </a:solidFill>
@@ -6850,6 +6868,7 @@
                     <a:bodyPr/>
                     <a:lstStyle/>
                     <a:p>
+                      <a:pPr algn="ctr"/>
                       <a:r>
                         <a:rPr sz="1300" b="1">
                           <a:solidFill>
@@ -6860,7 +6879,7 @@
                       </a:r>
                     </a:p>
                   </a:txBody>
-                  <a:tcPr>
+                  <a:tcPr anchor="ctr">
                     <a:solidFill>
                       <a:srgbClr val="FBE7E4"/>
                     </a:solidFill>
@@ -6871,6 +6890,7 @@
                     <a:bodyPr/>
                     <a:lstStyle/>
                     <a:p>
+                      <a:pPr algn="ctr"/>
                       <a:r>
                         <a:rPr sz="1300" b="1">
                           <a:solidFill>
@@ -6881,7 +6901,7 @@
                       </a:r>
                     </a:p>
                   </a:txBody>
-                  <a:tcPr>
+                  <a:tcPr anchor="ctr">
                     <a:solidFill>
                       <a:srgbClr val="FBE7E4"/>
                     </a:solidFill>
@@ -6892,6 +6912,7 @@
                     <a:bodyPr/>
                     <a:lstStyle/>
                     <a:p>
+                      <a:pPr algn="ctr"/>
                       <a:r>
                         <a:rPr sz="1300" b="1">
                           <a:solidFill>
@@ -6902,7 +6923,7 @@
                       </a:r>
                     </a:p>
                   </a:txBody>
-                  <a:tcPr>
+                  <a:tcPr anchor="ctr">
                     <a:solidFill>
                       <a:srgbClr val="FBE7E4"/>
                     </a:solidFill>

--- a/docs/report/CT3201_Slides.pptx
+++ b/docs/report/CT3201_Slides.pptx
@@ -5,19 +5,19 @@
     <p:sldMasterId id="2147483648" r:id="rId1"/>
   </p:sldMasterIdLst>
   <p:sldIdLst>
-    <p:sldId id="256" r:id="rId7"/>
-    <p:sldId id="257" r:id="rId8"/>
-    <p:sldId id="258" r:id="rId9"/>
-    <p:sldId id="259" r:id="rId10"/>
-    <p:sldId id="260" r:id="rId11"/>
-    <p:sldId id="261" r:id="rId12"/>
-    <p:sldId id="262" r:id="rId13"/>
-    <p:sldId id="263" r:id="rId14"/>
-    <p:sldId id="266" r:id="rId17"/>
-    <p:sldId id="264" r:id="rId15"/>
-    <p:sldId id="265" r:id="rId16"/>
+    <p:sldId id="256" r:id="rId2"/>
+    <p:sldId id="257" r:id="rId3"/>
+    <p:sldId id="258" r:id="rId4"/>
+    <p:sldId id="259" r:id="rId5"/>
+    <p:sldId id="260" r:id="rId6"/>
+    <p:sldId id="261" r:id="rId7"/>
+    <p:sldId id="262" r:id="rId8"/>
+    <p:sldId id="263" r:id="rId9"/>
+    <p:sldId id="266" r:id="rId10"/>
+    <p:sldId id="264" r:id="rId11"/>
+    <p:sldId id="265" r:id="rId12"/>
   </p:sldIdLst>
-  <p:sldSz cx="12191695" cy="6858000" type="screen4x3"/>
+  <p:sldSz cx="12192000" cy="6858000"/>
   <p:notesSz cx="6858000" cy="9144000"/>
   <p:defaultTextStyle>
     <a:defPPr>
@@ -114,6 +114,22 @@
       </a:defRPr>
     </a:lvl9pPr>
   </p:defaultTextStyle>
+  <p:extLst>
+    <p:ext uri="{EFAFB233-063F-42B5-8137-9DF3F51BA10A}">
+      <p15:sldGuideLst xmlns:p15="http://schemas.microsoft.com/office/powerpoint/2012/main">
+        <p15:guide id="1" orient="horz" pos="2160">
+          <p15:clr>
+            <a:srgbClr val="A4A3A4"/>
+          </p15:clr>
+        </p15:guide>
+        <p15:guide id="2" pos="2880">
+          <p15:clr>
+            <a:srgbClr val="A4A3A4"/>
+          </p15:clr>
+        </p15:guide>
+      </p15:sldGuideLst>
+    </p:ext>
+  </p:extLst>
 </p:presentation>
 </file>
 
@@ -155,10 +171,9 @@
           <a:lstStyle/>
           <a:p>
             <a:r>
-              <a:rPr lang="en-US" smtClean="0"/>
+              <a:rPr lang="en-US"/>
               <a:t>Click to edit Master title style</a:t>
             </a:r>
-            <a:endParaRPr lang="en-US"/>
           </a:p>
         </p:txBody>
       </p:sp>
@@ -274,10 +289,9 @@
           </a:lstStyle>
           <a:p>
             <a:r>
-              <a:rPr lang="en-US" smtClean="0"/>
+              <a:rPr lang="en-US"/>
               <a:t>Click to edit Master subtitle style</a:t>
             </a:r>
-            <a:endParaRPr lang="en-US"/>
           </a:p>
         </p:txBody>
       </p:sp>
@@ -298,7 +312,7 @@
           <a:p>
             <a:fld id="{5BCAD085-E8A6-8845-BD4E-CB4CCA059FC4}" type="datetimeFigureOut">
               <a:rPr lang="en-US" smtClean="0"/>
-              <a:t>1/27/13</a:t>
+              <a:t>10/2/2026</a:t>
             </a:fld>
             <a:endParaRPr lang="en-US"/>
           </a:p>
@@ -392,10 +406,9 @@
           <a:lstStyle/>
           <a:p>
             <a:r>
-              <a:rPr lang="en-US" smtClean="0"/>
+              <a:rPr lang="en-US"/>
               <a:t>Click to edit Master title style</a:t>
             </a:r>
-            <a:endParaRPr lang="en-US"/>
           </a:p>
         </p:txBody>
       </p:sp>
@@ -416,38 +429,37 @@
           <a:p>
             <a:pPr lvl="0"/>
             <a:r>
-              <a:rPr lang="en-US" smtClean="0"/>
+              <a:rPr lang="en-US"/>
               <a:t>Click to edit Master text styles</a:t>
             </a:r>
           </a:p>
           <a:p>
             <a:pPr lvl="1"/>
             <a:r>
-              <a:rPr lang="en-US" smtClean="0"/>
+              <a:rPr lang="en-US"/>
               <a:t>Second level</a:t>
             </a:r>
           </a:p>
           <a:p>
             <a:pPr lvl="2"/>
             <a:r>
-              <a:rPr lang="en-US" smtClean="0"/>
+              <a:rPr lang="en-US"/>
               <a:t>Third level</a:t>
             </a:r>
           </a:p>
           <a:p>
             <a:pPr lvl="3"/>
             <a:r>
-              <a:rPr lang="en-US" smtClean="0"/>
+              <a:rPr lang="en-US"/>
               <a:t>Fourth level</a:t>
             </a:r>
           </a:p>
           <a:p>
             <a:pPr lvl="4"/>
             <a:r>
-              <a:rPr lang="en-US" smtClean="0"/>
+              <a:rPr lang="en-US"/>
               <a:t>Fifth level</a:t>
             </a:r>
-            <a:endParaRPr lang="en-US"/>
           </a:p>
         </p:txBody>
       </p:sp>
@@ -468,7 +480,7 @@
           <a:p>
             <a:fld id="{5BCAD085-E8A6-8845-BD4E-CB4CCA059FC4}" type="datetimeFigureOut">
               <a:rPr lang="en-US" smtClean="0"/>
-              <a:t>1/27/13</a:t>
+              <a:t>10/2/2026</a:t>
             </a:fld>
             <a:endParaRPr lang="en-US"/>
           </a:p>
@@ -567,10 +579,9 @@
           <a:lstStyle/>
           <a:p>
             <a:r>
-              <a:rPr lang="en-US" smtClean="0"/>
+              <a:rPr lang="en-US"/>
               <a:t>Click to edit Master title style</a:t>
             </a:r>
-            <a:endParaRPr lang="en-US"/>
           </a:p>
         </p:txBody>
       </p:sp>
@@ -596,38 +607,37 @@
           <a:p>
             <a:pPr lvl="0"/>
             <a:r>
-              <a:rPr lang="en-US" smtClean="0"/>
+              <a:rPr lang="en-US"/>
               <a:t>Click to edit Master text styles</a:t>
             </a:r>
           </a:p>
           <a:p>
             <a:pPr lvl="1"/>
             <a:r>
-              <a:rPr lang="en-US" smtClean="0"/>
+              <a:rPr lang="en-US"/>
               <a:t>Second level</a:t>
             </a:r>
           </a:p>
           <a:p>
             <a:pPr lvl="2"/>
             <a:r>
-              <a:rPr lang="en-US" smtClean="0"/>
+              <a:rPr lang="en-US"/>
               <a:t>Third level</a:t>
             </a:r>
           </a:p>
           <a:p>
             <a:pPr lvl="3"/>
             <a:r>
-              <a:rPr lang="en-US" smtClean="0"/>
+              <a:rPr lang="en-US"/>
               <a:t>Fourth level</a:t>
             </a:r>
           </a:p>
           <a:p>
             <a:pPr lvl="4"/>
             <a:r>
-              <a:rPr lang="en-US" smtClean="0"/>
+              <a:rPr lang="en-US"/>
               <a:t>Fifth level</a:t>
             </a:r>
-            <a:endParaRPr lang="en-US"/>
           </a:p>
         </p:txBody>
       </p:sp>
@@ -648,7 +658,7 @@
           <a:p>
             <a:fld id="{5BCAD085-E8A6-8845-BD4E-CB4CCA059FC4}" type="datetimeFigureOut">
               <a:rPr lang="en-US" smtClean="0"/>
-              <a:t>1/27/13</a:t>
+              <a:t>10/2/2026</a:t>
             </a:fld>
             <a:endParaRPr lang="en-US"/>
           </a:p>
@@ -742,10 +752,9 @@
           <a:lstStyle/>
           <a:p>
             <a:r>
-              <a:rPr lang="en-US" smtClean="0"/>
+              <a:rPr lang="en-US"/>
               <a:t>Click to edit Master title style</a:t>
             </a:r>
-            <a:endParaRPr lang="en-US"/>
           </a:p>
         </p:txBody>
       </p:sp>
@@ -766,38 +775,37 @@
           <a:p>
             <a:pPr lvl="0"/>
             <a:r>
-              <a:rPr lang="en-US" smtClean="0"/>
+              <a:rPr lang="en-US"/>
               <a:t>Click to edit Master text styles</a:t>
             </a:r>
           </a:p>
           <a:p>
             <a:pPr lvl="1"/>
             <a:r>
-              <a:rPr lang="en-US" smtClean="0"/>
+              <a:rPr lang="en-US"/>
               <a:t>Second level</a:t>
             </a:r>
           </a:p>
           <a:p>
             <a:pPr lvl="2"/>
             <a:r>
-              <a:rPr lang="en-US" smtClean="0"/>
+              <a:rPr lang="en-US"/>
               <a:t>Third level</a:t>
             </a:r>
           </a:p>
           <a:p>
             <a:pPr lvl="3"/>
             <a:r>
-              <a:rPr lang="en-US" smtClean="0"/>
+              <a:rPr lang="en-US"/>
               <a:t>Fourth level</a:t>
             </a:r>
           </a:p>
           <a:p>
             <a:pPr lvl="4"/>
             <a:r>
-              <a:rPr lang="en-US" smtClean="0"/>
+              <a:rPr lang="en-US"/>
               <a:t>Fifth level</a:t>
             </a:r>
-            <a:endParaRPr lang="en-US"/>
           </a:p>
         </p:txBody>
       </p:sp>
@@ -818,7 +826,7 @@
           <a:p>
             <a:fld id="{5BCAD085-E8A6-8845-BD4E-CB4CCA059FC4}" type="datetimeFigureOut">
               <a:rPr lang="en-US" smtClean="0"/>
-              <a:t>1/27/13</a:t>
+              <a:t>10/2/2026</a:t>
             </a:fld>
             <a:endParaRPr lang="en-US"/>
           </a:p>
@@ -921,10 +929,9 @@
           </a:lstStyle>
           <a:p>
             <a:r>
-              <a:rPr lang="en-US" smtClean="0"/>
+              <a:rPr lang="en-US"/>
               <a:t>Click to edit Master title style</a:t>
             </a:r>
-            <a:endParaRPr lang="en-US"/>
           </a:p>
         </p:txBody>
       </p:sp>
@@ -1041,7 +1048,7 @@
           <a:p>
             <a:pPr lvl="0"/>
             <a:r>
-              <a:rPr lang="en-US" smtClean="0"/>
+              <a:rPr lang="en-US"/>
               <a:t>Click to edit Master text styles</a:t>
             </a:r>
           </a:p>
@@ -1064,7 +1071,7 @@
           <a:p>
             <a:fld id="{5BCAD085-E8A6-8845-BD4E-CB4CCA059FC4}" type="datetimeFigureOut">
               <a:rPr lang="en-US" smtClean="0"/>
-              <a:t>1/27/13</a:t>
+              <a:t>10/2/2026</a:t>
             </a:fld>
             <a:endParaRPr lang="en-US"/>
           </a:p>
@@ -1158,10 +1165,9 @@
           <a:lstStyle/>
           <a:p>
             <a:r>
-              <a:rPr lang="en-US" smtClean="0"/>
+              <a:rPr lang="en-US"/>
               <a:t>Click to edit Master title style</a:t>
             </a:r>
-            <a:endParaRPr lang="en-US"/>
           </a:p>
         </p:txBody>
       </p:sp>
@@ -1215,38 +1221,37 @@
           <a:p>
             <a:pPr lvl="0"/>
             <a:r>
-              <a:rPr lang="en-US" smtClean="0"/>
+              <a:rPr lang="en-US"/>
               <a:t>Click to edit Master text styles</a:t>
             </a:r>
           </a:p>
           <a:p>
             <a:pPr lvl="1"/>
             <a:r>
-              <a:rPr lang="en-US" smtClean="0"/>
+              <a:rPr lang="en-US"/>
               <a:t>Second level</a:t>
             </a:r>
           </a:p>
           <a:p>
             <a:pPr lvl="2"/>
             <a:r>
-              <a:rPr lang="en-US" smtClean="0"/>
+              <a:rPr lang="en-US"/>
               <a:t>Third level</a:t>
             </a:r>
           </a:p>
           <a:p>
             <a:pPr lvl="3"/>
             <a:r>
-              <a:rPr lang="en-US" smtClean="0"/>
+              <a:rPr lang="en-US"/>
               <a:t>Fourth level</a:t>
             </a:r>
           </a:p>
           <a:p>
             <a:pPr lvl="4"/>
             <a:r>
-              <a:rPr lang="en-US" smtClean="0"/>
+              <a:rPr lang="en-US"/>
               <a:t>Fifth level</a:t>
             </a:r>
-            <a:endParaRPr lang="en-US"/>
           </a:p>
         </p:txBody>
       </p:sp>
@@ -1300,38 +1305,37 @@
           <a:p>
             <a:pPr lvl="0"/>
             <a:r>
-              <a:rPr lang="en-US" smtClean="0"/>
+              <a:rPr lang="en-US"/>
               <a:t>Click to edit Master text styles</a:t>
             </a:r>
           </a:p>
           <a:p>
             <a:pPr lvl="1"/>
             <a:r>
-              <a:rPr lang="en-US" smtClean="0"/>
+              <a:rPr lang="en-US"/>
               <a:t>Second level</a:t>
             </a:r>
           </a:p>
           <a:p>
             <a:pPr lvl="2"/>
             <a:r>
-              <a:rPr lang="en-US" smtClean="0"/>
+              <a:rPr lang="en-US"/>
               <a:t>Third level</a:t>
             </a:r>
           </a:p>
           <a:p>
             <a:pPr lvl="3"/>
             <a:r>
-              <a:rPr lang="en-US" smtClean="0"/>
+              <a:rPr lang="en-US"/>
               <a:t>Fourth level</a:t>
             </a:r>
           </a:p>
           <a:p>
             <a:pPr lvl="4"/>
             <a:r>
-              <a:rPr lang="en-US" smtClean="0"/>
+              <a:rPr lang="en-US"/>
               <a:t>Fifth level</a:t>
             </a:r>
-            <a:endParaRPr lang="en-US"/>
           </a:p>
         </p:txBody>
       </p:sp>
@@ -1352,7 +1356,7 @@
           <a:p>
             <a:fld id="{5BCAD085-E8A6-8845-BD4E-CB4CCA059FC4}" type="datetimeFigureOut">
               <a:rPr lang="en-US" smtClean="0"/>
-              <a:t>1/27/13</a:t>
+              <a:t>10/2/2026</a:t>
             </a:fld>
             <a:endParaRPr lang="en-US"/>
           </a:p>
@@ -1450,10 +1454,9 @@
           </a:lstStyle>
           <a:p>
             <a:r>
-              <a:rPr lang="en-US" smtClean="0"/>
+              <a:rPr lang="en-US"/>
               <a:t>Click to edit Master title style</a:t>
             </a:r>
-            <a:endParaRPr lang="en-US"/>
           </a:p>
         </p:txBody>
       </p:sp>
@@ -1516,7 +1519,7 @@
           <a:p>
             <a:pPr lvl="0"/>
             <a:r>
-              <a:rPr lang="en-US" smtClean="0"/>
+              <a:rPr lang="en-US"/>
               <a:t>Click to edit Master text styles</a:t>
             </a:r>
           </a:p>
@@ -1572,38 +1575,37 @@
           <a:p>
             <a:pPr lvl="0"/>
             <a:r>
-              <a:rPr lang="en-US" smtClean="0"/>
+              <a:rPr lang="en-US"/>
               <a:t>Click to edit Master text styles</a:t>
             </a:r>
           </a:p>
           <a:p>
             <a:pPr lvl="1"/>
             <a:r>
-              <a:rPr lang="en-US" smtClean="0"/>
+              <a:rPr lang="en-US"/>
               <a:t>Second level</a:t>
             </a:r>
           </a:p>
           <a:p>
             <a:pPr lvl="2"/>
             <a:r>
-              <a:rPr lang="en-US" smtClean="0"/>
+              <a:rPr lang="en-US"/>
               <a:t>Third level</a:t>
             </a:r>
           </a:p>
           <a:p>
             <a:pPr lvl="3"/>
             <a:r>
-              <a:rPr lang="en-US" smtClean="0"/>
+              <a:rPr lang="en-US"/>
               <a:t>Fourth level</a:t>
             </a:r>
           </a:p>
           <a:p>
             <a:pPr lvl="4"/>
             <a:r>
-              <a:rPr lang="en-US" smtClean="0"/>
+              <a:rPr lang="en-US"/>
               <a:t>Fifth level</a:t>
             </a:r>
-            <a:endParaRPr lang="en-US"/>
           </a:p>
         </p:txBody>
       </p:sp>
@@ -1666,7 +1668,7 @@
           <a:p>
             <a:pPr lvl="0"/>
             <a:r>
-              <a:rPr lang="en-US" smtClean="0"/>
+              <a:rPr lang="en-US"/>
               <a:t>Click to edit Master text styles</a:t>
             </a:r>
           </a:p>
@@ -1722,38 +1724,37 @@
           <a:p>
             <a:pPr lvl="0"/>
             <a:r>
-              <a:rPr lang="en-US" smtClean="0"/>
+              <a:rPr lang="en-US"/>
               <a:t>Click to edit Master text styles</a:t>
             </a:r>
           </a:p>
           <a:p>
             <a:pPr lvl="1"/>
             <a:r>
-              <a:rPr lang="en-US" smtClean="0"/>
+              <a:rPr lang="en-US"/>
               <a:t>Second level</a:t>
             </a:r>
           </a:p>
           <a:p>
             <a:pPr lvl="2"/>
             <a:r>
-              <a:rPr lang="en-US" smtClean="0"/>
+              <a:rPr lang="en-US"/>
               <a:t>Third level</a:t>
             </a:r>
           </a:p>
           <a:p>
             <a:pPr lvl="3"/>
             <a:r>
-              <a:rPr lang="en-US" smtClean="0"/>
+              <a:rPr lang="en-US"/>
               <a:t>Fourth level</a:t>
             </a:r>
           </a:p>
           <a:p>
             <a:pPr lvl="4"/>
             <a:r>
-              <a:rPr lang="en-US" smtClean="0"/>
+              <a:rPr lang="en-US"/>
               <a:t>Fifth level</a:t>
             </a:r>
-            <a:endParaRPr lang="en-US"/>
           </a:p>
         </p:txBody>
       </p:sp>
@@ -1774,7 +1775,7 @@
           <a:p>
             <a:fld id="{5BCAD085-E8A6-8845-BD4E-CB4CCA059FC4}" type="datetimeFigureOut">
               <a:rPr lang="en-US" smtClean="0"/>
-              <a:t>1/27/13</a:t>
+              <a:t>10/2/2026</a:t>
             </a:fld>
             <a:endParaRPr lang="en-US"/>
           </a:p>
@@ -1868,10 +1869,9 @@
           <a:lstStyle/>
           <a:p>
             <a:r>
-              <a:rPr lang="en-US" smtClean="0"/>
+              <a:rPr lang="en-US"/>
               <a:t>Click to edit Master title style</a:t>
             </a:r>
-            <a:endParaRPr lang="en-US"/>
           </a:p>
         </p:txBody>
       </p:sp>
@@ -1892,7 +1892,7 @@
           <a:p>
             <a:fld id="{5BCAD085-E8A6-8845-BD4E-CB4CCA059FC4}" type="datetimeFigureOut">
               <a:rPr lang="en-US" smtClean="0"/>
-              <a:t>1/27/13</a:t>
+              <a:t>10/2/2026</a:t>
             </a:fld>
             <a:endParaRPr lang="en-US"/>
           </a:p>
@@ -1987,7 +1987,7 @@
           <a:p>
             <a:fld id="{5BCAD085-E8A6-8845-BD4E-CB4CCA059FC4}" type="datetimeFigureOut">
               <a:rPr lang="en-US" smtClean="0"/>
-              <a:t>1/27/13</a:t>
+              <a:t>10/2/2026</a:t>
             </a:fld>
             <a:endParaRPr lang="en-US"/>
           </a:p>
@@ -2090,10 +2090,9 @@
           </a:lstStyle>
           <a:p>
             <a:r>
-              <a:rPr lang="en-US" smtClean="0"/>
+              <a:rPr lang="en-US"/>
               <a:t>Click to edit Master title style</a:t>
             </a:r>
-            <a:endParaRPr lang="en-US"/>
           </a:p>
         </p:txBody>
       </p:sp>
@@ -2147,38 +2146,37 @@
           <a:p>
             <a:pPr lvl="0"/>
             <a:r>
-              <a:rPr lang="en-US" smtClean="0"/>
+              <a:rPr lang="en-US"/>
               <a:t>Click to edit Master text styles</a:t>
             </a:r>
           </a:p>
           <a:p>
             <a:pPr lvl="1"/>
             <a:r>
-              <a:rPr lang="en-US" smtClean="0"/>
+              <a:rPr lang="en-US"/>
               <a:t>Second level</a:t>
             </a:r>
           </a:p>
           <a:p>
             <a:pPr lvl="2"/>
             <a:r>
-              <a:rPr lang="en-US" smtClean="0"/>
+              <a:rPr lang="en-US"/>
               <a:t>Third level</a:t>
             </a:r>
           </a:p>
           <a:p>
             <a:pPr lvl="3"/>
             <a:r>
-              <a:rPr lang="en-US" smtClean="0"/>
+              <a:rPr lang="en-US"/>
               <a:t>Fourth level</a:t>
             </a:r>
           </a:p>
           <a:p>
             <a:pPr lvl="4"/>
             <a:r>
-              <a:rPr lang="en-US" smtClean="0"/>
+              <a:rPr lang="en-US"/>
               <a:t>Fifth level</a:t>
             </a:r>
-            <a:endParaRPr lang="en-US"/>
           </a:p>
         </p:txBody>
       </p:sp>
@@ -2241,7 +2239,7 @@
           <a:p>
             <a:pPr lvl="0"/>
             <a:r>
-              <a:rPr lang="en-US" smtClean="0"/>
+              <a:rPr lang="en-US"/>
               <a:t>Click to edit Master text styles</a:t>
             </a:r>
           </a:p>
@@ -2264,7 +2262,7 @@
           <a:p>
             <a:fld id="{5BCAD085-E8A6-8845-BD4E-CB4CCA059FC4}" type="datetimeFigureOut">
               <a:rPr lang="en-US" smtClean="0"/>
-              <a:t>1/27/13</a:t>
+              <a:t>10/2/2026</a:t>
             </a:fld>
             <a:endParaRPr lang="en-US"/>
           </a:p>
@@ -2367,10 +2365,9 @@
           </a:lstStyle>
           <a:p>
             <a:r>
-              <a:rPr lang="en-US" smtClean="0"/>
+              <a:rPr lang="en-US"/>
               <a:t>Click to edit Master title style</a:t>
             </a:r>
-            <a:endParaRPr lang="en-US"/>
           </a:p>
         </p:txBody>
       </p:sp>
@@ -2494,7 +2491,7 @@
           <a:p>
             <a:pPr lvl="0"/>
             <a:r>
-              <a:rPr lang="en-US" smtClean="0"/>
+              <a:rPr lang="en-US"/>
               <a:t>Click to edit Master text styles</a:t>
             </a:r>
           </a:p>
@@ -2517,7 +2514,7 @@
           <a:p>
             <a:fld id="{5BCAD085-E8A6-8845-BD4E-CB4CCA059FC4}" type="datetimeFigureOut">
               <a:rPr lang="en-US" smtClean="0"/>
-              <a:t>1/27/13</a:t>
+              <a:t>10/2/2026</a:t>
             </a:fld>
             <a:endParaRPr lang="en-US"/>
           </a:p>
@@ -2626,10 +2623,9 @@
           <a:lstStyle/>
           <a:p>
             <a:r>
-              <a:rPr lang="en-US" smtClean="0"/>
+              <a:rPr lang="en-US"/>
               <a:t>Click to edit Master title style</a:t>
             </a:r>
-            <a:endParaRPr lang="en-US"/>
           </a:p>
         </p:txBody>
       </p:sp>
@@ -2660,38 +2656,37 @@
           <a:p>
             <a:pPr lvl="0"/>
             <a:r>
-              <a:rPr lang="en-US" smtClean="0"/>
+              <a:rPr lang="en-US"/>
               <a:t>Click to edit Master text styles</a:t>
             </a:r>
           </a:p>
           <a:p>
             <a:pPr lvl="1"/>
             <a:r>
-              <a:rPr lang="en-US" smtClean="0"/>
+              <a:rPr lang="en-US"/>
               <a:t>Second level</a:t>
             </a:r>
           </a:p>
           <a:p>
             <a:pPr lvl="2"/>
             <a:r>
-              <a:rPr lang="en-US" smtClean="0"/>
+              <a:rPr lang="en-US"/>
               <a:t>Third level</a:t>
             </a:r>
           </a:p>
           <a:p>
             <a:pPr lvl="3"/>
             <a:r>
-              <a:rPr lang="en-US" smtClean="0"/>
+              <a:rPr lang="en-US"/>
               <a:t>Fourth level</a:t>
             </a:r>
           </a:p>
           <a:p>
             <a:pPr lvl="4"/>
             <a:r>
-              <a:rPr lang="en-US" smtClean="0"/>
+              <a:rPr lang="en-US"/>
               <a:t>Fifth level</a:t>
             </a:r>
-            <a:endParaRPr lang="en-US"/>
           </a:p>
         </p:txBody>
       </p:sp>
@@ -2730,7 +2725,7 @@
           <a:p>
             <a:fld id="{5BCAD085-E8A6-8845-BD4E-CB4CCA059FC4}" type="datetimeFigureOut">
               <a:rPr lang="en-US" smtClean="0"/>
-              <a:t>1/27/13</a:t>
+              <a:t>10/2/2026</a:t>
             </a:fld>
             <a:endParaRPr lang="en-US"/>
           </a:p>
@@ -3089,7 +3084,7 @@
 </file>
 
 <file path=ppt/slides/slide1.xml><?xml version="1.0" encoding="utf-8"?>
-<p:sld xmlns:a="http://schemas.openxmlformats.org/drawingml/2006/main" xmlns:p="http://schemas.openxmlformats.org/presentationml/2006/main" xmlns:r="http://schemas.openxmlformats.org/officeDocument/2006/relationships">
+<p:sld xmlns:a="http://schemas.openxmlformats.org/drawingml/2006/main" xmlns:r="http://schemas.openxmlformats.org/officeDocument/2006/relationships" xmlns:p="http://schemas.openxmlformats.org/presentationml/2006/main">
   <p:cSld>
     <p:spTree>
       <p:nvGrpSpPr>
@@ -3097,7 +3092,14 @@
         <p:cNvGrpSpPr/>
         <p:nvPr/>
       </p:nvGrpSpPr>
-      <p:grpSpPr/>
+      <p:grpSpPr>
+        <a:xfrm>
+          <a:off x="0" y="0"/>
+          <a:ext cx="0" cy="0"/>
+          <a:chOff x="0" y="0"/>
+          <a:chExt cx="0" cy="0"/>
+        </a:xfrm>
+      </p:grpSpPr>
       <p:sp>
         <p:nvSpPr>
           <p:cNvPr id="4" name="Rectangle 3"/>
@@ -3139,6 +3141,7 @@
           <a:lstStyle/>
           <a:p>
             <a:pPr algn="ctr"/>
+            <a:endParaRPr/>
           </a:p>
         </p:txBody>
       </p:sp>
@@ -3216,7 +3219,7 @@
               </a:spcAft>
             </a:pPr>
             <a:r>
-              <a:rPr b="1" sz="1600">
+              <a:rPr sz="1600" b="1">
                 <a:solidFill>
                   <a:srgbClr val="C8820E"/>
                 </a:solidFill>
@@ -3224,7 +3227,7 @@
               <a:t>▸  </a:t>
             </a:r>
             <a:r>
-              <a:rPr b="1" sz="1600">
+              <a:rPr sz="1600" b="1">
                 <a:solidFill>
                   <a:srgbClr val="1F4E79"/>
                 </a:solidFill>
@@ -3250,7 +3253,7 @@
               </a:spcAft>
             </a:pPr>
             <a:r>
-              <a:rPr b="1" sz="1600">
+              <a:rPr sz="1600" b="1">
                 <a:solidFill>
                   <a:srgbClr val="C8820E"/>
                 </a:solidFill>
@@ -3258,7 +3261,7 @@
               <a:t>▸  </a:t>
             </a:r>
             <a:r>
-              <a:rPr b="1" sz="1600">
+              <a:rPr sz="1600" b="1">
                 <a:solidFill>
                   <a:srgbClr val="1F4E79"/>
                 </a:solidFill>
@@ -3284,7 +3287,7 @@
               </a:spcAft>
             </a:pPr>
             <a:r>
-              <a:rPr b="1" sz="1600">
+              <a:rPr sz="1600" b="1">
                 <a:solidFill>
                   <a:srgbClr val="C8820E"/>
                 </a:solidFill>
@@ -3343,6 +3346,7 @@
           <a:lstStyle/>
           <a:p>
             <a:pPr algn="ctr"/>
+            <a:endParaRPr/>
           </a:p>
         </p:txBody>
       </p:sp>
@@ -3387,6 +3391,7 @@
           <a:lstStyle/>
           <a:p>
             <a:pPr algn="ctr"/>
+            <a:endParaRPr/>
           </a:p>
         </p:txBody>
       </p:sp>
@@ -3466,7 +3471,7 @@
 </file>
 
 <file path=ppt/slides/slide10.xml><?xml version="1.0" encoding="utf-8"?>
-<p:sld xmlns:a="http://schemas.openxmlformats.org/drawingml/2006/main" xmlns:p="http://schemas.openxmlformats.org/presentationml/2006/main" xmlns:r="http://schemas.openxmlformats.org/officeDocument/2006/relationships">
+<p:sld xmlns:a="http://schemas.openxmlformats.org/drawingml/2006/main" xmlns:r="http://schemas.openxmlformats.org/officeDocument/2006/relationships" xmlns:p="http://schemas.openxmlformats.org/presentationml/2006/main">
   <p:cSld>
     <p:spTree>
       <p:nvGrpSpPr>
@@ -3474,7 +3479,14 @@
         <p:cNvGrpSpPr/>
         <p:nvPr/>
       </p:nvGrpSpPr>
-      <p:grpSpPr/>
+      <p:grpSpPr>
+        <a:xfrm>
+          <a:off x="0" y="0"/>
+          <a:ext cx="0" cy="0"/>
+          <a:chOff x="0" y="0"/>
+          <a:chExt cx="0" cy="0"/>
+        </a:xfrm>
+      </p:grpSpPr>
       <p:sp>
         <p:nvSpPr>
           <p:cNvPr id="4" name="Rectangle 3"/>
@@ -3516,6 +3528,7 @@
           <a:lstStyle/>
           <a:p>
             <a:pPr algn="ctr"/>
+            <a:endParaRPr/>
           </a:p>
         </p:txBody>
       </p:sp>
@@ -3593,7 +3606,7 @@
               </a:spcAft>
             </a:pPr>
             <a:r>
-              <a:rPr b="1" sz="1300">
+              <a:rPr sz="1300" b="1">
                 <a:solidFill>
                   <a:srgbClr val="C8820E"/>
                 </a:solidFill>
@@ -3601,7 +3614,7 @@
               <a:t>▸  </a:t>
             </a:r>
             <a:r>
-              <a:rPr b="1" sz="1300">
+              <a:rPr sz="1300" b="1">
                 <a:solidFill>
                   <a:srgbClr val="1F4E79"/>
                 </a:solidFill>
@@ -3627,7 +3640,7 @@
               </a:spcAft>
             </a:pPr>
             <a:r>
-              <a:rPr b="1" sz="1300">
+              <a:rPr sz="1300" b="1">
                 <a:solidFill>
                   <a:srgbClr val="C8820E"/>
                 </a:solidFill>
@@ -3635,7 +3648,7 @@
               <a:t>▸  </a:t>
             </a:r>
             <a:r>
-              <a:rPr b="1" sz="1300">
+              <a:rPr sz="1300" b="1">
                 <a:solidFill>
                   <a:srgbClr val="1F4E79"/>
                 </a:solidFill>
@@ -3661,7 +3674,7 @@
               </a:spcAft>
             </a:pPr>
             <a:r>
-              <a:rPr b="1" sz="1300">
+              <a:rPr sz="1300" b="1">
                 <a:solidFill>
                   <a:srgbClr val="C8820E"/>
                 </a:solidFill>
@@ -3669,7 +3682,7 @@
               <a:t>▸  </a:t>
             </a:r>
             <a:r>
-              <a:rPr b="1" sz="1300">
+              <a:rPr sz="1300" b="1">
                 <a:solidFill>
                   <a:srgbClr val="1F4E79"/>
                 </a:solidFill>
@@ -3695,7 +3708,7 @@
               </a:spcAft>
             </a:pPr>
             <a:r>
-              <a:rPr b="1" sz="1300">
+              <a:rPr sz="1300" b="1">
                 <a:solidFill>
                   <a:srgbClr val="C8820E"/>
                 </a:solidFill>
@@ -3703,7 +3716,7 @@
               <a:t>▸  </a:t>
             </a:r>
             <a:r>
-              <a:rPr b="1" sz="1300">
+              <a:rPr sz="1300" b="1">
                 <a:solidFill>
                   <a:srgbClr val="1F4E79"/>
                 </a:solidFill>
@@ -3729,7 +3742,7 @@
               </a:spcAft>
             </a:pPr>
             <a:r>
-              <a:rPr b="1" sz="1300">
+              <a:rPr sz="1300" b="1">
                 <a:solidFill>
                   <a:srgbClr val="C8820E"/>
                 </a:solidFill>
@@ -3737,7 +3750,7 @@
               <a:t>▸  </a:t>
             </a:r>
             <a:r>
-              <a:rPr b="1" sz="1300">
+              <a:rPr sz="1300" b="1">
                 <a:solidFill>
                   <a:srgbClr val="1F4E79"/>
                 </a:solidFill>
@@ -3763,7 +3776,7 @@
               </a:spcAft>
             </a:pPr>
             <a:r>
-              <a:rPr b="1" sz="1300">
+              <a:rPr sz="1300" b="1">
                 <a:solidFill>
                   <a:srgbClr val="C8820E"/>
                 </a:solidFill>
@@ -3771,7 +3784,7 @@
               <a:t>▸  </a:t>
             </a:r>
             <a:r>
-              <a:rPr b="1" sz="1300">
+              <a:rPr sz="1300" b="1">
                 <a:solidFill>
                   <a:srgbClr val="1F4E79"/>
                 </a:solidFill>
@@ -3797,7 +3810,7 @@
               </a:spcAft>
             </a:pPr>
             <a:r>
-              <a:rPr b="1" sz="1300">
+              <a:rPr sz="1300" b="1">
                 <a:solidFill>
                   <a:srgbClr val="C8820E"/>
                 </a:solidFill>
@@ -3805,7 +3818,7 @@
               <a:t>▸  </a:t>
             </a:r>
             <a:r>
-              <a:rPr b="1" sz="1300">
+              <a:rPr sz="1300" b="1">
                 <a:solidFill>
                   <a:srgbClr val="1F4E79"/>
                 </a:solidFill>
@@ -3831,7 +3844,7 @@
               </a:spcAft>
             </a:pPr>
             <a:r>
-              <a:rPr b="1" sz="1300">
+              <a:rPr sz="1300" b="1">
                 <a:solidFill>
                   <a:srgbClr val="C8820E"/>
                 </a:solidFill>
@@ -3839,7 +3852,7 @@
               <a:t>▸  </a:t>
             </a:r>
             <a:r>
-              <a:rPr b="1" sz="1300">
+              <a:rPr sz="1300" b="1">
                 <a:solidFill>
                   <a:srgbClr val="1F4E79"/>
                 </a:solidFill>
@@ -3898,6 +3911,7 @@
           <a:lstStyle/>
           <a:p>
             <a:pPr algn="ctr"/>
+            <a:endParaRPr/>
           </a:p>
         </p:txBody>
       </p:sp>
@@ -3940,7 +3954,7 @@
           </a:fontRef>
         </p:style>
         <p:txBody>
-          <a:bodyPr rtlCol="0" anchor="ctr" wrap="none" lIns="0" rIns="0" tIns="0" bIns="0"/>
+          <a:bodyPr wrap="none" lIns="0" tIns="0" rIns="0" bIns="0" rtlCol="0" anchor="ctr"/>
           <a:lstStyle/>
           <a:p>
             <a:pPr algn="ctr"/>
@@ -3997,6 +4011,7 @@
           <a:lstStyle/>
           <a:p>
             <a:pPr algn="ctr"/>
+            <a:endParaRPr/>
           </a:p>
         </p:txBody>
       </p:sp>
@@ -4076,7 +4091,7 @@
 </file>
 
 <file path=ppt/slides/slide11.xml><?xml version="1.0" encoding="utf-8"?>
-<p:sld xmlns:a="http://schemas.openxmlformats.org/drawingml/2006/main" xmlns:p="http://schemas.openxmlformats.org/presentationml/2006/main" xmlns:r="http://schemas.openxmlformats.org/officeDocument/2006/relationships">
+<p:sld xmlns:a="http://schemas.openxmlformats.org/drawingml/2006/main" xmlns:r="http://schemas.openxmlformats.org/officeDocument/2006/relationships" xmlns:p="http://schemas.openxmlformats.org/presentationml/2006/main">
   <p:cSld>
     <p:spTree>
       <p:nvGrpSpPr>
@@ -4084,7 +4099,14 @@
         <p:cNvGrpSpPr/>
         <p:nvPr/>
       </p:nvGrpSpPr>
-      <p:grpSpPr/>
+      <p:grpSpPr>
+        <a:xfrm>
+          <a:off x="0" y="0"/>
+          <a:ext cx="0" cy="0"/>
+          <a:chOff x="0" y="0"/>
+          <a:chExt cx="0" cy="0"/>
+        </a:xfrm>
+      </p:grpSpPr>
       <p:sp>
         <p:nvSpPr>
           <p:cNvPr id="4" name="Rectangle 3"/>
@@ -4126,6 +4148,7 @@
           <a:lstStyle/>
           <a:p>
             <a:pPr algn="ctr"/>
+            <a:endParaRPr/>
           </a:p>
         </p:txBody>
       </p:sp>
@@ -4193,7 +4216,7 @@
               </a:spcAft>
             </a:pPr>
             <a:r>
-              <a:rPr b="1" sz="1600">
+              <a:rPr sz="1600" b="1">
                 <a:solidFill>
                   <a:srgbClr val="C8820E"/>
                 </a:solidFill>
@@ -4219,7 +4242,7 @@
               </a:spcAft>
             </a:pPr>
             <a:r>
-              <a:rPr b="1" sz="1600">
+              <a:rPr sz="1600" b="1">
                 <a:solidFill>
                   <a:srgbClr val="C8820E"/>
                 </a:solidFill>
@@ -4245,7 +4268,7 @@
               </a:spcAft>
             </a:pPr>
             <a:r>
-              <a:rPr b="1" sz="1600">
+              <a:rPr sz="1600" b="1">
                 <a:solidFill>
                   <a:srgbClr val="C8820E"/>
                 </a:solidFill>
@@ -4271,7 +4294,7 @@
               </a:spcAft>
             </a:pPr>
             <a:r>
-              <a:rPr b="1" sz="1600">
+              <a:rPr sz="1600" b="1">
                 <a:solidFill>
                   <a:srgbClr val="C8820E"/>
                 </a:solidFill>
@@ -4297,7 +4320,7 @@
               </a:spcAft>
             </a:pPr>
             <a:r>
-              <a:rPr b="1" sz="1600">
+              <a:rPr sz="1600" b="1">
                 <a:solidFill>
                   <a:srgbClr val="C8820E"/>
                 </a:solidFill>
@@ -4323,7 +4346,7 @@
               </a:spcAft>
             </a:pPr>
             <a:r>
-              <a:rPr b="1" sz="1600">
+              <a:rPr sz="1600" b="1">
                 <a:solidFill>
                   <a:srgbClr val="C8820E"/>
                 </a:solidFill>
@@ -4382,6 +4405,7 @@
           <a:lstStyle/>
           <a:p>
             <a:pPr algn="ctr"/>
+            <a:endParaRPr/>
           </a:p>
         </p:txBody>
       </p:sp>
@@ -4424,7 +4448,7 @@
           </a:fontRef>
         </p:style>
         <p:txBody>
-          <a:bodyPr rtlCol="0" anchor="ctr" wrap="none" lIns="0" rIns="0" tIns="0" bIns="0"/>
+          <a:bodyPr wrap="none" lIns="0" tIns="0" rIns="0" bIns="0" rtlCol="0" anchor="ctr"/>
           <a:lstStyle/>
           <a:p>
             <a:pPr algn="ctr"/>
@@ -4481,6 +4505,7 @@
           <a:lstStyle/>
           <a:p>
             <a:pPr algn="ctr"/>
+            <a:endParaRPr/>
           </a:p>
         </p:txBody>
       </p:sp>
@@ -4560,7 +4585,7 @@
 </file>
 
 <file path=ppt/slides/slide2.xml><?xml version="1.0" encoding="utf-8"?>
-<p:sld xmlns:a="http://schemas.openxmlformats.org/drawingml/2006/main" xmlns:p="http://schemas.openxmlformats.org/presentationml/2006/main" xmlns:r="http://schemas.openxmlformats.org/officeDocument/2006/relationships">
+<p:sld xmlns:a="http://schemas.openxmlformats.org/drawingml/2006/main" xmlns:r="http://schemas.openxmlformats.org/officeDocument/2006/relationships" xmlns:p="http://schemas.openxmlformats.org/presentationml/2006/main">
   <p:cSld>
     <p:spTree>
       <p:nvGrpSpPr>
@@ -4568,7 +4593,14 @@
         <p:cNvGrpSpPr/>
         <p:nvPr/>
       </p:nvGrpSpPr>
-      <p:grpSpPr/>
+      <p:grpSpPr>
+        <a:xfrm>
+          <a:off x="0" y="0"/>
+          <a:ext cx="0" cy="0"/>
+          <a:chOff x="0" y="0"/>
+          <a:chExt cx="0" cy="0"/>
+        </a:xfrm>
+      </p:grpSpPr>
       <p:sp>
         <p:nvSpPr>
           <p:cNvPr id="4" name="Rectangle 3"/>
@@ -4610,6 +4642,7 @@
           <a:lstStyle/>
           <a:p>
             <a:pPr algn="ctr"/>
+            <a:endParaRPr/>
           </a:p>
         </p:txBody>
       </p:sp>
@@ -4687,7 +4720,7 @@
               </a:spcAft>
             </a:pPr>
             <a:r>
-              <a:rPr b="1" sz="1600">
+              <a:rPr sz="1600" b="1">
                 <a:solidFill>
                   <a:srgbClr val="C8820E"/>
                 </a:solidFill>
@@ -4695,7 +4728,7 @@
               <a:t>▸  </a:t>
             </a:r>
             <a:r>
-              <a:rPr b="1" sz="1600">
+              <a:rPr sz="1600" b="1">
                 <a:solidFill>
                   <a:srgbClr val="1F4E79"/>
                 </a:solidFill>
@@ -4721,7 +4754,7 @@
               </a:spcAft>
             </a:pPr>
             <a:r>
-              <a:rPr b="1" sz="1600">
+              <a:rPr sz="1600" b="1">
                 <a:solidFill>
                   <a:srgbClr val="C8820E"/>
                 </a:solidFill>
@@ -4729,7 +4762,7 @@
               <a:t>▸  </a:t>
             </a:r>
             <a:r>
-              <a:rPr b="1" sz="1600">
+              <a:rPr sz="1600" b="1">
                 <a:solidFill>
                   <a:srgbClr val="1F4E79"/>
                 </a:solidFill>
@@ -4755,7 +4788,7 @@
               </a:spcAft>
             </a:pPr>
             <a:r>
-              <a:rPr b="1" sz="1600">
+              <a:rPr sz="1600" b="1">
                 <a:solidFill>
                   <a:srgbClr val="C8820E"/>
                 </a:solidFill>
@@ -4763,7 +4796,7 @@
               <a:t>▸  </a:t>
             </a:r>
             <a:r>
-              <a:rPr b="1" sz="1600">
+              <a:rPr sz="1600" b="1">
                 <a:solidFill>
                   <a:srgbClr val="1F4E79"/>
                 </a:solidFill>
@@ -4789,7 +4822,7 @@
               </a:spcAft>
             </a:pPr>
             <a:r>
-              <a:rPr b="1" sz="1600">
+              <a:rPr sz="1600" b="1">
                 <a:solidFill>
                   <a:srgbClr val="C8820E"/>
                 </a:solidFill>
@@ -4797,7 +4830,7 @@
               <a:t>▸  </a:t>
             </a:r>
             <a:r>
-              <a:rPr b="1" sz="1600">
+              <a:rPr sz="1600" b="1">
                 <a:solidFill>
                   <a:srgbClr val="1F4E79"/>
                 </a:solidFill>
@@ -4823,7 +4856,7 @@
               </a:spcAft>
             </a:pPr>
             <a:r>
-              <a:rPr b="1" sz="1600">
+              <a:rPr sz="1600" b="1">
                 <a:solidFill>
                   <a:srgbClr val="C8820E"/>
                 </a:solidFill>
@@ -4831,7 +4864,7 @@
               <a:t>▸  </a:t>
             </a:r>
             <a:r>
-              <a:rPr b="1" sz="1600">
+              <a:rPr sz="1600" b="1">
                 <a:solidFill>
                   <a:srgbClr val="1F4E79"/>
                 </a:solidFill>
@@ -4857,7 +4890,7 @@
               </a:spcAft>
             </a:pPr>
             <a:r>
-              <a:rPr b="1" sz="1600">
+              <a:rPr sz="1600" b="1">
                 <a:solidFill>
                   <a:srgbClr val="C8820E"/>
                 </a:solidFill>
@@ -4865,7 +4898,7 @@
               <a:t>▸  </a:t>
             </a:r>
             <a:r>
-              <a:rPr b="1" sz="1600">
+              <a:rPr sz="1600" b="1">
                 <a:solidFill>
                   <a:srgbClr val="1F4E79"/>
                 </a:solidFill>
@@ -4924,6 +4957,7 @@
           <a:lstStyle/>
           <a:p>
             <a:pPr algn="ctr"/>
+            <a:endParaRPr/>
           </a:p>
         </p:txBody>
       </p:sp>
@@ -4966,7 +5000,7 @@
           </a:fontRef>
         </p:style>
         <p:txBody>
-          <a:bodyPr rtlCol="0" anchor="ctr" wrap="none" lIns="0" rIns="0" tIns="0" bIns="0"/>
+          <a:bodyPr wrap="none" lIns="0" tIns="0" rIns="0" bIns="0" rtlCol="0" anchor="ctr"/>
           <a:lstStyle/>
           <a:p>
             <a:pPr algn="ctr"/>
@@ -5023,6 +5057,7 @@
           <a:lstStyle/>
           <a:p>
             <a:pPr algn="ctr"/>
+            <a:endParaRPr/>
           </a:p>
         </p:txBody>
       </p:sp>
@@ -5102,7 +5137,7 @@
 </file>
 
 <file path=ppt/slides/slide3.xml><?xml version="1.0" encoding="utf-8"?>
-<p:sld xmlns:a="http://schemas.openxmlformats.org/drawingml/2006/main" xmlns:p="http://schemas.openxmlformats.org/presentationml/2006/main" xmlns:r="http://schemas.openxmlformats.org/officeDocument/2006/relationships">
+<p:sld xmlns:a="http://schemas.openxmlformats.org/drawingml/2006/main" xmlns:r="http://schemas.openxmlformats.org/officeDocument/2006/relationships" xmlns:p="http://schemas.openxmlformats.org/presentationml/2006/main">
   <p:cSld>
     <p:spTree>
       <p:nvGrpSpPr>
@@ -5110,7 +5145,14 @@
         <p:cNvGrpSpPr/>
         <p:nvPr/>
       </p:nvGrpSpPr>
-      <p:grpSpPr/>
+      <p:grpSpPr>
+        <a:xfrm>
+          <a:off x="0" y="0"/>
+          <a:ext cx="0" cy="0"/>
+          <a:chOff x="0" y="0"/>
+          <a:chExt cx="0" cy="0"/>
+        </a:xfrm>
+      </p:grpSpPr>
       <p:sp>
         <p:nvSpPr>
           <p:cNvPr id="5" name="Rectangle 4"/>
@@ -5152,6 +5194,7 @@
           <a:lstStyle/>
           <a:p>
             <a:pPr algn="ctr"/>
+            <a:endParaRPr/>
           </a:p>
         </p:txBody>
       </p:sp>
@@ -5217,8 +5260,20 @@
                 <a:tableStyleId>{5C22544A-7EE6-4342-B048-85BDC9FD1C3A}</a:tableStyleId>
               </a:tblPr>
               <a:tblGrid>
-                <a:gridCol w="5532120"/>
-                <a:gridCol w="5532120"/>
+                <a:gridCol w="5532120">
+                  <a:extLst>
+                    <a:ext uri="{9D8B030D-6E8A-4147-A177-3AD203B41FA5}">
+                      <a16:colId xmlns:a16="http://schemas.microsoft.com/office/drawing/2014/main" val="20000"/>
+                    </a:ext>
+                  </a:extLst>
+                </a:gridCol>
+                <a:gridCol w="5532120">
+                  <a:extLst>
+                    <a:ext uri="{9D8B030D-6E8A-4147-A177-3AD203B41FA5}">
+                      <a16:colId xmlns:a16="http://schemas.microsoft.com/office/drawing/2014/main" val="20001"/>
+                    </a:ext>
+                  </a:extLst>
+                </a:gridCol>
               </a:tblGrid>
               <a:tr h="365760">
                 <a:tc>
@@ -5265,6 +5320,11 @@
                     </a:solidFill>
                   </a:tcPr>
                 </a:tc>
+                <a:extLst>
+                  <a:ext uri="{0D108BD9-81ED-4DB2-BD59-A6C34878D82A}">
+                    <a16:rowId xmlns:a16="http://schemas.microsoft.com/office/drawing/2014/main" val="10000"/>
+                  </a:ext>
+                </a:extLst>
               </a:tr>
               <a:tr h="365760">
                 <a:tc>
@@ -5294,6 +5354,11 @@
                   </a:txBody>
                   <a:tcPr anchor="ctr"/>
                 </a:tc>
+                <a:extLst>
+                  <a:ext uri="{0D108BD9-81ED-4DB2-BD59-A6C34878D82A}">
+                    <a16:rowId xmlns:a16="http://schemas.microsoft.com/office/drawing/2014/main" val="10001"/>
+                  </a:ext>
+                </a:extLst>
               </a:tr>
               <a:tr h="365760">
                 <a:tc>
@@ -5323,6 +5388,11 @@
                   </a:txBody>
                   <a:tcPr anchor="ctr"/>
                 </a:tc>
+                <a:extLst>
+                  <a:ext uri="{0D108BD9-81ED-4DB2-BD59-A6C34878D82A}">
+                    <a16:rowId xmlns:a16="http://schemas.microsoft.com/office/drawing/2014/main" val="10002"/>
+                  </a:ext>
+                </a:extLst>
               </a:tr>
               <a:tr h="365760">
                 <a:tc>
@@ -5352,6 +5422,11 @@
                   </a:txBody>
                   <a:tcPr anchor="ctr"/>
                 </a:tc>
+                <a:extLst>
+                  <a:ext uri="{0D108BD9-81ED-4DB2-BD59-A6C34878D82A}">
+                    <a16:rowId xmlns:a16="http://schemas.microsoft.com/office/drawing/2014/main" val="10003"/>
+                  </a:ext>
+                </a:extLst>
               </a:tr>
               <a:tr h="365760">
                 <a:tc>
@@ -5381,6 +5456,11 @@
                   </a:txBody>
                   <a:tcPr anchor="ctr"/>
                 </a:tc>
+                <a:extLst>
+                  <a:ext uri="{0D108BD9-81ED-4DB2-BD59-A6C34878D82A}">
+                    <a16:rowId xmlns:a16="http://schemas.microsoft.com/office/drawing/2014/main" val="10004"/>
+                  </a:ext>
+                </a:extLst>
               </a:tr>
               <a:tr h="365760">
                 <a:tc>
@@ -5410,6 +5490,11 @@
                   </a:txBody>
                   <a:tcPr anchor="ctr"/>
                 </a:tc>
+                <a:extLst>
+                  <a:ext uri="{0D108BD9-81ED-4DB2-BD59-A6C34878D82A}">
+                    <a16:rowId xmlns:a16="http://schemas.microsoft.com/office/drawing/2014/main" val="10005"/>
+                  </a:ext>
+                </a:extLst>
               </a:tr>
               <a:tr h="365760">
                 <a:tc>
@@ -5439,6 +5524,11 @@
                   </a:txBody>
                   <a:tcPr anchor="ctr"/>
                 </a:tc>
+                <a:extLst>
+                  <a:ext uri="{0D108BD9-81ED-4DB2-BD59-A6C34878D82A}">
+                    <a16:rowId xmlns:a16="http://schemas.microsoft.com/office/drawing/2014/main" val="10006"/>
+                  </a:ext>
+                </a:extLst>
               </a:tr>
               <a:tr h="365760">
                 <a:tc>
@@ -5468,6 +5558,11 @@
                   </a:txBody>
                   <a:tcPr anchor="ctr"/>
                 </a:tc>
+                <a:extLst>
+                  <a:ext uri="{0D108BD9-81ED-4DB2-BD59-A6C34878D82A}">
+                    <a16:rowId xmlns:a16="http://schemas.microsoft.com/office/drawing/2014/main" val="10007"/>
+                  </a:ext>
+                </a:extLst>
               </a:tr>
             </a:tbl>
           </a:graphicData>
@@ -5504,7 +5599,7 @@
               </a:spcAft>
             </a:pPr>
             <a:r>
-              <a:rPr b="1" sz="1600">
+              <a:rPr sz="1600" b="1">
                 <a:solidFill>
                   <a:srgbClr val="C8820E"/>
                 </a:solidFill>
@@ -5512,7 +5607,7 @@
               <a:t>▸  </a:t>
             </a:r>
             <a:r>
-              <a:rPr b="1" sz="1600">
+              <a:rPr sz="1600" b="1">
                 <a:solidFill>
                   <a:srgbClr val="1F4E79"/>
                 </a:solidFill>
@@ -5571,6 +5666,7 @@
           <a:lstStyle/>
           <a:p>
             <a:pPr algn="ctr"/>
+            <a:endParaRPr/>
           </a:p>
         </p:txBody>
       </p:sp>
@@ -5613,7 +5709,7 @@
           </a:fontRef>
         </p:style>
         <p:txBody>
-          <a:bodyPr rtlCol="0" anchor="ctr" wrap="none" lIns="0" rIns="0" tIns="0" bIns="0"/>
+          <a:bodyPr wrap="none" lIns="0" tIns="0" rIns="0" bIns="0" rtlCol="0" anchor="ctr"/>
           <a:lstStyle/>
           <a:p>
             <a:pPr algn="ctr"/>
@@ -5670,6 +5766,7 @@
           <a:lstStyle/>
           <a:p>
             <a:pPr algn="ctr"/>
+            <a:endParaRPr/>
           </a:p>
         </p:txBody>
       </p:sp>
@@ -5749,7 +5846,7 @@
 </file>
 
 <file path=ppt/slides/slide4.xml><?xml version="1.0" encoding="utf-8"?>
-<p:sld xmlns:a="http://schemas.openxmlformats.org/drawingml/2006/main" xmlns:p="http://schemas.openxmlformats.org/presentationml/2006/main" xmlns:r="http://schemas.openxmlformats.org/officeDocument/2006/relationships">
+<p:sld xmlns:a="http://schemas.openxmlformats.org/drawingml/2006/main" xmlns:r="http://schemas.openxmlformats.org/officeDocument/2006/relationships" xmlns:p="http://schemas.openxmlformats.org/presentationml/2006/main">
   <p:cSld>
     <p:spTree>
       <p:nvGrpSpPr>
@@ -5757,7 +5854,14 @@
         <p:cNvGrpSpPr/>
         <p:nvPr/>
       </p:nvGrpSpPr>
-      <p:grpSpPr/>
+      <p:grpSpPr>
+        <a:xfrm>
+          <a:off x="0" y="0"/>
+          <a:ext cx="0" cy="0"/>
+          <a:chOff x="0" y="0"/>
+          <a:chExt cx="0" cy="0"/>
+        </a:xfrm>
+      </p:grpSpPr>
       <p:sp>
         <p:nvSpPr>
           <p:cNvPr id="4" name="Rectangle 3"/>
@@ -5799,6 +5903,7 @@
           <a:lstStyle/>
           <a:p>
             <a:pPr algn="ctr"/>
+            <a:endParaRPr/>
           </a:p>
         </p:txBody>
       </p:sp>
@@ -5855,7 +5960,7 @@
         </p:nvGraphicFramePr>
         <p:xfrm>
           <a:off x="548640" y="1371600"/>
-          <a:ext cx="11064240" cy="1828800"/>
+          <a:ext cx="11064240" cy="2072640"/>
         </p:xfrm>
         <a:graphic>
           <a:graphicData uri="http://schemas.openxmlformats.org/drawingml/2006/table">
@@ -5864,9 +5969,27 @@
                 <a:tableStyleId>{5C22544A-7EE6-4342-B048-85BDC9FD1C3A}</a:tableStyleId>
               </a:tblPr>
               <a:tblGrid>
-                <a:gridCol w="3688080"/>
-                <a:gridCol w="3688080"/>
-                <a:gridCol w="3688080"/>
+                <a:gridCol w="3688080">
+                  <a:extLst>
+                    <a:ext uri="{9D8B030D-6E8A-4147-A177-3AD203B41FA5}">
+                      <a16:colId xmlns:a16="http://schemas.microsoft.com/office/drawing/2014/main" val="20000"/>
+                    </a:ext>
+                  </a:extLst>
+                </a:gridCol>
+                <a:gridCol w="3688080">
+                  <a:extLst>
+                    <a:ext uri="{9D8B030D-6E8A-4147-A177-3AD203B41FA5}">
+                      <a16:colId xmlns:a16="http://schemas.microsoft.com/office/drawing/2014/main" val="20001"/>
+                    </a:ext>
+                  </a:extLst>
+                </a:gridCol>
+                <a:gridCol w="3688080">
+                  <a:extLst>
+                    <a:ext uri="{9D8B030D-6E8A-4147-A177-3AD203B41FA5}">
+                      <a16:colId xmlns:a16="http://schemas.microsoft.com/office/drawing/2014/main" val="20002"/>
+                    </a:ext>
+                  </a:extLst>
+                </a:gridCol>
               </a:tblGrid>
               <a:tr h="365760">
                 <a:tc>
@@ -5935,6 +6058,11 @@
                     </a:solidFill>
                   </a:tcPr>
                 </a:tc>
+                <a:extLst>
+                  <a:ext uri="{0D108BD9-81ED-4DB2-BD59-A6C34878D82A}">
+                    <a16:rowId xmlns:a16="http://schemas.microsoft.com/office/drawing/2014/main" val="10000"/>
+                  </a:ext>
+                </a:extLst>
               </a:tr>
               <a:tr h="365760">
                 <a:tc>
@@ -5979,6 +6107,11 @@
                   </a:txBody>
                   <a:tcPr anchor="ctr"/>
                 </a:tc>
+                <a:extLst>
+                  <a:ext uri="{0D108BD9-81ED-4DB2-BD59-A6C34878D82A}">
+                    <a16:rowId xmlns:a16="http://schemas.microsoft.com/office/drawing/2014/main" val="10001"/>
+                  </a:ext>
+                </a:extLst>
               </a:tr>
               <a:tr h="365760">
                 <a:tc>
@@ -6023,6 +6156,11 @@
                   </a:txBody>
                   <a:tcPr anchor="ctr"/>
                 </a:tc>
+                <a:extLst>
+                  <a:ext uri="{0D108BD9-81ED-4DB2-BD59-A6C34878D82A}">
+                    <a16:rowId xmlns:a16="http://schemas.microsoft.com/office/drawing/2014/main" val="10002"/>
+                  </a:ext>
+                </a:extLst>
               </a:tr>
               <a:tr h="365760">
                 <a:tc>
@@ -6067,6 +6205,11 @@
                   </a:txBody>
                   <a:tcPr anchor="ctr"/>
                 </a:tc>
+                <a:extLst>
+                  <a:ext uri="{0D108BD9-81ED-4DB2-BD59-A6C34878D82A}">
+                    <a16:rowId xmlns:a16="http://schemas.microsoft.com/office/drawing/2014/main" val="10003"/>
+                  </a:ext>
+                </a:extLst>
               </a:tr>
               <a:tr h="365760">
                 <a:tc>
@@ -6111,6 +6254,11 @@
                   </a:txBody>
                   <a:tcPr anchor="ctr"/>
                 </a:tc>
+                <a:extLst>
+                  <a:ext uri="{0D108BD9-81ED-4DB2-BD59-A6C34878D82A}">
+                    <a16:rowId xmlns:a16="http://schemas.microsoft.com/office/drawing/2014/main" val="10004"/>
+                  </a:ext>
+                </a:extLst>
               </a:tr>
             </a:tbl>
           </a:graphicData>
@@ -6157,6 +6305,7 @@
           <a:lstStyle/>
           <a:p>
             <a:pPr algn="ctr"/>
+            <a:endParaRPr/>
           </a:p>
         </p:txBody>
       </p:sp>
@@ -6199,7 +6348,7 @@
           </a:fontRef>
         </p:style>
         <p:txBody>
-          <a:bodyPr rtlCol="0" anchor="ctr" wrap="none" lIns="0" rIns="0" tIns="0" bIns="0"/>
+          <a:bodyPr wrap="none" lIns="0" tIns="0" rIns="0" bIns="0" rtlCol="0" anchor="ctr"/>
           <a:lstStyle/>
           <a:p>
             <a:pPr algn="ctr"/>
@@ -6256,6 +6405,7 @@
           <a:lstStyle/>
           <a:p>
             <a:pPr algn="ctr"/>
+            <a:endParaRPr/>
           </a:p>
         </p:txBody>
       </p:sp>
@@ -6335,7 +6485,7 @@
 </file>
 
 <file path=ppt/slides/slide5.xml><?xml version="1.0" encoding="utf-8"?>
-<p:sld xmlns:a="http://schemas.openxmlformats.org/drawingml/2006/main" xmlns:p="http://schemas.openxmlformats.org/presentationml/2006/main" xmlns:r="http://schemas.openxmlformats.org/officeDocument/2006/relationships">
+<p:sld xmlns:a="http://schemas.openxmlformats.org/drawingml/2006/main" xmlns:r="http://schemas.openxmlformats.org/officeDocument/2006/relationships" xmlns:p="http://schemas.openxmlformats.org/presentationml/2006/main">
   <p:cSld>
     <p:spTree>
       <p:nvGrpSpPr>
@@ -6343,7 +6493,14 @@
         <p:cNvGrpSpPr/>
         <p:nvPr/>
       </p:nvGrpSpPr>
-      <p:grpSpPr/>
+      <p:grpSpPr>
+        <a:xfrm>
+          <a:off x="0" y="0"/>
+          <a:ext cx="0" cy="0"/>
+          <a:chOff x="0" y="0"/>
+          <a:chExt cx="0" cy="0"/>
+        </a:xfrm>
+      </p:grpSpPr>
       <p:sp>
         <p:nvSpPr>
           <p:cNvPr id="4" name="Rectangle 3"/>
@@ -6385,6 +6542,7 @@
           <a:lstStyle/>
           <a:p>
             <a:pPr algn="ctr"/>
+            <a:endParaRPr/>
           </a:p>
         </p:txBody>
       </p:sp>
@@ -6441,7 +6599,7 @@
         </p:nvGraphicFramePr>
         <p:xfrm>
           <a:off x="548640" y="1371600"/>
-          <a:ext cx="11064240" cy="2560320"/>
+          <a:ext cx="11064240" cy="3291840"/>
         </p:xfrm>
         <a:graphic>
           <a:graphicData uri="http://schemas.openxmlformats.org/drawingml/2006/table">
@@ -6450,9 +6608,27 @@
                 <a:tableStyleId>{5C22544A-7EE6-4342-B048-85BDC9FD1C3A}</a:tableStyleId>
               </a:tblPr>
               <a:tblGrid>
-                <a:gridCol w="3688080"/>
-                <a:gridCol w="3688080"/>
-                <a:gridCol w="3688080"/>
+                <a:gridCol w="3688080">
+                  <a:extLst>
+                    <a:ext uri="{9D8B030D-6E8A-4147-A177-3AD203B41FA5}">
+                      <a16:colId xmlns:a16="http://schemas.microsoft.com/office/drawing/2014/main" val="20000"/>
+                    </a:ext>
+                  </a:extLst>
+                </a:gridCol>
+                <a:gridCol w="3688080">
+                  <a:extLst>
+                    <a:ext uri="{9D8B030D-6E8A-4147-A177-3AD203B41FA5}">
+                      <a16:colId xmlns:a16="http://schemas.microsoft.com/office/drawing/2014/main" val="20001"/>
+                    </a:ext>
+                  </a:extLst>
+                </a:gridCol>
+                <a:gridCol w="3688080">
+                  <a:extLst>
+                    <a:ext uri="{9D8B030D-6E8A-4147-A177-3AD203B41FA5}">
+                      <a16:colId xmlns:a16="http://schemas.microsoft.com/office/drawing/2014/main" val="20002"/>
+                    </a:ext>
+                  </a:extLst>
+                </a:gridCol>
               </a:tblGrid>
               <a:tr h="365760">
                 <a:tc>
@@ -6521,6 +6697,11 @@
                     </a:solidFill>
                   </a:tcPr>
                 </a:tc>
+                <a:extLst>
+                  <a:ext uri="{0D108BD9-81ED-4DB2-BD59-A6C34878D82A}">
+                    <a16:rowId xmlns:a16="http://schemas.microsoft.com/office/drawing/2014/main" val="10000"/>
+                  </a:ext>
+                </a:extLst>
               </a:tr>
               <a:tr h="365760">
                 <a:tc>
@@ -6589,6 +6770,11 @@
                     </a:solidFill>
                   </a:tcPr>
                 </a:tc>
+                <a:extLst>
+                  <a:ext uri="{0D108BD9-81ED-4DB2-BD59-A6C34878D82A}">
+                    <a16:rowId xmlns:a16="http://schemas.microsoft.com/office/drawing/2014/main" val="10001"/>
+                  </a:ext>
+                </a:extLst>
               </a:tr>
               <a:tr h="365760">
                 <a:tc>
@@ -6657,6 +6843,11 @@
                     </a:solidFill>
                   </a:tcPr>
                 </a:tc>
+                <a:extLst>
+                  <a:ext uri="{0D108BD9-81ED-4DB2-BD59-A6C34878D82A}">
+                    <a16:rowId xmlns:a16="http://schemas.microsoft.com/office/drawing/2014/main" val="10002"/>
+                  </a:ext>
+                </a:extLst>
               </a:tr>
               <a:tr h="365760">
                 <a:tc>
@@ -6725,6 +6916,11 @@
                     </a:solidFill>
                   </a:tcPr>
                 </a:tc>
+                <a:extLst>
+                  <a:ext uri="{0D108BD9-81ED-4DB2-BD59-A6C34878D82A}">
+                    <a16:rowId xmlns:a16="http://schemas.microsoft.com/office/drawing/2014/main" val="10003"/>
+                  </a:ext>
+                </a:extLst>
               </a:tr>
               <a:tr h="365760">
                 <a:tc>
@@ -6793,6 +6989,11 @@
                     </a:solidFill>
                   </a:tcPr>
                 </a:tc>
+                <a:extLst>
+                  <a:ext uri="{0D108BD9-81ED-4DB2-BD59-A6C34878D82A}">
+                    <a16:rowId xmlns:a16="http://schemas.microsoft.com/office/drawing/2014/main" val="10004"/>
+                  </a:ext>
+                </a:extLst>
               </a:tr>
               <a:tr h="365760">
                 <a:tc>
@@ -6861,6 +7062,11 @@
                     </a:solidFill>
                   </a:tcPr>
                 </a:tc>
+                <a:extLst>
+                  <a:ext uri="{0D108BD9-81ED-4DB2-BD59-A6C34878D82A}">
+                    <a16:rowId xmlns:a16="http://schemas.microsoft.com/office/drawing/2014/main" val="10005"/>
+                  </a:ext>
+                </a:extLst>
               </a:tr>
               <a:tr h="365760">
                 <a:tc>
@@ -6929,6 +7135,11 @@
                     </a:solidFill>
                   </a:tcPr>
                 </a:tc>
+                <a:extLst>
+                  <a:ext uri="{0D108BD9-81ED-4DB2-BD59-A6C34878D82A}">
+                    <a16:rowId xmlns:a16="http://schemas.microsoft.com/office/drawing/2014/main" val="10006"/>
+                  </a:ext>
+                </a:extLst>
               </a:tr>
             </a:tbl>
           </a:graphicData>
@@ -6975,6 +7186,7 @@
           <a:lstStyle/>
           <a:p>
             <a:pPr algn="ctr"/>
+            <a:endParaRPr/>
           </a:p>
         </p:txBody>
       </p:sp>
@@ -7017,7 +7229,7 @@
           </a:fontRef>
         </p:style>
         <p:txBody>
-          <a:bodyPr rtlCol="0" anchor="ctr" wrap="none" lIns="0" rIns="0" tIns="0" bIns="0"/>
+          <a:bodyPr wrap="none" lIns="0" tIns="0" rIns="0" bIns="0" rtlCol="0" anchor="ctr"/>
           <a:lstStyle/>
           <a:p>
             <a:pPr algn="ctr"/>
@@ -7074,6 +7286,7 @@
           <a:lstStyle/>
           <a:p>
             <a:pPr algn="ctr"/>
+            <a:endParaRPr/>
           </a:p>
         </p:txBody>
       </p:sp>
@@ -7153,7 +7366,7 @@
 </file>
 
 <file path=ppt/slides/slide6.xml><?xml version="1.0" encoding="utf-8"?>
-<p:sld xmlns:a="http://schemas.openxmlformats.org/drawingml/2006/main" xmlns:p="http://schemas.openxmlformats.org/presentationml/2006/main" xmlns:r="http://schemas.openxmlformats.org/officeDocument/2006/relationships">
+<p:sld xmlns:a="http://schemas.openxmlformats.org/drawingml/2006/main" xmlns:r="http://schemas.openxmlformats.org/officeDocument/2006/relationships" xmlns:p="http://schemas.openxmlformats.org/presentationml/2006/main">
   <p:cSld>
     <p:spTree>
       <p:nvGrpSpPr>
@@ -7161,7 +7374,14 @@
         <p:cNvGrpSpPr/>
         <p:nvPr/>
       </p:nvGrpSpPr>
-      <p:grpSpPr/>
+      <p:grpSpPr>
+        <a:xfrm>
+          <a:off x="0" y="0"/>
+          <a:ext cx="0" cy="0"/>
+          <a:chOff x="0" y="0"/>
+          <a:chExt cx="0" cy="0"/>
+        </a:xfrm>
+      </p:grpSpPr>
       <p:sp>
         <p:nvSpPr>
           <p:cNvPr id="6" name="Rectangle 5"/>
@@ -7203,6 +7423,7 @@
           <a:lstStyle/>
           <a:p>
             <a:pPr algn="ctr"/>
+            <a:endParaRPr/>
           </a:p>
         </p:txBody>
       </p:sp>
@@ -7214,8 +7435,8 @@
         </p:nvSpPr>
         <p:spPr>
           <a:xfrm>
-            <a:off x="1234440" y="91440"/>
-            <a:ext cx="10728655" cy="960120"/>
+            <a:off x="1234440" y="232946"/>
+            <a:ext cx="4203330" cy="677108"/>
           </a:xfrm>
           <a:prstGeom prst="rect">
             <a:avLst/>
@@ -7229,7 +7450,7 @@
           <a:lstStyle/>
           <a:p>
             <a:r>
-              <a:rPr sz="2600" b="1">
+              <a:rPr sz="2600" b="1" dirty="0">
                 <a:solidFill>
                   <a:srgbClr val="FFFFFF"/>
                 </a:solidFill>
@@ -7239,12 +7460,36 @@
           </a:p>
           <a:p>
             <a:r>
-              <a:rPr sz="1200">
+              <a:rPr sz="1200" dirty="0">
                 <a:solidFill>
                   <a:srgbClr val="C9D7E4"/>
                 </a:solidFill>
               </a:rPr>
-              <a:t>Playable game + autonomous rescue agent (robot or drone skin)</a:t>
+              <a:t>Playable game + </a:t>
+            </a:r>
+            <a:r>
+              <a:rPr lang="en-SG" sz="1200" dirty="0">
+                <a:solidFill>
+                  <a:srgbClr val="C9D7E4"/>
+                </a:solidFill>
+              </a:rPr>
+              <a:t>A</a:t>
+            </a:r>
+            <a:r>
+              <a:rPr sz="1200" dirty="0" err="1">
+                <a:solidFill>
+                  <a:srgbClr val="C9D7E4"/>
+                </a:solidFill>
+              </a:rPr>
+              <a:t>utonomous</a:t>
+            </a:r>
+            <a:r>
+              <a:rPr sz="1200" dirty="0">
+                <a:solidFill>
+                  <a:srgbClr val="C9D7E4"/>
+                </a:solidFill>
+              </a:rPr>
+              <a:t> rescue agent (robot or drone skin)</a:t>
             </a:r>
           </a:p>
         </p:txBody>
@@ -7280,7 +7525,7 @@
               </a:spcAft>
             </a:pPr>
             <a:r>
-              <a:rPr b="1" sz="1600">
+              <a:rPr sz="1600" b="1">
                 <a:solidFill>
                   <a:srgbClr val="C8820E"/>
                 </a:solidFill>
@@ -7288,7 +7533,7 @@
               <a:t>▸  </a:t>
             </a:r>
             <a:r>
-              <a:rPr b="1" sz="1600">
+              <a:rPr sz="1600" b="1">
                 <a:solidFill>
                   <a:srgbClr val="1F4E79"/>
                 </a:solidFill>
@@ -7314,7 +7559,7 @@
               </a:spcAft>
             </a:pPr>
             <a:r>
-              <a:rPr b="1" sz="1600">
+              <a:rPr sz="1600" b="1">
                 <a:solidFill>
                   <a:srgbClr val="C8820E"/>
                 </a:solidFill>
@@ -7322,7 +7567,7 @@
               <a:t>▸  </a:t>
             </a:r>
             <a:r>
-              <a:rPr b="1" sz="1600">
+              <a:rPr sz="1600" b="1">
                 <a:solidFill>
                   <a:srgbClr val="1F4E79"/>
                 </a:solidFill>
@@ -7348,7 +7593,7 @@
               </a:spcAft>
             </a:pPr>
             <a:r>
-              <a:rPr b="1" sz="1600">
+              <a:rPr sz="1600" b="1">
                 <a:solidFill>
                   <a:srgbClr val="C8820E"/>
                 </a:solidFill>
@@ -7356,12 +7601,20 @@
               <a:t>▸  </a:t>
             </a:r>
             <a:r>
+              <a:rPr sz="1600" b="1">
+                <a:solidFill>
+                  <a:srgbClr val="1F4E79"/>
+                </a:solidFill>
+              </a:rPr>
+              <a:t>Techniques (from the brief's list): </a:t>
+            </a:r>
+            <a:r>
               <a:rPr sz="1600">
                 <a:solidFill>
                   <a:srgbClr val="2B2B2B"/>
                 </a:solidFill>
               </a:rPr>
-              <a:t>Techniques (from the brief's list): Search (BFS/Dijkstra/A*/Greedy) • Intelligent agent • Decision-making under uncertainty • Machine learning (optional second brain, imitates A*)</a:t>
+              <a:t>Search (BFS/Dijkstra/A*/Greedy) • Intelligent agent • Decision-making under uncertainty • Machine learning (optional second brain, imitates A*)</a:t>
             </a:r>
           </a:p>
           <a:p>
@@ -7374,7 +7627,7 @@
               </a:spcAft>
             </a:pPr>
             <a:r>
-              <a:rPr b="1" sz="1600">
+              <a:rPr sz="1600" b="1">
                 <a:solidFill>
                   <a:srgbClr val="C8820E"/>
                 </a:solidFill>
@@ -7382,7 +7635,7 @@
               <a:t>▸  </a:t>
             </a:r>
             <a:r>
-              <a:rPr b="1" sz="1600">
+              <a:rPr sz="1600" b="1">
                 <a:solidFill>
                   <a:srgbClr val="1F4E79"/>
                 </a:solidFill>
@@ -7408,7 +7661,7 @@
               </a:spcAft>
             </a:pPr>
             <a:r>
-              <a:rPr b="1" sz="1600">
+              <a:rPr sz="1600" b="1">
                 <a:solidFill>
                   <a:srgbClr val="C8820E"/>
                 </a:solidFill>
@@ -7416,7 +7669,7 @@
               <a:t>▸  </a:t>
             </a:r>
             <a:r>
-              <a:rPr b="1" sz="1600">
+              <a:rPr sz="1600" b="1">
                 <a:solidFill>
                   <a:srgbClr val="1F4E79"/>
                 </a:solidFill>
@@ -7458,30 +7711,6 @@
           </a:prstGeom>
         </p:spPr>
       </p:pic>
-      <p:pic>
-        <p:nvPicPr>
-          <p:cNvPr id="5" name="Picture 4" descr="ui_sheet_final.png"/>
-          <p:cNvPicPr>
-            <a:picLocks noChangeAspect="1"/>
-          </p:cNvPicPr>
-          <p:nvPr/>
-        </p:nvPicPr>
-        <p:blipFill>
-          <a:blip r:embed="rId3"/>
-          <a:stretch>
-            <a:fillRect/>
-          </a:stretch>
-        </p:blipFill>
-        <p:spPr>
-          <a:xfrm>
-            <a:off x="5364201" y="4160520"/>
-            <a:ext cx="3360420" cy="2240280"/>
-          </a:xfrm>
-          <a:prstGeom prst="rect">
-            <a:avLst/>
-          </a:prstGeom>
-        </p:spPr>
-      </p:pic>
       <p:sp>
         <p:nvSpPr>
           <p:cNvPr id="7" name="Rectangle 6"/>
@@ -7523,6 +7752,7 @@
           <a:lstStyle/>
           <a:p>
             <a:pPr algn="ctr"/>
+            <a:endParaRPr/>
           </a:p>
         </p:txBody>
       </p:sp>
@@ -7565,7 +7795,7 @@
           </a:fontRef>
         </p:style>
         <p:txBody>
-          <a:bodyPr rtlCol="0" anchor="ctr" wrap="none" lIns="0" rIns="0" tIns="0" bIns="0"/>
+          <a:bodyPr wrap="none" lIns="0" tIns="0" rIns="0" bIns="0" rtlCol="0" anchor="ctr"/>
           <a:lstStyle/>
           <a:p>
             <a:pPr algn="ctr"/>
@@ -7622,6 +7852,7 @@
           <a:lstStyle/>
           <a:p>
             <a:pPr algn="ctr"/>
+            <a:endParaRPr/>
           </a:p>
         </p:txBody>
       </p:sp>
@@ -7692,6 +7923,30 @@
           </a:p>
         </p:txBody>
       </p:sp>
+      <p:pic>
+        <p:nvPicPr>
+          <p:cNvPr id="12" name="Picture 11" descr="slide6_two_panels.png"/>
+          <p:cNvPicPr>
+            <a:picLocks noChangeAspect="1"/>
+          </p:cNvPicPr>
+          <p:nvPr/>
+        </p:nvPicPr>
+        <p:blipFill>
+          <a:blip r:embed="rId4"/>
+          <a:stretch>
+            <a:fillRect/>
+          </a:stretch>
+        </p:blipFill>
+        <p:spPr>
+          <a:xfrm>
+            <a:off x="5074920" y="4160520"/>
+            <a:ext cx="5989320" cy="2240280"/>
+          </a:xfrm>
+          <a:prstGeom prst="rect">
+            <a:avLst/>
+          </a:prstGeom>
+        </p:spPr>
+      </p:pic>
     </p:spTree>
   </p:cSld>
   <p:clrMapOvr>
@@ -7701,7 +7956,7 @@
 </file>
 
 <file path=ppt/slides/slide7.xml><?xml version="1.0" encoding="utf-8"?>
-<p:sld xmlns:a="http://schemas.openxmlformats.org/drawingml/2006/main" xmlns:p="http://schemas.openxmlformats.org/presentationml/2006/main" xmlns:r="http://schemas.openxmlformats.org/officeDocument/2006/relationships">
+<p:sld xmlns:a="http://schemas.openxmlformats.org/drawingml/2006/main" xmlns:r="http://schemas.openxmlformats.org/officeDocument/2006/relationships" xmlns:p="http://schemas.openxmlformats.org/presentationml/2006/main">
   <p:cSld>
     <p:spTree>
       <p:nvGrpSpPr>
@@ -7709,7 +7964,14 @@
         <p:cNvGrpSpPr/>
         <p:nvPr/>
       </p:nvGrpSpPr>
-      <p:grpSpPr/>
+      <p:grpSpPr>
+        <a:xfrm>
+          <a:off x="0" y="0"/>
+          <a:ext cx="0" cy="0"/>
+          <a:chOff x="0" y="0"/>
+          <a:chExt cx="0" cy="0"/>
+        </a:xfrm>
+      </p:grpSpPr>
       <p:sp>
         <p:nvSpPr>
           <p:cNvPr id="6" name="Rectangle 5"/>
@@ -7751,6 +8013,7 @@
           <a:lstStyle/>
           <a:p>
             <a:pPr algn="ctr"/>
+            <a:endParaRPr/>
           </a:p>
         </p:txBody>
       </p:sp>
@@ -7828,7 +8091,7 @@
               </a:spcAft>
             </a:pPr>
             <a:r>
-              <a:rPr b="1" sz="1600">
+              <a:rPr sz="1600" b="1">
                 <a:solidFill>
                   <a:srgbClr val="C8820E"/>
                 </a:solidFill>
@@ -7836,7 +8099,7 @@
               <a:t>▸  </a:t>
             </a:r>
             <a:r>
-              <a:rPr b="1" sz="1600">
+              <a:rPr sz="1600" b="1">
                 <a:solidFill>
                   <a:srgbClr val="1F4E79"/>
                 </a:solidFill>
@@ -7873,10 +8136,34 @@
                 <a:tableStyleId>{5C22544A-7EE6-4342-B048-85BDC9FD1C3A}</a:tableStyleId>
               </a:tblPr>
               <a:tblGrid>
-                <a:gridCol w="2766060"/>
-                <a:gridCol w="2766060"/>
-                <a:gridCol w="2766060"/>
-                <a:gridCol w="2766060"/>
+                <a:gridCol w="2766060">
+                  <a:extLst>
+                    <a:ext uri="{9D8B030D-6E8A-4147-A177-3AD203B41FA5}">
+                      <a16:colId xmlns:a16="http://schemas.microsoft.com/office/drawing/2014/main" val="20000"/>
+                    </a:ext>
+                  </a:extLst>
+                </a:gridCol>
+                <a:gridCol w="2766060">
+                  <a:extLst>
+                    <a:ext uri="{9D8B030D-6E8A-4147-A177-3AD203B41FA5}">
+                      <a16:colId xmlns:a16="http://schemas.microsoft.com/office/drawing/2014/main" val="20001"/>
+                    </a:ext>
+                  </a:extLst>
+                </a:gridCol>
+                <a:gridCol w="2766060">
+                  <a:extLst>
+                    <a:ext uri="{9D8B030D-6E8A-4147-A177-3AD203B41FA5}">
+                      <a16:colId xmlns:a16="http://schemas.microsoft.com/office/drawing/2014/main" val="20002"/>
+                    </a:ext>
+                  </a:extLst>
+                </a:gridCol>
+                <a:gridCol w="2766060">
+                  <a:extLst>
+                    <a:ext uri="{9D8B030D-6E8A-4147-A177-3AD203B41FA5}">
+                      <a16:colId xmlns:a16="http://schemas.microsoft.com/office/drawing/2014/main" val="20003"/>
+                    </a:ext>
+                  </a:extLst>
+                </a:gridCol>
               </a:tblGrid>
               <a:tr h="365760">
                 <a:tc>
@@ -7884,6 +8171,7 @@
                     <a:bodyPr/>
                     <a:lstStyle/>
                     <a:p>
+                      <a:pPr algn="ctr"/>
                       <a:r>
                         <a:rPr sz="1300" b="1">
                           <a:solidFill>
@@ -7894,7 +8182,7 @@
                       </a:r>
                     </a:p>
                   </a:txBody>
-                  <a:tcPr>
+                  <a:tcPr anchor="ctr">
                     <a:solidFill>
                       <a:srgbClr val="1F4E79"/>
                     </a:solidFill>
@@ -7905,6 +8193,7 @@
                     <a:bodyPr/>
                     <a:lstStyle/>
                     <a:p>
+                      <a:pPr algn="ctr"/>
                       <a:r>
                         <a:rPr sz="1300" b="1">
                           <a:solidFill>
@@ -7915,7 +8204,7 @@
                       </a:r>
                     </a:p>
                   </a:txBody>
-                  <a:tcPr>
+                  <a:tcPr anchor="ctr">
                     <a:solidFill>
                       <a:srgbClr val="1F4E79"/>
                     </a:solidFill>
@@ -7926,6 +8215,7 @@
                     <a:bodyPr/>
                     <a:lstStyle/>
                     <a:p>
+                      <a:pPr algn="ctr"/>
                       <a:r>
                         <a:rPr sz="1300" b="1">
                           <a:solidFill>
@@ -7936,7 +8226,7 @@
                       </a:r>
                     </a:p>
                   </a:txBody>
-                  <a:tcPr>
+                  <a:tcPr anchor="ctr">
                     <a:solidFill>
                       <a:srgbClr val="1F4E79"/>
                     </a:solidFill>
@@ -7947,6 +8237,7 @@
                     <a:bodyPr/>
                     <a:lstStyle/>
                     <a:p>
+                      <a:pPr algn="ctr"/>
                       <a:r>
                         <a:rPr sz="1300" b="1">
                           <a:solidFill>
@@ -7957,12 +8248,17 @@
                       </a:r>
                     </a:p>
                   </a:txBody>
-                  <a:tcPr>
+                  <a:tcPr anchor="ctr">
                     <a:solidFill>
                       <a:srgbClr val="1F4E79"/>
                     </a:solidFill>
                   </a:tcPr>
                 </a:tc>
+                <a:extLst>
+                  <a:ext uri="{0D108BD9-81ED-4DB2-BD59-A6C34878D82A}">
+                    <a16:rowId xmlns:a16="http://schemas.microsoft.com/office/drawing/2014/main" val="10000"/>
+                  </a:ext>
+                </a:extLst>
               </a:tr>
               <a:tr h="365760">
                 <a:tc>
@@ -7970,6 +8266,7 @@
                     <a:bodyPr/>
                     <a:lstStyle/>
                     <a:p>
+                      <a:pPr algn="ctr"/>
                       <a:r>
                         <a:rPr sz="1300" b="1">
                           <a:solidFill>
@@ -7980,7 +8277,7 @@
                       </a:r>
                     </a:p>
                   </a:txBody>
-                  <a:tcPr>
+                  <a:tcPr anchor="ctr">
                     <a:solidFill>
                       <a:srgbClr val="FBE7E4"/>
                     </a:solidFill>
@@ -7991,6 +8288,7 @@
                     <a:bodyPr/>
                     <a:lstStyle/>
                     <a:p>
+                      <a:pPr algn="ctr"/>
                       <a:r>
                         <a:rPr sz="1300" b="1">
                           <a:solidFill>
@@ -8001,7 +8299,7 @@
                       </a:r>
                     </a:p>
                   </a:txBody>
-                  <a:tcPr>
+                  <a:tcPr anchor="ctr">
                     <a:solidFill>
                       <a:srgbClr val="FBE7E4"/>
                     </a:solidFill>
@@ -8012,6 +8310,7 @@
                     <a:bodyPr/>
                     <a:lstStyle/>
                     <a:p>
+                      <a:pPr algn="ctr"/>
                       <a:r>
                         <a:rPr sz="1300" b="1">
                           <a:solidFill>
@@ -8022,7 +8321,7 @@
                       </a:r>
                     </a:p>
                   </a:txBody>
-                  <a:tcPr>
+                  <a:tcPr anchor="ctr">
                     <a:solidFill>
                       <a:srgbClr val="FBE7E4"/>
                     </a:solidFill>
@@ -8033,6 +8332,7 @@
                     <a:bodyPr/>
                     <a:lstStyle/>
                     <a:p>
+                      <a:pPr algn="ctr"/>
                       <a:r>
                         <a:rPr sz="1300" b="1">
                           <a:solidFill>
@@ -8043,12 +8343,17 @@
                       </a:r>
                     </a:p>
                   </a:txBody>
-                  <a:tcPr>
+                  <a:tcPr anchor="ctr">
                     <a:solidFill>
                       <a:srgbClr val="FBE7E4"/>
                     </a:solidFill>
                   </a:tcPr>
                 </a:tc>
+                <a:extLst>
+                  <a:ext uri="{0D108BD9-81ED-4DB2-BD59-A6C34878D82A}">
+                    <a16:rowId xmlns:a16="http://schemas.microsoft.com/office/drawing/2014/main" val="10001"/>
+                  </a:ext>
+                </a:extLst>
               </a:tr>
               <a:tr h="365760">
                 <a:tc>
@@ -8056,53 +8361,62 @@
                     <a:bodyPr/>
                     <a:lstStyle/>
                     <a:p>
+                      <a:pPr algn="ctr"/>
                       <a:r>
                         <a:rPr sz="1300"/>
                         <a:t>Dijkstra</a:t>
                       </a:r>
                     </a:p>
                   </a:txBody>
-                  <a:tcPr/>
+                  <a:tcPr anchor="ctr"/>
                 </a:tc>
                 <a:tc>
                   <a:txBody>
                     <a:bodyPr/>
                     <a:lstStyle/>
                     <a:p>
+                      <a:pPr algn="ctr"/>
                       <a:r>
                         <a:rPr sz="1300"/>
                         <a:t>43.8</a:t>
                       </a:r>
                     </a:p>
                   </a:txBody>
-                  <a:tcPr/>
+                  <a:tcPr anchor="ctr"/>
                 </a:tc>
                 <a:tc>
                   <a:txBody>
                     <a:bodyPr/>
                     <a:lstStyle/>
                     <a:p>
+                      <a:pPr algn="ctr"/>
                       <a:r>
                         <a:rPr sz="1300"/>
                         <a:t>42</a:t>
                       </a:r>
                     </a:p>
                   </a:txBody>
-                  <a:tcPr/>
+                  <a:tcPr anchor="ctr"/>
                 </a:tc>
                 <a:tc>
                   <a:txBody>
                     <a:bodyPr/>
                     <a:lstStyle/>
                     <a:p>
+                      <a:pPr algn="ctr"/>
                       <a:r>
                         <a:rPr sz="1300"/>
                         <a:t>2</a:t>
                       </a:r>
                     </a:p>
                   </a:txBody>
-                  <a:tcPr/>
+                  <a:tcPr anchor="ctr"/>
                 </a:tc>
+                <a:extLst>
+                  <a:ext uri="{0D108BD9-81ED-4DB2-BD59-A6C34878D82A}">
+                    <a16:rowId xmlns:a16="http://schemas.microsoft.com/office/drawing/2014/main" val="10002"/>
+                  </a:ext>
+                </a:extLst>
               </a:tr>
               <a:tr h="365760">
                 <a:tc>
@@ -8110,6 +8424,7 @@
                     <a:bodyPr/>
                     <a:lstStyle/>
                     <a:p>
+                      <a:pPr algn="ctr"/>
                       <a:r>
                         <a:rPr sz="1300" b="1">
                           <a:solidFill>
@@ -8120,7 +8435,7 @@
                       </a:r>
                     </a:p>
                   </a:txBody>
-                  <a:tcPr>
+                  <a:tcPr anchor="ctr">
                     <a:solidFill>
                       <a:srgbClr val="E4F3E8"/>
                     </a:solidFill>
@@ -8131,6 +8446,7 @@
                     <a:bodyPr/>
                     <a:lstStyle/>
                     <a:p>
+                      <a:pPr algn="ctr"/>
                       <a:r>
                         <a:rPr sz="1300" b="1">
                           <a:solidFill>
@@ -8141,7 +8457,7 @@
                       </a:r>
                     </a:p>
                   </a:txBody>
-                  <a:tcPr>
+                  <a:tcPr anchor="ctr">
                     <a:solidFill>
                       <a:srgbClr val="E4F3E8"/>
                     </a:solidFill>
@@ -8152,6 +8468,7 @@
                     <a:bodyPr/>
                     <a:lstStyle/>
                     <a:p>
+                      <a:pPr algn="ctr"/>
                       <a:r>
                         <a:rPr sz="1300" b="1">
                           <a:solidFill>
@@ -8162,7 +8479,7 @@
                       </a:r>
                     </a:p>
                   </a:txBody>
-                  <a:tcPr>
+                  <a:tcPr anchor="ctr">
                     <a:solidFill>
                       <a:srgbClr val="E4F3E8"/>
                     </a:solidFill>
@@ -8173,6 +8490,7 @@
                     <a:bodyPr/>
                     <a:lstStyle/>
                     <a:p>
+                      <a:pPr algn="ctr"/>
                       <a:r>
                         <a:rPr sz="1300" b="1">
                           <a:solidFill>
@@ -8183,12 +8501,17 @@
                       </a:r>
                     </a:p>
                   </a:txBody>
-                  <a:tcPr>
+                  <a:tcPr anchor="ctr">
                     <a:solidFill>
                       <a:srgbClr val="E4F3E8"/>
                     </a:solidFill>
                   </a:tcPr>
                 </a:tc>
+                <a:extLst>
+                  <a:ext uri="{0D108BD9-81ED-4DB2-BD59-A6C34878D82A}">
+                    <a16:rowId xmlns:a16="http://schemas.microsoft.com/office/drawing/2014/main" val="10003"/>
+                  </a:ext>
+                </a:extLst>
               </a:tr>
               <a:tr h="365760">
                 <a:tc>
@@ -8196,6 +8519,7 @@
                     <a:bodyPr/>
                     <a:lstStyle/>
                     <a:p>
+                      <a:pPr algn="ctr"/>
                       <a:r>
                         <a:rPr sz="1300" b="1">
                           <a:solidFill>
@@ -8206,7 +8530,7 @@
                       </a:r>
                     </a:p>
                   </a:txBody>
-                  <a:tcPr>
+                  <a:tcPr anchor="ctr">
                     <a:solidFill>
                       <a:srgbClr val="FBE7E4"/>
                     </a:solidFill>
@@ -8217,6 +8541,7 @@
                     <a:bodyPr/>
                     <a:lstStyle/>
                     <a:p>
+                      <a:pPr algn="ctr"/>
                       <a:r>
                         <a:rPr sz="1300" b="1">
                           <a:solidFill>
@@ -8227,7 +8552,7 @@
                       </a:r>
                     </a:p>
                   </a:txBody>
-                  <a:tcPr>
+                  <a:tcPr anchor="ctr">
                     <a:solidFill>
                       <a:srgbClr val="FBE7E4"/>
                     </a:solidFill>
@@ -8238,6 +8563,7 @@
                     <a:bodyPr/>
                     <a:lstStyle/>
                     <a:p>
+                      <a:pPr algn="ctr"/>
                       <a:r>
                         <a:rPr sz="1300" b="1">
                           <a:solidFill>
@@ -8248,7 +8574,7 @@
                       </a:r>
                     </a:p>
                   </a:txBody>
-                  <a:tcPr>
+                  <a:tcPr anchor="ctr">
                     <a:solidFill>
                       <a:srgbClr val="FBE7E4"/>
                     </a:solidFill>
@@ -8259,6 +8585,7 @@
                     <a:bodyPr/>
                     <a:lstStyle/>
                     <a:p>
+                      <a:pPr algn="ctr"/>
                       <a:r>
                         <a:rPr sz="1300" b="1">
                           <a:solidFill>
@@ -8269,12 +8596,17 @@
                       </a:r>
                     </a:p>
                   </a:txBody>
-                  <a:tcPr>
+                  <a:tcPr anchor="ctr">
                     <a:solidFill>
                       <a:srgbClr val="FBE7E4"/>
                     </a:solidFill>
                   </a:tcPr>
                 </a:tc>
+                <a:extLst>
+                  <a:ext uri="{0D108BD9-81ED-4DB2-BD59-A6C34878D82A}">
+                    <a16:rowId xmlns:a16="http://schemas.microsoft.com/office/drawing/2014/main" val="10004"/>
+                  </a:ext>
+                </a:extLst>
               </a:tr>
             </a:tbl>
           </a:graphicData>
@@ -8311,7 +8643,7 @@
               </a:spcAft>
             </a:pPr>
             <a:r>
-              <a:rPr b="1" sz="1600">
+              <a:rPr sz="1600" b="1">
                 <a:solidFill>
                   <a:srgbClr val="C8820E"/>
                 </a:solidFill>
@@ -8319,7 +8651,7 @@
               <a:t>▸  </a:t>
             </a:r>
             <a:r>
-              <a:rPr b="1" sz="1600">
+              <a:rPr sz="1600" b="1">
                 <a:solidFill>
                   <a:srgbClr val="1F4E79"/>
                 </a:solidFill>
@@ -8345,7 +8677,7 @@
               </a:spcAft>
             </a:pPr>
             <a:r>
-              <a:rPr b="1" sz="1600">
+              <a:rPr sz="1600" b="1">
                 <a:solidFill>
                   <a:srgbClr val="C8820E"/>
                 </a:solidFill>
@@ -8353,7 +8685,7 @@
               <a:t>▸  </a:t>
             </a:r>
             <a:r>
-              <a:rPr b="1" sz="1600">
+              <a:rPr sz="1600" b="1">
                 <a:solidFill>
                   <a:srgbClr val="1F4E79"/>
                 </a:solidFill>
@@ -8379,7 +8711,7 @@
               </a:spcAft>
             </a:pPr>
             <a:r>
-              <a:rPr b="1" sz="1600">
+              <a:rPr sz="1600" b="1">
                 <a:solidFill>
                   <a:srgbClr val="C8820E"/>
                 </a:solidFill>
@@ -8387,7 +8719,7 @@
               <a:t>▸  </a:t>
             </a:r>
             <a:r>
-              <a:rPr b="1" sz="1600">
+              <a:rPr sz="1600" b="1">
                 <a:solidFill>
                   <a:srgbClr val="1F4E79"/>
                 </a:solidFill>
@@ -8446,6 +8778,7 @@
           <a:lstStyle/>
           <a:p>
             <a:pPr algn="ctr"/>
+            <a:endParaRPr/>
           </a:p>
         </p:txBody>
       </p:sp>
@@ -8488,7 +8821,7 @@
           </a:fontRef>
         </p:style>
         <p:txBody>
-          <a:bodyPr rtlCol="0" anchor="ctr" wrap="none" lIns="0" rIns="0" tIns="0" bIns="0"/>
+          <a:bodyPr wrap="none" lIns="0" tIns="0" rIns="0" bIns="0" rtlCol="0" anchor="ctr"/>
           <a:lstStyle/>
           <a:p>
             <a:pPr algn="ctr"/>
@@ -8545,6 +8878,7 @@
           <a:lstStyle/>
           <a:p>
             <a:pPr algn="ctr"/>
+            <a:endParaRPr/>
           </a:p>
         </p:txBody>
       </p:sp>
@@ -8624,7 +8958,7 @@
 </file>
 
 <file path=ppt/slides/slide8.xml><?xml version="1.0" encoding="utf-8"?>
-<p:sld xmlns:a="http://schemas.openxmlformats.org/drawingml/2006/main" xmlns:p="http://schemas.openxmlformats.org/presentationml/2006/main" xmlns:r="http://schemas.openxmlformats.org/officeDocument/2006/relationships">
+<p:sld xmlns:a="http://schemas.openxmlformats.org/drawingml/2006/main" xmlns:r="http://schemas.openxmlformats.org/officeDocument/2006/relationships" xmlns:p="http://schemas.openxmlformats.org/presentationml/2006/main">
   <p:cSld>
     <p:spTree>
       <p:nvGrpSpPr>
@@ -8632,7 +8966,14 @@
         <p:cNvGrpSpPr/>
         <p:nvPr/>
       </p:nvGrpSpPr>
-      <p:grpSpPr/>
+      <p:grpSpPr>
+        <a:xfrm>
+          <a:off x="0" y="0"/>
+          <a:ext cx="0" cy="0"/>
+          <a:chOff x="0" y="0"/>
+          <a:chExt cx="0" cy="0"/>
+        </a:xfrm>
+      </p:grpSpPr>
       <p:sp>
         <p:nvSpPr>
           <p:cNvPr id="5" name="Rectangle 4"/>
@@ -8674,6 +9015,7 @@
           <a:lstStyle/>
           <a:p>
             <a:pPr algn="ctr"/>
+            <a:endParaRPr/>
           </a:p>
         </p:txBody>
       </p:sp>
@@ -8739,8 +9081,20 @@
                 <a:tableStyleId>{5C22544A-7EE6-4342-B048-85BDC9FD1C3A}</a:tableStyleId>
               </a:tblPr>
               <a:tblGrid>
-                <a:gridCol w="5532120"/>
-                <a:gridCol w="5532120"/>
+                <a:gridCol w="5532120">
+                  <a:extLst>
+                    <a:ext uri="{9D8B030D-6E8A-4147-A177-3AD203B41FA5}">
+                      <a16:colId xmlns:a16="http://schemas.microsoft.com/office/drawing/2014/main" val="20000"/>
+                    </a:ext>
+                  </a:extLst>
+                </a:gridCol>
+                <a:gridCol w="5532120">
+                  <a:extLst>
+                    <a:ext uri="{9D8B030D-6E8A-4147-A177-3AD203B41FA5}">
+                      <a16:colId xmlns:a16="http://schemas.microsoft.com/office/drawing/2014/main" val="20001"/>
+                    </a:ext>
+                  </a:extLst>
+                </a:gridCol>
               </a:tblGrid>
               <a:tr h="365760">
                 <a:tc>
@@ -8785,6 +9139,11 @@
                     </a:solidFill>
                   </a:tcPr>
                 </a:tc>
+                <a:extLst>
+                  <a:ext uri="{0D108BD9-81ED-4DB2-BD59-A6C34878D82A}">
+                    <a16:rowId xmlns:a16="http://schemas.microsoft.com/office/drawing/2014/main" val="10000"/>
+                  </a:ext>
+                </a:extLst>
               </a:tr>
               <a:tr h="365760">
                 <a:tc>
@@ -8813,6 +9172,11 @@
                   </a:txBody>
                   <a:tcPr/>
                 </a:tc>
+                <a:extLst>
+                  <a:ext uri="{0D108BD9-81ED-4DB2-BD59-A6C34878D82A}">
+                    <a16:rowId xmlns:a16="http://schemas.microsoft.com/office/drawing/2014/main" val="10001"/>
+                  </a:ext>
+                </a:extLst>
               </a:tr>
               <a:tr h="365760">
                 <a:tc>
@@ -8841,6 +9205,11 @@
                   </a:txBody>
                   <a:tcPr/>
                 </a:tc>
+                <a:extLst>
+                  <a:ext uri="{0D108BD9-81ED-4DB2-BD59-A6C34878D82A}">
+                    <a16:rowId xmlns:a16="http://schemas.microsoft.com/office/drawing/2014/main" val="10002"/>
+                  </a:ext>
+                </a:extLst>
               </a:tr>
               <a:tr h="365760">
                 <a:tc>
@@ -8869,6 +9238,11 @@
                   </a:txBody>
                   <a:tcPr/>
                 </a:tc>
+                <a:extLst>
+                  <a:ext uri="{0D108BD9-81ED-4DB2-BD59-A6C34878D82A}">
+                    <a16:rowId xmlns:a16="http://schemas.microsoft.com/office/drawing/2014/main" val="10003"/>
+                  </a:ext>
+                </a:extLst>
               </a:tr>
               <a:tr h="365760">
                 <a:tc>
@@ -8897,6 +9271,11 @@
                   </a:txBody>
                   <a:tcPr/>
                 </a:tc>
+                <a:extLst>
+                  <a:ext uri="{0D108BD9-81ED-4DB2-BD59-A6C34878D82A}">
+                    <a16:rowId xmlns:a16="http://schemas.microsoft.com/office/drawing/2014/main" val="10004"/>
+                  </a:ext>
+                </a:extLst>
               </a:tr>
               <a:tr h="365760">
                 <a:tc>
@@ -8925,6 +9304,11 @@
                   </a:txBody>
                   <a:tcPr/>
                 </a:tc>
+                <a:extLst>
+                  <a:ext uri="{0D108BD9-81ED-4DB2-BD59-A6C34878D82A}">
+                    <a16:rowId xmlns:a16="http://schemas.microsoft.com/office/drawing/2014/main" val="10005"/>
+                  </a:ext>
+                </a:extLst>
               </a:tr>
               <a:tr h="365760">
                 <a:tc>
@@ -8953,6 +9337,11 @@
                   </a:txBody>
                   <a:tcPr/>
                 </a:tc>
+                <a:extLst>
+                  <a:ext uri="{0D108BD9-81ED-4DB2-BD59-A6C34878D82A}">
+                    <a16:rowId xmlns:a16="http://schemas.microsoft.com/office/drawing/2014/main" val="10006"/>
+                  </a:ext>
+                </a:extLst>
               </a:tr>
               <a:tr h="365760">
                 <a:tc>
@@ -8981,6 +9370,11 @@
                   </a:txBody>
                   <a:tcPr/>
                 </a:tc>
+                <a:extLst>
+                  <a:ext uri="{0D108BD9-81ED-4DB2-BD59-A6C34878D82A}">
+                    <a16:rowId xmlns:a16="http://schemas.microsoft.com/office/drawing/2014/main" val="10007"/>
+                  </a:ext>
+                </a:extLst>
               </a:tr>
             </a:tbl>
           </a:graphicData>
@@ -9017,7 +9411,7 @@
               </a:spcAft>
             </a:pPr>
             <a:r>
-              <a:rPr b="1" sz="1600">
+              <a:rPr sz="1600" b="1">
                 <a:solidFill>
                   <a:srgbClr val="C8820E"/>
                 </a:solidFill>
@@ -9025,7 +9419,7 @@
               <a:t>▸  </a:t>
             </a:r>
             <a:r>
-              <a:rPr b="1" sz="1600">
+              <a:rPr sz="1600" b="1">
                 <a:solidFill>
                   <a:srgbClr val="1F4E79"/>
                 </a:solidFill>
@@ -9084,6 +9478,7 @@
           <a:lstStyle/>
           <a:p>
             <a:pPr algn="ctr"/>
+            <a:endParaRPr/>
           </a:p>
         </p:txBody>
       </p:sp>
@@ -9126,7 +9521,7 @@
           </a:fontRef>
         </p:style>
         <p:txBody>
-          <a:bodyPr rtlCol="0" anchor="ctr" wrap="none" lIns="0" rIns="0" tIns="0" bIns="0"/>
+          <a:bodyPr wrap="none" lIns="0" tIns="0" rIns="0" bIns="0" rtlCol="0" anchor="ctr"/>
           <a:lstStyle/>
           <a:p>
             <a:pPr algn="ctr"/>
@@ -9183,6 +9578,7 @@
           <a:lstStyle/>
           <a:p>
             <a:pPr algn="ctr"/>
+            <a:endParaRPr/>
           </a:p>
         </p:txBody>
       </p:sp>
@@ -9262,7 +9658,7 @@
 </file>
 
 <file path=ppt/slides/slide9.xml><?xml version="1.0" encoding="utf-8"?>
-<p:sld xmlns:a="http://schemas.openxmlformats.org/drawingml/2006/main" xmlns:p="http://schemas.openxmlformats.org/presentationml/2006/main" xmlns:r="http://schemas.openxmlformats.org/officeDocument/2006/relationships">
+<p:sld xmlns:a="http://schemas.openxmlformats.org/drawingml/2006/main" xmlns:r="http://schemas.openxmlformats.org/officeDocument/2006/relationships" xmlns:p="http://schemas.openxmlformats.org/presentationml/2006/main">
   <p:cSld>
     <p:spTree>
       <p:nvGrpSpPr>
@@ -9270,7 +9666,14 @@
         <p:cNvGrpSpPr/>
         <p:nvPr/>
       </p:nvGrpSpPr>
-      <p:grpSpPr/>
+      <p:grpSpPr>
+        <a:xfrm>
+          <a:off x="0" y="0"/>
+          <a:ext cx="0" cy="0"/>
+          <a:chOff x="0" y="0"/>
+          <a:chExt cx="0" cy="0"/>
+        </a:xfrm>
+      </p:grpSpPr>
       <p:sp>
         <p:nvSpPr>
           <p:cNvPr id="4" name="Rectangle 3"/>
@@ -9312,6 +9715,7 @@
           <a:lstStyle/>
           <a:p>
             <a:pPr algn="ctr"/>
+            <a:endParaRPr/>
           </a:p>
         </p:txBody>
       </p:sp>
@@ -9389,7 +9793,7 @@
               </a:spcAft>
             </a:pPr>
             <a:r>
-              <a:rPr b="1" sz="1600">
+              <a:rPr sz="1600" b="1">
                 <a:solidFill>
                   <a:srgbClr val="C8820E"/>
                 </a:solidFill>
@@ -9397,7 +9801,7 @@
               <a:t>▸  </a:t>
             </a:r>
             <a:r>
-              <a:rPr b="1" sz="1600">
+              <a:rPr sz="1600" b="1">
                 <a:solidFill>
                   <a:srgbClr val="1F4E79"/>
                 </a:solidFill>
@@ -9423,7 +9827,7 @@
               </a:spcAft>
             </a:pPr>
             <a:r>
-              <a:rPr b="1" sz="1600">
+              <a:rPr sz="1600" b="1">
                 <a:solidFill>
                   <a:srgbClr val="C8820E"/>
                 </a:solidFill>
@@ -9431,7 +9835,7 @@
               <a:t>▸  </a:t>
             </a:r>
             <a:r>
-              <a:rPr b="1" sz="1600">
+              <a:rPr sz="1600" b="1">
                 <a:solidFill>
                   <a:srgbClr val="1F4E79"/>
                 </a:solidFill>
@@ -9457,7 +9861,7 @@
               </a:spcAft>
             </a:pPr>
             <a:r>
-              <a:rPr b="1" sz="1600">
+              <a:rPr sz="1600" b="1">
                 <a:solidFill>
                   <a:srgbClr val="C8820E"/>
                 </a:solidFill>
@@ -9465,7 +9869,7 @@
               <a:t>▸  </a:t>
             </a:r>
             <a:r>
-              <a:rPr b="1" sz="1600">
+              <a:rPr sz="1600" b="1">
                 <a:solidFill>
                   <a:srgbClr val="1F4E79"/>
                 </a:solidFill>
@@ -9491,7 +9895,7 @@
               </a:spcAft>
             </a:pPr>
             <a:r>
-              <a:rPr b="1" sz="1600">
+              <a:rPr sz="1600" b="1">
                 <a:solidFill>
                   <a:srgbClr val="C8820E"/>
                 </a:solidFill>
@@ -9499,7 +9903,7 @@
               <a:t>▸  </a:t>
             </a:r>
             <a:r>
-              <a:rPr b="1" sz="1600">
+              <a:rPr sz="1600" b="1">
                 <a:solidFill>
                   <a:srgbClr val="1F4E79"/>
                 </a:solidFill>
@@ -9525,7 +9929,7 @@
               </a:spcAft>
             </a:pPr>
             <a:r>
-              <a:rPr b="1" sz="1600">
+              <a:rPr sz="1600" b="1">
                 <a:solidFill>
                   <a:srgbClr val="C8820E"/>
                 </a:solidFill>
@@ -9533,7 +9937,7 @@
               <a:t>▸  </a:t>
             </a:r>
             <a:r>
-              <a:rPr b="1" sz="1600">
+              <a:rPr sz="1600" b="1">
                 <a:solidFill>
                   <a:srgbClr val="1F4E79"/>
                 </a:solidFill>
@@ -9559,7 +9963,7 @@
               </a:spcAft>
             </a:pPr>
             <a:r>
-              <a:rPr b="1" sz="1600">
+              <a:rPr sz="1600" b="1">
                 <a:solidFill>
                   <a:srgbClr val="C8820E"/>
                 </a:solidFill>
@@ -9618,6 +10022,7 @@
           <a:lstStyle/>
           <a:p>
             <a:pPr algn="ctr"/>
+            <a:endParaRPr/>
           </a:p>
         </p:txBody>
       </p:sp>
@@ -9660,7 +10065,7 @@
           </a:fontRef>
         </p:style>
         <p:txBody>
-          <a:bodyPr rtlCol="0" anchor="ctr" wrap="none" lIns="0" rIns="0" tIns="0" bIns="0"/>
+          <a:bodyPr wrap="none" lIns="0" tIns="0" rIns="0" bIns="0" rtlCol="0" anchor="ctr"/>
           <a:lstStyle/>
           <a:p>
             <a:pPr algn="ctr"/>
@@ -9717,6 +10122,7 @@
           <a:lstStyle/>
           <a:p>
             <a:pPr algn="ctr"/>
+            <a:endParaRPr/>
           </a:p>
         </p:txBody>
       </p:sp>

--- a/docs/report/CT3201_Slides.pptx
+++ b/docs/report/CT3201_Slides.pptx
@@ -9102,6 +9102,7 @@
                     <a:bodyPr/>
                     <a:lstStyle/>
                     <a:p>
+                      <a:pPr algn="ctr"/>
                       <a:r>
                         <a:rPr sz="1300" b="1">
                           <a:solidFill>
@@ -9112,7 +9113,7 @@
                       </a:r>
                     </a:p>
                   </a:txBody>
-                  <a:tcPr>
+                  <a:tcPr anchor="ctr">
                     <a:solidFill>
                       <a:srgbClr val="1F4E79"/>
                     </a:solidFill>
@@ -9123,6 +9124,7 @@
                     <a:bodyPr/>
                     <a:lstStyle/>
                     <a:p>
+                      <a:pPr algn="ctr"/>
                       <a:r>
                         <a:rPr sz="1300" b="1">
                           <a:solidFill>
@@ -9133,7 +9135,7 @@
                       </a:r>
                     </a:p>
                   </a:txBody>
-                  <a:tcPr>
+                  <a:tcPr anchor="ctr">
                     <a:solidFill>
                       <a:srgbClr val="1F4E79"/>
                     </a:solidFill>
@@ -9151,26 +9153,28 @@
                     <a:bodyPr/>
                     <a:lstStyle/>
                     <a:p>
+                      <a:pPr algn="ctr"/>
                       <a:r>
                         <a:rPr sz="1300"/>
                         <a:t>Fairness</a:t>
                       </a:r>
                     </a:p>
                   </a:txBody>
-                  <a:tcPr/>
+                  <a:tcPr anchor="ctr"/>
                 </a:tc>
                 <a:tc>
                   <a:txBody>
                     <a:bodyPr/>
                     <a:lstStyle/>
                     <a:p>
+                      <a:pPr algn="ctr"/>
                       <a:r>
                         <a:rPr sz="1300"/>
                         <a:t>In-game the AI agent takes hazard damage &amp; has the same vision as the human - fair by construction</a:t>
                       </a:r>
                     </a:p>
                   </a:txBody>
-                  <a:tcPr/>
+                  <a:tcPr anchor="ctr"/>
                 </a:tc>
                 <a:extLst>
                   <a:ext uri="{0D108BD9-81ED-4DB2-BD59-A6C34878D82A}">
@@ -9184,26 +9188,28 @@
                     <a:bodyPr/>
                     <a:lstStyle/>
                     <a:p>
+                      <a:pPr algn="ctr"/>
                       <a:r>
                         <a:rPr sz="1300"/>
                         <a:t>Bias</a:t>
                       </a:r>
                     </a:p>
                   </a:txBody>
-                  <a:tcPr/>
+                  <a:tcPr anchor="ctr"/>
                 </a:tc>
                 <a:tc>
                   <a:txBody>
                     <a:bodyPr/>
                     <a:lstStyle/>
                     <a:p>
+                      <a:pPr algn="ctr"/>
                       <a:r>
                         <a:rPr sz="1300"/>
                         <a:t>Goal selection is greedy nearest-first: no triage, no notion of who is most at risk</a:t>
                       </a:r>
                     </a:p>
                   </a:txBody>
-                  <a:tcPr/>
+                  <a:tcPr anchor="ctr"/>
                 </a:tc>
                 <a:extLst>
                   <a:ext uri="{0D108BD9-81ED-4DB2-BD59-A6C34878D82A}">
@@ -9217,26 +9223,28 @@
                     <a:bodyPr/>
                     <a:lstStyle/>
                     <a:p>
+                      <a:pPr algn="ctr"/>
                       <a:r>
                         <a:rPr sz="1300"/>
                         <a:t>Transparency</a:t>
                       </a:r>
                     </a:p>
                   </a:txBody>
-                  <a:tcPr/>
+                  <a:tcPr anchor="ctr"/>
                 </a:tc>
                 <a:tc>
                   <a:txBody>
                     <a:bodyPr/>
                     <a:lstStyle/>
                     <a:p>
+                      <a:pPr algn="ctr"/>
                       <a:r>
                         <a:rPr sz="1300"/>
                         <a:t>The agent DRAWS its planned route + walked trail - you can see what it decided and why it changed</a:t>
                       </a:r>
                     </a:p>
                   </a:txBody>
-                  <a:tcPr/>
+                  <a:tcPr anchor="ctr"/>
                 </a:tc>
                 <a:extLst>
                   <a:ext uri="{0D108BD9-81ED-4DB2-BD59-A6C34878D82A}">
@@ -9250,26 +9258,28 @@
                     <a:bodyPr/>
                     <a:lstStyle/>
                     <a:p>
+                      <a:pPr algn="ctr"/>
                       <a:r>
                         <a:rPr sz="1300"/>
                         <a:t>Privacy</a:t>
                       </a:r>
                     </a:p>
                   </a:txBody>
-                  <a:tcPr/>
+                  <a:tcPr anchor="ctr"/>
                 </a:tc>
                 <a:tc>
                   <a:txBody>
                     <a:bodyPr/>
                     <a:lstStyle/>
                     <a:p>
+                      <a:pPr algn="ctr"/>
                       <a:r>
                         <a:rPr sz="1300"/>
                         <a:t>A real occupant-locator needs live location data on people - sensitive, must be minimised</a:t>
                       </a:r>
                     </a:p>
                   </a:txBody>
-                  <a:tcPr/>
+                  <a:tcPr anchor="ctr"/>
                 </a:tc>
                 <a:extLst>
                   <a:ext uri="{0D108BD9-81ED-4DB2-BD59-A6C34878D82A}">
@@ -9283,26 +9293,28 @@
                     <a:bodyPr/>
                     <a:lstStyle/>
                     <a:p>
+                      <a:pPr algn="ctr"/>
                       <a:r>
                         <a:rPr sz="1300"/>
                         <a:t>Security</a:t>
                       </a:r>
                     </a:p>
                   </a:txBody>
-                  <a:tcPr/>
+                  <a:tcPr anchor="ctr"/>
                 </a:tc>
                 <a:tc>
                   <a:txBody>
                     <a:bodyPr/>
                     <a:lstStyle/>
                     <a:p>
+                      <a:pPr algn="ctr"/>
                       <a:r>
                         <a:rPr sz="1300"/>
                         <a:t>The agent trusts its hazard map; a spoofed feed could steer it (and followers) into a hazard</a:t>
                       </a:r>
                     </a:p>
                   </a:txBody>
-                  <a:tcPr/>
+                  <a:tcPr anchor="ctr"/>
                 </a:tc>
                 <a:extLst>
                   <a:ext uri="{0D108BD9-81ED-4DB2-BD59-A6C34878D82A}">
@@ -9316,26 +9328,28 @@
                     <a:bodyPr/>
                     <a:lstStyle/>
                     <a:p>
+                      <a:pPr algn="ctr"/>
                       <a:r>
                         <a:rPr sz="1300"/>
                         <a:t>Accountability</a:t>
                       </a:r>
                     </a:p>
                   </a:txBody>
-                  <a:tcPr/>
+                  <a:tcPr anchor="ctr"/>
                 </a:tc>
                 <a:tc>
                   <a:txBody>
                     <a:bodyPr/>
                     <a:lstStyle/>
                     <a:p>
+                      <a:pPr algn="ctr"/>
                       <a:r>
                         <a:rPr sz="1300"/>
                         <a:t>If it leads someone into a collapse - operator? developer? sensor vendor? needs an audit log</a:t>
                       </a:r>
                     </a:p>
                   </a:txBody>
-                  <a:tcPr/>
+                  <a:tcPr anchor="ctr"/>
                 </a:tc>
                 <a:extLst>
                   <a:ext uri="{0D108BD9-81ED-4DB2-BD59-A6C34878D82A}">
@@ -9349,26 +9363,28 @@
                     <a:bodyPr/>
                     <a:lstStyle/>
                     <a:p>
+                      <a:pPr algn="ctr"/>
                       <a:r>
                         <a:rPr sz="1300"/>
                         <a:t>Human oversight</a:t>
                       </a:r>
                     </a:p>
                   </a:txBody>
-                  <a:tcPr/>
+                  <a:tcPr anchor="ctr"/>
                 </a:tc>
                 <a:tc>
                   <a:txBody>
                     <a:bodyPr/>
                     <a:lstStyle/>
                     <a:p>
+                      <a:pPr algn="ctr"/>
                       <a:r>
                         <a:rPr sz="1300"/>
                         <a:t>It's decision-support, not an autonomous replacement for firefighters - the right posture</a:t>
                       </a:r>
                     </a:p>
                   </a:txBody>
-                  <a:tcPr/>
+                  <a:tcPr anchor="ctr"/>
                 </a:tc>
                 <a:extLst>
                   <a:ext uri="{0D108BD9-81ED-4DB2-BD59-A6C34878D82A}">

--- a/docs/report/CT3201_Slides.pptx
+++ b/docs/report/CT3201_Slides.pptx
@@ -3602,11 +3602,11 @@
                 <a:spcPct val="100000"/>
               </a:lnSpc>
               <a:spcAft>
-                <a:spcPts val="600"/>
+                <a:spcPts val="400"/>
               </a:spcAft>
             </a:pPr>
             <a:r>
-              <a:rPr sz="1300" b="1">
+              <a:rPr sz="1600" b="1">
                 <a:solidFill>
                   <a:srgbClr val="C8820E"/>
                 </a:solidFill>
@@ -3614,7 +3614,7 @@
               <a:t>▸  </a:t>
             </a:r>
             <a:r>
-              <a:rPr sz="1300" b="1">
+              <a:rPr sz="1600" b="1">
                 <a:solidFill>
                   <a:srgbClr val="1F4E79"/>
                 </a:solidFill>
@@ -3622,7 +3622,7 @@
               <a:t>AI helped: </a:t>
             </a:r>
             <a:r>
-              <a:rPr sz="1300">
+              <a:rPr sz="1600">
                 <a:solidFill>
                   <a:srgbClr val="2B2B2B"/>
                 </a:solidFill>
@@ -3636,11 +3636,11 @@
                 <a:spcPct val="100000"/>
               </a:lnSpc>
               <a:spcAft>
-                <a:spcPts val="600"/>
+                <a:spcPts val="400"/>
               </a:spcAft>
             </a:pPr>
             <a:r>
-              <a:rPr sz="1300" b="1">
+              <a:rPr sz="1600" b="1">
                 <a:solidFill>
                   <a:srgbClr val="C8820E"/>
                 </a:solidFill>
@@ -3648,7 +3648,7 @@
               <a:t>▸  </a:t>
             </a:r>
             <a:r>
-              <a:rPr sz="1300" b="1">
+              <a:rPr sz="1600" b="1">
                 <a:solidFill>
                   <a:srgbClr val="1F4E79"/>
                 </a:solidFill>
@@ -3656,7 +3656,7 @@
               <a:t>AI got wrong: </a:t>
             </a:r>
             <a:r>
-              <a:rPr sz="1300">
+              <a:rPr sz="1600">
                 <a:solidFill>
                   <a:srgbClr val="2B2B2B"/>
                 </a:solidFill>
@@ -3670,11 +3670,11 @@
                 <a:spcPct val="100000"/>
               </a:lnSpc>
               <a:spcAft>
-                <a:spcPts val="600"/>
+                <a:spcPts val="400"/>
               </a:spcAft>
             </a:pPr>
             <a:r>
-              <a:rPr sz="1300" b="1">
+              <a:rPr sz="1600" b="1">
                 <a:solidFill>
                   <a:srgbClr val="C8820E"/>
                 </a:solidFill>
@@ -3682,7 +3682,7 @@
               <a:t>▸  </a:t>
             </a:r>
             <a:r>
-              <a:rPr sz="1300" b="1">
+              <a:rPr sz="1600" b="1">
                 <a:solidFill>
                   <a:srgbClr val="1F4E79"/>
                 </a:solidFill>
@@ -3690,7 +3690,7 @@
               <a:t>Accepted: </a:t>
             </a:r>
             <a:r>
-              <a:rPr sz="1300">
+              <a:rPr sz="1600">
                 <a:solidFill>
                   <a:srgbClr val="2B2B2B"/>
                 </a:solidFill>
@@ -3704,11 +3704,11 @@
                 <a:spcPct val="100000"/>
               </a:lnSpc>
               <a:spcAft>
-                <a:spcPts val="600"/>
+                <a:spcPts val="400"/>
               </a:spcAft>
             </a:pPr>
             <a:r>
-              <a:rPr sz="1300" b="1">
+              <a:rPr sz="1600" b="1">
                 <a:solidFill>
                   <a:srgbClr val="C8820E"/>
                 </a:solidFill>
@@ -3716,7 +3716,7 @@
               <a:t>▸  </a:t>
             </a:r>
             <a:r>
-              <a:rPr sz="1300" b="1">
+              <a:rPr sz="1600" b="1">
                 <a:solidFill>
                   <a:srgbClr val="1F4E79"/>
                 </a:solidFill>
@@ -3724,7 +3724,7 @@
               <a:t>Rejected: </a:t>
             </a:r>
             <a:r>
-              <a:rPr sz="1300">
+              <a:rPr sz="1600">
                 <a:solidFill>
                   <a:srgbClr val="2B2B2B"/>
                 </a:solidFill>
@@ -3738,11 +3738,11 @@
                 <a:spcPct val="100000"/>
               </a:lnSpc>
               <a:spcAft>
-                <a:spcPts val="600"/>
+                <a:spcPts val="400"/>
               </a:spcAft>
             </a:pPr>
             <a:r>
-              <a:rPr sz="1300" b="1">
+              <a:rPr sz="1600" b="1">
                 <a:solidFill>
                   <a:srgbClr val="C8820E"/>
                 </a:solidFill>
@@ -3750,7 +3750,7 @@
               <a:t>▸  </a:t>
             </a:r>
             <a:r>
-              <a:rPr sz="1300" b="1">
+              <a:rPr sz="1600" b="1">
                 <a:solidFill>
                   <a:srgbClr val="1F4E79"/>
                 </a:solidFill>
@@ -3758,7 +3758,7 @@
               <a:t>Verified via: </a:t>
             </a:r>
             <a:r>
-              <a:rPr sz="1300">
+              <a:rPr sz="1600">
                 <a:solidFill>
                   <a:srgbClr val="2B2B2B"/>
                 </a:solidFill>
@@ -3772,11 +3772,11 @@
                 <a:spcPct val="100000"/>
               </a:lnSpc>
               <a:spcAft>
-                <a:spcPts val="600"/>
+                <a:spcPts val="400"/>
               </a:spcAft>
             </a:pPr>
             <a:r>
-              <a:rPr sz="1300" b="1">
+              <a:rPr sz="1600" b="1">
                 <a:solidFill>
                   <a:srgbClr val="C8820E"/>
                 </a:solidFill>
@@ -3784,7 +3784,7 @@
               <a:t>▸  </a:t>
             </a:r>
             <a:r>
-              <a:rPr sz="1300" b="1">
+              <a:rPr sz="1600" b="1">
                 <a:solidFill>
                   <a:srgbClr val="1F4E79"/>
                 </a:solidFill>
@@ -3792,7 +3792,7 @@
               <a:t>Human judgement was necessary for: </a:t>
             </a:r>
             <a:r>
-              <a:rPr sz="1300">
+              <a:rPr sz="1600">
                 <a:solidFill>
                   <a:srgbClr val="2B2B2B"/>
                 </a:solidFill>
@@ -3806,11 +3806,11 @@
                 <a:spcPct val="100000"/>
               </a:lnSpc>
               <a:spcAft>
-                <a:spcPts val="600"/>
+                <a:spcPts val="400"/>
               </a:spcAft>
             </a:pPr>
             <a:r>
-              <a:rPr sz="1300" b="1">
+              <a:rPr sz="1600" b="1">
                 <a:solidFill>
                   <a:srgbClr val="C8820E"/>
                 </a:solidFill>
@@ -3818,7 +3818,7 @@
               <a:t>▸  </a:t>
             </a:r>
             <a:r>
-              <a:rPr sz="1300" b="1">
+              <a:rPr sz="1600" b="1">
                 <a:solidFill>
                   <a:srgbClr val="1F4E79"/>
                 </a:solidFill>
@@ -3826,7 +3826,7 @@
               <a:t>If we'd blindly followed AI: </a:t>
             </a:r>
             <a:r>
-              <a:rPr sz="1300">
+              <a:rPr sz="1600">
                 <a:solidFill>
                   <a:srgbClr val="2B2B2B"/>
                 </a:solidFill>
@@ -3840,11 +3840,11 @@
                 <a:spcPct val="100000"/>
               </a:lnSpc>
               <a:spcAft>
-                <a:spcPts val="600"/>
+                <a:spcPts val="400"/>
               </a:spcAft>
             </a:pPr>
             <a:r>
-              <a:rPr sz="1300" b="1">
+              <a:rPr sz="1600" b="1">
                 <a:solidFill>
                   <a:srgbClr val="C8820E"/>
                 </a:solidFill>
@@ -3852,7 +3852,7 @@
               <a:t>▸  </a:t>
             </a:r>
             <a:r>
-              <a:rPr sz="1300" b="1">
+              <a:rPr sz="1600" b="1">
                 <a:solidFill>
                   <a:srgbClr val="1F4E79"/>
                 </a:solidFill>
@@ -3860,7 +3860,7 @@
               <a:t>Learned: </a:t>
             </a:r>
             <a:r>
-              <a:rPr sz="1300">
+              <a:rPr sz="1600">
                 <a:solidFill>
                   <a:srgbClr val="2B2B2B"/>
                 </a:solidFill>

--- a/docs/report/CT3201_Slides.pptx
+++ b/docs/report/CT3201_Slides.pptx
@@ -3423,7 +3423,7 @@
                   <a:srgbClr val="9A9A9A"/>
                 </a:solidFill>
               </a:rPr>
-              <a:t>Pyro Pete: Emergency Evacuation  ·  CT3201 Mini Project</a:t>
+              <a:t>Pyro Pete: Emergency Evacuation  ·  CT3201 Introduction to Artificial Intelligence Mini Project</a:t>
             </a:r>
           </a:p>
         </p:txBody>
@@ -3462,6 +3462,30 @@
           </a:p>
         </p:txBody>
       </p:sp>
+      <p:pic>
+        <p:nvPicPr>
+          <p:cNvPr id="9" name="Picture 8" descr="crop_title.png"/>
+          <p:cNvPicPr>
+            <a:picLocks noChangeAspect="1"/>
+          </p:cNvPicPr>
+          <p:nvPr/>
+        </p:nvPicPr>
+        <p:blipFill>
+          <a:blip r:embed="rId2"/>
+          <a:stretch>
+            <a:fillRect/>
+          </a:stretch>
+        </p:blipFill>
+        <p:spPr>
+          <a:xfrm>
+            <a:off x="4827270" y="1188720"/>
+            <a:ext cx="2537460" cy="1691640"/>
+          </a:xfrm>
+          <a:prstGeom prst="rect">
+            <a:avLst/>
+          </a:prstGeom>
+        </p:spPr>
+      </p:pic>
     </p:spTree>
   </p:cSld>
   <p:clrMapOvr>
@@ -4043,7 +4067,7 @@
                   <a:srgbClr val="9A9A9A"/>
                 </a:solidFill>
               </a:rPr>
-              <a:t>Pyro Pete: Emergency Evacuation  ·  CT3201 Mini Project</a:t>
+              <a:t>Pyro Pete: Emergency Evacuation  ·  CT3201 Introduction to Artificial Intelligence Mini Project</a:t>
             </a:r>
           </a:p>
         </p:txBody>
@@ -4537,7 +4561,7 @@
                   <a:srgbClr val="9A9A9A"/>
                 </a:solidFill>
               </a:rPr>
-              <a:t>Pyro Pete: Emergency Evacuation  ·  CT3201 Mini Project</a:t>
+              <a:t>Pyro Pete: Emergency Evacuation  ·  CT3201 Introduction to Artificial Intelligence Mini Project</a:t>
             </a:r>
           </a:p>
         </p:txBody>
@@ -4576,6 +4600,30 @@
           </a:p>
         </p:txBody>
       </p:sp>
+      <p:pic>
+        <p:nvPicPr>
+          <p:cNvPr id="10" name="Picture 9" descr="crop_results.png"/>
+          <p:cNvPicPr>
+            <a:picLocks noChangeAspect="1"/>
+          </p:cNvPicPr>
+          <p:nvPr/>
+        </p:nvPicPr>
+        <p:blipFill>
+          <a:blip r:embed="rId2"/>
+          <a:stretch>
+            <a:fillRect/>
+          </a:stretch>
+        </p:blipFill>
+        <p:spPr>
+          <a:xfrm>
+            <a:off x="4861560" y="4754880"/>
+            <a:ext cx="2468880" cy="1645920"/>
+          </a:xfrm>
+          <a:prstGeom prst="rect">
+            <a:avLst/>
+          </a:prstGeom>
+        </p:spPr>
+      </p:pic>
     </p:spTree>
   </p:cSld>
   <p:clrMapOvr>
@@ -5089,7 +5137,7 @@
                   <a:srgbClr val="9A9A9A"/>
                 </a:solidFill>
               </a:rPr>
-              <a:t>Pyro Pete: Emergency Evacuation  ·  CT3201 Mini Project</a:t>
+              <a:t>Pyro Pete: Emergency Evacuation  ·  CT3201 Introduction to Artificial Intelligence Mini Project</a:t>
             </a:r>
           </a:p>
         </p:txBody>
@@ -5798,7 +5846,7 @@
                   <a:srgbClr val="9A9A9A"/>
                 </a:solidFill>
               </a:rPr>
-              <a:t>Pyro Pete: Emergency Evacuation  ·  CT3201 Mini Project</a:t>
+              <a:t>Pyro Pete: Emergency Evacuation  ·  CT3201 Introduction to Artificial Intelligence Mini Project</a:t>
             </a:r>
           </a:p>
         </p:txBody>
@@ -6437,7 +6485,7 @@
                   <a:srgbClr val="9A9A9A"/>
                 </a:solidFill>
               </a:rPr>
-              <a:t>Pyro Pete: Emergency Evacuation  ·  CT3201 Mini Project</a:t>
+              <a:t>Pyro Pete: Emergency Evacuation  ·  CT3201 Introduction to Artificial Intelligence Mini Project</a:t>
             </a:r>
           </a:p>
         </p:txBody>
@@ -7318,7 +7366,7 @@
                   <a:srgbClr val="9A9A9A"/>
                 </a:solidFill>
               </a:rPr>
-              <a:t>Pyro Pete: Emergency Evacuation  ·  CT3201 Mini Project</a:t>
+              <a:t>Pyro Pete: Emergency Evacuation  ·  CT3201 Introduction to Artificial Intelligence Mini Project</a:t>
             </a:r>
           </a:p>
         </p:txBody>
@@ -7884,7 +7932,7 @@
                   <a:srgbClr val="9A9A9A"/>
                 </a:solidFill>
               </a:rPr>
-              <a:t>Pyro Pete: Emergency Evacuation  ·  CT3201 Mini Project</a:t>
+              <a:t>Pyro Pete: Emergency Evacuation  ·  CT3201 Introduction to Artificial Intelligence Mini Project</a:t>
             </a:r>
           </a:p>
         </p:txBody>
@@ -8698,7 +8746,7 @@
                   <a:srgbClr val="2B2B2B"/>
                 </a:solidFill>
               </a:rPr>
-              <a:t>BFS route = 2.3x the cost through 9 burning tiles. A* = Dijkstra cost, fewer expansions -&gt; optimal AND fast.</a:t>
+              <a:t>BFS route = 2.3x the cost through 9 burning tiles. A* = Dijkstra cost, fewer expansions -&gt; optimal AND fast. Tested systematically (10 stages x 3 layouts x 5 fire times): Greedy costlier than A* in 98 of 150 situations, never cheaper.</a:t>
             </a:r>
           </a:p>
           <a:p>
@@ -8910,7 +8958,7 @@
                   <a:srgbClr val="9A9A9A"/>
                 </a:solidFill>
               </a:rPr>
-              <a:t>Pyro Pete: Emergency Evacuation  ·  CT3201 Mini Project</a:t>
+              <a:t>Pyro Pete: Emergency Evacuation  ·  CT3201 Introduction to Artificial Intelligence Mini Project</a:t>
             </a:r>
           </a:p>
         </p:txBody>
@@ -9626,7 +9674,7 @@
                   <a:srgbClr val="9A9A9A"/>
                 </a:solidFill>
               </a:rPr>
-              <a:t>Pyro Pete: Emergency Evacuation  ·  CT3201 Mini Project</a:t>
+              <a:t>Pyro Pete: Emergency Evacuation  ·  CT3201 Introduction to Artificial Intelligence Mini Project</a:t>
             </a:r>
           </a:p>
         </p:txBody>
@@ -10170,7 +10218,7 @@
                   <a:srgbClr val="9A9A9A"/>
                 </a:solidFill>
               </a:rPr>
-              <a:t>Pyro Pete: Emergency Evacuation  ·  CT3201 Mini Project</a:t>
+              <a:t>Pyro Pete: Emergency Evacuation  ·  CT3201 Introduction to Artificial Intelligence Mini Project</a:t>
             </a:r>
           </a:p>
         </p:txBody>

--- a/docs/report/CT3201_Slides.pptx
+++ b/docs/report/CT3201_Slides.pptx
@@ -3196,7 +3196,7 @@
         </p:nvSpPr>
         <p:spPr>
           <a:xfrm>
-            <a:off x="640080" y="2926080"/>
+            <a:off x="640080" y="3749039"/>
             <a:ext cx="10972800" cy="5029200"/>
           </a:xfrm>
           <a:prstGeom prst="rect">
@@ -3212,14 +3212,14 @@
           <a:p>
             <a:pPr>
               <a:lnSpc>
-                <a:spcPct val="108000"/>
+                <a:spcPct val="115000"/>
               </a:lnSpc>
               <a:spcAft>
-                <a:spcPts val="1200"/>
+                <a:spcPts val="2200"/>
               </a:spcAft>
             </a:pPr>
             <a:r>
-              <a:rPr sz="1600" b="1">
+              <a:rPr sz="1800" b="1">
                 <a:solidFill>
                   <a:srgbClr val="C8820E"/>
                 </a:solidFill>
@@ -3227,7 +3227,7 @@
               <a:t>▸  </a:t>
             </a:r>
             <a:r>
-              <a:rPr sz="1600" b="1">
+              <a:rPr sz="1800" b="1">
                 <a:solidFill>
                   <a:srgbClr val="1F4E79"/>
                 </a:solidFill>
@@ -3235,7 +3235,7 @@
               <a:t>Team: </a:t>
             </a:r>
             <a:r>
-              <a:rPr sz="1600">
+              <a:rPr sz="1800">
                 <a:solidFill>
                   <a:srgbClr val="2B2B2B"/>
                 </a:solidFill>
@@ -3246,14 +3246,14 @@
           <a:p>
             <a:pPr>
               <a:lnSpc>
-                <a:spcPct val="108000"/>
+                <a:spcPct val="115000"/>
               </a:lnSpc>
               <a:spcAft>
-                <a:spcPts val="1200"/>
+                <a:spcPts val="2200"/>
               </a:spcAft>
             </a:pPr>
             <a:r>
-              <a:rPr sz="1600" b="1">
+              <a:rPr sz="1800" b="1">
                 <a:solidFill>
                   <a:srgbClr val="C8820E"/>
                 </a:solidFill>
@@ -3261,7 +3261,7 @@
               <a:t>▸  </a:t>
             </a:r>
             <a:r>
-              <a:rPr sz="1600" b="1">
+              <a:rPr sz="1800" b="1">
                 <a:solidFill>
                   <a:srgbClr val="1F4E79"/>
                 </a:solidFill>
@@ -3269,7 +3269,7 @@
               <a:t>Problem area: </a:t>
             </a:r>
             <a:r>
-              <a:rPr sz="1600">
+              <a:rPr sz="1800">
                 <a:solidFill>
                   <a:srgbClr val="2B2B2B"/>
                 </a:solidFill>
@@ -3280,14 +3280,14 @@
           <a:p>
             <a:pPr>
               <a:lnSpc>
-                <a:spcPct val="108000"/>
+                <a:spcPct val="115000"/>
               </a:lnSpc>
               <a:spcAft>
-                <a:spcPts val="1200"/>
+                <a:spcPts val="2200"/>
               </a:spcAft>
             </a:pPr>
             <a:r>
-              <a:rPr sz="1600" b="1">
+              <a:rPr sz="1800" b="1">
                 <a:solidFill>
                   <a:srgbClr val="C8820E"/>
                 </a:solidFill>
@@ -3295,7 +3295,7 @@
               <a:t>▸  </a:t>
             </a:r>
             <a:r>
-              <a:rPr sz="1600">
+              <a:rPr sz="1800">
                 <a:solidFill>
                   <a:srgbClr val="2B2B2B"/>
                 </a:solidFill>
@@ -3478,8 +3478,8 @@
         </p:blipFill>
         <p:spPr>
           <a:xfrm>
-            <a:off x="4827270" y="1188720"/>
-            <a:ext cx="2537460" cy="1691640"/>
+            <a:off x="4312920" y="1143000"/>
+            <a:ext cx="3566160" cy="2377440"/>
           </a:xfrm>
           <a:prstGeom prst="rect">
             <a:avLst/>
@@ -6008,7 +6008,7 @@
         </p:nvGraphicFramePr>
         <p:xfrm>
           <a:off x="548640" y="1371600"/>
-          <a:ext cx="11064240" cy="2072640"/>
+          <a:ext cx="11064240" cy="3931920"/>
         </p:xfrm>
         <a:graphic>
           <a:graphicData uri="http://schemas.openxmlformats.org/drawingml/2006/table">
@@ -6039,7 +6039,7 @@
                   </a:extLst>
                 </a:gridCol>
               </a:tblGrid>
-              <a:tr h="365760">
+              <a:tr h="786384">
                 <a:tc>
                   <a:txBody>
                     <a:bodyPr/>
@@ -6047,7 +6047,7 @@
                     <a:p>
                       <a:pPr algn="ctr"/>
                       <a:r>
-                        <a:rPr sz="1300" b="1">
+                        <a:rPr sz="1500" b="1">
                           <a:solidFill>
                             <a:srgbClr val="FFFFFF"/>
                           </a:solidFill>
@@ -6069,7 +6069,7 @@
                     <a:p>
                       <a:pPr algn="ctr"/>
                       <a:r>
-                        <a:rPr sz="1300" b="1">
+                        <a:rPr sz="1500" b="1">
                           <a:solidFill>
                             <a:srgbClr val="FFFFFF"/>
                           </a:solidFill>
@@ -6091,7 +6091,7 @@
                     <a:p>
                       <a:pPr algn="ctr"/>
                       <a:r>
-                        <a:rPr sz="1300" b="1">
+                        <a:rPr sz="1500" b="1">
                           <a:solidFill>
                             <a:srgbClr val="FFFFFF"/>
                           </a:solidFill>
@@ -6112,7 +6112,7 @@
                   </a:ext>
                 </a:extLst>
               </a:tr>
-              <a:tr h="365760">
+              <a:tr h="786384">
                 <a:tc>
                   <a:txBody>
                     <a:bodyPr/>
@@ -6120,7 +6120,7 @@
                     <a:p>
                       <a:pPr algn="ctr"/>
                       <a:r>
-                        <a:rPr sz="1300"/>
+                        <a:rPr sz="1500"/>
                         <a:t>Challenge BFS-with-fire-as-a-wall</a:t>
                       </a:r>
                     </a:p>
@@ -6134,7 +6134,7 @@
                     <a:p>
                       <a:pPr algn="ctr"/>
                       <a:r>
-                        <a:rPr sz="1300"/>
+                        <a:rPr sz="1500"/>
                         <a:t>BFS minimises tiles, not danger - it walks through fire to save a step</a:t>
                       </a:r>
                     </a:p>
@@ -6148,7 +6148,7 @@
                     <a:p>
                       <a:pPr algn="ctr"/>
                       <a:r>
-                        <a:rPr sz="1300"/>
+                        <a:rPr sz="1500"/>
                         <a:t>Treat hazards as weighted costs; use cost-aware search</a:t>
                       </a:r>
                     </a:p>
@@ -6161,7 +6161,7 @@
                   </a:ext>
                 </a:extLst>
               </a:tr>
-              <a:tr h="365760">
+              <a:tr h="786384">
                 <a:tc>
                   <a:txBody>
                     <a:bodyPr/>
@@ -6169,7 +6169,7 @@
                     <a:p>
                       <a:pPr algn="ctr"/>
                       <a:r>
-                        <a:rPr sz="1300"/>
+                        <a:rPr sz="1500"/>
                         <a:t>Suggest alternative search strategies</a:t>
                       </a:r>
                     </a:p>
@@ -6183,7 +6183,7 @@
                     <a:p>
                       <a:pPr algn="ctr"/>
                       <a:r>
-                        <a:rPr sz="1300"/>
+                        <a:rPr sz="1500"/>
                         <a:t>Dijkstra / A* / Greedy and their trade-offs</a:t>
                       </a:r>
                     </a:p>
@@ -6197,7 +6197,7 @@
                     <a:p>
                       <a:pPr algn="ctr"/>
                       <a:r>
-                        <a:rPr sz="1300"/>
+                        <a:rPr sz="1500"/>
                         <a:t>Implement all four to compare on our own map</a:t>
                       </a:r>
                     </a:p>
@@ -6210,7 +6210,7 @@
                   </a:ext>
                 </a:extLst>
               </a:tr>
-              <a:tr h="365760">
+              <a:tr h="786384">
                 <a:tc>
                   <a:txBody>
                     <a:bodyPr/>
@@ -6218,7 +6218,7 @@
                     <a:p>
                       <a:pPr algn="ctr"/>
                       <a:r>
-                        <a:rPr sz="1300"/>
+                        <a:rPr sz="1500"/>
                         <a:t>Point out assumptions</a:t>
                       </a:r>
                     </a:p>
@@ -6232,7 +6232,7 @@
                     <a:p>
                       <a:pPr algn="ctr"/>
                       <a:r>
-                        <a:rPr sz="1300"/>
+                        <a:rPr sz="1500"/>
                         <a:t>We assumed a full map of occupant locations</a:t>
                       </a:r>
                     </a:p>
@@ -6246,7 +6246,7 @@
                     <a:p>
                       <a:pPr algn="ctr"/>
                       <a:r>
-                        <a:rPr sz="1300"/>
+                        <a:rPr sz="1500"/>
                         <a:t>Add partial observability + frontier exploration</a:t>
                       </a:r>
                     </a:p>
@@ -6259,7 +6259,7 @@
                   </a:ext>
                 </a:extLst>
               </a:tr>
-              <a:tr h="365760">
+              <a:tr h="786384">
                 <a:tc>
                   <a:txBody>
                     <a:bodyPr/>
@@ -6267,7 +6267,7 @@
                     <a:p>
                       <a:pPr algn="ctr"/>
                       <a:r>
-                        <a:rPr sz="1300"/>
+                        <a:rPr sz="1500"/>
                         <a:t>What could make it fail?</a:t>
                       </a:r>
                     </a:p>
@@ -6281,7 +6281,7 @@
                     <a:p>
                       <a:pPr algn="ctr"/>
                       <a:r>
-                        <a:rPr sz="1300"/>
+                        <a:rPr sz="1500"/>
                         <a:t>Locked door on the only corridor; a collapse could trap someone</a:t>
                       </a:r>
                     </a:p>
@@ -6295,7 +6295,7 @@
                     <a:p>
                       <a:pPr algn="ctr"/>
                       <a:r>
-                        <a:rPr sz="1300"/>
+                        <a:rPr sz="1500"/>
                         <a:t>Key sub-goal; connectivity-checked collapse</a:t>
                       </a:r>
                     </a:p>

--- a/docs/report/CT3201_Slides.pptx
+++ b/docs/report/CT3201_Slides.pptx
@@ -6647,7 +6647,7 @@
         </p:nvGraphicFramePr>
         <p:xfrm>
           <a:off x="548640" y="1371600"/>
-          <a:ext cx="11064240" cy="3291840"/>
+          <a:ext cx="11064240" cy="4800600"/>
         </p:xfrm>
         <a:graphic>
           <a:graphicData uri="http://schemas.openxmlformats.org/drawingml/2006/table">
@@ -6678,7 +6678,7 @@
                   </a:extLst>
                 </a:gridCol>
               </a:tblGrid>
-              <a:tr h="365760">
+              <a:tr h="685800">
                 <a:tc>
                   <a:txBody>
                     <a:bodyPr/>
@@ -6686,7 +6686,7 @@
                     <a:p>
                       <a:pPr algn="ctr"/>
                       <a:r>
-                        <a:rPr sz="1300" b="1">
+                        <a:rPr sz="1400" b="1">
                           <a:solidFill>
                             <a:srgbClr val="FFFFFF"/>
                           </a:solidFill>
@@ -6708,7 +6708,7 @@
                     <a:p>
                       <a:pPr algn="ctr"/>
                       <a:r>
-                        <a:rPr sz="1300" b="1">
+                        <a:rPr sz="1400" b="1">
                           <a:solidFill>
                             <a:srgbClr val="FFFFFF"/>
                           </a:solidFill>
@@ -6730,7 +6730,7 @@
                     <a:p>
                       <a:pPr algn="ctr"/>
                       <a:r>
-                        <a:rPr sz="1300" b="1">
+                        <a:rPr sz="1400" b="1">
                           <a:solidFill>
                             <a:srgbClr val="FFFFFF"/>
                           </a:solidFill>
@@ -6751,7 +6751,7 @@
                   </a:ext>
                 </a:extLst>
               </a:tr>
-              <a:tr h="365760">
+              <a:tr h="685800">
                 <a:tc>
                   <a:txBody>
                     <a:bodyPr/>
@@ -6759,7 +6759,7 @@
                     <a:p>
                       <a:pPr algn="ctr"/>
                       <a:r>
-                        <a:rPr sz="1300" b="1">
+                        <a:rPr sz="1400" b="1">
                           <a:solidFill>
                             <a:srgbClr val="A32B1F"/>
                           </a:solidFill>
@@ -6781,7 +6781,7 @@
                     <a:p>
                       <a:pPr algn="ctr"/>
                       <a:r>
-                        <a:rPr sz="1300" b="1">
+                        <a:rPr sz="1400" b="1">
                           <a:solidFill>
                             <a:srgbClr val="A32B1F"/>
                           </a:solidFill>
@@ -6803,7 +6803,7 @@
                     <a:p>
                       <a:pPr algn="ctr"/>
                       <a:r>
-                        <a:rPr sz="1300" b="1">
+                        <a:rPr sz="1400" b="1">
                           <a:solidFill>
                             <a:srgbClr val="A32B1F"/>
                           </a:solidFill>
@@ -6824,7 +6824,7 @@
                   </a:ext>
                 </a:extLst>
               </a:tr>
-              <a:tr h="365760">
+              <a:tr h="685800">
                 <a:tc>
                   <a:txBody>
                     <a:bodyPr/>
@@ -6832,7 +6832,7 @@
                     <a:p>
                       <a:pPr algn="ctr"/>
                       <a:r>
-                        <a:rPr sz="1300" b="1">
+                        <a:rPr sz="1400" b="1">
                           <a:solidFill>
                             <a:srgbClr val="1E6B3D"/>
                           </a:solidFill>
@@ -6854,7 +6854,7 @@
                     <a:p>
                       <a:pPr algn="ctr"/>
                       <a:r>
-                        <a:rPr sz="1300" b="1">
+                        <a:rPr sz="1400" b="1">
                           <a:solidFill>
                             <a:srgbClr val="1E6B3D"/>
                           </a:solidFill>
@@ -6876,7 +6876,7 @@
                     <a:p>
                       <a:pPr algn="ctr"/>
                       <a:r>
-                        <a:rPr sz="1300" b="1">
+                        <a:rPr sz="1400" b="1">
                           <a:solidFill>
                             <a:srgbClr val="1E6B3D"/>
                           </a:solidFill>
@@ -6897,7 +6897,7 @@
                   </a:ext>
                 </a:extLst>
               </a:tr>
-              <a:tr h="365760">
+              <a:tr h="685800">
                 <a:tc>
                   <a:txBody>
                     <a:bodyPr/>
@@ -6905,7 +6905,7 @@
                     <a:p>
                       <a:pPr algn="ctr"/>
                       <a:r>
-                        <a:rPr sz="1300" b="1">
+                        <a:rPr sz="1400" b="1">
                           <a:solidFill>
                             <a:srgbClr val="1E6B3D"/>
                           </a:solidFill>
@@ -6927,7 +6927,7 @@
                     <a:p>
                       <a:pPr algn="ctr"/>
                       <a:r>
-                        <a:rPr sz="1300" b="1">
+                        <a:rPr sz="1400" b="1">
                           <a:solidFill>
                             <a:srgbClr val="1E6B3D"/>
                           </a:solidFill>
@@ -6949,7 +6949,7 @@
                     <a:p>
                       <a:pPr algn="ctr"/>
                       <a:r>
-                        <a:rPr sz="1300" b="1">
+                        <a:rPr sz="1400" b="1">
                           <a:solidFill>
                             <a:srgbClr val="1E6B3D"/>
                           </a:solidFill>
@@ -6970,7 +6970,7 @@
                   </a:ext>
                 </a:extLst>
               </a:tr>
-              <a:tr h="365760">
+              <a:tr h="685800">
                 <a:tc>
                   <a:txBody>
                     <a:bodyPr/>
@@ -6978,7 +6978,7 @@
                     <a:p>
                       <a:pPr algn="ctr"/>
                       <a:r>
-                        <a:rPr sz="1300" b="1">
+                        <a:rPr sz="1400" b="1">
                           <a:solidFill>
                             <a:srgbClr val="A32B1F"/>
                           </a:solidFill>
@@ -7000,7 +7000,7 @@
                     <a:p>
                       <a:pPr algn="ctr"/>
                       <a:r>
-                        <a:rPr sz="1300" b="1">
+                        <a:rPr sz="1400" b="1">
                           <a:solidFill>
                             <a:srgbClr val="A32B1F"/>
                           </a:solidFill>
@@ -7022,7 +7022,7 @@
                     <a:p>
                       <a:pPr algn="ctr"/>
                       <a:r>
-                        <a:rPr sz="1300" b="1">
+                        <a:rPr sz="1400" b="1">
                           <a:solidFill>
                             <a:srgbClr val="A32B1F"/>
                           </a:solidFill>
@@ -7043,7 +7043,7 @@
                   </a:ext>
                 </a:extLst>
               </a:tr>
-              <a:tr h="365760">
+              <a:tr h="685800">
                 <a:tc>
                   <a:txBody>
                     <a:bodyPr/>
@@ -7051,7 +7051,7 @@
                     <a:p>
                       <a:pPr algn="ctr"/>
                       <a:r>
-                        <a:rPr sz="1300" b="1">
+                        <a:rPr sz="1400" b="1">
                           <a:solidFill>
                             <a:srgbClr val="8A5A12"/>
                           </a:solidFill>
@@ -7073,7 +7073,7 @@
                     <a:p>
                       <a:pPr algn="ctr"/>
                       <a:r>
-                        <a:rPr sz="1300" b="1">
+                        <a:rPr sz="1400" b="1">
                           <a:solidFill>
                             <a:srgbClr val="8A5A12"/>
                           </a:solidFill>
@@ -7095,7 +7095,7 @@
                     <a:p>
                       <a:pPr algn="ctr"/>
                       <a:r>
-                        <a:rPr sz="1300" b="1">
+                        <a:rPr sz="1400" b="1">
                           <a:solidFill>
                             <a:srgbClr val="8A5A12"/>
                           </a:solidFill>
@@ -7116,7 +7116,7 @@
                   </a:ext>
                 </a:extLst>
               </a:tr>
-              <a:tr h="365760">
+              <a:tr h="685800">
                 <a:tc>
                   <a:txBody>
                     <a:bodyPr/>
@@ -7124,7 +7124,7 @@
                     <a:p>
                       <a:pPr algn="ctr"/>
                       <a:r>
-                        <a:rPr sz="1300" b="1">
+                        <a:rPr sz="1400" b="1">
                           <a:solidFill>
                             <a:srgbClr val="A32B1F"/>
                           </a:solidFill>
@@ -7146,7 +7146,7 @@
                     <a:p>
                       <a:pPr algn="ctr"/>
                       <a:r>
-                        <a:rPr sz="1300" b="1">
+                        <a:rPr sz="1400" b="1">
                           <a:solidFill>
                             <a:srgbClr val="A32B1F"/>
                           </a:solidFill>
@@ -7168,7 +7168,7 @@
                     <a:p>
                       <a:pPr algn="ctr"/>
                       <a:r>
-                        <a:rPr sz="1300" b="1">
+                        <a:rPr sz="1400" b="1">
                           <a:solidFill>
                             <a:srgbClr val="A32B1F"/>
                           </a:solidFill>

--- a/docs/report/CT3201_Slides.pptx
+++ b/docs/report/CT3201_Slides.pptx
@@ -6786,7 +6786,7 @@
                             <a:srgbClr val="A32B1F"/>
                           </a:solidFill>
                         </a:rPr>
-                        <a:t>Reject</a:t>
+                        <a:t>✗ Reject</a:t>
                       </a:r>
                     </a:p>
                   </a:txBody>
@@ -6859,7 +6859,7 @@
                             <a:srgbClr val="1E6B3D"/>
                           </a:solidFill>
                         </a:rPr>
-                        <a:t>Accept</a:t>
+                        <a:t>✓ Accept</a:t>
                       </a:r>
                     </a:p>
                   </a:txBody>
@@ -6932,7 +6932,7 @@
                             <a:srgbClr val="1E6B3D"/>
                           </a:solidFill>
                         </a:rPr>
-                        <a:t>Accept</a:t>
+                        <a:t>✓ Accept</a:t>
                       </a:r>
                     </a:p>
                   </a:txBody>
@@ -7005,7 +7005,7 @@
                             <a:srgbClr val="A32B1F"/>
                           </a:solidFill>
                         </a:rPr>
-                        <a:t>Reject</a:t>
+                        <a:t>✗ Reject</a:t>
                       </a:r>
                     </a:p>
                   </a:txBody>
@@ -7078,7 +7078,7 @@
                             <a:srgbClr val="8A5A12"/>
                           </a:solidFill>
                         </a:rPr>
-                        <a:t>Modify</a:t>
+                        <a:t>~ Modify</a:t>
                       </a:r>
                     </a:p>
                   </a:txBody>
@@ -7151,7 +7151,7 @@
                             <a:srgbClr val="A32B1F"/>
                           </a:solidFill>
                         </a:rPr>
-                        <a:t>Reject</a:t>
+                        <a:t>✗ Reject</a:t>
                       </a:r>
                     </a:p>
                   </a:txBody>
@@ -7735,30 +7735,6 @@
           </a:p>
         </p:txBody>
       </p:sp>
-      <p:pic>
-        <p:nvPicPr>
-          <p:cNvPr id="4" name="Picture 3" descr="fig_decision_loop.png"/>
-          <p:cNvPicPr>
-            <a:picLocks noChangeAspect="1"/>
-          </p:cNvPicPr>
-          <p:nvPr/>
-        </p:nvPicPr>
-        <p:blipFill>
-          <a:blip r:embed="rId2"/>
-          <a:stretch>
-            <a:fillRect/>
-          </a:stretch>
-        </p:blipFill>
-        <p:spPr>
-          <a:xfrm>
-            <a:off x="3055593" y="4160520"/>
-            <a:ext cx="1649437" cy="2240280"/>
-          </a:xfrm>
-          <a:prstGeom prst="rect">
-            <a:avLst/>
-          </a:prstGeom>
-        </p:spPr>
-      </p:pic>
       <p:sp>
         <p:nvSpPr>
           <p:cNvPr id="7" name="Rectangle 6"/>
@@ -7989,6 +7965,30 @@
           <a:xfrm>
             <a:off x="5074920" y="4160520"/>
             <a:ext cx="5989320" cy="2240280"/>
+          </a:xfrm>
+          <a:prstGeom prst="rect">
+            <a:avLst/>
+          </a:prstGeom>
+        </p:spPr>
+      </p:pic>
+      <p:pic>
+        <p:nvPicPr>
+          <p:cNvPr id="13" name="Picture 12" descr="flowchart_card.png"/>
+          <p:cNvPicPr>
+            <a:picLocks noChangeAspect="1"/>
+          </p:cNvPicPr>
+          <p:nvPr/>
+        </p:nvPicPr>
+        <p:blipFill>
+          <a:blip r:embed="rId5"/>
+          <a:stretch>
+            <a:fillRect/>
+          </a:stretch>
+        </p:blipFill>
+        <p:spPr>
+          <a:xfrm>
+            <a:off x="3055593" y="4114800"/>
+            <a:ext cx="1731498" cy="2322341"/>
           </a:xfrm>
           <a:prstGeom prst="rect">
             <a:avLst/>
@@ -8321,7 +8321,7 @@
                             <a:srgbClr val="A32B1F"/>
                           </a:solidFill>
                         </a:rPr>
-                        <a:t>BFS (unweighted)</a:t>
+                        <a:t>✗ BFS (unweighted)</a:t>
                       </a:r>
                     </a:p>
                   </a:txBody>
@@ -8479,7 +8479,7 @@
                             <a:srgbClr val="1E6B3D"/>
                           </a:solidFill>
                         </a:rPr>
-                        <a:t>A*</a:t>
+                        <a:t>✓ A*</a:t>
                       </a:r>
                     </a:p>
                   </a:txBody>
@@ -8574,7 +8574,7 @@
                             <a:srgbClr val="A32B1F"/>
                           </a:solidFill>
                         </a:rPr>
-                        <a:t>Greedy best-first</a:t>
+                        <a:t>✗ Greedy best-first</a:t>
                       </a:r>
                     </a:p>
                   </a:txBody>
